--- a/BI/moscow_places/moscow_places_hw.pptx
+++ b/BI/moscow_places/moscow_places_hw.pptx
@@ -6,18 +6,33 @@
   </p:sldMasterIdLst>
   <p:sldIdLst>
     <p:sldId id="256" r:id="rId2"/>
-    <p:sldId id="257" r:id="rId3"/>
-    <p:sldId id="258" r:id="rId4"/>
-    <p:sldId id="259" r:id="rId5"/>
-    <p:sldId id="260" r:id="rId6"/>
-    <p:sldId id="261" r:id="rId7"/>
-    <p:sldId id="262" r:id="rId8"/>
-    <p:sldId id="263" r:id="rId9"/>
-    <p:sldId id="264" r:id="rId10"/>
-    <p:sldId id="265" r:id="rId11"/>
-    <p:sldId id="266" r:id="rId12"/>
-    <p:sldId id="267" r:id="rId13"/>
-    <p:sldId id="268" r:id="rId14"/>
+    <p:sldId id="269" r:id="rId3"/>
+    <p:sldId id="270" r:id="rId4"/>
+    <p:sldId id="271" r:id="rId5"/>
+    <p:sldId id="272" r:id="rId6"/>
+    <p:sldId id="273" r:id="rId7"/>
+    <p:sldId id="274" r:id="rId8"/>
+    <p:sldId id="275" r:id="rId9"/>
+    <p:sldId id="276" r:id="rId10"/>
+    <p:sldId id="277" r:id="rId11"/>
+    <p:sldId id="257" r:id="rId12"/>
+    <p:sldId id="258" r:id="rId13"/>
+    <p:sldId id="259" r:id="rId14"/>
+    <p:sldId id="260" r:id="rId15"/>
+    <p:sldId id="261" r:id="rId16"/>
+    <p:sldId id="278" r:id="rId17"/>
+    <p:sldId id="262" r:id="rId18"/>
+    <p:sldId id="279" r:id="rId19"/>
+    <p:sldId id="263" r:id="rId20"/>
+    <p:sldId id="264" r:id="rId21"/>
+    <p:sldId id="280" r:id="rId22"/>
+    <p:sldId id="265" r:id="rId23"/>
+    <p:sldId id="281" r:id="rId24"/>
+    <p:sldId id="282" r:id="rId25"/>
+    <p:sldId id="266" r:id="rId26"/>
+    <p:sldId id="283" r:id="rId27"/>
+    <p:sldId id="267" r:id="rId28"/>
+    <p:sldId id="268" r:id="rId29"/>
   </p:sldIdLst>
   <p:sldSz cx="12192000" cy="6858000"/>
   <p:notesSz cx="6858000" cy="9144000"/>
@@ -116,6 +131,11 @@
       </a:defRPr>
     </a:lvl9pPr>
   </p:defaultTextStyle>
+  <p:extLst>
+    <p:ext uri="{EFAFB233-063F-42B5-8137-9DF3F51BA10A}">
+      <p15:sldGuideLst xmlns:p15="http://schemas.microsoft.com/office/powerpoint/2012/main"/>
+    </p:ext>
+  </p:extLst>
 </p:presentation>
 </file>
 
@@ -266,7 +286,7 @@
           <a:p>
             <a:fld id="{05D7635D-5716-2149-87AF-1F135607E50F}" type="datetimeFigureOut">
               <a:rPr lang="en-US" smtClean="0"/>
-              <a:t>12/9/25</a:t>
+              <a:t>1/1/26</a:t>
             </a:fld>
             <a:endParaRPr lang="en-US"/>
           </a:p>
@@ -464,7 +484,7 @@
           <a:p>
             <a:fld id="{05D7635D-5716-2149-87AF-1F135607E50F}" type="datetimeFigureOut">
               <a:rPr lang="en-US" smtClean="0"/>
-              <a:t>12/9/25</a:t>
+              <a:t>1/1/26</a:t>
             </a:fld>
             <a:endParaRPr lang="en-US"/>
           </a:p>
@@ -672,7 +692,7 @@
           <a:p>
             <a:fld id="{05D7635D-5716-2149-87AF-1F135607E50F}" type="datetimeFigureOut">
               <a:rPr lang="en-US" smtClean="0"/>
-              <a:t>12/9/25</a:t>
+              <a:t>1/1/26</a:t>
             </a:fld>
             <a:endParaRPr lang="en-US"/>
           </a:p>
@@ -870,7 +890,7 @@
           <a:p>
             <a:fld id="{05D7635D-5716-2149-87AF-1F135607E50F}" type="datetimeFigureOut">
               <a:rPr lang="en-US" smtClean="0"/>
-              <a:t>12/9/25</a:t>
+              <a:t>1/1/26</a:t>
             </a:fld>
             <a:endParaRPr lang="en-US"/>
           </a:p>
@@ -1145,7 +1165,7 @@
           <a:p>
             <a:fld id="{05D7635D-5716-2149-87AF-1F135607E50F}" type="datetimeFigureOut">
               <a:rPr lang="en-US" smtClean="0"/>
-              <a:t>12/9/25</a:t>
+              <a:t>1/1/26</a:t>
             </a:fld>
             <a:endParaRPr lang="en-US"/>
           </a:p>
@@ -1410,7 +1430,7 @@
           <a:p>
             <a:fld id="{05D7635D-5716-2149-87AF-1F135607E50F}" type="datetimeFigureOut">
               <a:rPr lang="en-US" smtClean="0"/>
-              <a:t>12/9/25</a:t>
+              <a:t>1/1/26</a:t>
             </a:fld>
             <a:endParaRPr lang="en-US"/>
           </a:p>
@@ -1822,7 +1842,7 @@
           <a:p>
             <a:fld id="{05D7635D-5716-2149-87AF-1F135607E50F}" type="datetimeFigureOut">
               <a:rPr lang="en-US" smtClean="0"/>
-              <a:t>12/9/25</a:t>
+              <a:t>1/1/26</a:t>
             </a:fld>
             <a:endParaRPr lang="en-US"/>
           </a:p>
@@ -1963,7 +1983,7 @@
           <a:p>
             <a:fld id="{05D7635D-5716-2149-87AF-1F135607E50F}" type="datetimeFigureOut">
               <a:rPr lang="en-US" smtClean="0"/>
-              <a:t>12/9/25</a:t>
+              <a:t>1/1/26</a:t>
             </a:fld>
             <a:endParaRPr lang="en-US"/>
           </a:p>
@@ -2076,7 +2096,7 @@
           <a:p>
             <a:fld id="{05D7635D-5716-2149-87AF-1F135607E50F}" type="datetimeFigureOut">
               <a:rPr lang="en-US" smtClean="0"/>
-              <a:t>12/9/25</a:t>
+              <a:t>1/1/26</a:t>
             </a:fld>
             <a:endParaRPr lang="en-US"/>
           </a:p>
@@ -2387,7 +2407,7 @@
           <a:p>
             <a:fld id="{05D7635D-5716-2149-87AF-1F135607E50F}" type="datetimeFigureOut">
               <a:rPr lang="en-US" smtClean="0"/>
-              <a:t>12/9/25</a:t>
+              <a:t>1/1/26</a:t>
             </a:fld>
             <a:endParaRPr lang="en-US"/>
           </a:p>
@@ -2675,7 +2695,7 @@
           <a:p>
             <a:fld id="{05D7635D-5716-2149-87AF-1F135607E50F}" type="datetimeFigureOut">
               <a:rPr lang="en-US" smtClean="0"/>
-              <a:t>12/9/25</a:t>
+              <a:t>1/1/26</a:t>
             </a:fld>
             <a:endParaRPr lang="en-US"/>
           </a:p>
@@ -2916,7 +2936,7 @@
           <a:p>
             <a:fld id="{05D7635D-5716-2149-87AF-1F135607E50F}" type="datetimeFigureOut">
               <a:rPr lang="en-US" smtClean="0"/>
-              <a:t>12/9/25</a:t>
+              <a:t>1/1/26</a:t>
             </a:fld>
             <a:endParaRPr lang="en-US"/>
           </a:p>
@@ -3436,6 +3456,1398 @@
           <a:chExt cx="0" cy="0"/>
         </a:xfrm>
       </p:grpSpPr>
+      <p:sp>
+        <p:nvSpPr>
+          <p:cNvPr id="3" name="Content Placeholder 2">
+            <a:extLst>
+              <a:ext uri="{FF2B5EF4-FFF2-40B4-BE49-F238E27FC236}">
+                <a16:creationId xmlns:a16="http://schemas.microsoft.com/office/drawing/2014/main" id="{6AA418E5-4D5E-D50B-3BF0-A7FA7F5B4E86}"/>
+              </a:ext>
+            </a:extLst>
+          </p:cNvPr>
+          <p:cNvSpPr>
+            <a:spLocks noGrp="1"/>
+          </p:cNvSpPr>
+          <p:nvPr>
+            <p:ph idx="1"/>
+          </p:nvPr>
+        </p:nvSpPr>
+        <p:spPr/>
+        <p:txBody>
+          <a:bodyPr/>
+          <a:lstStyle/>
+          <a:p>
+            <a:pPr marL="0" indent="0">
+              <a:buNone/>
+            </a:pPr>
+            <a:r>
+              <a:rPr lang="en-US" dirty="0" err="1"/>
+              <a:t>Ожидаемые</a:t>
+            </a:r>
+            <a:r>
+              <a:rPr lang="en-US" dirty="0"/>
+              <a:t> </a:t>
+            </a:r>
+            <a:r>
+              <a:rPr lang="en-US" dirty="0" err="1"/>
+              <a:t>результаты</a:t>
+            </a:r>
+            <a:endParaRPr lang="en-US" dirty="0"/>
+          </a:p>
+          <a:p>
+            <a:r>
+              <a:rPr lang="en-US" dirty="0"/>
+              <a:t>- </a:t>
+            </a:r>
+            <a:r>
+              <a:rPr lang="en-US" dirty="0" err="1"/>
+              <a:t>Презентация</a:t>
+            </a:r>
+            <a:r>
+              <a:rPr lang="en-US" dirty="0"/>
+              <a:t> </a:t>
+            </a:r>
+            <a:r>
+              <a:rPr lang="en-US" dirty="0" err="1"/>
+              <a:t>с</a:t>
+            </a:r>
+            <a:r>
+              <a:rPr lang="en-US" dirty="0"/>
+              <a:t> </a:t>
+            </a:r>
+            <a:r>
+              <a:rPr lang="en-US" dirty="0" err="1"/>
+              <a:t>аналитическими</a:t>
+            </a:r>
+            <a:r>
+              <a:rPr lang="en-US" dirty="0"/>
+              <a:t> </a:t>
+            </a:r>
+            <a:r>
+              <a:rPr lang="en-US" dirty="0" err="1"/>
+              <a:t>выводами</a:t>
+            </a:r>
+            <a:r>
+              <a:rPr lang="en-US" dirty="0"/>
+              <a:t> </a:t>
+            </a:r>
+            <a:r>
+              <a:rPr lang="en-US" dirty="0" err="1"/>
+              <a:t>и</a:t>
+            </a:r>
+            <a:r>
+              <a:rPr lang="en-US" dirty="0"/>
+              <a:t> </a:t>
+            </a:r>
+            <a:r>
+              <a:rPr lang="en-US" dirty="0" err="1"/>
+              <a:t>рекомендациями</a:t>
+            </a:r>
+            <a:endParaRPr lang="en-US" dirty="0"/>
+          </a:p>
+          <a:p>
+            <a:r>
+              <a:rPr lang="en-US" dirty="0"/>
+              <a:t>- </a:t>
+            </a:r>
+            <a:r>
+              <a:rPr lang="en-US" dirty="0" err="1"/>
+              <a:t>Конкретные</a:t>
+            </a:r>
+            <a:r>
+              <a:rPr lang="en-US" dirty="0"/>
+              <a:t> </a:t>
+            </a:r>
+            <a:r>
+              <a:rPr lang="en-US" dirty="0" err="1"/>
+              <a:t>предложения</a:t>
+            </a:r>
+            <a:r>
+              <a:rPr lang="en-US" dirty="0"/>
+              <a:t> </a:t>
+            </a:r>
+            <a:r>
+              <a:rPr lang="en-US" dirty="0" err="1"/>
+              <a:t>по</a:t>
+            </a:r>
+            <a:r>
+              <a:rPr lang="en-US" dirty="0"/>
+              <a:t> </a:t>
+            </a:r>
+            <a:r>
+              <a:rPr lang="en-US" dirty="0" err="1"/>
+              <a:t>локации</a:t>
+            </a:r>
+            <a:r>
+              <a:rPr lang="en-US" dirty="0"/>
+              <a:t>, </a:t>
+            </a:r>
+            <a:r>
+              <a:rPr lang="en-US" dirty="0" err="1"/>
+              <a:t>формату</a:t>
+            </a:r>
+            <a:r>
+              <a:rPr lang="en-US" dirty="0"/>
+              <a:t> </a:t>
+            </a:r>
+            <a:r>
+              <a:rPr lang="en-US" dirty="0" err="1"/>
+              <a:t>и</a:t>
+            </a:r>
+            <a:r>
+              <a:rPr lang="en-US" dirty="0"/>
+              <a:t> </a:t>
+            </a:r>
+            <a:r>
+              <a:rPr lang="en-US" dirty="0" err="1"/>
+              <a:t>ценообразованию</a:t>
+            </a:r>
+            <a:endParaRPr lang="en-US" dirty="0"/>
+          </a:p>
+          <a:p>
+            <a:r>
+              <a:rPr lang="en-US" dirty="0"/>
+              <a:t>- </a:t>
+            </a:r>
+            <a:r>
+              <a:rPr lang="en-US" dirty="0" err="1"/>
+              <a:t>Пошаговый</a:t>
+            </a:r>
+            <a:r>
+              <a:rPr lang="en-US" dirty="0"/>
+              <a:t> </a:t>
+            </a:r>
+            <a:r>
+              <a:rPr lang="en-US" dirty="0" err="1"/>
+              <a:t>план</a:t>
+            </a:r>
+            <a:r>
+              <a:rPr lang="en-US" dirty="0"/>
+              <a:t> </a:t>
+            </a:r>
+            <a:r>
+              <a:rPr lang="en-US" dirty="0" err="1"/>
+              <a:t>открытия</a:t>
+            </a:r>
+            <a:r>
+              <a:rPr lang="en-US" dirty="0"/>
+              <a:t> </a:t>
+            </a:r>
+            <a:r>
+              <a:rPr lang="en-US" dirty="0" err="1"/>
+              <a:t>нового</a:t>
+            </a:r>
+            <a:r>
+              <a:rPr lang="en-US" dirty="0"/>
+              <a:t> </a:t>
+            </a:r>
+            <a:r>
+              <a:rPr lang="en-US" dirty="0" err="1"/>
+              <a:t>заведения</a:t>
+            </a:r>
+            <a:endParaRPr lang="en-US" dirty="0"/>
+          </a:p>
+          <a:p>
+            <a:r>
+              <a:rPr lang="en-US" dirty="0"/>
+              <a:t>- </a:t>
+            </a:r>
+            <a:r>
+              <a:rPr lang="en-US" dirty="0" err="1"/>
+              <a:t>Оценка</a:t>
+            </a:r>
+            <a:r>
+              <a:rPr lang="en-US" dirty="0"/>
+              <a:t> </a:t>
+            </a:r>
+            <a:r>
+              <a:rPr lang="en-US" dirty="0" err="1"/>
+              <a:t>рисков</a:t>
+            </a:r>
+            <a:r>
+              <a:rPr lang="en-US" dirty="0"/>
+              <a:t> </a:t>
+            </a:r>
+            <a:r>
+              <a:rPr lang="en-US" dirty="0" err="1"/>
+              <a:t>и</a:t>
+            </a:r>
+            <a:r>
+              <a:rPr lang="en-US" dirty="0"/>
+              <a:t> </a:t>
+            </a:r>
+            <a:r>
+              <a:rPr lang="en-US" dirty="0" err="1"/>
+              <a:t>возможностей</a:t>
+            </a:r>
+            <a:r>
+              <a:rPr lang="en-US" dirty="0"/>
+              <a:t> </a:t>
+            </a:r>
+            <a:r>
+              <a:rPr lang="en-US" dirty="0" err="1"/>
+              <a:t>на</a:t>
+            </a:r>
+            <a:r>
+              <a:rPr lang="en-US" dirty="0"/>
+              <a:t> </a:t>
+            </a:r>
+            <a:r>
+              <a:rPr lang="en-US" dirty="0" err="1"/>
+              <a:t>московском</a:t>
+            </a:r>
+            <a:r>
+              <a:rPr lang="en-US" dirty="0"/>
+              <a:t> </a:t>
+            </a:r>
+            <a:r>
+              <a:rPr lang="en-US" dirty="0" err="1"/>
+              <a:t>рынке</a:t>
+            </a:r>
+            <a:endParaRPr lang="en-US" dirty="0"/>
+          </a:p>
+        </p:txBody>
+      </p:sp>
+    </p:spTree>
+    <p:extLst>
+      <p:ext uri="{BB962C8B-B14F-4D97-AF65-F5344CB8AC3E}">
+        <p14:creationId xmlns:p14="http://schemas.microsoft.com/office/powerpoint/2010/main" val="817738001"/>
+      </p:ext>
+    </p:extLst>
+  </p:cSld>
+  <p:clrMapOvr>
+    <a:masterClrMapping/>
+  </p:clrMapOvr>
+</p:sld>
+</file>
+
+<file path=ppt/slides/slide11.xml><?xml version="1.0" encoding="utf-8"?>
+<p:sld xmlns:a="http://schemas.openxmlformats.org/drawingml/2006/main" xmlns:r="http://schemas.openxmlformats.org/officeDocument/2006/relationships" xmlns:p="http://schemas.openxmlformats.org/presentationml/2006/main">
+  <p:cSld>
+    <p:spTree>
+      <p:nvGrpSpPr>
+        <p:cNvPr id="1" name=""/>
+        <p:cNvGrpSpPr/>
+        <p:nvPr/>
+      </p:nvGrpSpPr>
+      <p:grpSpPr>
+        <a:xfrm>
+          <a:off x="0" y="0"/>
+          <a:ext cx="0" cy="0"/>
+          <a:chOff x="0" y="0"/>
+          <a:chExt cx="0" cy="0"/>
+        </a:xfrm>
+      </p:grpSpPr>
+      <p:sp>
+        <p:nvSpPr>
+          <p:cNvPr id="2" name="Title 1">
+            <a:extLst>
+              <a:ext uri="{FF2B5EF4-FFF2-40B4-BE49-F238E27FC236}">
+                <a16:creationId xmlns:a16="http://schemas.microsoft.com/office/drawing/2014/main" id="{9C5F0CC4-133F-5E42-252E-38277450431A}"/>
+              </a:ext>
+            </a:extLst>
+          </p:cNvPr>
+          <p:cNvSpPr>
+            <a:spLocks noGrp="1"/>
+          </p:cNvSpPr>
+          <p:nvPr>
+            <p:ph type="title"/>
+          </p:nvPr>
+        </p:nvSpPr>
+        <p:spPr/>
+        <p:txBody>
+          <a:bodyPr/>
+          <a:lstStyle/>
+          <a:p>
+            <a:r>
+              <a:rPr lang="ru-RU" dirty="0"/>
+              <a:t>КЛЮЧЕВЫЕ МЕТРИКИ</a:t>
+            </a:r>
+            <a:endParaRPr lang="en-US" dirty="0"/>
+          </a:p>
+        </p:txBody>
+      </p:sp>
+      <p:sp>
+        <p:nvSpPr>
+          <p:cNvPr id="3" name="Content Placeholder 2">
+            <a:extLst>
+              <a:ext uri="{FF2B5EF4-FFF2-40B4-BE49-F238E27FC236}">
+                <a16:creationId xmlns:a16="http://schemas.microsoft.com/office/drawing/2014/main" id="{720CE304-5A65-A9BA-5444-B7F449C1CA94}"/>
+              </a:ext>
+            </a:extLst>
+          </p:cNvPr>
+          <p:cNvSpPr>
+            <a:spLocks noGrp="1"/>
+          </p:cNvSpPr>
+          <p:nvPr>
+            <p:ph idx="1"/>
+          </p:nvPr>
+        </p:nvSpPr>
+        <p:spPr/>
+        <p:txBody>
+          <a:bodyPr>
+            <a:normAutofit lnSpcReduction="10000"/>
+          </a:bodyPr>
+          <a:lstStyle/>
+          <a:p>
+            <a:r>
+              <a:rPr lang="ru-RU" dirty="0"/>
+              <a:t>Общее количество заведений: 8406</a:t>
+            </a:r>
+          </a:p>
+          <a:p>
+            <a:r>
+              <a:rPr lang="ru-RU" dirty="0"/>
+              <a:t>Количество категорий: 8</a:t>
+            </a:r>
+          </a:p>
+          <a:p>
+            <a:r>
+              <a:rPr lang="ru-RU" dirty="0"/>
+              <a:t>Количество районов: 9</a:t>
+            </a:r>
+          </a:p>
+          <a:p>
+            <a:r>
+              <a:rPr lang="ru-RU" dirty="0"/>
+              <a:t>Доля сетевых заведений: 38.1%</a:t>
+            </a:r>
+          </a:p>
+          <a:p>
+            <a:r>
+              <a:rPr lang="ru-RU" dirty="0"/>
+              <a:t>Средний рейтинг: 4.23</a:t>
+            </a:r>
+          </a:p>
+          <a:p>
+            <a:r>
+              <a:rPr lang="ru-RU" dirty="0"/>
+              <a:t>Количество кофеен: 1413</a:t>
+            </a:r>
+          </a:p>
+          <a:p>
+            <a:r>
+              <a:rPr lang="ru-RU" dirty="0"/>
+              <a:t>Доля круглосуточных заведений: 13.5%</a:t>
+            </a:r>
+          </a:p>
+          <a:p>
+            <a:r>
+              <a:rPr lang="ru-RU" dirty="0"/>
+              <a:t>Среднее количество мест: 108 </a:t>
+            </a:r>
+            <a:br>
+              <a:rPr lang="ru-RU" dirty="0"/>
+            </a:br>
+            <a:endParaRPr lang="en-US" dirty="0"/>
+          </a:p>
+        </p:txBody>
+      </p:sp>
+    </p:spTree>
+    <p:extLst>
+      <p:ext uri="{BB962C8B-B14F-4D97-AF65-F5344CB8AC3E}">
+        <p14:creationId xmlns:p14="http://schemas.microsoft.com/office/powerpoint/2010/main" val="4127898922"/>
+      </p:ext>
+    </p:extLst>
+  </p:cSld>
+  <p:clrMapOvr>
+    <a:masterClrMapping/>
+  </p:clrMapOvr>
+</p:sld>
+</file>
+
+<file path=ppt/slides/slide12.xml><?xml version="1.0" encoding="utf-8"?>
+<p:sld xmlns:a="http://schemas.openxmlformats.org/drawingml/2006/main" xmlns:r="http://schemas.openxmlformats.org/officeDocument/2006/relationships" xmlns:p="http://schemas.openxmlformats.org/presentationml/2006/main">
+  <p:cSld>
+    <p:spTree>
+      <p:nvGrpSpPr>
+        <p:cNvPr id="1" name=""/>
+        <p:cNvGrpSpPr/>
+        <p:nvPr/>
+      </p:nvGrpSpPr>
+      <p:grpSpPr>
+        <a:xfrm>
+          <a:off x="0" y="0"/>
+          <a:ext cx="0" cy="0"/>
+          <a:chOff x="0" y="0"/>
+          <a:chExt cx="0" cy="0"/>
+        </a:xfrm>
+      </p:grpSpPr>
+      <p:sp>
+        <p:nvSpPr>
+          <p:cNvPr id="2" name="Title 1">
+            <a:extLst>
+              <a:ext uri="{FF2B5EF4-FFF2-40B4-BE49-F238E27FC236}">
+                <a16:creationId xmlns:a16="http://schemas.microsoft.com/office/drawing/2014/main" id="{522F646E-33BD-04F3-8837-579188A6B518}"/>
+              </a:ext>
+            </a:extLst>
+          </p:cNvPr>
+          <p:cNvSpPr>
+            <a:spLocks noGrp="1"/>
+          </p:cNvSpPr>
+          <p:nvPr>
+            <p:ph type="title"/>
+          </p:nvPr>
+        </p:nvSpPr>
+        <p:spPr/>
+        <p:txBody>
+          <a:bodyPr/>
+          <a:lstStyle/>
+          <a:p>
+            <a:r>
+              <a:rPr lang="ru-RU" dirty="0"/>
+              <a:t>ТОП-5 КАТЕГОРИЙ</a:t>
+            </a:r>
+            <a:endParaRPr lang="en-US" dirty="0"/>
+          </a:p>
+        </p:txBody>
+      </p:sp>
+      <p:sp>
+        <p:nvSpPr>
+          <p:cNvPr id="3" name="Content Placeholder 2">
+            <a:extLst>
+              <a:ext uri="{FF2B5EF4-FFF2-40B4-BE49-F238E27FC236}">
+                <a16:creationId xmlns:a16="http://schemas.microsoft.com/office/drawing/2014/main" id="{6A7513FC-4206-D33B-53FE-7DE2D12A4A96}"/>
+              </a:ext>
+            </a:extLst>
+          </p:cNvPr>
+          <p:cNvSpPr>
+            <a:spLocks noGrp="1"/>
+          </p:cNvSpPr>
+          <p:nvPr>
+            <p:ph idx="1"/>
+          </p:nvPr>
+        </p:nvSpPr>
+        <p:spPr/>
+        <p:txBody>
+          <a:bodyPr/>
+          <a:lstStyle/>
+          <a:p>
+            <a:r>
+              <a:rPr lang="ru-RU" dirty="0"/>
+              <a:t>1. кафе: 2378 заведений (28.3%)</a:t>
+            </a:r>
+          </a:p>
+          <a:p>
+            <a:r>
+              <a:rPr lang="ru-RU" dirty="0"/>
+              <a:t>2. ресторан: 2043 заведений (24.3%)</a:t>
+            </a:r>
+          </a:p>
+          <a:p>
+            <a:r>
+              <a:rPr lang="ru-RU" dirty="0"/>
+              <a:t>3. кофейня: 1413 заведений (16.8%)</a:t>
+            </a:r>
+          </a:p>
+          <a:p>
+            <a:r>
+              <a:rPr lang="ru-RU" dirty="0"/>
+              <a:t>4. </a:t>
+            </a:r>
+            <a:r>
+              <a:rPr lang="ru-RU" dirty="0" err="1"/>
+              <a:t>бар,паб</a:t>
+            </a:r>
+            <a:r>
+              <a:rPr lang="ru-RU" dirty="0"/>
+              <a:t>: 765 заведений (9.1%)</a:t>
+            </a:r>
+          </a:p>
+          <a:p>
+            <a:r>
+              <a:rPr lang="ru-RU" dirty="0"/>
+              <a:t>5. пиццерия: 633 заведений (7.5%) </a:t>
+            </a:r>
+            <a:endParaRPr lang="en-US" dirty="0"/>
+          </a:p>
+        </p:txBody>
+      </p:sp>
+    </p:spTree>
+    <p:extLst>
+      <p:ext uri="{BB962C8B-B14F-4D97-AF65-F5344CB8AC3E}">
+        <p14:creationId xmlns:p14="http://schemas.microsoft.com/office/powerpoint/2010/main" val="3415080444"/>
+      </p:ext>
+    </p:extLst>
+  </p:cSld>
+  <p:clrMapOvr>
+    <a:masterClrMapping/>
+  </p:clrMapOvr>
+</p:sld>
+</file>
+
+<file path=ppt/slides/slide13.xml><?xml version="1.0" encoding="utf-8"?>
+<p:sld xmlns:a="http://schemas.openxmlformats.org/drawingml/2006/main" xmlns:r="http://schemas.openxmlformats.org/officeDocument/2006/relationships" xmlns:p="http://schemas.openxmlformats.org/presentationml/2006/main">
+  <p:cSld>
+    <p:spTree>
+      <p:nvGrpSpPr>
+        <p:cNvPr id="1" name=""/>
+        <p:cNvGrpSpPr/>
+        <p:nvPr/>
+      </p:nvGrpSpPr>
+      <p:grpSpPr>
+        <a:xfrm>
+          <a:off x="0" y="0"/>
+          <a:ext cx="0" cy="0"/>
+          <a:chOff x="0" y="0"/>
+          <a:chExt cx="0" cy="0"/>
+        </a:xfrm>
+      </p:grpSpPr>
+      <p:sp>
+        <p:nvSpPr>
+          <p:cNvPr id="2" name="Title 1">
+            <a:extLst>
+              <a:ext uri="{FF2B5EF4-FFF2-40B4-BE49-F238E27FC236}">
+                <a16:creationId xmlns:a16="http://schemas.microsoft.com/office/drawing/2014/main" id="{72D3B505-7998-DB26-3D32-2A4205F63F98}"/>
+              </a:ext>
+            </a:extLst>
+          </p:cNvPr>
+          <p:cNvSpPr>
+            <a:spLocks noGrp="1"/>
+          </p:cNvSpPr>
+          <p:nvPr>
+            <p:ph type="title"/>
+          </p:nvPr>
+        </p:nvSpPr>
+        <p:spPr/>
+        <p:txBody>
+          <a:bodyPr/>
+          <a:lstStyle/>
+          <a:p>
+            <a:r>
+              <a:rPr lang="ru-RU" dirty="0"/>
+              <a:t>ТОП-5 РАЙОНОВ</a:t>
+            </a:r>
+            <a:endParaRPr lang="en-US" dirty="0"/>
+          </a:p>
+        </p:txBody>
+      </p:sp>
+      <p:sp>
+        <p:nvSpPr>
+          <p:cNvPr id="3" name="Content Placeholder 2">
+            <a:extLst>
+              <a:ext uri="{FF2B5EF4-FFF2-40B4-BE49-F238E27FC236}">
+                <a16:creationId xmlns:a16="http://schemas.microsoft.com/office/drawing/2014/main" id="{31E886C4-680E-2F6E-6918-86D8EDBCCB34}"/>
+              </a:ext>
+            </a:extLst>
+          </p:cNvPr>
+          <p:cNvSpPr>
+            <a:spLocks noGrp="1"/>
+          </p:cNvSpPr>
+          <p:nvPr>
+            <p:ph idx="1"/>
+          </p:nvPr>
+        </p:nvSpPr>
+        <p:spPr/>
+        <p:txBody>
+          <a:bodyPr/>
+          <a:lstStyle/>
+          <a:p>
+            <a:r>
+              <a:rPr lang="ru-RU" dirty="0"/>
+              <a:t>1. Центральный административный округ: 2242</a:t>
+            </a:r>
+          </a:p>
+          <a:p>
+            <a:r>
+              <a:rPr lang="ru-RU" dirty="0"/>
+              <a:t>заведений 2. Северный административный округ: 900 заведений</a:t>
+            </a:r>
+          </a:p>
+          <a:p>
+            <a:r>
+              <a:rPr lang="ru-RU" dirty="0"/>
+              <a:t>3. Южный административный округ: 892 заведений</a:t>
+            </a:r>
+          </a:p>
+          <a:p>
+            <a:r>
+              <a:rPr lang="ru-RU" dirty="0"/>
+              <a:t>4. Северо-Восточный административный округ: 891 заведений</a:t>
+            </a:r>
+          </a:p>
+          <a:p>
+            <a:r>
+              <a:rPr lang="ru-RU" dirty="0"/>
+              <a:t>5. Западный административный округ: 851 заведений</a:t>
+            </a:r>
+            <a:endParaRPr lang="en-US" dirty="0"/>
+          </a:p>
+        </p:txBody>
+      </p:sp>
+    </p:spTree>
+    <p:extLst>
+      <p:ext uri="{BB962C8B-B14F-4D97-AF65-F5344CB8AC3E}">
+        <p14:creationId xmlns:p14="http://schemas.microsoft.com/office/powerpoint/2010/main" val="2581424752"/>
+      </p:ext>
+    </p:extLst>
+  </p:cSld>
+  <p:clrMapOvr>
+    <a:masterClrMapping/>
+  </p:clrMapOvr>
+</p:sld>
+</file>
+
+<file path=ppt/slides/slide14.xml><?xml version="1.0" encoding="utf-8"?>
+<p:sld xmlns:a="http://schemas.openxmlformats.org/drawingml/2006/main" xmlns:r="http://schemas.openxmlformats.org/officeDocument/2006/relationships" xmlns:p="http://schemas.openxmlformats.org/presentationml/2006/main">
+  <p:cSld>
+    <p:spTree>
+      <p:nvGrpSpPr>
+        <p:cNvPr id="1" name=""/>
+        <p:cNvGrpSpPr/>
+        <p:nvPr/>
+      </p:nvGrpSpPr>
+      <p:grpSpPr>
+        <a:xfrm>
+          <a:off x="0" y="0"/>
+          <a:ext cx="0" cy="0"/>
+          <a:chOff x="0" y="0"/>
+          <a:chExt cx="0" cy="0"/>
+        </a:xfrm>
+      </p:grpSpPr>
+      <p:sp>
+        <p:nvSpPr>
+          <p:cNvPr id="2" name="Title 1">
+            <a:extLst>
+              <a:ext uri="{FF2B5EF4-FFF2-40B4-BE49-F238E27FC236}">
+                <a16:creationId xmlns:a16="http://schemas.microsoft.com/office/drawing/2014/main" id="{7C783312-079B-DB28-3CC9-491CAA272E3C}"/>
+              </a:ext>
+            </a:extLst>
+          </p:cNvPr>
+          <p:cNvSpPr>
+            <a:spLocks noGrp="1"/>
+          </p:cNvSpPr>
+          <p:nvPr>
+            <p:ph type="title"/>
+          </p:nvPr>
+        </p:nvSpPr>
+        <p:spPr/>
+        <p:txBody>
+          <a:bodyPr/>
+          <a:lstStyle/>
+          <a:p>
+            <a:r>
+              <a:rPr lang="ru-RU" dirty="0"/>
+              <a:t>АНАЛИЗ ДЛЯ КОФЕЕН</a:t>
+            </a:r>
+            <a:endParaRPr lang="en-US" dirty="0"/>
+          </a:p>
+        </p:txBody>
+      </p:sp>
+      <p:sp>
+        <p:nvSpPr>
+          <p:cNvPr id="3" name="Content Placeholder 2">
+            <a:extLst>
+              <a:ext uri="{FF2B5EF4-FFF2-40B4-BE49-F238E27FC236}">
+                <a16:creationId xmlns:a16="http://schemas.microsoft.com/office/drawing/2014/main" id="{A49E6497-4A9C-DAE8-9C84-297DF3003440}"/>
+              </a:ext>
+            </a:extLst>
+          </p:cNvPr>
+          <p:cNvSpPr>
+            <a:spLocks noGrp="1"/>
+          </p:cNvSpPr>
+          <p:nvPr>
+            <p:ph idx="1"/>
+          </p:nvPr>
+        </p:nvSpPr>
+        <p:spPr/>
+        <p:txBody>
+          <a:bodyPr/>
+          <a:lstStyle/>
+          <a:p>
+            <a:r>
+              <a:rPr lang="ru-RU" dirty="0"/>
+              <a:t>Средняя цена капучино: 175 </a:t>
+            </a:r>
+            <a:r>
+              <a:rPr lang="en-US" dirty="0"/>
+              <a:t>₽</a:t>
+            </a:r>
+            <a:endParaRPr lang="ru-RU" dirty="0"/>
+          </a:p>
+          <a:p>
+            <a:r>
+              <a:rPr lang="ru-RU" dirty="0"/>
+              <a:t>Медианная цена капучино: 170 </a:t>
+            </a:r>
+            <a:r>
+              <a:rPr lang="en-US" dirty="0"/>
+              <a:t>₽</a:t>
+            </a:r>
+            <a:endParaRPr lang="ru-RU" dirty="0"/>
+          </a:p>
+          <a:p>
+            <a:r>
+              <a:rPr lang="ru-RU" dirty="0"/>
+              <a:t>Средний рейтинг кофеен: 4.28</a:t>
+            </a:r>
+          </a:p>
+          <a:p>
+            <a:r>
+              <a:rPr lang="ru-RU" dirty="0"/>
+              <a:t>Доля сетевых кофеен: 51.0%</a:t>
+            </a:r>
+            <a:endParaRPr lang="en-US" dirty="0"/>
+          </a:p>
+        </p:txBody>
+      </p:sp>
+    </p:spTree>
+    <p:extLst>
+      <p:ext uri="{BB962C8B-B14F-4D97-AF65-F5344CB8AC3E}">
+        <p14:creationId xmlns:p14="http://schemas.microsoft.com/office/powerpoint/2010/main" val="1293604767"/>
+      </p:ext>
+    </p:extLst>
+  </p:cSld>
+  <p:clrMapOvr>
+    <a:masterClrMapping/>
+  </p:clrMapOvr>
+</p:sld>
+</file>
+
+<file path=ppt/slides/slide15.xml><?xml version="1.0" encoding="utf-8"?>
+<p:sld xmlns:a="http://schemas.openxmlformats.org/drawingml/2006/main" xmlns:r="http://schemas.openxmlformats.org/officeDocument/2006/relationships" xmlns:p="http://schemas.openxmlformats.org/presentationml/2006/main">
+  <p:cSld>
+    <p:spTree>
+      <p:nvGrpSpPr>
+        <p:cNvPr id="1" name=""/>
+        <p:cNvGrpSpPr/>
+        <p:nvPr/>
+      </p:nvGrpSpPr>
+      <p:grpSpPr>
+        <a:xfrm>
+          <a:off x="0" y="0"/>
+          <a:ext cx="0" cy="0"/>
+          <a:chOff x="0" y="0"/>
+          <a:chExt cx="0" cy="0"/>
+        </a:xfrm>
+      </p:grpSpPr>
+      <p:pic>
+        <p:nvPicPr>
+          <p:cNvPr id="4" name="Picture 3">
+            <a:extLst>
+              <a:ext uri="{FF2B5EF4-FFF2-40B4-BE49-F238E27FC236}">
+                <a16:creationId xmlns:a16="http://schemas.microsoft.com/office/drawing/2014/main" id="{D200E814-FCA0-8A68-AD3B-F872736EE9D4}"/>
+              </a:ext>
+            </a:extLst>
+          </p:cNvPr>
+          <p:cNvPicPr>
+            <a:picLocks noChangeAspect="1"/>
+          </p:cNvPicPr>
+          <p:nvPr/>
+        </p:nvPicPr>
+        <p:blipFill>
+          <a:blip r:embed="rId2"/>
+          <a:stretch>
+            <a:fillRect/>
+          </a:stretch>
+        </p:blipFill>
+        <p:spPr>
+          <a:xfrm>
+            <a:off x="139261" y="1038831"/>
+            <a:ext cx="11789403" cy="4668286"/>
+          </a:xfrm>
+          <a:prstGeom prst="rect">
+            <a:avLst/>
+          </a:prstGeom>
+        </p:spPr>
+      </p:pic>
+    </p:spTree>
+    <p:extLst>
+      <p:ext uri="{BB962C8B-B14F-4D97-AF65-F5344CB8AC3E}">
+        <p14:creationId xmlns:p14="http://schemas.microsoft.com/office/powerpoint/2010/main" val="3881097657"/>
+      </p:ext>
+    </p:extLst>
+  </p:cSld>
+  <p:clrMapOvr>
+    <a:masterClrMapping/>
+  </p:clrMapOvr>
+</p:sld>
+</file>
+
+<file path=ppt/slides/slide16.xml><?xml version="1.0" encoding="utf-8"?>
+<p:sld xmlns:a="http://schemas.openxmlformats.org/drawingml/2006/main" xmlns:r="http://schemas.openxmlformats.org/officeDocument/2006/relationships" xmlns:p="http://schemas.openxmlformats.org/presentationml/2006/main">
+  <p:cSld>
+    <p:spTree>
+      <p:nvGrpSpPr>
+        <p:cNvPr id="1" name=""/>
+        <p:cNvGrpSpPr/>
+        <p:nvPr/>
+      </p:nvGrpSpPr>
+      <p:grpSpPr>
+        <a:xfrm>
+          <a:off x="0" y="0"/>
+          <a:ext cx="0" cy="0"/>
+          <a:chOff x="0" y="0"/>
+          <a:chExt cx="0" cy="0"/>
+        </a:xfrm>
+      </p:grpSpPr>
+      <p:sp>
+        <p:nvSpPr>
+          <p:cNvPr id="2" name="Title 1">
+            <a:extLst>
+              <a:ext uri="{FF2B5EF4-FFF2-40B4-BE49-F238E27FC236}">
+                <a16:creationId xmlns:a16="http://schemas.microsoft.com/office/drawing/2014/main" id="{7C30A4FA-5D1F-E5B9-B4C8-09808CCB36A9}"/>
+              </a:ext>
+            </a:extLst>
+          </p:cNvPr>
+          <p:cNvSpPr>
+            <a:spLocks noGrp="1"/>
+          </p:cNvSpPr>
+          <p:nvPr>
+            <p:ph type="title"/>
+          </p:nvPr>
+        </p:nvSpPr>
+        <p:spPr/>
+        <p:txBody>
+          <a:bodyPr/>
+          <a:lstStyle/>
+          <a:p>
+            <a:r>
+              <a:rPr lang="ru-RU" dirty="0"/>
+              <a:t>Вывод для графика</a:t>
+            </a:r>
+            <a:endParaRPr lang="en-US" dirty="0"/>
+          </a:p>
+        </p:txBody>
+      </p:sp>
+      <p:sp>
+        <p:nvSpPr>
+          <p:cNvPr id="3" name="Content Placeholder 2">
+            <a:extLst>
+              <a:ext uri="{FF2B5EF4-FFF2-40B4-BE49-F238E27FC236}">
+                <a16:creationId xmlns:a16="http://schemas.microsoft.com/office/drawing/2014/main" id="{9B5F0554-E5B8-6D1B-432C-C112DF955808}"/>
+              </a:ext>
+            </a:extLst>
+          </p:cNvPr>
+          <p:cNvSpPr>
+            <a:spLocks noGrp="1"/>
+          </p:cNvSpPr>
+          <p:nvPr>
+            <p:ph idx="1"/>
+          </p:nvPr>
+        </p:nvSpPr>
+        <p:spPr/>
+        <p:txBody>
+          <a:bodyPr/>
+          <a:lstStyle/>
+          <a:p>
+            <a:r>
+              <a:rPr lang="ru-RU" dirty="0"/>
+              <a:t>В топ-10 категорий явно преобладают кафе (35 </a:t>
+            </a:r>
+            <a:r>
+              <a:rPr lang="en-US" dirty="0"/>
+              <a:t>% </a:t>
+            </a:r>
+            <a:r>
+              <a:rPr lang="ru-RU" dirty="0"/>
+              <a:t>рынка)</a:t>
+            </a:r>
+          </a:p>
+          <a:p>
+            <a:r>
+              <a:rPr lang="ru-RU" dirty="0"/>
+              <a:t>Топ-3 – кафе, рестораны и кофейни</a:t>
+            </a:r>
+          </a:p>
+        </p:txBody>
+      </p:sp>
+    </p:spTree>
+    <p:extLst>
+      <p:ext uri="{BB962C8B-B14F-4D97-AF65-F5344CB8AC3E}">
+        <p14:creationId xmlns:p14="http://schemas.microsoft.com/office/powerpoint/2010/main" val="1004253992"/>
+      </p:ext>
+    </p:extLst>
+  </p:cSld>
+  <p:clrMapOvr>
+    <a:masterClrMapping/>
+  </p:clrMapOvr>
+</p:sld>
+</file>
+
+<file path=ppt/slides/slide17.xml><?xml version="1.0" encoding="utf-8"?>
+<p:sld xmlns:a="http://schemas.openxmlformats.org/drawingml/2006/main" xmlns:r="http://schemas.openxmlformats.org/officeDocument/2006/relationships" xmlns:p="http://schemas.openxmlformats.org/presentationml/2006/main">
+  <p:cSld>
+    <p:spTree>
+      <p:nvGrpSpPr>
+        <p:cNvPr id="1" name=""/>
+        <p:cNvGrpSpPr/>
+        <p:nvPr/>
+      </p:nvGrpSpPr>
+      <p:grpSpPr>
+        <a:xfrm>
+          <a:off x="0" y="0"/>
+          <a:ext cx="0" cy="0"/>
+          <a:chOff x="0" y="0"/>
+          <a:chExt cx="0" cy="0"/>
+        </a:xfrm>
+      </p:grpSpPr>
+      <p:pic>
+        <p:nvPicPr>
+          <p:cNvPr id="4" name="Picture 3">
+            <a:extLst>
+              <a:ext uri="{FF2B5EF4-FFF2-40B4-BE49-F238E27FC236}">
+                <a16:creationId xmlns:a16="http://schemas.microsoft.com/office/drawing/2014/main" id="{5B09E531-FC18-6DC9-344B-6E25C062D534}"/>
+              </a:ext>
+            </a:extLst>
+          </p:cNvPr>
+          <p:cNvPicPr>
+            <a:picLocks noChangeAspect="1"/>
+          </p:cNvPicPr>
+          <p:nvPr/>
+        </p:nvPicPr>
+        <p:blipFill>
+          <a:blip r:embed="rId2"/>
+          <a:stretch>
+            <a:fillRect/>
+          </a:stretch>
+        </p:blipFill>
+        <p:spPr>
+          <a:xfrm>
+            <a:off x="205961" y="1382400"/>
+            <a:ext cx="11780077" cy="4387780"/>
+          </a:xfrm>
+          <a:prstGeom prst="rect">
+            <a:avLst/>
+          </a:prstGeom>
+        </p:spPr>
+      </p:pic>
+    </p:spTree>
+    <p:extLst>
+      <p:ext uri="{BB962C8B-B14F-4D97-AF65-F5344CB8AC3E}">
+        <p14:creationId xmlns:p14="http://schemas.microsoft.com/office/powerpoint/2010/main" val="2851149009"/>
+      </p:ext>
+    </p:extLst>
+  </p:cSld>
+  <p:clrMapOvr>
+    <a:masterClrMapping/>
+  </p:clrMapOvr>
+</p:sld>
+</file>
+
+<file path=ppt/slides/slide18.xml><?xml version="1.0" encoding="utf-8"?>
+<p:sld xmlns:a="http://schemas.openxmlformats.org/drawingml/2006/main" xmlns:r="http://schemas.openxmlformats.org/officeDocument/2006/relationships" xmlns:p="http://schemas.openxmlformats.org/presentationml/2006/main">
+  <p:cSld>
+    <p:spTree>
+      <p:nvGrpSpPr>
+        <p:cNvPr id="1" name=""/>
+        <p:cNvGrpSpPr/>
+        <p:nvPr/>
+      </p:nvGrpSpPr>
+      <p:grpSpPr>
+        <a:xfrm>
+          <a:off x="0" y="0"/>
+          <a:ext cx="0" cy="0"/>
+          <a:chOff x="0" y="0"/>
+          <a:chExt cx="0" cy="0"/>
+        </a:xfrm>
+      </p:grpSpPr>
+      <p:sp>
+        <p:nvSpPr>
+          <p:cNvPr id="3" name="Content Placeholder 2">
+            <a:extLst>
+              <a:ext uri="{FF2B5EF4-FFF2-40B4-BE49-F238E27FC236}">
+                <a16:creationId xmlns:a16="http://schemas.microsoft.com/office/drawing/2014/main" id="{04928502-C69A-32F8-5A06-C41A14E3F949}"/>
+              </a:ext>
+            </a:extLst>
+          </p:cNvPr>
+          <p:cNvSpPr>
+            <a:spLocks noGrp="1"/>
+          </p:cNvSpPr>
+          <p:nvPr>
+            <p:ph idx="1"/>
+          </p:nvPr>
+        </p:nvSpPr>
+        <p:spPr/>
+        <p:txBody>
+          <a:bodyPr/>
+          <a:lstStyle/>
+          <a:p>
+            <a:r>
+              <a:rPr lang="ru-RU" dirty="0"/>
+              <a:t>Более 2000 заведений имеют средний чек до 1000 </a:t>
+            </a:r>
+            <a:r>
+              <a:rPr lang="ru-RU" dirty="0" err="1"/>
+              <a:t>руб</a:t>
+            </a:r>
+            <a:endParaRPr lang="ru-RU" dirty="0"/>
+          </a:p>
+          <a:p>
+            <a:r>
+              <a:rPr lang="ru-RU" dirty="0"/>
+              <a:t>Самые дорогие заведения расположены в ЗАО и ЦАО</a:t>
+            </a:r>
+            <a:endParaRPr lang="en-US" dirty="0"/>
+          </a:p>
+        </p:txBody>
+      </p:sp>
+      <p:sp>
+        <p:nvSpPr>
+          <p:cNvPr id="5" name="Title 1">
+            <a:extLst>
+              <a:ext uri="{FF2B5EF4-FFF2-40B4-BE49-F238E27FC236}">
+                <a16:creationId xmlns:a16="http://schemas.microsoft.com/office/drawing/2014/main" id="{9B44E071-FAB3-11CD-1604-E4FF71411C73}"/>
+              </a:ext>
+            </a:extLst>
+          </p:cNvPr>
+          <p:cNvSpPr>
+            <a:spLocks noGrp="1"/>
+          </p:cNvSpPr>
+          <p:nvPr>
+            <p:ph type="title"/>
+          </p:nvPr>
+        </p:nvSpPr>
+        <p:spPr>
+          <a:xfrm>
+            <a:off x="838200" y="365125"/>
+            <a:ext cx="10515600" cy="1325563"/>
+          </a:xfrm>
+        </p:spPr>
+        <p:txBody>
+          <a:bodyPr/>
+          <a:lstStyle/>
+          <a:p>
+            <a:r>
+              <a:rPr lang="ru-RU" dirty="0"/>
+              <a:t>Вывод для графика</a:t>
+            </a:r>
+            <a:endParaRPr lang="en-US" dirty="0"/>
+          </a:p>
+        </p:txBody>
+      </p:sp>
+    </p:spTree>
+    <p:extLst>
+      <p:ext uri="{BB962C8B-B14F-4D97-AF65-F5344CB8AC3E}">
+        <p14:creationId xmlns:p14="http://schemas.microsoft.com/office/powerpoint/2010/main" val="4139397235"/>
+      </p:ext>
+    </p:extLst>
+  </p:cSld>
+  <p:clrMapOvr>
+    <a:masterClrMapping/>
+  </p:clrMapOvr>
+</p:sld>
+</file>
+
+<file path=ppt/slides/slide19.xml><?xml version="1.0" encoding="utf-8"?>
+<p:sld xmlns:a="http://schemas.openxmlformats.org/drawingml/2006/main" xmlns:r="http://schemas.openxmlformats.org/officeDocument/2006/relationships" xmlns:p="http://schemas.openxmlformats.org/presentationml/2006/main">
+  <p:cSld>
+    <p:spTree>
+      <p:nvGrpSpPr>
+        <p:cNvPr id="1" name=""/>
+        <p:cNvGrpSpPr/>
+        <p:nvPr/>
+      </p:nvGrpSpPr>
+      <p:grpSpPr>
+        <a:xfrm>
+          <a:off x="0" y="0"/>
+          <a:ext cx="0" cy="0"/>
+          <a:chOff x="0" y="0"/>
+          <a:chExt cx="0" cy="0"/>
+        </a:xfrm>
+      </p:grpSpPr>
+      <p:sp>
+        <p:nvSpPr>
+          <p:cNvPr id="2" name="Title 1">
+            <a:extLst>
+              <a:ext uri="{FF2B5EF4-FFF2-40B4-BE49-F238E27FC236}">
+                <a16:creationId xmlns:a16="http://schemas.microsoft.com/office/drawing/2014/main" id="{ECE0B99E-240E-BA97-0F4A-C331A5B56A22}"/>
+              </a:ext>
+            </a:extLst>
+          </p:cNvPr>
+          <p:cNvSpPr>
+            <a:spLocks noGrp="1"/>
+          </p:cNvSpPr>
+          <p:nvPr>
+            <p:ph type="title"/>
+          </p:nvPr>
+        </p:nvSpPr>
+        <p:spPr/>
+        <p:txBody>
+          <a:bodyPr/>
+          <a:lstStyle/>
+          <a:p>
+            <a:r>
+              <a:rPr lang="ru-RU" dirty="0"/>
+              <a:t>Детальный анализ рынка кофеен Москвы</a:t>
+            </a:r>
+            <a:endParaRPr lang="en-US" dirty="0"/>
+          </a:p>
+        </p:txBody>
+      </p:sp>
+    </p:spTree>
+    <p:extLst>
+      <p:ext uri="{BB962C8B-B14F-4D97-AF65-F5344CB8AC3E}">
+        <p14:creationId xmlns:p14="http://schemas.microsoft.com/office/powerpoint/2010/main" val="1817500874"/>
+      </p:ext>
+    </p:extLst>
+  </p:cSld>
+  <p:clrMapOvr>
+    <a:masterClrMapping/>
+  </p:clrMapOvr>
+</p:sld>
+</file>
+
+<file path=ppt/slides/slide2.xml><?xml version="1.0" encoding="utf-8"?>
+<p:sld xmlns:a="http://schemas.openxmlformats.org/drawingml/2006/main" xmlns:r="http://schemas.openxmlformats.org/officeDocument/2006/relationships" xmlns:p="http://schemas.openxmlformats.org/presentationml/2006/main">
+  <p:cSld>
+    <p:spTree>
+      <p:nvGrpSpPr>
+        <p:cNvPr id="1" name=""/>
+        <p:cNvGrpSpPr/>
+        <p:nvPr/>
+      </p:nvGrpSpPr>
+      <p:grpSpPr>
+        <a:xfrm>
+          <a:off x="0" y="0"/>
+          <a:ext cx="0" cy="0"/>
+          <a:chOff x="0" y="0"/>
+          <a:chExt cx="0" cy="0"/>
+        </a:xfrm>
+      </p:grpSpPr>
+      <p:sp>
+        <p:nvSpPr>
+          <p:cNvPr id="6" name="TextBox 5">
+            <a:extLst>
+              <a:ext uri="{FF2B5EF4-FFF2-40B4-BE49-F238E27FC236}">
+                <a16:creationId xmlns:a16="http://schemas.microsoft.com/office/drawing/2014/main" id="{6C4B9DCB-34DA-D924-EFD0-4F0EDD69DDFE}"/>
+              </a:ext>
+            </a:extLst>
+          </p:cNvPr>
+          <p:cNvSpPr txBox="1"/>
+          <p:nvPr/>
+        </p:nvSpPr>
+        <p:spPr>
+          <a:xfrm>
+            <a:off x="2939526" y="2782669"/>
+            <a:ext cx="6312947" cy="646331"/>
+          </a:xfrm>
+          <a:prstGeom prst="rect">
+            <a:avLst/>
+          </a:prstGeom>
+          <a:noFill/>
+        </p:spPr>
+        <p:txBody>
+          <a:bodyPr wrap="none" rtlCol="0">
+            <a:spAutoFit/>
+          </a:bodyPr>
+          <a:lstStyle/>
+          <a:p>
+            <a:r>
+              <a:rPr lang="en-US" sz="3600" dirty="0" err="1"/>
+              <a:t>Цели</a:t>
+            </a:r>
+            <a:r>
+              <a:rPr lang="en-US" sz="3600" dirty="0"/>
+              <a:t> </a:t>
+            </a:r>
+            <a:r>
+              <a:rPr lang="en-US" sz="3600" dirty="0" err="1"/>
+              <a:t>и</a:t>
+            </a:r>
+            <a:r>
+              <a:rPr lang="en-US" sz="3600" dirty="0"/>
+              <a:t> </a:t>
+            </a:r>
+            <a:r>
+              <a:rPr lang="en-US" sz="3600" dirty="0" err="1"/>
+              <a:t>задачи</a:t>
+            </a:r>
+            <a:r>
+              <a:rPr lang="en-US" sz="3600" dirty="0"/>
+              <a:t> </a:t>
+            </a:r>
+            <a:r>
+              <a:rPr lang="en-US" sz="3600" dirty="0" err="1"/>
+              <a:t>исследования</a:t>
+            </a:r>
+            <a:endParaRPr lang="en-US" sz="3600" dirty="0"/>
+          </a:p>
+        </p:txBody>
+      </p:sp>
+    </p:spTree>
+    <p:extLst>
+      <p:ext uri="{BB962C8B-B14F-4D97-AF65-F5344CB8AC3E}">
+        <p14:creationId xmlns:p14="http://schemas.microsoft.com/office/powerpoint/2010/main" val="3951675378"/>
+      </p:ext>
+    </p:extLst>
+  </p:cSld>
+  <p:clrMapOvr>
+    <a:masterClrMapping/>
+  </p:clrMapOvr>
+</p:sld>
+</file>
+
+<file path=ppt/slides/slide20.xml><?xml version="1.0" encoding="utf-8"?>
+<p:sld xmlns:a="http://schemas.openxmlformats.org/drawingml/2006/main" xmlns:r="http://schemas.openxmlformats.org/officeDocument/2006/relationships" xmlns:p="http://schemas.openxmlformats.org/presentationml/2006/main">
+  <p:cSld>
+    <p:spTree>
+      <p:nvGrpSpPr>
+        <p:cNvPr id="1" name=""/>
+        <p:cNvGrpSpPr/>
+        <p:nvPr/>
+      </p:nvGrpSpPr>
+      <p:grpSpPr>
+        <a:xfrm>
+          <a:off x="0" y="0"/>
+          <a:ext cx="0" cy="0"/>
+          <a:chOff x="0" y="0"/>
+          <a:chExt cx="0" cy="0"/>
+        </a:xfrm>
+      </p:grpSpPr>
+      <p:pic>
+        <p:nvPicPr>
+          <p:cNvPr id="5" name="Picture 4" descr="A graph with a bar graph&#10;&#10;AI-generated content may be incorrect.">
+            <a:extLst>
+              <a:ext uri="{FF2B5EF4-FFF2-40B4-BE49-F238E27FC236}">
+                <a16:creationId xmlns:a16="http://schemas.microsoft.com/office/drawing/2014/main" id="{F757F8BD-E723-7E59-B49C-A84979D75FE7}"/>
+              </a:ext>
+            </a:extLst>
+          </p:cNvPr>
+          <p:cNvPicPr>
+            <a:picLocks noChangeAspect="1"/>
+          </p:cNvPicPr>
+          <p:nvPr/>
+        </p:nvPicPr>
+        <p:blipFill>
+          <a:blip r:embed="rId2"/>
+          <a:stretch>
+            <a:fillRect/>
+          </a:stretch>
+        </p:blipFill>
+        <p:spPr>
+          <a:xfrm>
+            <a:off x="316061" y="1341535"/>
+            <a:ext cx="11559878" cy="4174930"/>
+          </a:xfrm>
+          <a:prstGeom prst="rect">
+            <a:avLst/>
+          </a:prstGeom>
+        </p:spPr>
+      </p:pic>
+    </p:spTree>
+    <p:extLst>
+      <p:ext uri="{BB962C8B-B14F-4D97-AF65-F5344CB8AC3E}">
+        <p14:creationId xmlns:p14="http://schemas.microsoft.com/office/powerpoint/2010/main" val="383111777"/>
+      </p:ext>
+    </p:extLst>
+  </p:cSld>
+  <p:clrMapOvr>
+    <a:masterClrMapping/>
+  </p:clrMapOvr>
+</p:sld>
+</file>
+
+<file path=ppt/slides/slide21.xml><?xml version="1.0" encoding="utf-8"?>
+<p:sld xmlns:a="http://schemas.openxmlformats.org/drawingml/2006/main" xmlns:r="http://schemas.openxmlformats.org/officeDocument/2006/relationships" xmlns:p="http://schemas.openxmlformats.org/presentationml/2006/main">
+  <p:cSld>
+    <p:spTree>
+      <p:nvGrpSpPr>
+        <p:cNvPr id="1" name=""/>
+        <p:cNvGrpSpPr/>
+        <p:nvPr/>
+      </p:nvGrpSpPr>
+      <p:grpSpPr>
+        <a:xfrm>
+          <a:off x="0" y="0"/>
+          <a:ext cx="0" cy="0"/>
+          <a:chOff x="0" y="0"/>
+          <a:chExt cx="0" cy="0"/>
+        </a:xfrm>
+      </p:grpSpPr>
+      <p:sp>
+        <p:nvSpPr>
+          <p:cNvPr id="3" name="Content Placeholder 2">
+            <a:extLst>
+              <a:ext uri="{FF2B5EF4-FFF2-40B4-BE49-F238E27FC236}">
+                <a16:creationId xmlns:a16="http://schemas.microsoft.com/office/drawing/2014/main" id="{AC102A0B-768B-54DC-A3E0-CEC739693D4B}"/>
+              </a:ext>
+            </a:extLst>
+          </p:cNvPr>
+          <p:cNvSpPr>
+            <a:spLocks noGrp="1"/>
+          </p:cNvSpPr>
+          <p:nvPr>
+            <p:ph idx="1"/>
+          </p:nvPr>
+        </p:nvSpPr>
+        <p:spPr/>
+        <p:txBody>
+          <a:bodyPr/>
+          <a:lstStyle/>
+          <a:p>
+            <a:r>
+              <a:rPr lang="ru-RU" dirty="0"/>
+              <a:t>ЦАО впереди всех по количеству кофеен</a:t>
+            </a:r>
+            <a:endParaRPr lang="en-US" dirty="0"/>
+          </a:p>
+        </p:txBody>
+      </p:sp>
+      <p:sp>
+        <p:nvSpPr>
+          <p:cNvPr id="4" name="Title 1">
+            <a:extLst>
+              <a:ext uri="{FF2B5EF4-FFF2-40B4-BE49-F238E27FC236}">
+                <a16:creationId xmlns:a16="http://schemas.microsoft.com/office/drawing/2014/main" id="{B90A6E98-A833-44E1-2AF1-623F33C7C344}"/>
+              </a:ext>
+            </a:extLst>
+          </p:cNvPr>
+          <p:cNvSpPr>
+            <a:spLocks noGrp="1"/>
+          </p:cNvSpPr>
+          <p:nvPr>
+            <p:ph type="title"/>
+          </p:nvPr>
+        </p:nvSpPr>
+        <p:spPr>
+          <a:xfrm>
+            <a:off x="838200" y="365125"/>
+            <a:ext cx="10515600" cy="1325563"/>
+          </a:xfrm>
+        </p:spPr>
+        <p:txBody>
+          <a:bodyPr/>
+          <a:lstStyle/>
+          <a:p>
+            <a:r>
+              <a:rPr lang="ru-RU" dirty="0"/>
+              <a:t>Вывод для графика</a:t>
+            </a:r>
+            <a:endParaRPr lang="en-US" dirty="0"/>
+          </a:p>
+        </p:txBody>
+      </p:sp>
+    </p:spTree>
+    <p:extLst>
+      <p:ext uri="{BB962C8B-B14F-4D97-AF65-F5344CB8AC3E}">
+        <p14:creationId xmlns:p14="http://schemas.microsoft.com/office/powerpoint/2010/main" val="2344262252"/>
+      </p:ext>
+    </p:extLst>
+  </p:cSld>
+  <p:clrMapOvr>
+    <a:masterClrMapping/>
+  </p:clrMapOvr>
+</p:sld>
+</file>
+
+<file path=ppt/slides/slide22.xml><?xml version="1.0" encoding="utf-8"?>
+<p:sld xmlns:a="http://schemas.openxmlformats.org/drawingml/2006/main" xmlns:r="http://schemas.openxmlformats.org/officeDocument/2006/relationships" xmlns:p="http://schemas.openxmlformats.org/presentationml/2006/main">
+  <p:cSld>
+    <p:spTree>
+      <p:nvGrpSpPr>
+        <p:cNvPr id="1" name=""/>
+        <p:cNvGrpSpPr/>
+        <p:nvPr/>
+      </p:nvGrpSpPr>
+      <p:grpSpPr>
+        <a:xfrm>
+          <a:off x="0" y="0"/>
+          <a:ext cx="0" cy="0"/>
+          <a:chOff x="0" y="0"/>
+          <a:chExt cx="0" cy="0"/>
+        </a:xfrm>
+      </p:grpSpPr>
       <p:pic>
         <p:nvPicPr>
           <p:cNvPr id="5" name="Picture 4" descr="A screenshot of a graph&#10;&#10;AI-generated content may be incorrect.">
@@ -3479,7 +4891,7 @@
 </p:sld>
 </file>
 
-<file path=ppt/slides/slide11.xml><?xml version="1.0" encoding="utf-8"?>
+<file path=ppt/slides/slide23.xml><?xml version="1.0" encoding="utf-8"?>
 <p:sld xmlns:a="http://schemas.openxmlformats.org/drawingml/2006/main" xmlns:r="http://schemas.openxmlformats.org/officeDocument/2006/relationships" xmlns:p="http://schemas.openxmlformats.org/presentationml/2006/main">
   <p:cSld>
     <p:spTree>
@@ -3498,10 +4910,43 @@
       </p:grpSpPr>
       <p:sp>
         <p:nvSpPr>
-          <p:cNvPr id="2" name="Title 1">
-            <a:extLst>
-              <a:ext uri="{FF2B5EF4-FFF2-40B4-BE49-F238E27FC236}">
-                <a16:creationId xmlns:a16="http://schemas.microsoft.com/office/drawing/2014/main" id="{C5C3FE05-BBA7-ADDD-3C0A-B6DA4DFF7D75}"/>
+          <p:cNvPr id="3" name="Content Placeholder 2">
+            <a:extLst>
+              <a:ext uri="{FF2B5EF4-FFF2-40B4-BE49-F238E27FC236}">
+                <a16:creationId xmlns:a16="http://schemas.microsoft.com/office/drawing/2014/main" id="{5412A1E7-41D9-118E-2A02-9DEF5AC9CD26}"/>
+              </a:ext>
+            </a:extLst>
+          </p:cNvPr>
+          <p:cNvSpPr>
+            <a:spLocks noGrp="1"/>
+          </p:cNvSpPr>
+          <p:nvPr>
+            <p:ph idx="1"/>
+          </p:nvPr>
+        </p:nvSpPr>
+        <p:spPr/>
+        <p:txBody>
+          <a:bodyPr/>
+          <a:lstStyle/>
+          <a:p>
+            <a:r>
+              <a:rPr lang="ru-RU" dirty="0"/>
+              <a:t>Примерно 200 кофеен имеют цену капучино в 170 </a:t>
+            </a:r>
+            <a:r>
+              <a:rPr lang="ru-RU" dirty="0" err="1"/>
+              <a:t>руб</a:t>
+            </a:r>
+            <a:endParaRPr lang="en-US" dirty="0"/>
+          </a:p>
+        </p:txBody>
+      </p:sp>
+      <p:sp>
+        <p:nvSpPr>
+          <p:cNvPr id="4" name="Title 1">
+            <a:extLst>
+              <a:ext uri="{FF2B5EF4-FFF2-40B4-BE49-F238E27FC236}">
+                <a16:creationId xmlns:a16="http://schemas.microsoft.com/office/drawing/2014/main" id="{9A37EFAE-16C6-25DB-DDBF-2840E803119A}"/>
               </a:ext>
             </a:extLst>
           </p:cNvPr>
@@ -3512,67 +4957,19 @@
             <p:ph type="title"/>
           </p:nvPr>
         </p:nvSpPr>
-        <p:spPr/>
+        <p:spPr>
+          <a:xfrm>
+            <a:off x="838200" y="365125"/>
+            <a:ext cx="10515600" cy="1325563"/>
+          </a:xfrm>
+        </p:spPr>
         <p:txBody>
           <a:bodyPr/>
           <a:lstStyle/>
           <a:p>
             <a:r>
               <a:rPr lang="ru-RU" dirty="0"/>
-              <a:t>ОСНОВНЫЕ ВЫВОДЫ</a:t>
-            </a:r>
-            <a:endParaRPr lang="en-US" dirty="0"/>
-          </a:p>
-        </p:txBody>
-      </p:sp>
-      <p:sp>
-        <p:nvSpPr>
-          <p:cNvPr id="3" name="Content Placeholder 2">
-            <a:extLst>
-              <a:ext uri="{FF2B5EF4-FFF2-40B4-BE49-F238E27FC236}">
-                <a16:creationId xmlns:a16="http://schemas.microsoft.com/office/drawing/2014/main" id="{B318946C-5DE9-CF75-B402-67DC1018CC5F}"/>
-              </a:ext>
-            </a:extLst>
-          </p:cNvPr>
-          <p:cNvSpPr>
-            <a:spLocks noGrp="1"/>
-          </p:cNvSpPr>
-          <p:nvPr>
-            <p:ph idx="1"/>
-          </p:nvPr>
-        </p:nvSpPr>
-        <p:spPr/>
-        <p:txBody>
-          <a:bodyPr/>
-          <a:lstStyle/>
-          <a:p>
-            <a:r>
-              <a:rPr lang="ru-RU" dirty="0"/>
-              <a:t>1. Рынок общественного питания Москвы разнообразен и конкурентен.</a:t>
-            </a:r>
-          </a:p>
-          <a:p>
-            <a:r>
-              <a:rPr lang="ru-RU" dirty="0"/>
-              <a:t>2. Наибольшую долю занимают кафе, рестораны и кофейни.</a:t>
-            </a:r>
-          </a:p>
-          <a:p>
-            <a:r>
-              <a:rPr lang="ru-RU" dirty="0"/>
-              <a:t>3. Центральные районы имеют наибольшую концентрацию заведений.</a:t>
-            </a:r>
-          </a:p>
-          <a:p>
-            <a:r>
-              <a:rPr lang="ru-RU" dirty="0"/>
-              <a:t>4. Цены значительно варьируются в зависимости от района и категории.</a:t>
-            </a:r>
-          </a:p>
-          <a:p>
-            <a:r>
-              <a:rPr lang="ru-RU" dirty="0"/>
-              <a:t>5. Сетевые заведения составляют значительную часть рынка.</a:t>
+              <a:t>Вывод для графика</a:t>
             </a:r>
             <a:endParaRPr lang="en-US" dirty="0"/>
           </a:p>
@@ -3581,7 +4978,7 @@
     </p:spTree>
     <p:extLst>
       <p:ext uri="{BB962C8B-B14F-4D97-AF65-F5344CB8AC3E}">
-        <p14:creationId xmlns:p14="http://schemas.microsoft.com/office/powerpoint/2010/main" val="2476823012"/>
+        <p14:creationId xmlns:p14="http://schemas.microsoft.com/office/powerpoint/2010/main" val="1392304825"/>
       </p:ext>
     </p:extLst>
   </p:cSld>
@@ -3591,7 +4988,7 @@
 </p:sld>
 </file>
 
-<file path=ppt/slides/slide12.xml><?xml version="1.0" encoding="utf-8"?>
+<file path=ppt/slides/slide24.xml><?xml version="1.0" encoding="utf-8"?>
 <p:sld xmlns:a="http://schemas.openxmlformats.org/drawingml/2006/main" xmlns:r="http://schemas.openxmlformats.org/officeDocument/2006/relationships" xmlns:p="http://schemas.openxmlformats.org/presentationml/2006/main">
   <p:cSld>
     <p:spTree>
@@ -3610,10 +5007,10 @@
       </p:grpSpPr>
       <p:sp>
         <p:nvSpPr>
-          <p:cNvPr id="2" name="Title 1">
-            <a:extLst>
-              <a:ext uri="{FF2B5EF4-FFF2-40B4-BE49-F238E27FC236}">
-                <a16:creationId xmlns:a16="http://schemas.microsoft.com/office/drawing/2014/main" id="{F42B907E-BF48-8E50-35F6-5EEC58A7E1AC}"/>
+          <p:cNvPr id="4" name="Title 1">
+            <a:extLst>
+              <a:ext uri="{FF2B5EF4-FFF2-40B4-BE49-F238E27FC236}">
+                <a16:creationId xmlns:a16="http://schemas.microsoft.com/office/drawing/2014/main" id="{45261F94-C4AB-2307-4A90-C582EF93C253}"/>
               </a:ext>
             </a:extLst>
           </p:cNvPr>
@@ -3624,69 +5021,19 @@
             <p:ph type="title"/>
           </p:nvPr>
         </p:nvSpPr>
-        <p:spPr/>
+        <p:spPr>
+          <a:xfrm>
+            <a:off x="838200" y="365125"/>
+            <a:ext cx="10515600" cy="1325563"/>
+          </a:xfrm>
+        </p:spPr>
         <p:txBody>
           <a:bodyPr/>
           <a:lstStyle/>
           <a:p>
             <a:r>
               <a:rPr lang="ru-RU" dirty="0"/>
-              <a:t>РЕКОМЕНДАЦИИ ДЛЯ ИНВЕСТОРОВ</a:t>
-            </a:r>
-            <a:endParaRPr lang="en-US" dirty="0"/>
-          </a:p>
-        </p:txBody>
-      </p:sp>
-      <p:sp>
-        <p:nvSpPr>
-          <p:cNvPr id="3" name="Content Placeholder 2">
-            <a:extLst>
-              <a:ext uri="{FF2B5EF4-FFF2-40B4-BE49-F238E27FC236}">
-                <a16:creationId xmlns:a16="http://schemas.microsoft.com/office/drawing/2014/main" id="{639975A1-EE33-DB01-21EC-729CFD8B75A0}"/>
-              </a:ext>
-            </a:extLst>
-          </p:cNvPr>
-          <p:cNvSpPr>
-            <a:spLocks noGrp="1"/>
-          </p:cNvSpPr>
-          <p:nvPr>
-            <p:ph idx="1"/>
-          </p:nvPr>
-        </p:nvSpPr>
-        <p:spPr/>
-        <p:txBody>
-          <a:bodyPr>
-            <a:normAutofit lnSpcReduction="10000"/>
-          </a:bodyPr>
-          <a:lstStyle/>
-          <a:p>
-            <a:r>
-              <a:rPr lang="ru-RU" dirty="0"/>
-              <a:t>1. Для нового заведения стоит рассмотреть районы с высокой проходимостью.</a:t>
-            </a:r>
-          </a:p>
-          <a:p>
-            <a:r>
-              <a:rPr lang="ru-RU" dirty="0"/>
-              <a:t>2. При выборе категории важно учитывать локальные предпочтения.</a:t>
-            </a:r>
-          </a:p>
-          <a:p>
-            <a:r>
-              <a:rPr lang="ru-RU" dirty="0"/>
-              <a:t>3. Ценовая политика должна соответствовать району расположения.</a:t>
-            </a:r>
-          </a:p>
-          <a:p>
-            <a:r>
-              <a:rPr lang="ru-RU" dirty="0"/>
-              <a:t>4. Уникальная концепция может стать конкурентным преимуществом.</a:t>
-            </a:r>
-          </a:p>
-          <a:p>
-            <a:r>
-              <a:rPr lang="ru-RU" dirty="0"/>
-              <a:t>5. Сетевой формат имеет преимущества, но требует больше инвестиций.</a:t>
+              <a:t>ОСНОВНЫЕ ВЫВОДЫ</a:t>
             </a:r>
             <a:endParaRPr lang="en-US" dirty="0"/>
           </a:p>
@@ -3695,7 +5042,7 @@
     </p:spTree>
     <p:extLst>
       <p:ext uri="{BB962C8B-B14F-4D97-AF65-F5344CB8AC3E}">
-        <p14:creationId xmlns:p14="http://schemas.microsoft.com/office/powerpoint/2010/main" val="622617928"/>
+        <p14:creationId xmlns:p14="http://schemas.microsoft.com/office/powerpoint/2010/main" val="2482158534"/>
       </p:ext>
     </p:extLst>
   </p:cSld>
@@ -3705,7 +5052,7 @@
 </p:sld>
 </file>
 
-<file path=ppt/slides/slide13.xml><?xml version="1.0" encoding="utf-8"?>
+<file path=ppt/slides/slide25.xml><?xml version="1.0" encoding="utf-8"?>
 <p:sld xmlns:a="http://schemas.openxmlformats.org/drawingml/2006/main" xmlns:r="http://schemas.openxmlformats.org/officeDocument/2006/relationships" xmlns:p="http://schemas.openxmlformats.org/presentationml/2006/main">
   <p:cSld>
     <p:spTree>
@@ -3724,81 +5071,57 @@
       </p:grpSpPr>
       <p:sp>
         <p:nvSpPr>
-          <p:cNvPr id="2" name="Title 1">
-            <a:extLst>
-              <a:ext uri="{FF2B5EF4-FFF2-40B4-BE49-F238E27FC236}">
-                <a16:creationId xmlns:a16="http://schemas.microsoft.com/office/drawing/2014/main" id="{29534D7C-D29D-18ED-9616-8D5D26E24DB2}"/>
-              </a:ext>
-            </a:extLst>
-          </p:cNvPr>
-          <p:cNvSpPr>
-            <a:spLocks noGrp="1"/>
-          </p:cNvSpPr>
-          <p:nvPr>
-            <p:ph type="title"/>
-          </p:nvPr>
-        </p:nvSpPr>
-        <p:spPr/>
+          <p:cNvPr id="3" name="Content Placeholder 2">
+            <a:extLst>
+              <a:ext uri="{FF2B5EF4-FFF2-40B4-BE49-F238E27FC236}">
+                <a16:creationId xmlns:a16="http://schemas.microsoft.com/office/drawing/2014/main" id="{B318946C-5DE9-CF75-B402-67DC1018CC5F}"/>
+              </a:ext>
+            </a:extLst>
+          </p:cNvPr>
+          <p:cNvSpPr>
+            <a:spLocks noGrp="1"/>
+          </p:cNvSpPr>
+          <p:nvPr>
+            <p:ph idx="1"/>
+          </p:nvPr>
+        </p:nvSpPr>
+        <p:spPr>
+          <a:xfrm>
+            <a:off x="838200" y="1253331"/>
+            <a:ext cx="10515600" cy="4351338"/>
+          </a:xfrm>
+        </p:spPr>
         <p:txBody>
           <a:bodyPr/>
           <a:lstStyle/>
           <a:p>
             <a:r>
               <a:rPr lang="ru-RU" dirty="0"/>
-              <a:t>ДЛЯ ОТКРЫТИЯ КОФЕЙНИ</a:t>
-            </a:r>
-            <a:endParaRPr lang="en-US" dirty="0"/>
-          </a:p>
-        </p:txBody>
-      </p:sp>
-      <p:sp>
-        <p:nvSpPr>
-          <p:cNvPr id="3" name="Content Placeholder 2">
-            <a:extLst>
-              <a:ext uri="{FF2B5EF4-FFF2-40B4-BE49-F238E27FC236}">
-                <a16:creationId xmlns:a16="http://schemas.microsoft.com/office/drawing/2014/main" id="{6DA5A218-432A-06DF-7501-5540C07BF4A2}"/>
-              </a:ext>
-            </a:extLst>
-          </p:cNvPr>
-          <p:cNvSpPr>
-            <a:spLocks noGrp="1"/>
-          </p:cNvSpPr>
-          <p:nvPr>
-            <p:ph idx="1"/>
-          </p:nvPr>
-        </p:nvSpPr>
-        <p:spPr/>
-        <p:txBody>
-          <a:bodyPr/>
-          <a:lstStyle/>
+              <a:t>1. Рынок общественного питания Москвы разнообразен и конкурентен.</a:t>
+            </a:r>
+          </a:p>
           <a:p>
             <a:r>
               <a:rPr lang="ru-RU" dirty="0"/>
-              <a:t>1. Рассмотреть районы: Хамовники, Таганский, Басманный.</a:t>
+              <a:t>2. Наибольшую долю занимают кафе, рестораны и кофейни.</a:t>
             </a:r>
           </a:p>
           <a:p>
             <a:r>
               <a:rPr lang="ru-RU" dirty="0"/>
-              <a:t>2. Цена капучино: 250-350 рублей.</a:t>
+              <a:t>3. Центральные районы имеют наибольшую концентрацию заведений.</a:t>
             </a:r>
           </a:p>
           <a:p>
             <a:r>
               <a:rPr lang="ru-RU" dirty="0"/>
-              <a:t>3. Количество мест: 20-40.</a:t>
+              <a:t>4. Цены значительно варьируются в зависимости от района и категории.</a:t>
             </a:r>
           </a:p>
           <a:p>
             <a:r>
               <a:rPr lang="ru-RU" dirty="0"/>
-              <a:t>4. Акцент на качественный кофе и атмосферу.</a:t>
-            </a:r>
-          </a:p>
-          <a:p>
-            <a:r>
-              <a:rPr lang="ru-RU" dirty="0"/>
-              <a:t>5. Рассмотреть возможность работы допоздна или круглосуточно.</a:t>
+              <a:t>5. Сетевые заведения составляют значительную часть рынка.</a:t>
             </a:r>
             <a:endParaRPr lang="en-US" dirty="0"/>
           </a:p>
@@ -3807,7 +5130,7 @@
     </p:spTree>
     <p:extLst>
       <p:ext uri="{BB962C8B-B14F-4D97-AF65-F5344CB8AC3E}">
-        <p14:creationId xmlns:p14="http://schemas.microsoft.com/office/powerpoint/2010/main" val="1973122323"/>
+        <p14:creationId xmlns:p14="http://schemas.microsoft.com/office/powerpoint/2010/main" val="2476823012"/>
       </p:ext>
     </p:extLst>
   </p:cSld>
@@ -3817,7 +5140,7 @@
 </p:sld>
 </file>
 
-<file path=ppt/slides/slide2.xml><?xml version="1.0" encoding="utf-8"?>
+<file path=ppt/slides/slide26.xml><?xml version="1.0" encoding="utf-8"?>
 <p:sld xmlns:a="http://schemas.openxmlformats.org/drawingml/2006/main" xmlns:r="http://schemas.openxmlformats.org/officeDocument/2006/relationships" xmlns:p="http://schemas.openxmlformats.org/presentationml/2006/main">
   <p:cSld>
     <p:spTree>
@@ -3836,10 +5159,10 @@
       </p:grpSpPr>
       <p:sp>
         <p:nvSpPr>
-          <p:cNvPr id="2" name="Title 1">
-            <a:extLst>
-              <a:ext uri="{FF2B5EF4-FFF2-40B4-BE49-F238E27FC236}">
-                <a16:creationId xmlns:a16="http://schemas.microsoft.com/office/drawing/2014/main" id="{9C5F0CC4-133F-5E42-252E-38277450431A}"/>
+          <p:cNvPr id="4" name="Title 1">
+            <a:extLst>
+              <a:ext uri="{FF2B5EF4-FFF2-40B4-BE49-F238E27FC236}">
+                <a16:creationId xmlns:a16="http://schemas.microsoft.com/office/drawing/2014/main" id="{50255F9A-9FDF-0A46-828D-B6B3138407B5}"/>
               </a:ext>
             </a:extLst>
           </p:cNvPr>
@@ -3850,25 +5173,60 @@
             <p:ph type="title"/>
           </p:nvPr>
         </p:nvSpPr>
-        <p:spPr/>
+        <p:spPr>
+          <a:xfrm>
+            <a:off x="838200" y="365125"/>
+            <a:ext cx="10515600" cy="1325563"/>
+          </a:xfrm>
+        </p:spPr>
         <p:txBody>
           <a:bodyPr/>
           <a:lstStyle/>
           <a:p>
             <a:r>
               <a:rPr lang="ru-RU" dirty="0"/>
-              <a:t>КЛЮЧЕВЫЕ МЕТРИКИ</a:t>
+              <a:t>РЕКОМЕНДАЦИИ ДЛЯ ИНВЕСТОРОВ</a:t>
             </a:r>
             <a:endParaRPr lang="en-US" dirty="0"/>
           </a:p>
         </p:txBody>
       </p:sp>
+    </p:spTree>
+    <p:extLst>
+      <p:ext uri="{BB962C8B-B14F-4D97-AF65-F5344CB8AC3E}">
+        <p14:creationId xmlns:p14="http://schemas.microsoft.com/office/powerpoint/2010/main" val="1150912623"/>
+      </p:ext>
+    </p:extLst>
+  </p:cSld>
+  <p:clrMapOvr>
+    <a:masterClrMapping/>
+  </p:clrMapOvr>
+</p:sld>
+</file>
+
+<file path=ppt/slides/slide27.xml><?xml version="1.0" encoding="utf-8"?>
+<p:sld xmlns:a="http://schemas.openxmlformats.org/drawingml/2006/main" xmlns:r="http://schemas.openxmlformats.org/officeDocument/2006/relationships" xmlns:p="http://schemas.openxmlformats.org/presentationml/2006/main">
+  <p:cSld>
+    <p:spTree>
+      <p:nvGrpSpPr>
+        <p:cNvPr id="1" name=""/>
+        <p:cNvGrpSpPr/>
+        <p:nvPr/>
+      </p:nvGrpSpPr>
+      <p:grpSpPr>
+        <a:xfrm>
+          <a:off x="0" y="0"/>
+          <a:ext cx="0" cy="0"/>
+          <a:chOff x="0" y="0"/>
+          <a:chExt cx="0" cy="0"/>
+        </a:xfrm>
+      </p:grpSpPr>
       <p:sp>
         <p:nvSpPr>
           <p:cNvPr id="3" name="Content Placeholder 2">
             <a:extLst>
               <a:ext uri="{FF2B5EF4-FFF2-40B4-BE49-F238E27FC236}">
-                <a16:creationId xmlns:a16="http://schemas.microsoft.com/office/drawing/2014/main" id="{720CE304-5A65-A9BA-5444-B7F449C1CA94}"/>
+                <a16:creationId xmlns:a16="http://schemas.microsoft.com/office/drawing/2014/main" id="{639975A1-EE33-DB01-21EC-729CFD8B75A0}"/>
               </a:ext>
             </a:extLst>
           </p:cNvPr>
@@ -3888,53 +5246,32 @@
           <a:p>
             <a:r>
               <a:rPr lang="ru-RU" dirty="0"/>
-              <a:t>Общее количество заведений: 8406</a:t>
+              <a:t>1. Для нового заведения стоит рассмотреть районы с высокой проходимостью.</a:t>
             </a:r>
           </a:p>
           <a:p>
             <a:r>
               <a:rPr lang="ru-RU" dirty="0"/>
-              <a:t>Количество категорий: 8</a:t>
+              <a:t>2. При выборе категории важно учитывать локальные предпочтения.</a:t>
             </a:r>
           </a:p>
           <a:p>
             <a:r>
               <a:rPr lang="ru-RU" dirty="0"/>
-              <a:t>Количество районов: 9</a:t>
+              <a:t>3. Ценовая политика должна соответствовать району расположения.</a:t>
             </a:r>
           </a:p>
           <a:p>
             <a:r>
               <a:rPr lang="ru-RU" dirty="0"/>
-              <a:t>Доля сетевых заведений: 38.1%</a:t>
+              <a:t>4. Уникальная концепция может стать конкурентным преимуществом.</a:t>
             </a:r>
           </a:p>
           <a:p>
             <a:r>
               <a:rPr lang="ru-RU" dirty="0"/>
-              <a:t>Средний рейтинг: 4.23</a:t>
-            </a:r>
-          </a:p>
-          <a:p>
-            <a:r>
-              <a:rPr lang="ru-RU" dirty="0"/>
-              <a:t>Количество кофеен: 1413</a:t>
-            </a:r>
-          </a:p>
-          <a:p>
-            <a:r>
-              <a:rPr lang="ru-RU" dirty="0"/>
-              <a:t>Доля круглосуточных заведений: 13.5%</a:t>
-            </a:r>
-          </a:p>
-          <a:p>
-            <a:r>
-              <a:rPr lang="ru-RU" dirty="0"/>
-              <a:t>Среднее количество мест: 108 </a:t>
-            </a:r>
-            <a:br>
-              <a:rPr lang="ru-RU" dirty="0"/>
-            </a:br>
+              <a:t>5. Сетевой формат имеет преимущества, но требует больше инвестиций.</a:t>
+            </a:r>
             <a:endParaRPr lang="en-US" dirty="0"/>
           </a:p>
         </p:txBody>
@@ -3942,7 +5279,119 @@
     </p:spTree>
     <p:extLst>
       <p:ext uri="{BB962C8B-B14F-4D97-AF65-F5344CB8AC3E}">
-        <p14:creationId xmlns:p14="http://schemas.microsoft.com/office/powerpoint/2010/main" val="4127898922"/>
+        <p14:creationId xmlns:p14="http://schemas.microsoft.com/office/powerpoint/2010/main" val="622617928"/>
+      </p:ext>
+    </p:extLst>
+  </p:cSld>
+  <p:clrMapOvr>
+    <a:masterClrMapping/>
+  </p:clrMapOvr>
+</p:sld>
+</file>
+
+<file path=ppt/slides/slide28.xml><?xml version="1.0" encoding="utf-8"?>
+<p:sld xmlns:a="http://schemas.openxmlformats.org/drawingml/2006/main" xmlns:r="http://schemas.openxmlformats.org/officeDocument/2006/relationships" xmlns:p="http://schemas.openxmlformats.org/presentationml/2006/main">
+  <p:cSld>
+    <p:spTree>
+      <p:nvGrpSpPr>
+        <p:cNvPr id="1" name=""/>
+        <p:cNvGrpSpPr/>
+        <p:nvPr/>
+      </p:nvGrpSpPr>
+      <p:grpSpPr>
+        <a:xfrm>
+          <a:off x="0" y="0"/>
+          <a:ext cx="0" cy="0"/>
+          <a:chOff x="0" y="0"/>
+          <a:chExt cx="0" cy="0"/>
+        </a:xfrm>
+      </p:grpSpPr>
+      <p:sp>
+        <p:nvSpPr>
+          <p:cNvPr id="2" name="Title 1">
+            <a:extLst>
+              <a:ext uri="{FF2B5EF4-FFF2-40B4-BE49-F238E27FC236}">
+                <a16:creationId xmlns:a16="http://schemas.microsoft.com/office/drawing/2014/main" id="{29534D7C-D29D-18ED-9616-8D5D26E24DB2}"/>
+              </a:ext>
+            </a:extLst>
+          </p:cNvPr>
+          <p:cNvSpPr>
+            <a:spLocks noGrp="1"/>
+          </p:cNvSpPr>
+          <p:nvPr>
+            <p:ph type="title"/>
+          </p:nvPr>
+        </p:nvSpPr>
+        <p:spPr/>
+        <p:txBody>
+          <a:bodyPr/>
+          <a:lstStyle/>
+          <a:p>
+            <a:r>
+              <a:rPr lang="ru-RU" dirty="0"/>
+              <a:t>ДЛЯ ОТКРЫТИЯ КОФЕЙНИ</a:t>
+            </a:r>
+            <a:endParaRPr lang="en-US" dirty="0"/>
+          </a:p>
+        </p:txBody>
+      </p:sp>
+      <p:sp>
+        <p:nvSpPr>
+          <p:cNvPr id="3" name="Content Placeholder 2">
+            <a:extLst>
+              <a:ext uri="{FF2B5EF4-FFF2-40B4-BE49-F238E27FC236}">
+                <a16:creationId xmlns:a16="http://schemas.microsoft.com/office/drawing/2014/main" id="{6DA5A218-432A-06DF-7501-5540C07BF4A2}"/>
+              </a:ext>
+            </a:extLst>
+          </p:cNvPr>
+          <p:cNvSpPr>
+            <a:spLocks noGrp="1"/>
+          </p:cNvSpPr>
+          <p:nvPr>
+            <p:ph idx="1"/>
+          </p:nvPr>
+        </p:nvSpPr>
+        <p:spPr/>
+        <p:txBody>
+          <a:bodyPr/>
+          <a:lstStyle/>
+          <a:p>
+            <a:r>
+              <a:rPr lang="ru-RU" dirty="0"/>
+              <a:t>1. Рассмотреть районы: Хамовники, Таганский, Басманный.</a:t>
+            </a:r>
+          </a:p>
+          <a:p>
+            <a:r>
+              <a:rPr lang="ru-RU" dirty="0"/>
+              <a:t>2. Цена капучино: 250-350 рублей.</a:t>
+            </a:r>
+          </a:p>
+          <a:p>
+            <a:r>
+              <a:rPr lang="ru-RU" dirty="0"/>
+              <a:t>3. Количество мест: 20-40.</a:t>
+            </a:r>
+          </a:p>
+          <a:p>
+            <a:r>
+              <a:rPr lang="ru-RU" dirty="0"/>
+              <a:t>4. Акцент на качественный кофе и атмосферу.</a:t>
+            </a:r>
+          </a:p>
+          <a:p>
+            <a:r>
+              <a:rPr lang="ru-RU" dirty="0"/>
+              <a:t>5. Рассмотреть возможность работы допоздна или круглосуточно.</a:t>
+            </a:r>
+            <a:endParaRPr lang="en-US" dirty="0"/>
+          </a:p>
+        </p:txBody>
+      </p:sp>
+    </p:spTree>
+    <p:extLst>
+      <p:ext uri="{BB962C8B-B14F-4D97-AF65-F5344CB8AC3E}">
+        <p14:creationId xmlns:p14="http://schemas.microsoft.com/office/powerpoint/2010/main" val="1973122323"/>
       </p:ext>
     </p:extLst>
   </p:cSld>
@@ -3974,7 +5423,7 @@
           <p:cNvPr id="2" name="Title 1">
             <a:extLst>
               <a:ext uri="{FF2B5EF4-FFF2-40B4-BE49-F238E27FC236}">
-                <a16:creationId xmlns:a16="http://schemas.microsoft.com/office/drawing/2014/main" id="{522F646E-33BD-04F3-8837-579188A6B518}"/>
+                <a16:creationId xmlns:a16="http://schemas.microsoft.com/office/drawing/2014/main" id="{99F575B1-F1D0-D1AD-DDDE-0CFC55D5CFA0}"/>
               </a:ext>
             </a:extLst>
           </p:cNvPr>
@@ -3991,8 +5440,16 @@
           <a:lstStyle/>
           <a:p>
             <a:r>
-              <a:rPr lang="ru-RU" dirty="0"/>
-              <a:t>ТОП-5 КАТЕГОРИЙ</a:t>
+              <a:rPr lang="en-US" dirty="0" err="1"/>
+              <a:t>Цель</a:t>
+            </a:r>
+            <a:r>
+              <a:rPr lang="en-US" dirty="0"/>
+              <a:t> </a:t>
+            </a:r>
+            <a:r>
+              <a:rPr lang="en-US" dirty="0" err="1"/>
+              <a:t>проекта</a:t>
             </a:r>
             <a:endParaRPr lang="en-US" dirty="0"/>
           </a:p>
@@ -4003,7 +5460,7 @@
           <p:cNvPr id="3" name="Content Placeholder 2">
             <a:extLst>
               <a:ext uri="{FF2B5EF4-FFF2-40B4-BE49-F238E27FC236}">
-                <a16:creationId xmlns:a16="http://schemas.microsoft.com/office/drawing/2014/main" id="{6A7513FC-4206-D33B-53FE-7DE2D12A4A96}"/>
+                <a16:creationId xmlns:a16="http://schemas.microsoft.com/office/drawing/2014/main" id="{36C55779-7DFB-3F86-52BE-2D9667ADED0B}"/>
               </a:ext>
             </a:extLst>
           </p:cNvPr>
@@ -4020,49 +5477,164 @@
           <a:lstStyle/>
           <a:p>
             <a:r>
-              <a:rPr lang="ru-RU" dirty="0"/>
-              <a:t>1. кафе: 2378 заведений (28.3%)</a:t>
-            </a:r>
-          </a:p>
-          <a:p>
-            <a:r>
-              <a:rPr lang="ru-RU" dirty="0"/>
-              <a:t>2. ресторан: 2043 заведений (24.3%)</a:t>
-            </a:r>
-          </a:p>
-          <a:p>
-            <a:r>
-              <a:rPr lang="ru-RU" dirty="0"/>
-              <a:t>3. кофейня: 1413 заведений (16.8%)</a:t>
-            </a:r>
-          </a:p>
-          <a:p>
-            <a:r>
-              <a:rPr lang="ru-RU" dirty="0"/>
-              <a:t>4. </a:t>
-            </a:r>
-            <a:r>
-              <a:rPr lang="ru-RU" dirty="0" err="1"/>
-              <a:t>бар,паб</a:t>
-            </a:r>
-            <a:r>
-              <a:rPr lang="ru-RU" dirty="0"/>
-              <a:t>: 765 заведений (9.1%)</a:t>
-            </a:r>
-          </a:p>
-          <a:p>
-            <a:r>
-              <a:rPr lang="ru-RU" dirty="0"/>
-              <a:t>5. пиццерия: 633 заведений (7.5%) </a:t>
-            </a:r>
-            <a:endParaRPr lang="en-US" dirty="0"/>
+              <a:rPr lang="en-US" dirty="0" err="1"/>
+              <a:t>Провести</a:t>
+            </a:r>
+            <a:r>
+              <a:rPr lang="en-US" dirty="0"/>
+              <a:t> </a:t>
+            </a:r>
+            <a:r>
+              <a:rPr lang="en-US" dirty="0" err="1"/>
+              <a:t>комплексный</a:t>
+            </a:r>
+            <a:r>
+              <a:rPr lang="en-US" dirty="0"/>
+              <a:t> </a:t>
+            </a:r>
+            <a:r>
+              <a:rPr lang="en-US" dirty="0" err="1"/>
+              <a:t>анализ</a:t>
+            </a:r>
+            <a:r>
+              <a:rPr lang="en-US" dirty="0"/>
+              <a:t> </a:t>
+            </a:r>
+            <a:r>
+              <a:rPr lang="en-US" dirty="0" err="1"/>
+              <a:t>рынка</a:t>
+            </a:r>
+            <a:r>
+              <a:rPr lang="en-US" dirty="0"/>
+              <a:t> </a:t>
+            </a:r>
+            <a:r>
+              <a:rPr lang="en-US" dirty="0" err="1"/>
+              <a:t>общественного</a:t>
+            </a:r>
+            <a:r>
+              <a:rPr lang="en-US" dirty="0"/>
+              <a:t> </a:t>
+            </a:r>
+            <a:r>
+              <a:rPr lang="en-US" dirty="0" err="1"/>
+              <a:t>питания</a:t>
+            </a:r>
+            <a:r>
+              <a:rPr lang="en-US" dirty="0"/>
+              <a:t> </a:t>
+            </a:r>
+            <a:r>
+              <a:rPr lang="en-US" dirty="0" err="1"/>
+              <a:t>Москвы</a:t>
+            </a:r>
+            <a:r>
+              <a:rPr lang="en-US" dirty="0"/>
+              <a:t> </a:t>
+            </a:r>
+            <a:r>
+              <a:rPr lang="en-US" dirty="0" err="1"/>
+              <a:t>для</a:t>
+            </a:r>
+            <a:r>
+              <a:rPr lang="en-US" dirty="0"/>
+              <a:t> </a:t>
+            </a:r>
+            <a:r>
+              <a:rPr lang="en-US" dirty="0" err="1"/>
+              <a:t>разработки</a:t>
+            </a:r>
+            <a:r>
+              <a:rPr lang="en-US" dirty="0"/>
+              <a:t> </a:t>
+            </a:r>
+            <a:r>
+              <a:rPr lang="en-US" dirty="0" err="1"/>
+              <a:t>обоснованных</a:t>
+            </a:r>
+            <a:r>
+              <a:rPr lang="en-US" dirty="0"/>
+              <a:t> </a:t>
+            </a:r>
+            <a:r>
+              <a:rPr lang="en-US" dirty="0" err="1"/>
+              <a:t>рекомендаций</a:t>
+            </a:r>
+            <a:r>
+              <a:rPr lang="en-US" dirty="0"/>
+              <a:t> </a:t>
+            </a:r>
+            <a:r>
+              <a:rPr lang="en-US" dirty="0" err="1"/>
+              <a:t>по</a:t>
+            </a:r>
+            <a:r>
+              <a:rPr lang="en-US" dirty="0"/>
+              <a:t> </a:t>
+            </a:r>
+            <a:r>
+              <a:rPr lang="en-US" dirty="0" err="1"/>
+              <a:t>открытию</a:t>
+            </a:r>
+            <a:r>
+              <a:rPr lang="en-US" dirty="0"/>
+              <a:t> </a:t>
+            </a:r>
+            <a:r>
+              <a:rPr lang="en-US" dirty="0" err="1"/>
+              <a:t>нового</a:t>
+            </a:r>
+            <a:r>
+              <a:rPr lang="en-US" dirty="0"/>
+              <a:t> </a:t>
+            </a:r>
+            <a:r>
+              <a:rPr lang="en-US" dirty="0" err="1"/>
+              <a:t>заведения</a:t>
+            </a:r>
+            <a:r>
+              <a:rPr lang="en-US" dirty="0"/>
+              <a:t>, </a:t>
+            </a:r>
+            <a:r>
+              <a:rPr lang="en-US" dirty="0" err="1"/>
+              <a:t>соответствующего</a:t>
+            </a:r>
+            <a:r>
+              <a:rPr lang="en-US" dirty="0"/>
+              <a:t> </a:t>
+            </a:r>
+            <a:r>
+              <a:rPr lang="en-US" dirty="0" err="1"/>
+              <a:t>требованиям</a:t>
+            </a:r>
+            <a:r>
+              <a:rPr lang="en-US" dirty="0"/>
+              <a:t> </a:t>
+            </a:r>
+            <a:r>
+              <a:rPr lang="en-US" dirty="0" err="1"/>
+              <a:t>инвесторов</a:t>
+            </a:r>
+            <a:r>
+              <a:rPr lang="en-US" dirty="0"/>
+              <a:t> </a:t>
+            </a:r>
+            <a:r>
+              <a:rPr lang="en-US" dirty="0" err="1"/>
+              <a:t>фонда</a:t>
+            </a:r>
+            <a:r>
+              <a:rPr lang="en-US" dirty="0"/>
+              <a:t> «Shut Up and Take My Money»</a:t>
+            </a:r>
           </a:p>
         </p:txBody>
       </p:sp>
     </p:spTree>
     <p:extLst>
       <p:ext uri="{BB962C8B-B14F-4D97-AF65-F5344CB8AC3E}">
-        <p14:creationId xmlns:p14="http://schemas.microsoft.com/office/powerpoint/2010/main" val="3415080444"/>
+        <p14:creationId xmlns:p14="http://schemas.microsoft.com/office/powerpoint/2010/main" val="1367698946"/>
       </p:ext>
     </p:extLst>
   </p:cSld>
@@ -4094,7 +5666,7 @@
           <p:cNvPr id="2" name="Title 1">
             <a:extLst>
               <a:ext uri="{FF2B5EF4-FFF2-40B4-BE49-F238E27FC236}">
-                <a16:creationId xmlns:a16="http://schemas.microsoft.com/office/drawing/2014/main" id="{72D3B505-7998-DB26-3D32-2A4205F63F98}"/>
+                <a16:creationId xmlns:a16="http://schemas.microsoft.com/office/drawing/2014/main" id="{C7400B65-49BA-89FB-B25D-CD20F9A6FC2E}"/>
               </a:ext>
             </a:extLst>
           </p:cNvPr>
@@ -4111,61 +5683,24 @@
           <a:lstStyle/>
           <a:p>
             <a:r>
-              <a:rPr lang="ru-RU" dirty="0"/>
-              <a:t>ТОП-5 РАЙОНОВ</a:t>
-            </a:r>
-            <a:endParaRPr lang="en-US" dirty="0"/>
-          </a:p>
-        </p:txBody>
-      </p:sp>
-      <p:sp>
-        <p:nvSpPr>
-          <p:cNvPr id="3" name="Content Placeholder 2">
-            <a:extLst>
-              <a:ext uri="{FF2B5EF4-FFF2-40B4-BE49-F238E27FC236}">
-                <a16:creationId xmlns:a16="http://schemas.microsoft.com/office/drawing/2014/main" id="{31E886C4-680E-2F6E-6918-86D8EDBCCB34}"/>
-              </a:ext>
-            </a:extLst>
-          </p:cNvPr>
-          <p:cNvSpPr>
-            <a:spLocks noGrp="1"/>
-          </p:cNvSpPr>
-          <p:nvPr>
-            <p:ph idx="1"/>
-          </p:nvPr>
-        </p:nvSpPr>
-        <p:spPr/>
-        <p:txBody>
-          <a:bodyPr/>
-          <a:lstStyle/>
-          <a:p>
-            <a:r>
-              <a:rPr lang="ru-RU" dirty="0"/>
-              <a:t>1. Центральный административный округ: 2242</a:t>
-            </a:r>
-          </a:p>
-          <a:p>
-            <a:r>
-              <a:rPr lang="ru-RU" dirty="0"/>
-              <a:t>заведений 2. Северный административный округ: 900 заведений</a:t>
-            </a:r>
-          </a:p>
-          <a:p>
-            <a:r>
-              <a:rPr lang="ru-RU" dirty="0"/>
-              <a:t>3. Южный административный округ: 892 заведений</a:t>
-            </a:r>
-          </a:p>
-          <a:p>
-            <a:r>
-              <a:rPr lang="ru-RU" dirty="0"/>
-              <a:t>4. Северо-Восточный административный округ: 891 заведений</a:t>
-            </a:r>
-          </a:p>
-          <a:p>
-            <a:r>
-              <a:rPr lang="ru-RU" dirty="0"/>
-              <a:t>5. Западный административный округ: 851 заведений</a:t>
+              <a:rPr lang="en-US" dirty="0" err="1"/>
+              <a:t>Ключевые</a:t>
+            </a:r>
+            <a:r>
+              <a:rPr lang="en-US" dirty="0"/>
+              <a:t> </a:t>
+            </a:r>
+            <a:r>
+              <a:rPr lang="en-US" dirty="0" err="1"/>
+              <a:t>задачи</a:t>
+            </a:r>
+            <a:r>
+              <a:rPr lang="en-US" dirty="0"/>
+              <a:t> </a:t>
+            </a:r>
+            <a:r>
+              <a:rPr lang="en-US" dirty="0" err="1"/>
+              <a:t>исследования</a:t>
             </a:r>
             <a:endParaRPr lang="en-US" dirty="0"/>
           </a:p>
@@ -4174,7 +5709,7 @@
     </p:spTree>
     <p:extLst>
       <p:ext uri="{BB962C8B-B14F-4D97-AF65-F5344CB8AC3E}">
-        <p14:creationId xmlns:p14="http://schemas.microsoft.com/office/powerpoint/2010/main" val="2581424752"/>
+        <p14:creationId xmlns:p14="http://schemas.microsoft.com/office/powerpoint/2010/main" val="3280353371"/>
       </p:ext>
     </p:extLst>
   </p:cSld>
@@ -4203,18 +5738,18 @@
       </p:grpSpPr>
       <p:sp>
         <p:nvSpPr>
-          <p:cNvPr id="2" name="Title 1">
-            <a:extLst>
-              <a:ext uri="{FF2B5EF4-FFF2-40B4-BE49-F238E27FC236}">
-                <a16:creationId xmlns:a16="http://schemas.microsoft.com/office/drawing/2014/main" id="{7C783312-079B-DB28-3CC9-491CAA272E3C}"/>
-              </a:ext>
-            </a:extLst>
-          </p:cNvPr>
-          <p:cNvSpPr>
-            <a:spLocks noGrp="1"/>
-          </p:cNvSpPr>
-          <p:nvPr>
-            <p:ph type="title"/>
+          <p:cNvPr id="3" name="Content Placeholder 2">
+            <a:extLst>
+              <a:ext uri="{FF2B5EF4-FFF2-40B4-BE49-F238E27FC236}">
+                <a16:creationId xmlns:a16="http://schemas.microsoft.com/office/drawing/2014/main" id="{B352F3F1-BD6A-AEAC-964F-B2E35212C855}"/>
+              </a:ext>
+            </a:extLst>
+          </p:cNvPr>
+          <p:cNvSpPr>
+            <a:spLocks noGrp="1"/>
+          </p:cNvSpPr>
+          <p:nvPr>
+            <p:ph idx="1"/>
           </p:nvPr>
         </p:nvSpPr>
         <p:spPr/>
@@ -4222,66 +5757,169 @@
           <a:bodyPr/>
           <a:lstStyle/>
           <a:p>
-            <a:r>
-              <a:rPr lang="ru-RU" dirty="0"/>
-              <a:t>АНАЛИЗ ДЛЯ КОФЕЕН</a:t>
+            <a:pPr marL="0" indent="0">
+              <a:buNone/>
+            </a:pPr>
+            <a:r>
+              <a:rPr lang="en-US" dirty="0"/>
+              <a:t>1. </a:t>
+            </a:r>
+            <a:r>
+              <a:rPr lang="en-US" dirty="0" err="1"/>
+              <a:t>Анализ</a:t>
+            </a:r>
+            <a:r>
+              <a:rPr lang="en-US" dirty="0"/>
+              <a:t> </a:t>
+            </a:r>
+            <a:r>
+              <a:rPr lang="en-US" dirty="0" err="1"/>
+              <a:t>общего</a:t>
+            </a:r>
+            <a:r>
+              <a:rPr lang="en-US" dirty="0"/>
+              <a:t> </a:t>
+            </a:r>
+            <a:r>
+              <a:rPr lang="en-US" dirty="0" err="1"/>
+              <a:t>состояния</a:t>
+            </a:r>
+            <a:r>
+              <a:rPr lang="en-US" dirty="0"/>
+              <a:t> </a:t>
+            </a:r>
+            <a:r>
+              <a:rPr lang="en-US" dirty="0" err="1"/>
+              <a:t>рынка</a:t>
             </a:r>
             <a:endParaRPr lang="en-US" dirty="0"/>
           </a:p>
-        </p:txBody>
-      </p:sp>
-      <p:sp>
-        <p:nvSpPr>
-          <p:cNvPr id="3" name="Content Placeholder 2">
-            <a:extLst>
-              <a:ext uri="{FF2B5EF4-FFF2-40B4-BE49-F238E27FC236}">
-                <a16:creationId xmlns:a16="http://schemas.microsoft.com/office/drawing/2014/main" id="{A49E6497-4A9C-DAE8-9C84-297DF3003440}"/>
-              </a:ext>
-            </a:extLst>
-          </p:cNvPr>
-          <p:cNvSpPr>
-            <a:spLocks noGrp="1"/>
-          </p:cNvSpPr>
-          <p:nvPr>
-            <p:ph idx="1"/>
-          </p:nvPr>
-        </p:nvSpPr>
-        <p:spPr/>
-        <p:txBody>
-          <a:bodyPr/>
-          <a:lstStyle/>
-          <a:p>
-            <a:r>
-              <a:rPr lang="ru-RU" dirty="0"/>
-              <a:t>Средняя цена капучино: 175 </a:t>
-            </a:r>
-            <a:r>
-              <a:rPr lang="en-US" dirty="0"/>
-              <a:t>₽</a:t>
-            </a:r>
-            <a:endParaRPr lang="ru-RU" dirty="0"/>
-          </a:p>
-          <a:p>
-            <a:r>
-              <a:rPr lang="ru-RU" dirty="0"/>
-              <a:t>Медианная цена капучино: 170 </a:t>
-            </a:r>
-            <a:r>
-              <a:rPr lang="en-US" dirty="0"/>
-              <a:t>₽</a:t>
-            </a:r>
-            <a:endParaRPr lang="ru-RU" dirty="0"/>
-          </a:p>
-          <a:p>
-            <a:r>
-              <a:rPr lang="ru-RU" dirty="0"/>
-              <a:t>Средний рейтинг кофеен: 4.28</a:t>
-            </a:r>
-          </a:p>
-          <a:p>
-            <a:r>
-              <a:rPr lang="ru-RU" dirty="0"/>
-              <a:t>Доля сетевых кофеен: 51.0%</a:t>
+          <a:p>
+            <a:r>
+              <a:rPr lang="en-US" dirty="0"/>
+              <a:t>- </a:t>
+            </a:r>
+            <a:r>
+              <a:rPr lang="en-US" dirty="0" err="1"/>
+              <a:t>Изучить</a:t>
+            </a:r>
+            <a:r>
+              <a:rPr lang="en-US" dirty="0"/>
+              <a:t> </a:t>
+            </a:r>
+            <a:r>
+              <a:rPr lang="en-US" dirty="0" err="1"/>
+              <a:t>структуру</a:t>
+            </a:r>
+            <a:r>
+              <a:rPr lang="en-US" dirty="0"/>
+              <a:t> </a:t>
+            </a:r>
+            <a:r>
+              <a:rPr lang="en-US" dirty="0" err="1"/>
+              <a:t>рынка</a:t>
+            </a:r>
+            <a:r>
+              <a:rPr lang="en-US" dirty="0"/>
+              <a:t> </a:t>
+            </a:r>
+            <a:r>
+              <a:rPr lang="en-US" dirty="0" err="1"/>
+              <a:t>по</a:t>
+            </a:r>
+            <a:r>
+              <a:rPr lang="en-US" dirty="0"/>
+              <a:t> </a:t>
+            </a:r>
+            <a:r>
+              <a:rPr lang="en-US" dirty="0" err="1"/>
+              <a:t>категориям</a:t>
+            </a:r>
+            <a:r>
+              <a:rPr lang="en-US" dirty="0"/>
+              <a:t> </a:t>
+            </a:r>
+            <a:r>
+              <a:rPr lang="en-US" dirty="0" err="1"/>
+              <a:t>заведений</a:t>
+            </a:r>
+            <a:endParaRPr lang="en-US" dirty="0"/>
+          </a:p>
+          <a:p>
+            <a:r>
+              <a:rPr lang="en-US" dirty="0"/>
+              <a:t>- </a:t>
+            </a:r>
+            <a:r>
+              <a:rPr lang="en-US" dirty="0" err="1"/>
+              <a:t>Проанализировать</a:t>
+            </a:r>
+            <a:r>
+              <a:rPr lang="en-US" dirty="0"/>
+              <a:t> </a:t>
+            </a:r>
+            <a:r>
+              <a:rPr lang="en-US" dirty="0" err="1"/>
+              <a:t>географическое</a:t>
+            </a:r>
+            <a:r>
+              <a:rPr lang="en-US" dirty="0"/>
+              <a:t> </a:t>
+            </a:r>
+            <a:r>
+              <a:rPr lang="en-US" dirty="0" err="1"/>
+              <a:t>распределение</a:t>
+            </a:r>
+            <a:endParaRPr lang="en-US" dirty="0"/>
+          </a:p>
+          <a:p>
+            <a:r>
+              <a:rPr lang="en-US" dirty="0"/>
+              <a:t>- </a:t>
+            </a:r>
+            <a:r>
+              <a:rPr lang="en-US" dirty="0" err="1"/>
+              <a:t>Определить</a:t>
+            </a:r>
+            <a:r>
+              <a:rPr lang="en-US" dirty="0"/>
+              <a:t> </a:t>
+            </a:r>
+            <a:r>
+              <a:rPr lang="en-US" dirty="0" err="1"/>
+              <a:t>уровень</a:t>
+            </a:r>
+            <a:r>
+              <a:rPr lang="en-US" dirty="0"/>
+              <a:t> </a:t>
+            </a:r>
+            <a:r>
+              <a:rPr lang="en-US" dirty="0" err="1"/>
+              <a:t>конкуренции</a:t>
+            </a:r>
+            <a:r>
+              <a:rPr lang="en-US" dirty="0"/>
+              <a:t> </a:t>
+            </a:r>
+            <a:r>
+              <a:rPr lang="en-US" dirty="0" err="1"/>
+              <a:t>в</a:t>
+            </a:r>
+            <a:r>
+              <a:rPr lang="en-US" dirty="0"/>
+              <a:t> </a:t>
+            </a:r>
+            <a:r>
+              <a:rPr lang="en-US" dirty="0" err="1"/>
+              <a:t>разных</a:t>
+            </a:r>
+            <a:r>
+              <a:rPr lang="en-US" dirty="0"/>
+              <a:t> </a:t>
+            </a:r>
+            <a:r>
+              <a:rPr lang="en-US" dirty="0" err="1"/>
+              <a:t>сегментах</a:t>
             </a:r>
             <a:endParaRPr lang="en-US" dirty="0"/>
           </a:p>
@@ -4290,7 +5928,7 @@
     </p:spTree>
     <p:extLst>
       <p:ext uri="{BB962C8B-B14F-4D97-AF65-F5344CB8AC3E}">
-        <p14:creationId xmlns:p14="http://schemas.microsoft.com/office/powerpoint/2010/main" val="1293604767"/>
+        <p14:creationId xmlns:p14="http://schemas.microsoft.com/office/powerpoint/2010/main" val="2873792181"/>
       </p:ext>
     </p:extLst>
   </p:cSld>
@@ -4317,40 +5955,183 @@
           <a:chExt cx="0" cy="0"/>
         </a:xfrm>
       </p:grpSpPr>
-      <p:pic>
-        <p:nvPicPr>
-          <p:cNvPr id="4" name="Picture 3">
-            <a:extLst>
-              <a:ext uri="{FF2B5EF4-FFF2-40B4-BE49-F238E27FC236}">
-                <a16:creationId xmlns:a16="http://schemas.microsoft.com/office/drawing/2014/main" id="{D200E814-FCA0-8A68-AD3B-F872736EE9D4}"/>
-              </a:ext>
-            </a:extLst>
-          </p:cNvPr>
-          <p:cNvPicPr>
-            <a:picLocks noChangeAspect="1"/>
-          </p:cNvPicPr>
-          <p:nvPr/>
-        </p:nvPicPr>
-        <p:blipFill>
-          <a:blip r:embed="rId2"/>
-          <a:stretch>
-            <a:fillRect/>
-          </a:stretch>
-        </p:blipFill>
-        <p:spPr>
-          <a:xfrm>
-            <a:off x="139261" y="1038831"/>
-            <a:ext cx="11789403" cy="4668286"/>
-          </a:xfrm>
-          <a:prstGeom prst="rect">
-            <a:avLst/>
-          </a:prstGeom>
-        </p:spPr>
-      </p:pic>
+      <p:sp>
+        <p:nvSpPr>
+          <p:cNvPr id="3" name="Content Placeholder 2">
+            <a:extLst>
+              <a:ext uri="{FF2B5EF4-FFF2-40B4-BE49-F238E27FC236}">
+                <a16:creationId xmlns:a16="http://schemas.microsoft.com/office/drawing/2014/main" id="{A67545FB-4F22-1FDB-6DDE-F9D2152323B5}"/>
+              </a:ext>
+            </a:extLst>
+          </p:cNvPr>
+          <p:cNvSpPr>
+            <a:spLocks noGrp="1"/>
+          </p:cNvSpPr>
+          <p:nvPr>
+            <p:ph idx="1"/>
+          </p:nvPr>
+        </p:nvSpPr>
+        <p:spPr/>
+        <p:txBody>
+          <a:bodyPr/>
+          <a:lstStyle/>
+          <a:p>
+            <a:pPr marL="0" indent="0">
+              <a:buNone/>
+            </a:pPr>
+            <a:r>
+              <a:rPr lang="en-US" dirty="0"/>
+              <a:t>2. </a:t>
+            </a:r>
+            <a:r>
+              <a:rPr lang="en-US" dirty="0" err="1"/>
+              <a:t>Исследование</a:t>
+            </a:r>
+            <a:r>
+              <a:rPr lang="en-US" dirty="0"/>
+              <a:t> </a:t>
+            </a:r>
+            <a:r>
+              <a:rPr lang="en-US" dirty="0" err="1"/>
+              <a:t>ценовой</a:t>
+            </a:r>
+            <a:r>
+              <a:rPr lang="en-US" dirty="0"/>
+              <a:t> </a:t>
+            </a:r>
+            <a:r>
+              <a:rPr lang="en-US" dirty="0" err="1"/>
+              <a:t>политики</a:t>
+            </a:r>
+            <a:endParaRPr lang="en-US" dirty="0"/>
+          </a:p>
+          <a:p>
+            <a:r>
+              <a:rPr lang="en-US" dirty="0"/>
+              <a:t>- </a:t>
+            </a:r>
+            <a:r>
+              <a:rPr lang="en-US" dirty="0" err="1"/>
+              <a:t>Проанализировать</a:t>
+            </a:r>
+            <a:r>
+              <a:rPr lang="en-US" dirty="0"/>
+              <a:t> </a:t>
+            </a:r>
+            <a:r>
+              <a:rPr lang="en-US" dirty="0" err="1"/>
+              <a:t>средние</a:t>
+            </a:r>
+            <a:r>
+              <a:rPr lang="en-US" dirty="0"/>
+              <a:t> </a:t>
+            </a:r>
+            <a:r>
+              <a:rPr lang="en-US" dirty="0" err="1"/>
+              <a:t>чеки</a:t>
+            </a:r>
+            <a:r>
+              <a:rPr lang="en-US" dirty="0"/>
+              <a:t> </a:t>
+            </a:r>
+            <a:r>
+              <a:rPr lang="en-US" dirty="0" err="1"/>
+              <a:t>по</a:t>
+            </a:r>
+            <a:r>
+              <a:rPr lang="en-US" dirty="0"/>
+              <a:t> </a:t>
+            </a:r>
+            <a:r>
+              <a:rPr lang="en-US" dirty="0" err="1"/>
+              <a:t>районам</a:t>
+            </a:r>
+            <a:endParaRPr lang="en-US" dirty="0"/>
+          </a:p>
+          <a:p>
+            <a:r>
+              <a:rPr lang="en-US" dirty="0"/>
+              <a:t>- </a:t>
+            </a:r>
+            <a:r>
+              <a:rPr lang="en-US" dirty="0" err="1"/>
+              <a:t>Выявить</a:t>
+            </a:r>
+            <a:r>
+              <a:rPr lang="en-US" dirty="0"/>
+              <a:t> </a:t>
+            </a:r>
+            <a:r>
+              <a:rPr lang="en-US" dirty="0" err="1"/>
+              <a:t>зависимость</a:t>
+            </a:r>
+            <a:r>
+              <a:rPr lang="en-US" dirty="0"/>
+              <a:t> </a:t>
+            </a:r>
+            <a:r>
+              <a:rPr lang="en-US" dirty="0" err="1"/>
+              <a:t>цен</a:t>
+            </a:r>
+            <a:r>
+              <a:rPr lang="en-US" dirty="0"/>
+              <a:t> </a:t>
+            </a:r>
+            <a:r>
+              <a:rPr lang="en-US" dirty="0" err="1"/>
+              <a:t>от</a:t>
+            </a:r>
+            <a:r>
+              <a:rPr lang="en-US" dirty="0"/>
+              <a:t> </a:t>
+            </a:r>
+            <a:r>
+              <a:rPr lang="en-US" dirty="0" err="1"/>
+              <a:t>локации</a:t>
+            </a:r>
+            <a:endParaRPr lang="en-US" dirty="0"/>
+          </a:p>
+          <a:p>
+            <a:r>
+              <a:rPr lang="en-US" dirty="0"/>
+              <a:t>- </a:t>
+            </a:r>
+            <a:r>
+              <a:rPr lang="en-US" dirty="0" err="1"/>
+              <a:t>Определить</a:t>
+            </a:r>
+            <a:r>
+              <a:rPr lang="en-US" dirty="0"/>
+              <a:t> </a:t>
+            </a:r>
+            <a:r>
+              <a:rPr lang="en-US" dirty="0" err="1"/>
+              <a:t>оптимальные</a:t>
+            </a:r>
+            <a:r>
+              <a:rPr lang="en-US" dirty="0"/>
+              <a:t> </a:t>
+            </a:r>
+            <a:r>
+              <a:rPr lang="en-US" dirty="0" err="1"/>
+              <a:t>ценовые</a:t>
+            </a:r>
+            <a:r>
+              <a:rPr lang="en-US" dirty="0"/>
+              <a:t> </a:t>
+            </a:r>
+            <a:r>
+              <a:rPr lang="en-US" dirty="0" err="1"/>
+              <a:t>сегменты</a:t>
+            </a:r>
+            <a:endParaRPr lang="en-US" dirty="0"/>
+          </a:p>
+        </p:txBody>
+      </p:sp>
     </p:spTree>
     <p:extLst>
       <p:ext uri="{BB962C8B-B14F-4D97-AF65-F5344CB8AC3E}">
-        <p14:creationId xmlns:p14="http://schemas.microsoft.com/office/powerpoint/2010/main" val="3881097657"/>
+        <p14:creationId xmlns:p14="http://schemas.microsoft.com/office/powerpoint/2010/main" val="660710441"/>
       </p:ext>
     </p:extLst>
   </p:cSld>
@@ -4377,40 +6158,191 @@
           <a:chExt cx="0" cy="0"/>
         </a:xfrm>
       </p:grpSpPr>
-      <p:pic>
-        <p:nvPicPr>
-          <p:cNvPr id="4" name="Picture 3">
-            <a:extLst>
-              <a:ext uri="{FF2B5EF4-FFF2-40B4-BE49-F238E27FC236}">
-                <a16:creationId xmlns:a16="http://schemas.microsoft.com/office/drawing/2014/main" id="{5B09E531-FC18-6DC9-344B-6E25C062D534}"/>
-              </a:ext>
-            </a:extLst>
-          </p:cNvPr>
-          <p:cNvPicPr>
-            <a:picLocks noChangeAspect="1"/>
-          </p:cNvPicPr>
-          <p:nvPr/>
-        </p:nvPicPr>
-        <p:blipFill>
-          <a:blip r:embed="rId2"/>
-          <a:stretch>
-            <a:fillRect/>
-          </a:stretch>
-        </p:blipFill>
-        <p:spPr>
-          <a:xfrm>
-            <a:off x="205961" y="1382400"/>
-            <a:ext cx="11780077" cy="4387780"/>
-          </a:xfrm>
-          <a:prstGeom prst="rect">
-            <a:avLst/>
-          </a:prstGeom>
-        </p:spPr>
-      </p:pic>
+      <p:sp>
+        <p:nvSpPr>
+          <p:cNvPr id="3" name="Content Placeholder 2">
+            <a:extLst>
+              <a:ext uri="{FF2B5EF4-FFF2-40B4-BE49-F238E27FC236}">
+                <a16:creationId xmlns:a16="http://schemas.microsoft.com/office/drawing/2014/main" id="{EC4305FC-F6A9-C783-6CE8-8D0756BE5187}"/>
+              </a:ext>
+            </a:extLst>
+          </p:cNvPr>
+          <p:cNvSpPr>
+            <a:spLocks noGrp="1"/>
+          </p:cNvSpPr>
+          <p:nvPr>
+            <p:ph idx="1"/>
+          </p:nvPr>
+        </p:nvSpPr>
+        <p:spPr/>
+        <p:txBody>
+          <a:bodyPr/>
+          <a:lstStyle/>
+          <a:p>
+            <a:pPr marL="0" indent="0">
+              <a:buNone/>
+            </a:pPr>
+            <a:r>
+              <a:rPr lang="en-US" dirty="0"/>
+              <a:t>3. </a:t>
+            </a:r>
+            <a:r>
+              <a:rPr lang="en-US" dirty="0" err="1"/>
+              <a:t>Оценка</a:t>
+            </a:r>
+            <a:r>
+              <a:rPr lang="en-US" dirty="0"/>
+              <a:t> </a:t>
+            </a:r>
+            <a:r>
+              <a:rPr lang="en-US" dirty="0" err="1"/>
+              <a:t>качества</a:t>
+            </a:r>
+            <a:r>
+              <a:rPr lang="en-US" dirty="0"/>
+              <a:t> </a:t>
+            </a:r>
+            <a:r>
+              <a:rPr lang="en-US" dirty="0" err="1"/>
+              <a:t>и</a:t>
+            </a:r>
+            <a:r>
+              <a:rPr lang="en-US" dirty="0"/>
+              <a:t> </a:t>
+            </a:r>
+            <a:r>
+              <a:rPr lang="en-US" dirty="0" err="1"/>
+              <a:t>рейтингов</a:t>
+            </a:r>
+            <a:endParaRPr lang="en-US" dirty="0"/>
+          </a:p>
+          <a:p>
+            <a:r>
+              <a:rPr lang="en-US" dirty="0"/>
+              <a:t>- </a:t>
+            </a:r>
+            <a:r>
+              <a:rPr lang="en-US" dirty="0" err="1"/>
+              <a:t>Изучить</a:t>
+            </a:r>
+            <a:r>
+              <a:rPr lang="en-US" dirty="0"/>
+              <a:t> </a:t>
+            </a:r>
+            <a:r>
+              <a:rPr lang="en-US" dirty="0" err="1"/>
+              <a:t>распределение</a:t>
+            </a:r>
+            <a:r>
+              <a:rPr lang="en-US" dirty="0"/>
+              <a:t> </a:t>
+            </a:r>
+            <a:r>
+              <a:rPr lang="en-US" dirty="0" err="1"/>
+              <a:t>рейтингов</a:t>
+            </a:r>
+            <a:r>
+              <a:rPr lang="en-US" dirty="0"/>
+              <a:t> </a:t>
+            </a:r>
+            <a:r>
+              <a:rPr lang="en-US" dirty="0" err="1"/>
+              <a:t>по</a:t>
+            </a:r>
+            <a:r>
+              <a:rPr lang="en-US" dirty="0"/>
+              <a:t> </a:t>
+            </a:r>
+            <a:r>
+              <a:rPr lang="en-US" dirty="0" err="1"/>
+              <a:t>категориям</a:t>
+            </a:r>
+            <a:endParaRPr lang="en-US" dirty="0"/>
+          </a:p>
+          <a:p>
+            <a:r>
+              <a:rPr lang="en-US" dirty="0"/>
+              <a:t>- </a:t>
+            </a:r>
+            <a:r>
+              <a:rPr lang="en-US" dirty="0" err="1"/>
+              <a:t>Выявить</a:t>
+            </a:r>
+            <a:r>
+              <a:rPr lang="en-US" dirty="0"/>
+              <a:t> </a:t>
+            </a:r>
+            <a:r>
+              <a:rPr lang="en-US" dirty="0" err="1"/>
+              <a:t>факторы</a:t>
+            </a:r>
+            <a:r>
+              <a:rPr lang="en-US" dirty="0"/>
+              <a:t> </a:t>
+            </a:r>
+            <a:r>
+              <a:rPr lang="en-US" dirty="0" err="1"/>
+              <a:t>успешных</a:t>
+            </a:r>
+            <a:r>
+              <a:rPr lang="en-US" dirty="0"/>
+              <a:t> </a:t>
+            </a:r>
+            <a:r>
+              <a:rPr lang="en-US" dirty="0" err="1"/>
+              <a:t>заведений</a:t>
+            </a:r>
+            <a:endParaRPr lang="en-US" dirty="0"/>
+          </a:p>
+          <a:p>
+            <a:r>
+              <a:rPr lang="en-US" dirty="0"/>
+              <a:t>- </a:t>
+            </a:r>
+            <a:r>
+              <a:rPr lang="en-US" dirty="0" err="1"/>
+              <a:t>Сравнить</a:t>
+            </a:r>
+            <a:r>
+              <a:rPr lang="en-US" dirty="0"/>
+              <a:t> </a:t>
+            </a:r>
+            <a:r>
+              <a:rPr lang="en-US" dirty="0" err="1"/>
+              <a:t>сетевые</a:t>
+            </a:r>
+            <a:r>
+              <a:rPr lang="en-US" dirty="0"/>
+              <a:t> </a:t>
+            </a:r>
+            <a:r>
+              <a:rPr lang="en-US" dirty="0" err="1"/>
+              <a:t>и</a:t>
+            </a:r>
+            <a:r>
+              <a:rPr lang="en-US" dirty="0"/>
+              <a:t> </a:t>
+            </a:r>
+            <a:r>
+              <a:rPr lang="en-US" dirty="0" err="1"/>
+              <a:t>независимые</a:t>
+            </a:r>
+            <a:r>
+              <a:rPr lang="en-US" dirty="0"/>
+              <a:t> </a:t>
+            </a:r>
+            <a:r>
+              <a:rPr lang="en-US" dirty="0" err="1"/>
+              <a:t>форматы</a:t>
+            </a:r>
+            <a:endParaRPr lang="en-US" dirty="0"/>
+          </a:p>
+        </p:txBody>
+      </p:sp>
     </p:spTree>
     <p:extLst>
       <p:ext uri="{BB962C8B-B14F-4D97-AF65-F5344CB8AC3E}">
-        <p14:creationId xmlns:p14="http://schemas.microsoft.com/office/powerpoint/2010/main" val="2851149009"/>
+        <p14:creationId xmlns:p14="http://schemas.microsoft.com/office/powerpoint/2010/main" val="170633380"/>
       </p:ext>
     </p:extLst>
   </p:cSld>
@@ -4439,18 +6371,18 @@
       </p:grpSpPr>
       <p:sp>
         <p:nvSpPr>
-          <p:cNvPr id="2" name="Title 1">
-            <a:extLst>
-              <a:ext uri="{FF2B5EF4-FFF2-40B4-BE49-F238E27FC236}">
-                <a16:creationId xmlns:a16="http://schemas.microsoft.com/office/drawing/2014/main" id="{ECE0B99E-240E-BA97-0F4A-C331A5B56A22}"/>
-              </a:ext>
-            </a:extLst>
-          </p:cNvPr>
-          <p:cNvSpPr>
-            <a:spLocks noGrp="1"/>
-          </p:cNvSpPr>
-          <p:nvPr>
-            <p:ph type="title"/>
+          <p:cNvPr id="3" name="Content Placeholder 2">
+            <a:extLst>
+              <a:ext uri="{FF2B5EF4-FFF2-40B4-BE49-F238E27FC236}">
+                <a16:creationId xmlns:a16="http://schemas.microsoft.com/office/drawing/2014/main" id="{D1A61D16-012F-CA0C-C7C9-657125C9E67C}"/>
+              </a:ext>
+            </a:extLst>
+          </p:cNvPr>
+          <p:cNvSpPr>
+            <a:spLocks noGrp="1"/>
+          </p:cNvSpPr>
+          <p:nvPr>
+            <p:ph idx="1"/>
           </p:nvPr>
         </p:nvSpPr>
         <p:spPr/>
@@ -4458,9 +6390,180 @@
           <a:bodyPr/>
           <a:lstStyle/>
           <a:p>
-            <a:r>
-              <a:rPr lang="ru-RU" dirty="0"/>
-              <a:t>Детальный анализ рынка кофеен Москвы</a:t>
+            <a:pPr marL="0" indent="0">
+              <a:buNone/>
+            </a:pPr>
+            <a:r>
+              <a:rPr lang="en-US" dirty="0"/>
+              <a:t>4. </a:t>
+            </a:r>
+            <a:r>
+              <a:rPr lang="en-US" dirty="0" err="1"/>
+              <a:t>Специализированный</a:t>
+            </a:r>
+            <a:r>
+              <a:rPr lang="en-US" dirty="0"/>
+              <a:t> </a:t>
+            </a:r>
+            <a:r>
+              <a:rPr lang="en-US" dirty="0" err="1"/>
+              <a:t>анализ</a:t>
+            </a:r>
+            <a:r>
+              <a:rPr lang="en-US" dirty="0"/>
+              <a:t> </a:t>
+            </a:r>
+            <a:r>
+              <a:rPr lang="en-US" dirty="0" err="1"/>
+              <a:t>кофеен</a:t>
+            </a:r>
+            <a:endParaRPr lang="en-US" dirty="0"/>
+          </a:p>
+          <a:p>
+            <a:r>
+              <a:rPr lang="en-US" dirty="0"/>
+              <a:t>- </a:t>
+            </a:r>
+            <a:r>
+              <a:rPr lang="en-US" dirty="0" err="1"/>
+              <a:t>Оценить</a:t>
+            </a:r>
+            <a:r>
+              <a:rPr lang="en-US" dirty="0"/>
+              <a:t> </a:t>
+            </a:r>
+            <a:r>
+              <a:rPr lang="en-US" dirty="0" err="1"/>
+              <a:t>потенциал</a:t>
+            </a:r>
+            <a:r>
+              <a:rPr lang="en-US" dirty="0"/>
+              <a:t> </a:t>
+            </a:r>
+            <a:r>
+              <a:rPr lang="en-US" dirty="0" err="1"/>
+              <a:t>открытия</a:t>
+            </a:r>
+            <a:r>
+              <a:rPr lang="en-US" dirty="0"/>
+              <a:t> </a:t>
+            </a:r>
+            <a:r>
+              <a:rPr lang="en-US" dirty="0" err="1"/>
+              <a:t>кофейни</a:t>
+            </a:r>
+            <a:r>
+              <a:rPr lang="en-US" dirty="0"/>
+              <a:t> </a:t>
+            </a:r>
+            <a:r>
+              <a:rPr lang="en-US" dirty="0" err="1"/>
+              <a:t>в</a:t>
+            </a:r>
+            <a:r>
+              <a:rPr lang="en-US" dirty="0"/>
+              <a:t> </a:t>
+            </a:r>
+            <a:r>
+              <a:rPr lang="en-US" dirty="0" err="1"/>
+              <a:t>стиле</a:t>
+            </a:r>
+            <a:r>
+              <a:rPr lang="en-US" dirty="0"/>
+              <a:t> «Central Perk»</a:t>
+            </a:r>
+          </a:p>
+          <a:p>
+            <a:r>
+              <a:rPr lang="en-US" dirty="0"/>
+              <a:t>- </a:t>
+            </a:r>
+            <a:r>
+              <a:rPr lang="en-US" dirty="0" err="1"/>
+              <a:t>Проанализировать</a:t>
+            </a:r>
+            <a:r>
+              <a:rPr lang="en-US" dirty="0"/>
+              <a:t> </a:t>
+            </a:r>
+            <a:r>
+              <a:rPr lang="en-US" dirty="0" err="1"/>
+              <a:t>конкурентную</a:t>
+            </a:r>
+            <a:r>
+              <a:rPr lang="en-US" dirty="0"/>
+              <a:t> </a:t>
+            </a:r>
+            <a:r>
+              <a:rPr lang="en-US" dirty="0" err="1"/>
+              <a:t>среду</a:t>
+            </a:r>
+            <a:r>
+              <a:rPr lang="en-US" dirty="0"/>
+              <a:t> </a:t>
+            </a:r>
+            <a:r>
+              <a:rPr lang="en-US" dirty="0" err="1"/>
+              <a:t>кофейного</a:t>
+            </a:r>
+            <a:r>
+              <a:rPr lang="en-US" dirty="0"/>
+              <a:t> </a:t>
+            </a:r>
+            <a:r>
+              <a:rPr lang="en-US" dirty="0" err="1"/>
+              <a:t>сегмента</a:t>
+            </a:r>
+            <a:endParaRPr lang="en-US" dirty="0"/>
+          </a:p>
+          <a:p>
+            <a:r>
+              <a:rPr lang="en-US" dirty="0"/>
+              <a:t>- </a:t>
+            </a:r>
+            <a:r>
+              <a:rPr lang="en-US" dirty="0" err="1"/>
+              <a:t>Определить</a:t>
+            </a:r>
+            <a:r>
+              <a:rPr lang="en-US" dirty="0"/>
+              <a:t> </a:t>
+            </a:r>
+            <a:r>
+              <a:rPr lang="en-US" dirty="0" err="1"/>
+              <a:t>оптимальные</a:t>
+            </a:r>
+            <a:r>
+              <a:rPr lang="en-US" dirty="0"/>
+              <a:t> </a:t>
+            </a:r>
+            <a:r>
+              <a:rPr lang="en-US" dirty="0" err="1"/>
+              <a:t>локации</a:t>
+            </a:r>
+            <a:r>
+              <a:rPr lang="en-US" dirty="0"/>
+              <a:t> </a:t>
+            </a:r>
+            <a:r>
+              <a:rPr lang="en-US" dirty="0" err="1"/>
+              <a:t>и</a:t>
+            </a:r>
+            <a:r>
+              <a:rPr lang="en-US" dirty="0"/>
+              <a:t> </a:t>
+            </a:r>
+            <a:r>
+              <a:rPr lang="en-US" dirty="0" err="1"/>
+              <a:t>ценовую</a:t>
+            </a:r>
+            <a:r>
+              <a:rPr lang="en-US" dirty="0"/>
+              <a:t> </a:t>
+            </a:r>
+            <a:r>
+              <a:rPr lang="en-US" dirty="0" err="1"/>
+              <a:t>политику</a:t>
             </a:r>
             <a:endParaRPr lang="en-US" dirty="0"/>
           </a:p>
@@ -4469,7 +6572,7 @@
     </p:spTree>
     <p:extLst>
       <p:ext uri="{BB962C8B-B14F-4D97-AF65-F5344CB8AC3E}">
-        <p14:creationId xmlns:p14="http://schemas.microsoft.com/office/powerpoint/2010/main" val="1817500874"/>
+        <p14:creationId xmlns:p14="http://schemas.microsoft.com/office/powerpoint/2010/main" val="2314375195"/>
       </p:ext>
     </p:extLst>
   </p:cSld>
@@ -4496,40 +6599,223 @@
           <a:chExt cx="0" cy="0"/>
         </a:xfrm>
       </p:grpSpPr>
-      <p:pic>
-        <p:nvPicPr>
-          <p:cNvPr id="5" name="Picture 4" descr="A graph with a bar graph&#10;&#10;AI-generated content may be incorrect.">
-            <a:extLst>
-              <a:ext uri="{FF2B5EF4-FFF2-40B4-BE49-F238E27FC236}">
-                <a16:creationId xmlns:a16="http://schemas.microsoft.com/office/drawing/2014/main" id="{F757F8BD-E723-7E59-B49C-A84979D75FE7}"/>
-              </a:ext>
-            </a:extLst>
-          </p:cNvPr>
-          <p:cNvPicPr>
-            <a:picLocks noChangeAspect="1"/>
-          </p:cNvPicPr>
-          <p:nvPr/>
-        </p:nvPicPr>
-        <p:blipFill>
-          <a:blip r:embed="rId2"/>
-          <a:stretch>
-            <a:fillRect/>
-          </a:stretch>
-        </p:blipFill>
-        <p:spPr>
-          <a:xfrm>
-            <a:off x="316061" y="1341535"/>
-            <a:ext cx="11559878" cy="4174930"/>
-          </a:xfrm>
-          <a:prstGeom prst="rect">
-            <a:avLst/>
-          </a:prstGeom>
-        </p:spPr>
-      </p:pic>
+      <p:sp>
+        <p:nvSpPr>
+          <p:cNvPr id="3" name="Content Placeholder 2">
+            <a:extLst>
+              <a:ext uri="{FF2B5EF4-FFF2-40B4-BE49-F238E27FC236}">
+                <a16:creationId xmlns:a16="http://schemas.microsoft.com/office/drawing/2014/main" id="{F16A7144-B8C6-E580-A491-ADC33A6899E9}"/>
+              </a:ext>
+            </a:extLst>
+          </p:cNvPr>
+          <p:cNvSpPr>
+            <a:spLocks noGrp="1"/>
+          </p:cNvSpPr>
+          <p:nvPr>
+            <p:ph idx="1"/>
+          </p:nvPr>
+        </p:nvSpPr>
+        <p:spPr/>
+        <p:txBody>
+          <a:bodyPr/>
+          <a:lstStyle/>
+          <a:p>
+            <a:pPr marL="0" indent="0">
+              <a:buNone/>
+            </a:pPr>
+            <a:r>
+              <a:rPr lang="en-US" dirty="0"/>
+              <a:t>5. </a:t>
+            </a:r>
+            <a:r>
+              <a:rPr lang="en-US" dirty="0" err="1"/>
+              <a:t>Разработка</a:t>
+            </a:r>
+            <a:r>
+              <a:rPr lang="en-US" dirty="0"/>
+              <a:t> </a:t>
+            </a:r>
+            <a:r>
+              <a:rPr lang="en-US" dirty="0" err="1"/>
+              <a:t>практических</a:t>
+            </a:r>
+            <a:r>
+              <a:rPr lang="en-US" dirty="0"/>
+              <a:t> </a:t>
+            </a:r>
+            <a:r>
+              <a:rPr lang="en-US" dirty="0" err="1"/>
+              <a:t>рекомендаций</a:t>
+            </a:r>
+            <a:endParaRPr lang="en-US" dirty="0"/>
+          </a:p>
+          <a:p>
+            <a:r>
+              <a:rPr lang="en-US" dirty="0"/>
+              <a:t>- </a:t>
+            </a:r>
+            <a:r>
+              <a:rPr lang="en-US" dirty="0" err="1"/>
+              <a:t>Сформировать</a:t>
+            </a:r>
+            <a:r>
+              <a:rPr lang="en-US" dirty="0"/>
+              <a:t> </a:t>
+            </a:r>
+            <a:r>
+              <a:rPr lang="en-US" dirty="0" err="1"/>
+              <a:t>конкретные</a:t>
+            </a:r>
+            <a:r>
+              <a:rPr lang="en-US" dirty="0"/>
+              <a:t> </a:t>
+            </a:r>
+            <a:r>
+              <a:rPr lang="en-US" dirty="0" err="1"/>
+              <a:t>предложения</a:t>
+            </a:r>
+            <a:r>
+              <a:rPr lang="en-US" dirty="0"/>
+              <a:t> </a:t>
+            </a:r>
+            <a:r>
+              <a:rPr lang="en-US" dirty="0" err="1"/>
+              <a:t>по</a:t>
+            </a:r>
+            <a:r>
+              <a:rPr lang="en-US" dirty="0"/>
+              <a:t> </a:t>
+            </a:r>
+            <a:r>
+              <a:rPr lang="en-US" dirty="0" err="1"/>
+              <a:t>формату</a:t>
+            </a:r>
+            <a:r>
+              <a:rPr lang="en-US" dirty="0"/>
+              <a:t> </a:t>
+            </a:r>
+            <a:r>
+              <a:rPr lang="en-US" dirty="0" err="1"/>
+              <a:t>и</a:t>
+            </a:r>
+            <a:r>
+              <a:rPr lang="en-US" dirty="0"/>
+              <a:t> </a:t>
+            </a:r>
+            <a:r>
+              <a:rPr lang="en-US" dirty="0" err="1"/>
+              <a:t>концепции</a:t>
+            </a:r>
+            <a:endParaRPr lang="en-US" dirty="0"/>
+          </a:p>
+          <a:p>
+            <a:r>
+              <a:rPr lang="en-US" dirty="0"/>
+              <a:t>- </a:t>
+            </a:r>
+            <a:r>
+              <a:rPr lang="en-US" dirty="0" err="1"/>
+              <a:t>Определить</a:t>
+            </a:r>
+            <a:r>
+              <a:rPr lang="en-US" dirty="0"/>
+              <a:t> </a:t>
+            </a:r>
+            <a:r>
+              <a:rPr lang="en-US" dirty="0" err="1"/>
+              <a:t>оптимальные</a:t>
+            </a:r>
+            <a:r>
+              <a:rPr lang="en-US" dirty="0"/>
+              <a:t> </a:t>
+            </a:r>
+            <a:r>
+              <a:rPr lang="en-US" dirty="0" err="1"/>
+              <a:t>параметры</a:t>
+            </a:r>
+            <a:r>
+              <a:rPr lang="en-US" dirty="0"/>
+              <a:t> </a:t>
+            </a:r>
+            <a:r>
+              <a:rPr lang="en-US" dirty="0" err="1"/>
+              <a:t>для</a:t>
+            </a:r>
+            <a:r>
+              <a:rPr lang="en-US" dirty="0"/>
+              <a:t> </a:t>
+            </a:r>
+            <a:r>
+              <a:rPr lang="en-US" dirty="0" err="1"/>
+              <a:t>нового</a:t>
+            </a:r>
+            <a:r>
+              <a:rPr lang="en-US" dirty="0"/>
+              <a:t> </a:t>
+            </a:r>
+            <a:r>
+              <a:rPr lang="en-US" dirty="0" err="1"/>
+              <a:t>заведения</a:t>
+            </a:r>
+            <a:endParaRPr lang="en-US" dirty="0"/>
+          </a:p>
+          <a:p>
+            <a:r>
+              <a:rPr lang="en-US" dirty="0"/>
+              <a:t>- </a:t>
+            </a:r>
+            <a:r>
+              <a:rPr lang="en-US" dirty="0" err="1"/>
+              <a:t>Предложить</a:t>
+            </a:r>
+            <a:r>
+              <a:rPr lang="en-US" dirty="0"/>
+              <a:t> </a:t>
+            </a:r>
+            <a:r>
+              <a:rPr lang="en-US" dirty="0" err="1"/>
+              <a:t>план</a:t>
+            </a:r>
+            <a:r>
+              <a:rPr lang="en-US" dirty="0"/>
+              <a:t> </a:t>
+            </a:r>
+            <a:r>
+              <a:rPr lang="en-US" dirty="0" err="1"/>
+              <a:t>действий</a:t>
+            </a:r>
+            <a:r>
+              <a:rPr lang="en-US" dirty="0"/>
+              <a:t> </a:t>
+            </a:r>
+            <a:r>
+              <a:rPr lang="en-US" dirty="0" err="1"/>
+              <a:t>для</a:t>
+            </a:r>
+            <a:r>
+              <a:rPr lang="en-US" dirty="0"/>
+              <a:t> </a:t>
+            </a:r>
+            <a:r>
+              <a:rPr lang="en-US" dirty="0" err="1"/>
+              <a:t>реализации</a:t>
+            </a:r>
+            <a:r>
+              <a:rPr lang="en-US" dirty="0"/>
+              <a:t> </a:t>
+            </a:r>
+            <a:r>
+              <a:rPr lang="en-US" dirty="0" err="1"/>
+              <a:t>проекта</a:t>
+            </a:r>
+            <a:endParaRPr lang="en-US" dirty="0"/>
+          </a:p>
+        </p:txBody>
+      </p:sp>
     </p:spTree>
     <p:extLst>
       <p:ext uri="{BB962C8B-B14F-4D97-AF65-F5344CB8AC3E}">
-        <p14:creationId xmlns:p14="http://schemas.microsoft.com/office/powerpoint/2010/main" val="383111777"/>
+        <p14:creationId xmlns:p14="http://schemas.microsoft.com/office/powerpoint/2010/main" val="3618464279"/>
       </p:ext>
     </p:extLst>
   </p:cSld>

--- a/BI/moscow_places/moscow_places_hw.pptx
+++ b/BI/moscow_places/moscow_places_hw.pptx
@@ -20,19 +20,15 @@
     <p:sldId id="259" r:id="rId14"/>
     <p:sldId id="260" r:id="rId15"/>
     <p:sldId id="261" r:id="rId16"/>
-    <p:sldId id="278" r:id="rId17"/>
-    <p:sldId id="262" r:id="rId18"/>
-    <p:sldId id="279" r:id="rId19"/>
-    <p:sldId id="263" r:id="rId20"/>
-    <p:sldId id="264" r:id="rId21"/>
-    <p:sldId id="280" r:id="rId22"/>
-    <p:sldId id="265" r:id="rId23"/>
-    <p:sldId id="281" r:id="rId24"/>
-    <p:sldId id="282" r:id="rId25"/>
-    <p:sldId id="266" r:id="rId26"/>
-    <p:sldId id="283" r:id="rId27"/>
-    <p:sldId id="267" r:id="rId28"/>
-    <p:sldId id="268" r:id="rId29"/>
+    <p:sldId id="262" r:id="rId17"/>
+    <p:sldId id="263" r:id="rId18"/>
+    <p:sldId id="264" r:id="rId19"/>
+    <p:sldId id="265" r:id="rId20"/>
+    <p:sldId id="282" r:id="rId21"/>
+    <p:sldId id="266" r:id="rId22"/>
+    <p:sldId id="283" r:id="rId23"/>
+    <p:sldId id="267" r:id="rId24"/>
+    <p:sldId id="268" r:id="rId25"/>
   </p:sldIdLst>
   <p:sldSz cx="12192000" cy="6858000"/>
   <p:notesSz cx="6858000" cy="9144000"/>
@@ -286,7 +282,7 @@
           <a:p>
             <a:fld id="{05D7635D-5716-2149-87AF-1F135607E50F}" type="datetimeFigureOut">
               <a:rPr lang="en-US" smtClean="0"/>
-              <a:t>1/1/26</a:t>
+              <a:t>1/6/26</a:t>
             </a:fld>
             <a:endParaRPr lang="en-US"/>
           </a:p>
@@ -484,7 +480,7 @@
           <a:p>
             <a:fld id="{05D7635D-5716-2149-87AF-1F135607E50F}" type="datetimeFigureOut">
               <a:rPr lang="en-US" smtClean="0"/>
-              <a:t>1/1/26</a:t>
+              <a:t>1/6/26</a:t>
             </a:fld>
             <a:endParaRPr lang="en-US"/>
           </a:p>
@@ -692,7 +688,7 @@
           <a:p>
             <a:fld id="{05D7635D-5716-2149-87AF-1F135607E50F}" type="datetimeFigureOut">
               <a:rPr lang="en-US" smtClean="0"/>
-              <a:t>1/1/26</a:t>
+              <a:t>1/6/26</a:t>
             </a:fld>
             <a:endParaRPr lang="en-US"/>
           </a:p>
@@ -890,7 +886,7 @@
           <a:p>
             <a:fld id="{05D7635D-5716-2149-87AF-1F135607E50F}" type="datetimeFigureOut">
               <a:rPr lang="en-US" smtClean="0"/>
-              <a:t>1/1/26</a:t>
+              <a:t>1/6/26</a:t>
             </a:fld>
             <a:endParaRPr lang="en-US"/>
           </a:p>
@@ -1165,7 +1161,7 @@
           <a:p>
             <a:fld id="{05D7635D-5716-2149-87AF-1F135607E50F}" type="datetimeFigureOut">
               <a:rPr lang="en-US" smtClean="0"/>
-              <a:t>1/1/26</a:t>
+              <a:t>1/6/26</a:t>
             </a:fld>
             <a:endParaRPr lang="en-US"/>
           </a:p>
@@ -1430,7 +1426,7 @@
           <a:p>
             <a:fld id="{05D7635D-5716-2149-87AF-1F135607E50F}" type="datetimeFigureOut">
               <a:rPr lang="en-US" smtClean="0"/>
-              <a:t>1/1/26</a:t>
+              <a:t>1/6/26</a:t>
             </a:fld>
             <a:endParaRPr lang="en-US"/>
           </a:p>
@@ -1842,7 +1838,7 @@
           <a:p>
             <a:fld id="{05D7635D-5716-2149-87AF-1F135607E50F}" type="datetimeFigureOut">
               <a:rPr lang="en-US" smtClean="0"/>
-              <a:t>1/1/26</a:t>
+              <a:t>1/6/26</a:t>
             </a:fld>
             <a:endParaRPr lang="en-US"/>
           </a:p>
@@ -1983,7 +1979,7 @@
           <a:p>
             <a:fld id="{05D7635D-5716-2149-87AF-1F135607E50F}" type="datetimeFigureOut">
               <a:rPr lang="en-US" smtClean="0"/>
-              <a:t>1/1/26</a:t>
+              <a:t>1/6/26</a:t>
             </a:fld>
             <a:endParaRPr lang="en-US"/>
           </a:p>
@@ -2096,7 +2092,7 @@
           <a:p>
             <a:fld id="{05D7635D-5716-2149-87AF-1F135607E50F}" type="datetimeFigureOut">
               <a:rPr lang="en-US" smtClean="0"/>
-              <a:t>1/1/26</a:t>
+              <a:t>1/6/26</a:t>
             </a:fld>
             <a:endParaRPr lang="en-US"/>
           </a:p>
@@ -2407,7 +2403,7 @@
           <a:p>
             <a:fld id="{05D7635D-5716-2149-87AF-1F135607E50F}" type="datetimeFigureOut">
               <a:rPr lang="en-US" smtClean="0"/>
-              <a:t>1/1/26</a:t>
+              <a:t>1/6/26</a:t>
             </a:fld>
             <a:endParaRPr lang="en-US"/>
           </a:p>
@@ -2695,7 +2691,7 @@
           <a:p>
             <a:fld id="{05D7635D-5716-2149-87AF-1F135607E50F}" type="datetimeFigureOut">
               <a:rPr lang="en-US" smtClean="0"/>
-              <a:t>1/1/26</a:t>
+              <a:t>1/6/26</a:t>
             </a:fld>
             <a:endParaRPr lang="en-US"/>
           </a:p>
@@ -2936,7 +2932,7 @@
           <a:p>
             <a:fld id="{05D7635D-5716-2149-87AF-1F135607E50F}" type="datetimeFigureOut">
               <a:rPr lang="en-US" smtClean="0"/>
-              <a:t>1/1/26</a:t>
+              <a:t>1/6/26</a:t>
             </a:fld>
             <a:endParaRPr lang="en-US"/>
           </a:p>
@@ -4251,6 +4247,53 @@
           </a:prstGeom>
         </p:spPr>
       </p:pic>
+      <p:sp>
+        <p:nvSpPr>
+          <p:cNvPr id="2" name="Content Placeholder 2">
+            <a:extLst>
+              <a:ext uri="{FF2B5EF4-FFF2-40B4-BE49-F238E27FC236}">
+                <a16:creationId xmlns:a16="http://schemas.microsoft.com/office/drawing/2014/main" id="{2D383DBF-ECB8-2C30-C81D-C7564FD66D0A}"/>
+              </a:ext>
+            </a:extLst>
+          </p:cNvPr>
+          <p:cNvSpPr>
+            <a:spLocks noGrp="1"/>
+          </p:cNvSpPr>
+          <p:nvPr>
+            <p:ph idx="1"/>
+          </p:nvPr>
+        </p:nvSpPr>
+        <p:spPr>
+          <a:xfrm>
+            <a:off x="1676400" y="5707117"/>
+            <a:ext cx="10515600" cy="4351338"/>
+          </a:xfrm>
+        </p:spPr>
+        <p:txBody>
+          <a:bodyPr/>
+          <a:lstStyle/>
+          <a:p>
+            <a:r>
+              <a:rPr lang="ru-RU" dirty="0"/>
+              <a:t>В топ-10 категорий явно преобладают кафе (35 </a:t>
+            </a:r>
+            <a:r>
+              <a:rPr lang="en-US" dirty="0"/>
+              <a:t>% </a:t>
+            </a:r>
+            <a:r>
+              <a:rPr lang="ru-RU" dirty="0"/>
+              <a:t>рынка)</a:t>
+            </a:r>
+          </a:p>
+          <a:p>
+            <a:r>
+              <a:rPr lang="ru-RU" dirty="0"/>
+              <a:t>Топ-3 – кафе, рестораны и кофейни</a:t>
+            </a:r>
+          </a:p>
+        </p:txBody>
+      </p:sp>
     </p:spTree>
     <p:extLst>
       <p:ext uri="{BB962C8B-B14F-4D97-AF65-F5344CB8AC3E}">
@@ -4281,81 +4324,85 @@
           <a:chExt cx="0" cy="0"/>
         </a:xfrm>
       </p:grpSpPr>
-      <p:sp>
-        <p:nvSpPr>
-          <p:cNvPr id="2" name="Title 1">
-            <a:extLst>
-              <a:ext uri="{FF2B5EF4-FFF2-40B4-BE49-F238E27FC236}">
-                <a16:creationId xmlns:a16="http://schemas.microsoft.com/office/drawing/2014/main" id="{7C30A4FA-5D1F-E5B9-B4C8-09808CCB36A9}"/>
-              </a:ext>
-            </a:extLst>
-          </p:cNvPr>
-          <p:cNvSpPr>
-            <a:spLocks noGrp="1"/>
-          </p:cNvSpPr>
-          <p:nvPr>
-            <p:ph type="title"/>
-          </p:nvPr>
-        </p:nvSpPr>
-        <p:spPr/>
+      <p:pic>
+        <p:nvPicPr>
+          <p:cNvPr id="4" name="Picture 3">
+            <a:extLst>
+              <a:ext uri="{FF2B5EF4-FFF2-40B4-BE49-F238E27FC236}">
+                <a16:creationId xmlns:a16="http://schemas.microsoft.com/office/drawing/2014/main" id="{5B09E531-FC18-6DC9-344B-6E25C062D534}"/>
+              </a:ext>
+            </a:extLst>
+          </p:cNvPr>
+          <p:cNvPicPr>
+            <a:picLocks noChangeAspect="1"/>
+          </p:cNvPicPr>
+          <p:nvPr/>
+        </p:nvPicPr>
+        <p:blipFill>
+          <a:blip r:embed="rId2"/>
+          <a:stretch>
+            <a:fillRect/>
+          </a:stretch>
+        </p:blipFill>
+        <p:spPr>
+          <a:xfrm>
+            <a:off x="205961" y="1382400"/>
+            <a:ext cx="11780077" cy="4387780"/>
+          </a:xfrm>
+          <a:prstGeom prst="rect">
+            <a:avLst/>
+          </a:prstGeom>
+        </p:spPr>
+      </p:pic>
+      <p:sp>
+        <p:nvSpPr>
+          <p:cNvPr id="2" name="Content Placeholder 2">
+            <a:extLst>
+              <a:ext uri="{FF2B5EF4-FFF2-40B4-BE49-F238E27FC236}">
+                <a16:creationId xmlns:a16="http://schemas.microsoft.com/office/drawing/2014/main" id="{98398DA1-7132-3009-A0CE-EE8B4934796C}"/>
+              </a:ext>
+            </a:extLst>
+          </p:cNvPr>
+          <p:cNvSpPr>
+            <a:spLocks noGrp="1"/>
+          </p:cNvSpPr>
+          <p:nvPr>
+            <p:ph idx="1"/>
+          </p:nvPr>
+        </p:nvSpPr>
+        <p:spPr>
+          <a:xfrm>
+            <a:off x="1027386" y="5770180"/>
+            <a:ext cx="10515600" cy="4351338"/>
+          </a:xfrm>
+        </p:spPr>
         <p:txBody>
           <a:bodyPr/>
           <a:lstStyle/>
           <a:p>
             <a:r>
               <a:rPr lang="ru-RU" dirty="0"/>
-              <a:t>Вывод для графика</a:t>
+              <a:t>Более 2000 заведений имеют средний чек до 1000 </a:t>
+            </a:r>
+            <a:r>
+              <a:rPr lang="ru-RU" dirty="0" err="1"/>
+              <a:t>руб</a:t>
+            </a:r>
+            <a:endParaRPr lang="ru-RU" dirty="0"/>
+          </a:p>
+          <a:p>
+            <a:r>
+              <a:rPr lang="ru-RU" dirty="0"/>
+              <a:t>Самые дорогие заведения расположены в ЗАО и ЦАО</a:t>
             </a:r>
             <a:endParaRPr lang="en-US" dirty="0"/>
-          </a:p>
-        </p:txBody>
-      </p:sp>
-      <p:sp>
-        <p:nvSpPr>
-          <p:cNvPr id="3" name="Content Placeholder 2">
-            <a:extLst>
-              <a:ext uri="{FF2B5EF4-FFF2-40B4-BE49-F238E27FC236}">
-                <a16:creationId xmlns:a16="http://schemas.microsoft.com/office/drawing/2014/main" id="{9B5F0554-E5B8-6D1B-432C-C112DF955808}"/>
-              </a:ext>
-            </a:extLst>
-          </p:cNvPr>
-          <p:cNvSpPr>
-            <a:spLocks noGrp="1"/>
-          </p:cNvSpPr>
-          <p:nvPr>
-            <p:ph idx="1"/>
-          </p:nvPr>
-        </p:nvSpPr>
-        <p:spPr/>
-        <p:txBody>
-          <a:bodyPr/>
-          <a:lstStyle/>
-          <a:p>
-            <a:r>
-              <a:rPr lang="ru-RU" dirty="0"/>
-              <a:t>В топ-10 категорий явно преобладают кафе (35 </a:t>
-            </a:r>
-            <a:r>
-              <a:rPr lang="en-US" dirty="0"/>
-              <a:t>% </a:t>
-            </a:r>
-            <a:r>
-              <a:rPr lang="ru-RU" dirty="0"/>
-              <a:t>рынка)</a:t>
-            </a:r>
-          </a:p>
-          <a:p>
-            <a:r>
-              <a:rPr lang="ru-RU" dirty="0"/>
-              <a:t>Топ-3 – кафе, рестораны и кофейни</a:t>
-            </a:r>
           </a:p>
         </p:txBody>
       </p:sp>
     </p:spTree>
     <p:extLst>
       <p:ext uri="{BB962C8B-B14F-4D97-AF65-F5344CB8AC3E}">
-        <p14:creationId xmlns:p14="http://schemas.microsoft.com/office/powerpoint/2010/main" val="1004253992"/>
+        <p14:creationId xmlns:p14="http://schemas.microsoft.com/office/powerpoint/2010/main" val="2851149009"/>
       </p:ext>
     </p:extLst>
   </p:cSld>
@@ -4382,40 +4429,39 @@
           <a:chExt cx="0" cy="0"/>
         </a:xfrm>
       </p:grpSpPr>
-      <p:pic>
-        <p:nvPicPr>
-          <p:cNvPr id="4" name="Picture 3">
-            <a:extLst>
-              <a:ext uri="{FF2B5EF4-FFF2-40B4-BE49-F238E27FC236}">
-                <a16:creationId xmlns:a16="http://schemas.microsoft.com/office/drawing/2014/main" id="{5B09E531-FC18-6DC9-344B-6E25C062D534}"/>
-              </a:ext>
-            </a:extLst>
-          </p:cNvPr>
-          <p:cNvPicPr>
-            <a:picLocks noChangeAspect="1"/>
-          </p:cNvPicPr>
-          <p:nvPr/>
-        </p:nvPicPr>
-        <p:blipFill>
-          <a:blip r:embed="rId2"/>
-          <a:stretch>
-            <a:fillRect/>
-          </a:stretch>
-        </p:blipFill>
-        <p:spPr>
-          <a:xfrm>
-            <a:off x="205961" y="1382400"/>
-            <a:ext cx="11780077" cy="4387780"/>
-          </a:xfrm>
-          <a:prstGeom prst="rect">
-            <a:avLst/>
-          </a:prstGeom>
-        </p:spPr>
-      </p:pic>
+      <p:sp>
+        <p:nvSpPr>
+          <p:cNvPr id="2" name="Title 1">
+            <a:extLst>
+              <a:ext uri="{FF2B5EF4-FFF2-40B4-BE49-F238E27FC236}">
+                <a16:creationId xmlns:a16="http://schemas.microsoft.com/office/drawing/2014/main" id="{ECE0B99E-240E-BA97-0F4A-C331A5B56A22}"/>
+              </a:ext>
+            </a:extLst>
+          </p:cNvPr>
+          <p:cNvSpPr>
+            <a:spLocks noGrp="1"/>
+          </p:cNvSpPr>
+          <p:nvPr>
+            <p:ph type="title"/>
+          </p:nvPr>
+        </p:nvSpPr>
+        <p:spPr/>
+        <p:txBody>
+          <a:bodyPr/>
+          <a:lstStyle/>
+          <a:p>
+            <a:r>
+              <a:rPr lang="ru-RU" dirty="0"/>
+              <a:t>Детальный анализ рынка кофеен Москвы</a:t>
+            </a:r>
+            <a:endParaRPr lang="en-US" dirty="0"/>
+          </a:p>
+        </p:txBody>
+      </p:sp>
     </p:spTree>
     <p:extLst>
       <p:ext uri="{BB962C8B-B14F-4D97-AF65-F5344CB8AC3E}">
-        <p14:creationId xmlns:p14="http://schemas.microsoft.com/office/powerpoint/2010/main" val="2851149009"/>
+        <p14:creationId xmlns:p14="http://schemas.microsoft.com/office/powerpoint/2010/main" val="1817500874"/>
       </p:ext>
     </p:extLst>
   </p:cSld>
@@ -4442,66 +4488,56 @@
           <a:chExt cx="0" cy="0"/>
         </a:xfrm>
       </p:grpSpPr>
-      <p:sp>
-        <p:nvSpPr>
-          <p:cNvPr id="3" name="Content Placeholder 2">
-            <a:extLst>
-              <a:ext uri="{FF2B5EF4-FFF2-40B4-BE49-F238E27FC236}">
-                <a16:creationId xmlns:a16="http://schemas.microsoft.com/office/drawing/2014/main" id="{04928502-C69A-32F8-5A06-C41A14E3F949}"/>
-              </a:ext>
-            </a:extLst>
-          </p:cNvPr>
-          <p:cNvSpPr>
-            <a:spLocks noGrp="1"/>
-          </p:cNvSpPr>
-          <p:nvPr>
-            <p:ph idx="1"/>
-          </p:nvPr>
-        </p:nvSpPr>
-        <p:spPr/>
-        <p:txBody>
-          <a:bodyPr/>
-          <a:lstStyle/>
-          <a:p>
-            <a:r>
-              <a:rPr lang="ru-RU" dirty="0"/>
-              <a:t>Более 2000 заведений имеют средний чек до 1000 </a:t>
-            </a:r>
-            <a:r>
-              <a:rPr lang="ru-RU" dirty="0" err="1"/>
-              <a:t>руб</a:t>
-            </a:r>
-            <a:endParaRPr lang="ru-RU" dirty="0"/>
-          </a:p>
-          <a:p>
-            <a:r>
-              <a:rPr lang="ru-RU" dirty="0"/>
-              <a:t>Самые дорогие заведения расположены в ЗАО и ЦАО</a:t>
-            </a:r>
-            <a:endParaRPr lang="en-US" dirty="0"/>
-          </a:p>
-        </p:txBody>
-      </p:sp>
-      <p:sp>
-        <p:nvSpPr>
-          <p:cNvPr id="5" name="Title 1">
-            <a:extLst>
-              <a:ext uri="{FF2B5EF4-FFF2-40B4-BE49-F238E27FC236}">
-                <a16:creationId xmlns:a16="http://schemas.microsoft.com/office/drawing/2014/main" id="{9B44E071-FAB3-11CD-1604-E4FF71411C73}"/>
-              </a:ext>
-            </a:extLst>
-          </p:cNvPr>
-          <p:cNvSpPr>
-            <a:spLocks noGrp="1"/>
-          </p:cNvSpPr>
-          <p:nvPr>
-            <p:ph type="title"/>
-          </p:nvPr>
-        </p:nvSpPr>
+      <p:pic>
+        <p:nvPicPr>
+          <p:cNvPr id="5" name="Picture 4" descr="A graph with a bar graph&#10;&#10;AI-generated content may be incorrect.">
+            <a:extLst>
+              <a:ext uri="{FF2B5EF4-FFF2-40B4-BE49-F238E27FC236}">
+                <a16:creationId xmlns:a16="http://schemas.microsoft.com/office/drawing/2014/main" id="{F757F8BD-E723-7E59-B49C-A84979D75FE7}"/>
+              </a:ext>
+            </a:extLst>
+          </p:cNvPr>
+          <p:cNvPicPr>
+            <a:picLocks noChangeAspect="1"/>
+          </p:cNvPicPr>
+          <p:nvPr/>
+        </p:nvPicPr>
+        <p:blipFill>
+          <a:blip r:embed="rId2"/>
+          <a:stretch>
+            <a:fillRect/>
+          </a:stretch>
+        </p:blipFill>
         <p:spPr>
           <a:xfrm>
-            <a:off x="838200" y="365125"/>
-            <a:ext cx="10515600" cy="1325563"/>
+            <a:off x="316061" y="1341535"/>
+            <a:ext cx="11559878" cy="4174930"/>
+          </a:xfrm>
+          <a:prstGeom prst="rect">
+            <a:avLst/>
+          </a:prstGeom>
+        </p:spPr>
+      </p:pic>
+      <p:sp>
+        <p:nvSpPr>
+          <p:cNvPr id="2" name="Content Placeholder 2">
+            <a:extLst>
+              <a:ext uri="{FF2B5EF4-FFF2-40B4-BE49-F238E27FC236}">
+                <a16:creationId xmlns:a16="http://schemas.microsoft.com/office/drawing/2014/main" id="{44433CCA-D5A3-B327-6C28-F000590C7F2B}"/>
+              </a:ext>
+            </a:extLst>
+          </p:cNvPr>
+          <p:cNvSpPr>
+            <a:spLocks noGrp="1"/>
+          </p:cNvSpPr>
+          <p:nvPr>
+            <p:ph idx="1"/>
+          </p:nvPr>
+        </p:nvSpPr>
+        <p:spPr>
+          <a:xfrm>
+            <a:off x="2404242" y="6029763"/>
+            <a:ext cx="10515600" cy="4351338"/>
           </a:xfrm>
         </p:spPr>
         <p:txBody>
@@ -4510,7 +4546,7 @@
           <a:p>
             <a:r>
               <a:rPr lang="ru-RU" dirty="0"/>
-              <a:t>Вывод для графика</a:t>
+              <a:t>ЦАО впереди всех по количеству кофеен</a:t>
             </a:r>
             <a:endParaRPr lang="en-US" dirty="0"/>
           </a:p>
@@ -4519,7 +4555,7 @@
     </p:spTree>
     <p:extLst>
       <p:ext uri="{BB962C8B-B14F-4D97-AF65-F5344CB8AC3E}">
-        <p14:creationId xmlns:p14="http://schemas.microsoft.com/office/powerpoint/2010/main" val="4139397235"/>
+        <p14:creationId xmlns:p14="http://schemas.microsoft.com/office/powerpoint/2010/main" val="383111777"/>
       </p:ext>
     </p:extLst>
   </p:cSld>
@@ -4546,30 +4582,69 @@
           <a:chExt cx="0" cy="0"/>
         </a:xfrm>
       </p:grpSpPr>
-      <p:sp>
-        <p:nvSpPr>
-          <p:cNvPr id="2" name="Title 1">
-            <a:extLst>
-              <a:ext uri="{FF2B5EF4-FFF2-40B4-BE49-F238E27FC236}">
-                <a16:creationId xmlns:a16="http://schemas.microsoft.com/office/drawing/2014/main" id="{ECE0B99E-240E-BA97-0F4A-C331A5B56A22}"/>
-              </a:ext>
-            </a:extLst>
-          </p:cNvPr>
-          <p:cNvSpPr>
-            <a:spLocks noGrp="1"/>
-          </p:cNvSpPr>
-          <p:nvPr>
-            <p:ph type="title"/>
-          </p:nvPr>
-        </p:nvSpPr>
-        <p:spPr/>
+      <p:pic>
+        <p:nvPicPr>
+          <p:cNvPr id="5" name="Picture 4" descr="A screenshot of a graph&#10;&#10;AI-generated content may be incorrect.">
+            <a:extLst>
+              <a:ext uri="{FF2B5EF4-FFF2-40B4-BE49-F238E27FC236}">
+                <a16:creationId xmlns:a16="http://schemas.microsoft.com/office/drawing/2014/main" id="{602B6CC3-BBE5-000B-8405-179A0C3A9743}"/>
+              </a:ext>
+            </a:extLst>
+          </p:cNvPr>
+          <p:cNvPicPr>
+            <a:picLocks noChangeAspect="1"/>
+          </p:cNvPicPr>
+          <p:nvPr/>
+        </p:nvPicPr>
+        <p:blipFill>
+          <a:blip r:embed="rId2"/>
+          <a:stretch>
+            <a:fillRect/>
+          </a:stretch>
+        </p:blipFill>
+        <p:spPr>
+          <a:xfrm>
+            <a:off x="732024" y="997767"/>
+            <a:ext cx="10727952" cy="4862466"/>
+          </a:xfrm>
+          <a:prstGeom prst="rect">
+            <a:avLst/>
+          </a:prstGeom>
+        </p:spPr>
+      </p:pic>
+      <p:sp>
+        <p:nvSpPr>
+          <p:cNvPr id="2" name="Content Placeholder 2">
+            <a:extLst>
+              <a:ext uri="{FF2B5EF4-FFF2-40B4-BE49-F238E27FC236}">
+                <a16:creationId xmlns:a16="http://schemas.microsoft.com/office/drawing/2014/main" id="{FFAC4712-A2AA-DAD7-1C43-0BAA767A9AB2}"/>
+              </a:ext>
+            </a:extLst>
+          </p:cNvPr>
+          <p:cNvSpPr>
+            <a:spLocks noGrp="1"/>
+          </p:cNvSpPr>
+          <p:nvPr>
+            <p:ph idx="1"/>
+          </p:nvPr>
+        </p:nvSpPr>
+        <p:spPr>
+          <a:xfrm>
+            <a:off x="1676400" y="6187418"/>
+            <a:ext cx="10515600" cy="4351338"/>
+          </a:xfrm>
+        </p:spPr>
         <p:txBody>
           <a:bodyPr/>
           <a:lstStyle/>
           <a:p>
             <a:r>
               <a:rPr lang="ru-RU" dirty="0"/>
-              <a:t>Детальный анализ рынка кофеен Москвы</a:t>
+              <a:t>Примерно 200 кофеен имеют цену капучино в 170 </a:t>
+            </a:r>
+            <a:r>
+              <a:rPr lang="ru-RU" dirty="0" err="1"/>
+              <a:t>руб</a:t>
             </a:r>
             <a:endParaRPr lang="en-US" dirty="0"/>
           </a:p>
@@ -4578,7 +4653,7 @@
     </p:spTree>
     <p:extLst>
       <p:ext uri="{BB962C8B-B14F-4D97-AF65-F5344CB8AC3E}">
-        <p14:creationId xmlns:p14="http://schemas.microsoft.com/office/powerpoint/2010/main" val="1817500874"/>
+        <p14:creationId xmlns:p14="http://schemas.microsoft.com/office/powerpoint/2010/main" val="1199043873"/>
       </p:ext>
     </p:extLst>
   </p:cSld>
@@ -4695,40 +4770,44 @@
           <a:chExt cx="0" cy="0"/>
         </a:xfrm>
       </p:grpSpPr>
-      <p:pic>
-        <p:nvPicPr>
-          <p:cNvPr id="5" name="Picture 4" descr="A graph with a bar graph&#10;&#10;AI-generated content may be incorrect.">
-            <a:extLst>
-              <a:ext uri="{FF2B5EF4-FFF2-40B4-BE49-F238E27FC236}">
-                <a16:creationId xmlns:a16="http://schemas.microsoft.com/office/drawing/2014/main" id="{F757F8BD-E723-7E59-B49C-A84979D75FE7}"/>
-              </a:ext>
-            </a:extLst>
-          </p:cNvPr>
-          <p:cNvPicPr>
-            <a:picLocks noChangeAspect="1"/>
-          </p:cNvPicPr>
-          <p:nvPr/>
-        </p:nvPicPr>
-        <p:blipFill>
-          <a:blip r:embed="rId2"/>
-          <a:stretch>
-            <a:fillRect/>
-          </a:stretch>
-        </p:blipFill>
+      <p:sp>
+        <p:nvSpPr>
+          <p:cNvPr id="4" name="Title 1">
+            <a:extLst>
+              <a:ext uri="{FF2B5EF4-FFF2-40B4-BE49-F238E27FC236}">
+                <a16:creationId xmlns:a16="http://schemas.microsoft.com/office/drawing/2014/main" id="{45261F94-C4AB-2307-4A90-C582EF93C253}"/>
+              </a:ext>
+            </a:extLst>
+          </p:cNvPr>
+          <p:cNvSpPr>
+            <a:spLocks noGrp="1"/>
+          </p:cNvSpPr>
+          <p:nvPr>
+            <p:ph type="title"/>
+          </p:nvPr>
+        </p:nvSpPr>
         <p:spPr>
           <a:xfrm>
-            <a:off x="316061" y="1341535"/>
-            <a:ext cx="11559878" cy="4174930"/>
+            <a:off x="838200" y="365125"/>
+            <a:ext cx="10515600" cy="1325563"/>
           </a:xfrm>
-          <a:prstGeom prst="rect">
-            <a:avLst/>
-          </a:prstGeom>
         </p:spPr>
-      </p:pic>
+        <p:txBody>
+          <a:bodyPr/>
+          <a:lstStyle/>
+          <a:p>
+            <a:r>
+              <a:rPr lang="ru-RU" dirty="0"/>
+              <a:t>ОСНОВНЫЕ ВЫВОДЫ</a:t>
+            </a:r>
+            <a:endParaRPr lang="en-US" dirty="0"/>
+          </a:p>
+        </p:txBody>
+      </p:sp>
     </p:spTree>
     <p:extLst>
       <p:ext uri="{BB962C8B-B14F-4D97-AF65-F5344CB8AC3E}">
-        <p14:creationId xmlns:p14="http://schemas.microsoft.com/office/powerpoint/2010/main" val="383111777"/>
+        <p14:creationId xmlns:p14="http://schemas.microsoft.com/office/powerpoint/2010/main" val="2482158534"/>
       </p:ext>
     </p:extLst>
   </p:cSld>
@@ -4760,7 +4839,7 @@
           <p:cNvPr id="3" name="Content Placeholder 2">
             <a:extLst>
               <a:ext uri="{FF2B5EF4-FFF2-40B4-BE49-F238E27FC236}">
-                <a16:creationId xmlns:a16="http://schemas.microsoft.com/office/drawing/2014/main" id="{AC102A0B-768B-54DC-A3E0-CEC739693D4B}"/>
+                <a16:creationId xmlns:a16="http://schemas.microsoft.com/office/drawing/2014/main" id="{B318946C-5DE9-CF75-B402-67DC1018CC5F}"/>
               </a:ext>
             </a:extLst>
           </p:cNvPr>
@@ -4769,41 +4848,12 @@
           </p:cNvSpPr>
           <p:nvPr>
             <p:ph idx="1"/>
-          </p:nvPr>
-        </p:nvSpPr>
-        <p:spPr/>
-        <p:txBody>
-          <a:bodyPr/>
-          <a:lstStyle/>
-          <a:p>
-            <a:r>
-              <a:rPr lang="ru-RU" dirty="0"/>
-              <a:t>ЦАО впереди всех по количеству кофеен</a:t>
-            </a:r>
-            <a:endParaRPr lang="en-US" dirty="0"/>
-          </a:p>
-        </p:txBody>
-      </p:sp>
-      <p:sp>
-        <p:nvSpPr>
-          <p:cNvPr id="4" name="Title 1">
-            <a:extLst>
-              <a:ext uri="{FF2B5EF4-FFF2-40B4-BE49-F238E27FC236}">
-                <a16:creationId xmlns:a16="http://schemas.microsoft.com/office/drawing/2014/main" id="{B90A6E98-A833-44E1-2AF1-623F33C7C344}"/>
-              </a:ext>
-            </a:extLst>
-          </p:cNvPr>
-          <p:cNvSpPr>
-            <a:spLocks noGrp="1"/>
-          </p:cNvSpPr>
-          <p:nvPr>
-            <p:ph type="title"/>
           </p:nvPr>
         </p:nvSpPr>
         <p:spPr>
           <a:xfrm>
-            <a:off x="838200" y="365125"/>
-            <a:ext cx="10515600" cy="1325563"/>
+            <a:off x="838200" y="1253331"/>
+            <a:ext cx="10515600" cy="4351338"/>
           </a:xfrm>
         </p:spPr>
         <p:txBody>
@@ -4812,7 +4862,31 @@
           <a:p>
             <a:r>
               <a:rPr lang="ru-RU" dirty="0"/>
-              <a:t>Вывод для графика</a:t>
+              <a:t>1. Рынок общественного питания Москвы разнообразен и конкурентен.</a:t>
+            </a:r>
+          </a:p>
+          <a:p>
+            <a:r>
+              <a:rPr lang="ru-RU" dirty="0"/>
+              <a:t>2. Наибольшую долю занимают кафе, рестораны и кофейни.</a:t>
+            </a:r>
+          </a:p>
+          <a:p>
+            <a:r>
+              <a:rPr lang="ru-RU" dirty="0"/>
+              <a:t>3. Центральные районы имеют наибольшую концентрацию заведений.</a:t>
+            </a:r>
+          </a:p>
+          <a:p>
+            <a:r>
+              <a:rPr lang="ru-RU" dirty="0"/>
+              <a:t>4. Цены значительно варьируются в зависимости от района и категории.</a:t>
+            </a:r>
+          </a:p>
+          <a:p>
+            <a:r>
+              <a:rPr lang="ru-RU" dirty="0"/>
+              <a:t>5. Сетевые заведения составляют значительную часть рынка.</a:t>
             </a:r>
             <a:endParaRPr lang="en-US" dirty="0"/>
           </a:p>
@@ -4821,7 +4895,7 @@
     </p:spTree>
     <p:extLst>
       <p:ext uri="{BB962C8B-B14F-4D97-AF65-F5344CB8AC3E}">
-        <p14:creationId xmlns:p14="http://schemas.microsoft.com/office/powerpoint/2010/main" val="2344262252"/>
+        <p14:creationId xmlns:p14="http://schemas.microsoft.com/office/powerpoint/2010/main" val="2476823012"/>
       </p:ext>
     </p:extLst>
   </p:cSld>
@@ -4848,40 +4922,44 @@
           <a:chExt cx="0" cy="0"/>
         </a:xfrm>
       </p:grpSpPr>
-      <p:pic>
-        <p:nvPicPr>
-          <p:cNvPr id="5" name="Picture 4" descr="A screenshot of a graph&#10;&#10;AI-generated content may be incorrect.">
-            <a:extLst>
-              <a:ext uri="{FF2B5EF4-FFF2-40B4-BE49-F238E27FC236}">
-                <a16:creationId xmlns:a16="http://schemas.microsoft.com/office/drawing/2014/main" id="{602B6CC3-BBE5-000B-8405-179A0C3A9743}"/>
-              </a:ext>
-            </a:extLst>
-          </p:cNvPr>
-          <p:cNvPicPr>
-            <a:picLocks noChangeAspect="1"/>
-          </p:cNvPicPr>
-          <p:nvPr/>
-        </p:nvPicPr>
-        <p:blipFill>
-          <a:blip r:embed="rId2"/>
-          <a:stretch>
-            <a:fillRect/>
-          </a:stretch>
-        </p:blipFill>
+      <p:sp>
+        <p:nvSpPr>
+          <p:cNvPr id="4" name="Title 1">
+            <a:extLst>
+              <a:ext uri="{FF2B5EF4-FFF2-40B4-BE49-F238E27FC236}">
+                <a16:creationId xmlns:a16="http://schemas.microsoft.com/office/drawing/2014/main" id="{50255F9A-9FDF-0A46-828D-B6B3138407B5}"/>
+              </a:ext>
+            </a:extLst>
+          </p:cNvPr>
+          <p:cNvSpPr>
+            <a:spLocks noGrp="1"/>
+          </p:cNvSpPr>
+          <p:nvPr>
+            <p:ph type="title"/>
+          </p:nvPr>
+        </p:nvSpPr>
         <p:spPr>
           <a:xfrm>
-            <a:off x="732024" y="997767"/>
-            <a:ext cx="10727952" cy="4862466"/>
+            <a:off x="838200" y="365125"/>
+            <a:ext cx="10515600" cy="1325563"/>
           </a:xfrm>
-          <a:prstGeom prst="rect">
-            <a:avLst/>
-          </a:prstGeom>
         </p:spPr>
-      </p:pic>
+        <p:txBody>
+          <a:bodyPr/>
+          <a:lstStyle/>
+          <a:p>
+            <a:r>
+              <a:rPr lang="ru-RU" dirty="0"/>
+              <a:t>РЕКОМЕНДАЦИИ ДЛЯ ИНВЕСТОРОВ</a:t>
+            </a:r>
+            <a:endParaRPr lang="en-US" dirty="0"/>
+          </a:p>
+        </p:txBody>
+      </p:sp>
     </p:spTree>
     <p:extLst>
       <p:ext uri="{BB962C8B-B14F-4D97-AF65-F5344CB8AC3E}">
-        <p14:creationId xmlns:p14="http://schemas.microsoft.com/office/powerpoint/2010/main" val="1199043873"/>
+        <p14:creationId xmlns:p14="http://schemas.microsoft.com/office/powerpoint/2010/main" val="1150912623"/>
       </p:ext>
     </p:extLst>
   </p:cSld>
@@ -4913,319 +4991,6 @@
           <p:cNvPr id="3" name="Content Placeholder 2">
             <a:extLst>
               <a:ext uri="{FF2B5EF4-FFF2-40B4-BE49-F238E27FC236}">
-                <a16:creationId xmlns:a16="http://schemas.microsoft.com/office/drawing/2014/main" id="{5412A1E7-41D9-118E-2A02-9DEF5AC9CD26}"/>
-              </a:ext>
-            </a:extLst>
-          </p:cNvPr>
-          <p:cNvSpPr>
-            <a:spLocks noGrp="1"/>
-          </p:cNvSpPr>
-          <p:nvPr>
-            <p:ph idx="1"/>
-          </p:nvPr>
-        </p:nvSpPr>
-        <p:spPr/>
-        <p:txBody>
-          <a:bodyPr/>
-          <a:lstStyle/>
-          <a:p>
-            <a:r>
-              <a:rPr lang="ru-RU" dirty="0"/>
-              <a:t>Примерно 200 кофеен имеют цену капучино в 170 </a:t>
-            </a:r>
-            <a:r>
-              <a:rPr lang="ru-RU" dirty="0" err="1"/>
-              <a:t>руб</a:t>
-            </a:r>
-            <a:endParaRPr lang="en-US" dirty="0"/>
-          </a:p>
-        </p:txBody>
-      </p:sp>
-      <p:sp>
-        <p:nvSpPr>
-          <p:cNvPr id="4" name="Title 1">
-            <a:extLst>
-              <a:ext uri="{FF2B5EF4-FFF2-40B4-BE49-F238E27FC236}">
-                <a16:creationId xmlns:a16="http://schemas.microsoft.com/office/drawing/2014/main" id="{9A37EFAE-16C6-25DB-DDBF-2840E803119A}"/>
-              </a:ext>
-            </a:extLst>
-          </p:cNvPr>
-          <p:cNvSpPr>
-            <a:spLocks noGrp="1"/>
-          </p:cNvSpPr>
-          <p:nvPr>
-            <p:ph type="title"/>
-          </p:nvPr>
-        </p:nvSpPr>
-        <p:spPr>
-          <a:xfrm>
-            <a:off x="838200" y="365125"/>
-            <a:ext cx="10515600" cy="1325563"/>
-          </a:xfrm>
-        </p:spPr>
-        <p:txBody>
-          <a:bodyPr/>
-          <a:lstStyle/>
-          <a:p>
-            <a:r>
-              <a:rPr lang="ru-RU" dirty="0"/>
-              <a:t>Вывод для графика</a:t>
-            </a:r>
-            <a:endParaRPr lang="en-US" dirty="0"/>
-          </a:p>
-        </p:txBody>
-      </p:sp>
-    </p:spTree>
-    <p:extLst>
-      <p:ext uri="{BB962C8B-B14F-4D97-AF65-F5344CB8AC3E}">
-        <p14:creationId xmlns:p14="http://schemas.microsoft.com/office/powerpoint/2010/main" val="1392304825"/>
-      </p:ext>
-    </p:extLst>
-  </p:cSld>
-  <p:clrMapOvr>
-    <a:masterClrMapping/>
-  </p:clrMapOvr>
-</p:sld>
-</file>
-
-<file path=ppt/slides/slide24.xml><?xml version="1.0" encoding="utf-8"?>
-<p:sld xmlns:a="http://schemas.openxmlformats.org/drawingml/2006/main" xmlns:r="http://schemas.openxmlformats.org/officeDocument/2006/relationships" xmlns:p="http://schemas.openxmlformats.org/presentationml/2006/main">
-  <p:cSld>
-    <p:spTree>
-      <p:nvGrpSpPr>
-        <p:cNvPr id="1" name=""/>
-        <p:cNvGrpSpPr/>
-        <p:nvPr/>
-      </p:nvGrpSpPr>
-      <p:grpSpPr>
-        <a:xfrm>
-          <a:off x="0" y="0"/>
-          <a:ext cx="0" cy="0"/>
-          <a:chOff x="0" y="0"/>
-          <a:chExt cx="0" cy="0"/>
-        </a:xfrm>
-      </p:grpSpPr>
-      <p:sp>
-        <p:nvSpPr>
-          <p:cNvPr id="4" name="Title 1">
-            <a:extLst>
-              <a:ext uri="{FF2B5EF4-FFF2-40B4-BE49-F238E27FC236}">
-                <a16:creationId xmlns:a16="http://schemas.microsoft.com/office/drawing/2014/main" id="{45261F94-C4AB-2307-4A90-C582EF93C253}"/>
-              </a:ext>
-            </a:extLst>
-          </p:cNvPr>
-          <p:cNvSpPr>
-            <a:spLocks noGrp="1"/>
-          </p:cNvSpPr>
-          <p:nvPr>
-            <p:ph type="title"/>
-          </p:nvPr>
-        </p:nvSpPr>
-        <p:spPr>
-          <a:xfrm>
-            <a:off x="838200" y="365125"/>
-            <a:ext cx="10515600" cy="1325563"/>
-          </a:xfrm>
-        </p:spPr>
-        <p:txBody>
-          <a:bodyPr/>
-          <a:lstStyle/>
-          <a:p>
-            <a:r>
-              <a:rPr lang="ru-RU" dirty="0"/>
-              <a:t>ОСНОВНЫЕ ВЫВОДЫ</a:t>
-            </a:r>
-            <a:endParaRPr lang="en-US" dirty="0"/>
-          </a:p>
-        </p:txBody>
-      </p:sp>
-    </p:spTree>
-    <p:extLst>
-      <p:ext uri="{BB962C8B-B14F-4D97-AF65-F5344CB8AC3E}">
-        <p14:creationId xmlns:p14="http://schemas.microsoft.com/office/powerpoint/2010/main" val="2482158534"/>
-      </p:ext>
-    </p:extLst>
-  </p:cSld>
-  <p:clrMapOvr>
-    <a:masterClrMapping/>
-  </p:clrMapOvr>
-</p:sld>
-</file>
-
-<file path=ppt/slides/slide25.xml><?xml version="1.0" encoding="utf-8"?>
-<p:sld xmlns:a="http://schemas.openxmlformats.org/drawingml/2006/main" xmlns:r="http://schemas.openxmlformats.org/officeDocument/2006/relationships" xmlns:p="http://schemas.openxmlformats.org/presentationml/2006/main">
-  <p:cSld>
-    <p:spTree>
-      <p:nvGrpSpPr>
-        <p:cNvPr id="1" name=""/>
-        <p:cNvGrpSpPr/>
-        <p:nvPr/>
-      </p:nvGrpSpPr>
-      <p:grpSpPr>
-        <a:xfrm>
-          <a:off x="0" y="0"/>
-          <a:ext cx="0" cy="0"/>
-          <a:chOff x="0" y="0"/>
-          <a:chExt cx="0" cy="0"/>
-        </a:xfrm>
-      </p:grpSpPr>
-      <p:sp>
-        <p:nvSpPr>
-          <p:cNvPr id="3" name="Content Placeholder 2">
-            <a:extLst>
-              <a:ext uri="{FF2B5EF4-FFF2-40B4-BE49-F238E27FC236}">
-                <a16:creationId xmlns:a16="http://schemas.microsoft.com/office/drawing/2014/main" id="{B318946C-5DE9-CF75-B402-67DC1018CC5F}"/>
-              </a:ext>
-            </a:extLst>
-          </p:cNvPr>
-          <p:cNvSpPr>
-            <a:spLocks noGrp="1"/>
-          </p:cNvSpPr>
-          <p:nvPr>
-            <p:ph idx="1"/>
-          </p:nvPr>
-        </p:nvSpPr>
-        <p:spPr>
-          <a:xfrm>
-            <a:off x="838200" y="1253331"/>
-            <a:ext cx="10515600" cy="4351338"/>
-          </a:xfrm>
-        </p:spPr>
-        <p:txBody>
-          <a:bodyPr/>
-          <a:lstStyle/>
-          <a:p>
-            <a:r>
-              <a:rPr lang="ru-RU" dirty="0"/>
-              <a:t>1. Рынок общественного питания Москвы разнообразен и конкурентен.</a:t>
-            </a:r>
-          </a:p>
-          <a:p>
-            <a:r>
-              <a:rPr lang="ru-RU" dirty="0"/>
-              <a:t>2. Наибольшую долю занимают кафе, рестораны и кофейни.</a:t>
-            </a:r>
-          </a:p>
-          <a:p>
-            <a:r>
-              <a:rPr lang="ru-RU" dirty="0"/>
-              <a:t>3. Центральные районы имеют наибольшую концентрацию заведений.</a:t>
-            </a:r>
-          </a:p>
-          <a:p>
-            <a:r>
-              <a:rPr lang="ru-RU" dirty="0"/>
-              <a:t>4. Цены значительно варьируются в зависимости от района и категории.</a:t>
-            </a:r>
-          </a:p>
-          <a:p>
-            <a:r>
-              <a:rPr lang="ru-RU" dirty="0"/>
-              <a:t>5. Сетевые заведения составляют значительную часть рынка.</a:t>
-            </a:r>
-            <a:endParaRPr lang="en-US" dirty="0"/>
-          </a:p>
-        </p:txBody>
-      </p:sp>
-    </p:spTree>
-    <p:extLst>
-      <p:ext uri="{BB962C8B-B14F-4D97-AF65-F5344CB8AC3E}">
-        <p14:creationId xmlns:p14="http://schemas.microsoft.com/office/powerpoint/2010/main" val="2476823012"/>
-      </p:ext>
-    </p:extLst>
-  </p:cSld>
-  <p:clrMapOvr>
-    <a:masterClrMapping/>
-  </p:clrMapOvr>
-</p:sld>
-</file>
-
-<file path=ppt/slides/slide26.xml><?xml version="1.0" encoding="utf-8"?>
-<p:sld xmlns:a="http://schemas.openxmlformats.org/drawingml/2006/main" xmlns:r="http://schemas.openxmlformats.org/officeDocument/2006/relationships" xmlns:p="http://schemas.openxmlformats.org/presentationml/2006/main">
-  <p:cSld>
-    <p:spTree>
-      <p:nvGrpSpPr>
-        <p:cNvPr id="1" name=""/>
-        <p:cNvGrpSpPr/>
-        <p:nvPr/>
-      </p:nvGrpSpPr>
-      <p:grpSpPr>
-        <a:xfrm>
-          <a:off x="0" y="0"/>
-          <a:ext cx="0" cy="0"/>
-          <a:chOff x="0" y="0"/>
-          <a:chExt cx="0" cy="0"/>
-        </a:xfrm>
-      </p:grpSpPr>
-      <p:sp>
-        <p:nvSpPr>
-          <p:cNvPr id="4" name="Title 1">
-            <a:extLst>
-              <a:ext uri="{FF2B5EF4-FFF2-40B4-BE49-F238E27FC236}">
-                <a16:creationId xmlns:a16="http://schemas.microsoft.com/office/drawing/2014/main" id="{50255F9A-9FDF-0A46-828D-B6B3138407B5}"/>
-              </a:ext>
-            </a:extLst>
-          </p:cNvPr>
-          <p:cNvSpPr>
-            <a:spLocks noGrp="1"/>
-          </p:cNvSpPr>
-          <p:nvPr>
-            <p:ph type="title"/>
-          </p:nvPr>
-        </p:nvSpPr>
-        <p:spPr>
-          <a:xfrm>
-            <a:off x="838200" y="365125"/>
-            <a:ext cx="10515600" cy="1325563"/>
-          </a:xfrm>
-        </p:spPr>
-        <p:txBody>
-          <a:bodyPr/>
-          <a:lstStyle/>
-          <a:p>
-            <a:r>
-              <a:rPr lang="ru-RU" dirty="0"/>
-              <a:t>РЕКОМЕНДАЦИИ ДЛЯ ИНВЕСТОРОВ</a:t>
-            </a:r>
-            <a:endParaRPr lang="en-US" dirty="0"/>
-          </a:p>
-        </p:txBody>
-      </p:sp>
-    </p:spTree>
-    <p:extLst>
-      <p:ext uri="{BB962C8B-B14F-4D97-AF65-F5344CB8AC3E}">
-        <p14:creationId xmlns:p14="http://schemas.microsoft.com/office/powerpoint/2010/main" val="1150912623"/>
-      </p:ext>
-    </p:extLst>
-  </p:cSld>
-  <p:clrMapOvr>
-    <a:masterClrMapping/>
-  </p:clrMapOvr>
-</p:sld>
-</file>
-
-<file path=ppt/slides/slide27.xml><?xml version="1.0" encoding="utf-8"?>
-<p:sld xmlns:a="http://schemas.openxmlformats.org/drawingml/2006/main" xmlns:r="http://schemas.openxmlformats.org/officeDocument/2006/relationships" xmlns:p="http://schemas.openxmlformats.org/presentationml/2006/main">
-  <p:cSld>
-    <p:spTree>
-      <p:nvGrpSpPr>
-        <p:cNvPr id="1" name=""/>
-        <p:cNvGrpSpPr/>
-        <p:nvPr/>
-      </p:nvGrpSpPr>
-      <p:grpSpPr>
-        <a:xfrm>
-          <a:off x="0" y="0"/>
-          <a:ext cx="0" cy="0"/>
-          <a:chOff x="0" y="0"/>
-          <a:chExt cx="0" cy="0"/>
-        </a:xfrm>
-      </p:grpSpPr>
-      <p:sp>
-        <p:nvSpPr>
-          <p:cNvPr id="3" name="Content Placeholder 2">
-            <a:extLst>
-              <a:ext uri="{FF2B5EF4-FFF2-40B4-BE49-F238E27FC236}">
                 <a16:creationId xmlns:a16="http://schemas.microsoft.com/office/drawing/2014/main" id="{639975A1-EE33-DB01-21EC-729CFD8B75A0}"/>
               </a:ext>
             </a:extLst>
@@ -5289,7 +5054,7 @@
 </p:sld>
 </file>
 
-<file path=ppt/slides/slide28.xml><?xml version="1.0" encoding="utf-8"?>
+<file path=ppt/slides/slide24.xml><?xml version="1.0" encoding="utf-8"?>
 <p:sld xmlns:a="http://schemas.openxmlformats.org/drawingml/2006/main" xmlns:r="http://schemas.openxmlformats.org/officeDocument/2006/relationships" xmlns:p="http://schemas.openxmlformats.org/presentationml/2006/main">
   <p:cSld>
     <p:spTree>

--- a/BI/moscow_places/moscow_places_hw.pptx
+++ b/BI/moscow_places/moscow_places_hw.pptx
@@ -2,7 +2,7 @@
 <file path=ppt/presentation.xml><?xml version="1.0" encoding="utf-8"?>
 <p:presentation xmlns:a="http://schemas.openxmlformats.org/drawingml/2006/main" xmlns:r="http://schemas.openxmlformats.org/officeDocument/2006/relationships" xmlns:p="http://schemas.openxmlformats.org/presentationml/2006/main" saveSubsetFonts="1" autoCompressPictures="0">
   <p:sldMasterIdLst>
-    <p:sldMasterId id="2147483648" r:id="rId1"/>
+    <p:sldMasterId id="2147483732" r:id="rId1"/>
   </p:sldMasterIdLst>
   <p:sldIdLst>
     <p:sldId id="256" r:id="rId2"/>
@@ -36,7 +36,7 @@
     <a:defPPr>
       <a:defRPr lang="en-US"/>
     </a:defPPr>
-    <a:lvl1pPr marL="0" algn="l" defTabSz="914400" rtl="0" eaLnBrk="1" latinLnBrk="0" hangingPunct="1">
+    <a:lvl1pPr marL="0" algn="l" defTabSz="457200" rtl="0" eaLnBrk="1" latinLnBrk="0" hangingPunct="1">
       <a:defRPr sz="1800" kern="1200">
         <a:solidFill>
           <a:schemeClr val="tx1"/>
@@ -46,7 +46,7 @@
         <a:cs typeface="+mn-cs"/>
       </a:defRPr>
     </a:lvl1pPr>
-    <a:lvl2pPr marL="457200" algn="l" defTabSz="914400" rtl="0" eaLnBrk="1" latinLnBrk="0" hangingPunct="1">
+    <a:lvl2pPr marL="457200" algn="l" defTabSz="457200" rtl="0" eaLnBrk="1" latinLnBrk="0" hangingPunct="1">
       <a:defRPr sz="1800" kern="1200">
         <a:solidFill>
           <a:schemeClr val="tx1"/>
@@ -56,7 +56,7 @@
         <a:cs typeface="+mn-cs"/>
       </a:defRPr>
     </a:lvl2pPr>
-    <a:lvl3pPr marL="914400" algn="l" defTabSz="914400" rtl="0" eaLnBrk="1" latinLnBrk="0" hangingPunct="1">
+    <a:lvl3pPr marL="914400" algn="l" defTabSz="457200" rtl="0" eaLnBrk="1" latinLnBrk="0" hangingPunct="1">
       <a:defRPr sz="1800" kern="1200">
         <a:solidFill>
           <a:schemeClr val="tx1"/>
@@ -66,7 +66,7 @@
         <a:cs typeface="+mn-cs"/>
       </a:defRPr>
     </a:lvl3pPr>
-    <a:lvl4pPr marL="1371600" algn="l" defTabSz="914400" rtl="0" eaLnBrk="1" latinLnBrk="0" hangingPunct="1">
+    <a:lvl4pPr marL="1371600" algn="l" defTabSz="457200" rtl="0" eaLnBrk="1" latinLnBrk="0" hangingPunct="1">
       <a:defRPr sz="1800" kern="1200">
         <a:solidFill>
           <a:schemeClr val="tx1"/>
@@ -76,7 +76,7 @@
         <a:cs typeface="+mn-cs"/>
       </a:defRPr>
     </a:lvl4pPr>
-    <a:lvl5pPr marL="1828800" algn="l" defTabSz="914400" rtl="0" eaLnBrk="1" latinLnBrk="0" hangingPunct="1">
+    <a:lvl5pPr marL="1828800" algn="l" defTabSz="457200" rtl="0" eaLnBrk="1" latinLnBrk="0" hangingPunct="1">
       <a:defRPr sz="1800" kern="1200">
         <a:solidFill>
           <a:schemeClr val="tx1"/>
@@ -86,7 +86,7 @@
         <a:cs typeface="+mn-cs"/>
       </a:defRPr>
     </a:lvl5pPr>
-    <a:lvl6pPr marL="2286000" algn="l" defTabSz="914400" rtl="0" eaLnBrk="1" latinLnBrk="0" hangingPunct="1">
+    <a:lvl6pPr marL="2286000" algn="l" defTabSz="457200" rtl="0" eaLnBrk="1" latinLnBrk="0" hangingPunct="1">
       <a:defRPr sz="1800" kern="1200">
         <a:solidFill>
           <a:schemeClr val="tx1"/>
@@ -96,7 +96,7 @@
         <a:cs typeface="+mn-cs"/>
       </a:defRPr>
     </a:lvl6pPr>
-    <a:lvl7pPr marL="2743200" algn="l" defTabSz="914400" rtl="0" eaLnBrk="1" latinLnBrk="0" hangingPunct="1">
+    <a:lvl7pPr marL="2743200" algn="l" defTabSz="457200" rtl="0" eaLnBrk="1" latinLnBrk="0" hangingPunct="1">
       <a:defRPr sz="1800" kern="1200">
         <a:solidFill>
           <a:schemeClr val="tx1"/>
@@ -106,7 +106,7 @@
         <a:cs typeface="+mn-cs"/>
       </a:defRPr>
     </a:lvl7pPr>
-    <a:lvl8pPr marL="3200400" algn="l" defTabSz="914400" rtl="0" eaLnBrk="1" latinLnBrk="0" hangingPunct="1">
+    <a:lvl8pPr marL="3200400" algn="l" defTabSz="457200" rtl="0" eaLnBrk="1" latinLnBrk="0" hangingPunct="1">
       <a:defRPr sz="1800" kern="1200">
         <a:solidFill>
           <a:schemeClr val="tx1"/>
@@ -116,7 +116,7 @@
         <a:cs typeface="+mn-cs"/>
       </a:defRPr>
     </a:lvl8pPr>
-    <a:lvl9pPr marL="3657600" algn="l" defTabSz="914400" rtl="0" eaLnBrk="1" latinLnBrk="0" hangingPunct="1">
+    <a:lvl9pPr marL="3657600" algn="l" defTabSz="457200" rtl="0" eaLnBrk="1" latinLnBrk="0" hangingPunct="1">
       <a:defRPr sz="1800" kern="1200">
         <a:solidFill>
           <a:schemeClr val="tx1"/>
@@ -138,6 +138,14 @@
 <file path=ppt/slideLayouts/slideLayout1.xml><?xml version="1.0" encoding="utf-8"?>
 <p:sldLayout xmlns:a="http://schemas.openxmlformats.org/drawingml/2006/main" xmlns:r="http://schemas.openxmlformats.org/officeDocument/2006/relationships" xmlns:p="http://schemas.openxmlformats.org/presentationml/2006/main" type="title" preserve="1">
   <p:cSld name="Title Slide">
+    <p:bg>
+      <p:bgPr>
+        <a:solidFill>
+          <a:schemeClr val="accent2"/>
+        </a:solidFill>
+        <a:effectLst/>
+      </p:bgPr>
+    </p:bg>
     <p:spTree>
       <p:nvGrpSpPr>
         <p:cNvPr id="1" name=""/>
@@ -154,69 +162,82 @@
       </p:grpSpPr>
       <p:sp>
         <p:nvSpPr>
-          <p:cNvPr id="2" name="Title 1">
-            <a:extLst>
-              <a:ext uri="{FF2B5EF4-FFF2-40B4-BE49-F238E27FC236}">
-                <a16:creationId xmlns:a16="http://schemas.microsoft.com/office/drawing/2014/main" id="{238EE681-5E0D-BD63-D15C-786AA21B0837}"/>
-              </a:ext>
-            </a:extLst>
-          </p:cNvPr>
+          <p:cNvPr id="2" name="Title 1"/>
           <p:cNvSpPr>
             <a:spLocks noGrp="1"/>
           </p:cNvSpPr>
           <p:nvPr>
             <p:ph type="ctrTitle"/>
+          </p:nvPr>
+        </p:nvSpPr>
+        <p:spPr bwMode="blackWhite">
+          <a:xfrm>
+            <a:off x="1600200" y="2386744"/>
+            <a:ext cx="8991600" cy="1645920"/>
+          </a:xfrm>
+          <a:solidFill>
+            <a:srgbClr val="FFFFFF"/>
+          </a:solidFill>
+          <a:ln w="38100">
+            <a:solidFill>
+              <a:srgbClr val="404040"/>
+            </a:solidFill>
+          </a:ln>
+        </p:spPr>
+        <p:txBody>
+          <a:bodyPr lIns="274320" rIns="274320" anchor="ctr" anchorCtr="1">
+            <a:normAutofit/>
+          </a:bodyPr>
+          <a:lstStyle>
+            <a:lvl1pPr algn="ctr">
+              <a:defRPr sz="3800">
+                <a:solidFill>
+                  <a:srgbClr val="262626"/>
+                </a:solidFill>
+              </a:defRPr>
+            </a:lvl1pPr>
+          </a:lstStyle>
+          <a:p>
+            <a:r>
+              <a:rPr lang="en-US"/>
+              <a:t>Click to edit Master title style</a:t>
+            </a:r>
+            <a:endParaRPr lang="en-US" dirty="0"/>
+          </a:p>
+        </p:txBody>
+      </p:sp>
+      <p:sp>
+        <p:nvSpPr>
+          <p:cNvPr id="3" name="Subtitle 2"/>
+          <p:cNvSpPr>
+            <a:spLocks noGrp="1"/>
+          </p:cNvSpPr>
+          <p:nvPr>
+            <p:ph type="subTitle" idx="1"/>
           </p:nvPr>
         </p:nvSpPr>
         <p:spPr>
           <a:xfrm>
-            <a:off x="1524000" y="1122363"/>
-            <a:ext cx="9144000" cy="2387600"/>
+            <a:off x="2695194" y="4352544"/>
+            <a:ext cx="6801612" cy="1239894"/>
           </a:xfrm>
+          <a:noFill/>
         </p:spPr>
         <p:txBody>
-          <a:bodyPr anchor="b"/>
-          <a:lstStyle>
-            <a:lvl1pPr algn="ctr">
-              <a:defRPr sz="6000"/>
-            </a:lvl1pPr>
-          </a:lstStyle>
-          <a:p>
-            <a:r>
-              <a:rPr lang="en-US"/>
-              <a:t>Click to edit Master title style</a:t>
-            </a:r>
-          </a:p>
-        </p:txBody>
-      </p:sp>
-      <p:sp>
-        <p:nvSpPr>
-          <p:cNvPr id="3" name="Subtitle 2">
-            <a:extLst>
-              <a:ext uri="{FF2B5EF4-FFF2-40B4-BE49-F238E27FC236}">
-                <a16:creationId xmlns:a16="http://schemas.microsoft.com/office/drawing/2014/main" id="{49BD8754-D4EF-B75C-090A-790B2C15019B}"/>
-              </a:ext>
-            </a:extLst>
-          </p:cNvPr>
-          <p:cNvSpPr>
-            <a:spLocks noGrp="1"/>
-          </p:cNvSpPr>
-          <p:nvPr>
-            <p:ph type="subTitle" idx="1"/>
-          </p:nvPr>
-        </p:nvSpPr>
-        <p:spPr>
-          <a:xfrm>
-            <a:off x="1524000" y="3602038"/>
-            <a:ext cx="9144000" cy="1655762"/>
-          </a:xfrm>
-        </p:spPr>
-        <p:txBody>
-          <a:bodyPr/>
+          <a:bodyPr>
+            <a:normAutofit/>
+          </a:bodyPr>
           <a:lstStyle>
             <a:lvl1pPr marL="0" indent="0" algn="ctr">
               <a:buNone/>
-              <a:defRPr sz="2400"/>
+              <a:defRPr sz="2000">
+                <a:solidFill>
+                  <a:schemeClr val="tx1">
+                    <a:lumMod val="75000"/>
+                    <a:lumOff val="25000"/>
+                  </a:schemeClr>
+                </a:solidFill>
+              </a:defRPr>
             </a:lvl1pPr>
             <a:lvl2pPr marL="457200" indent="0" algn="ctr">
               <a:buNone/>
@@ -256,18 +277,13 @@
               <a:rPr lang="en-US"/>
               <a:t>Click to edit Master subtitle style</a:t>
             </a:r>
-          </a:p>
-        </p:txBody>
-      </p:sp>
-      <p:sp>
-        <p:nvSpPr>
-          <p:cNvPr id="4" name="Date Placeholder 3">
-            <a:extLst>
-              <a:ext uri="{FF2B5EF4-FFF2-40B4-BE49-F238E27FC236}">
-                <a16:creationId xmlns:a16="http://schemas.microsoft.com/office/drawing/2014/main" id="{BCDF513D-CA60-78FC-D030-9AA91786C065}"/>
-              </a:ext>
-            </a:extLst>
-          </p:cNvPr>
+            <a:endParaRPr lang="en-US" dirty="0"/>
+          </a:p>
+        </p:txBody>
+      </p:sp>
+      <p:sp>
+        <p:nvSpPr>
+          <p:cNvPr id="7" name="Date Placeholder 6"/>
           <p:cNvSpPr>
             <a:spLocks noGrp="1"/>
           </p:cNvSpPr>
@@ -290,13 +306,7 @@
       </p:sp>
       <p:sp>
         <p:nvSpPr>
-          <p:cNvPr id="5" name="Footer Placeholder 4">
-            <a:extLst>
-              <a:ext uri="{FF2B5EF4-FFF2-40B4-BE49-F238E27FC236}">
-                <a16:creationId xmlns:a16="http://schemas.microsoft.com/office/drawing/2014/main" id="{24E92C7A-BF6F-7C2F-47DB-877391EA6198}"/>
-              </a:ext>
-            </a:extLst>
-          </p:cNvPr>
+          <p:cNvPr id="8" name="Footer Placeholder 7"/>
           <p:cNvSpPr>
             <a:spLocks noGrp="1"/>
           </p:cNvSpPr>
@@ -315,13 +325,7 @@
       </p:sp>
       <p:sp>
         <p:nvSpPr>
-          <p:cNvPr id="6" name="Slide Number Placeholder 5">
-            <a:extLst>
-              <a:ext uri="{FF2B5EF4-FFF2-40B4-BE49-F238E27FC236}">
-                <a16:creationId xmlns:a16="http://schemas.microsoft.com/office/drawing/2014/main" id="{2D60C829-EB2E-5F01-EA1E-1E17A5DD7CDF}"/>
-              </a:ext>
-            </a:extLst>
-          </p:cNvPr>
+          <p:cNvPr id="9" name="Slide Number Placeholder 8"/>
           <p:cNvSpPr>
             <a:spLocks noGrp="1"/>
           </p:cNvSpPr>
@@ -345,12 +349,12 @@
     </p:spTree>
     <p:extLst>
       <p:ext uri="{BB962C8B-B14F-4D97-AF65-F5344CB8AC3E}">
-        <p14:creationId xmlns:p14="http://schemas.microsoft.com/office/powerpoint/2010/main" val="2894544891"/>
+        <p14:creationId xmlns:p14="http://schemas.microsoft.com/office/powerpoint/2010/main" val="1345573371"/>
       </p:ext>
     </p:extLst>
   </p:cSld>
   <p:clrMapOvr>
-    <a:masterClrMapping/>
+    <a:overrideClrMapping bg1="dk1" tx1="lt1" bg2="dk2" tx2="lt2" accent1="accent1" accent2="accent2" accent3="accent3" accent4="accent4" accent5="accent5" accent6="accent6" hlink="hlink" folHlink="folHlink"/>
   </p:clrMapOvr>
 </p:sldLayout>
 </file>
@@ -374,13 +378,7 @@
       </p:grpSpPr>
       <p:sp>
         <p:nvSpPr>
-          <p:cNvPr id="2" name="Title 1">
-            <a:extLst>
-              <a:ext uri="{FF2B5EF4-FFF2-40B4-BE49-F238E27FC236}">
-                <a16:creationId xmlns:a16="http://schemas.microsoft.com/office/drawing/2014/main" id="{AEA8E1B3-A982-FDAF-7A7C-2B2655596011}"/>
-              </a:ext>
-            </a:extLst>
-          </p:cNvPr>
+          <p:cNvPr id="2" name="Title 1"/>
           <p:cNvSpPr>
             <a:spLocks noGrp="1"/>
           </p:cNvSpPr>
@@ -397,18 +395,13 @@
               <a:rPr lang="en-US"/>
               <a:t>Click to edit Master title style</a:t>
             </a:r>
-          </a:p>
-        </p:txBody>
-      </p:sp>
-      <p:sp>
-        <p:nvSpPr>
-          <p:cNvPr id="3" name="Vertical Text Placeholder 2">
-            <a:extLst>
-              <a:ext uri="{FF2B5EF4-FFF2-40B4-BE49-F238E27FC236}">
-                <a16:creationId xmlns:a16="http://schemas.microsoft.com/office/drawing/2014/main" id="{BBECEC66-8604-1BFF-5C03-D3EB90C220F7}"/>
-              </a:ext>
-            </a:extLst>
-          </p:cNvPr>
+            <a:endParaRPr lang="en-US" dirty="0"/>
+          </a:p>
+        </p:txBody>
+      </p:sp>
+      <p:sp>
+        <p:nvSpPr>
+          <p:cNvPr id="3" name="Vertical Text Placeholder 2"/>
           <p:cNvSpPr>
             <a:spLocks noGrp="1"/>
           </p:cNvSpPr>
@@ -454,18 +447,13 @@
               <a:rPr lang="en-US"/>
               <a:t>Fifth level</a:t>
             </a:r>
-          </a:p>
-        </p:txBody>
-      </p:sp>
-      <p:sp>
-        <p:nvSpPr>
-          <p:cNvPr id="4" name="Date Placeholder 3">
-            <a:extLst>
-              <a:ext uri="{FF2B5EF4-FFF2-40B4-BE49-F238E27FC236}">
-                <a16:creationId xmlns:a16="http://schemas.microsoft.com/office/drawing/2014/main" id="{84AEA7F7-2A96-B1E9-DA05-C54B88AFDC55}"/>
-              </a:ext>
-            </a:extLst>
-          </p:cNvPr>
+            <a:endParaRPr lang="en-US" dirty="0"/>
+          </a:p>
+        </p:txBody>
+      </p:sp>
+      <p:sp>
+        <p:nvSpPr>
+          <p:cNvPr id="4" name="Date Placeholder 3"/>
           <p:cNvSpPr>
             <a:spLocks noGrp="1"/>
           </p:cNvSpPr>
@@ -488,13 +476,7 @@
       </p:sp>
       <p:sp>
         <p:nvSpPr>
-          <p:cNvPr id="5" name="Footer Placeholder 4">
-            <a:extLst>
-              <a:ext uri="{FF2B5EF4-FFF2-40B4-BE49-F238E27FC236}">
-                <a16:creationId xmlns:a16="http://schemas.microsoft.com/office/drawing/2014/main" id="{DBF0A29C-49F3-7730-C55B-0BD231AC3F4F}"/>
-              </a:ext>
-            </a:extLst>
-          </p:cNvPr>
+          <p:cNvPr id="5" name="Footer Placeholder 4"/>
           <p:cNvSpPr>
             <a:spLocks noGrp="1"/>
           </p:cNvSpPr>
@@ -513,13 +495,7 @@
       </p:sp>
       <p:sp>
         <p:nvSpPr>
-          <p:cNvPr id="6" name="Slide Number Placeholder 5">
-            <a:extLst>
-              <a:ext uri="{FF2B5EF4-FFF2-40B4-BE49-F238E27FC236}">
-                <a16:creationId xmlns:a16="http://schemas.microsoft.com/office/drawing/2014/main" id="{A51D8102-9F11-FF39-8C9D-E66EA411A197}"/>
-              </a:ext>
-            </a:extLst>
-          </p:cNvPr>
+          <p:cNvPr id="6" name="Slide Number Placeholder 5"/>
           <p:cNvSpPr>
             <a:spLocks noGrp="1"/>
           </p:cNvSpPr>
@@ -543,7 +519,7 @@
     </p:spTree>
     <p:extLst>
       <p:ext uri="{BB962C8B-B14F-4D97-AF65-F5344CB8AC3E}">
-        <p14:creationId xmlns:p14="http://schemas.microsoft.com/office/powerpoint/2010/main" val="1145684614"/>
+        <p14:creationId xmlns:p14="http://schemas.microsoft.com/office/powerpoint/2010/main" val="1368541801"/>
       </p:ext>
     </p:extLst>
   </p:cSld>
@@ -572,13 +548,7 @@
       </p:grpSpPr>
       <p:sp>
         <p:nvSpPr>
-          <p:cNvPr id="2" name="Vertical Title 1">
-            <a:extLst>
-              <a:ext uri="{FF2B5EF4-FFF2-40B4-BE49-F238E27FC236}">
-                <a16:creationId xmlns:a16="http://schemas.microsoft.com/office/drawing/2014/main" id="{565CA448-0510-F8AA-492F-ED11B54FFED5}"/>
-              </a:ext>
-            </a:extLst>
-          </p:cNvPr>
+          <p:cNvPr id="2" name="Vertical Title 1"/>
           <p:cNvSpPr>
             <a:spLocks noGrp="1"/>
           </p:cNvSpPr>
@@ -588,8 +558,8 @@
         </p:nvSpPr>
         <p:spPr>
           <a:xfrm>
-            <a:off x="8724900" y="365125"/>
-            <a:ext cx="2628900" cy="5811838"/>
+            <a:off x="8653112" y="937260"/>
+            <a:ext cx="1298608" cy="4983480"/>
           </a:xfrm>
         </p:spPr>
         <p:txBody>
@@ -600,18 +570,13 @@
               <a:rPr lang="en-US"/>
               <a:t>Click to edit Master title style</a:t>
             </a:r>
-          </a:p>
-        </p:txBody>
-      </p:sp>
-      <p:sp>
-        <p:nvSpPr>
-          <p:cNvPr id="3" name="Vertical Text Placeholder 2">
-            <a:extLst>
-              <a:ext uri="{FF2B5EF4-FFF2-40B4-BE49-F238E27FC236}">
-                <a16:creationId xmlns:a16="http://schemas.microsoft.com/office/drawing/2014/main" id="{8C0979C5-151C-5ED3-F6FB-376593B565D6}"/>
-              </a:ext>
-            </a:extLst>
-          </p:cNvPr>
+            <a:endParaRPr lang="en-US" dirty="0"/>
+          </a:p>
+        </p:txBody>
+      </p:sp>
+      <p:sp>
+        <p:nvSpPr>
+          <p:cNvPr id="3" name="Vertical Text Placeholder 2"/>
           <p:cNvSpPr>
             <a:spLocks noGrp="1"/>
           </p:cNvSpPr>
@@ -621,8 +586,8 @@
         </p:nvSpPr>
         <p:spPr>
           <a:xfrm>
-            <a:off x="838200" y="365125"/>
-            <a:ext cx="7734300" cy="5811838"/>
+            <a:off x="2231136" y="937260"/>
+            <a:ext cx="6198489" cy="4983480"/>
           </a:xfrm>
         </p:spPr>
         <p:txBody>
@@ -662,18 +627,13 @@
               <a:rPr lang="en-US"/>
               <a:t>Fifth level</a:t>
             </a:r>
-          </a:p>
-        </p:txBody>
-      </p:sp>
-      <p:sp>
-        <p:nvSpPr>
-          <p:cNvPr id="4" name="Date Placeholder 3">
-            <a:extLst>
-              <a:ext uri="{FF2B5EF4-FFF2-40B4-BE49-F238E27FC236}">
-                <a16:creationId xmlns:a16="http://schemas.microsoft.com/office/drawing/2014/main" id="{F9231CF4-89C0-0C84-346A-3B321306842C}"/>
-              </a:ext>
-            </a:extLst>
-          </p:cNvPr>
+            <a:endParaRPr lang="en-US" dirty="0"/>
+          </a:p>
+        </p:txBody>
+      </p:sp>
+      <p:sp>
+        <p:nvSpPr>
+          <p:cNvPr id="4" name="Date Placeholder 3"/>
           <p:cNvSpPr>
             <a:spLocks noGrp="1"/>
           </p:cNvSpPr>
@@ -696,13 +656,7 @@
       </p:sp>
       <p:sp>
         <p:nvSpPr>
-          <p:cNvPr id="5" name="Footer Placeholder 4">
-            <a:extLst>
-              <a:ext uri="{FF2B5EF4-FFF2-40B4-BE49-F238E27FC236}">
-                <a16:creationId xmlns:a16="http://schemas.microsoft.com/office/drawing/2014/main" id="{6BF35BEF-722E-B81C-26E0-9583A13C2C99}"/>
-              </a:ext>
-            </a:extLst>
-          </p:cNvPr>
+          <p:cNvPr id="5" name="Footer Placeholder 4"/>
           <p:cNvSpPr>
             <a:spLocks noGrp="1"/>
           </p:cNvSpPr>
@@ -721,13 +675,7 @@
       </p:sp>
       <p:sp>
         <p:nvSpPr>
-          <p:cNvPr id="6" name="Slide Number Placeholder 5">
-            <a:extLst>
-              <a:ext uri="{FF2B5EF4-FFF2-40B4-BE49-F238E27FC236}">
-                <a16:creationId xmlns:a16="http://schemas.microsoft.com/office/drawing/2014/main" id="{67121618-3CC8-C485-B37C-9740C64FAE30}"/>
-              </a:ext>
-            </a:extLst>
-          </p:cNvPr>
+          <p:cNvPr id="6" name="Slide Number Placeholder 5"/>
           <p:cNvSpPr>
             <a:spLocks noGrp="1"/>
           </p:cNvSpPr>
@@ -751,7 +699,7 @@
     </p:spTree>
     <p:extLst>
       <p:ext uri="{BB962C8B-B14F-4D97-AF65-F5344CB8AC3E}">
-        <p14:creationId xmlns:p14="http://schemas.microsoft.com/office/powerpoint/2010/main" val="228687805"/>
+        <p14:creationId xmlns:p14="http://schemas.microsoft.com/office/powerpoint/2010/main" val="3653664106"/>
       </p:ext>
     </p:extLst>
   </p:cSld>
@@ -780,13 +728,7 @@
       </p:grpSpPr>
       <p:sp>
         <p:nvSpPr>
-          <p:cNvPr id="2" name="Title 1">
-            <a:extLst>
-              <a:ext uri="{FF2B5EF4-FFF2-40B4-BE49-F238E27FC236}">
-                <a16:creationId xmlns:a16="http://schemas.microsoft.com/office/drawing/2014/main" id="{112005FC-AA60-7AA1-D9C6-D23D10E5EF9A}"/>
-              </a:ext>
-            </a:extLst>
-          </p:cNvPr>
+          <p:cNvPr id="2" name="Title 1"/>
           <p:cNvSpPr>
             <a:spLocks noGrp="1"/>
           </p:cNvSpPr>
@@ -803,18 +745,13 @@
               <a:rPr lang="en-US"/>
               <a:t>Click to edit Master title style</a:t>
             </a:r>
-          </a:p>
-        </p:txBody>
-      </p:sp>
-      <p:sp>
-        <p:nvSpPr>
-          <p:cNvPr id="3" name="Content Placeholder 2">
-            <a:extLst>
-              <a:ext uri="{FF2B5EF4-FFF2-40B4-BE49-F238E27FC236}">
-                <a16:creationId xmlns:a16="http://schemas.microsoft.com/office/drawing/2014/main" id="{093DDF24-823B-28C2-E1F4-608F942E77EF}"/>
-              </a:ext>
-            </a:extLst>
-          </p:cNvPr>
+            <a:endParaRPr lang="en-US" dirty="0"/>
+          </a:p>
+        </p:txBody>
+      </p:sp>
+      <p:sp>
+        <p:nvSpPr>
+          <p:cNvPr id="3" name="Content Placeholder 2"/>
           <p:cNvSpPr>
             <a:spLocks noGrp="1"/>
           </p:cNvSpPr>
@@ -860,18 +797,13 @@
               <a:rPr lang="en-US"/>
               <a:t>Fifth level</a:t>
             </a:r>
-          </a:p>
-        </p:txBody>
-      </p:sp>
-      <p:sp>
-        <p:nvSpPr>
-          <p:cNvPr id="4" name="Date Placeholder 3">
-            <a:extLst>
-              <a:ext uri="{FF2B5EF4-FFF2-40B4-BE49-F238E27FC236}">
-                <a16:creationId xmlns:a16="http://schemas.microsoft.com/office/drawing/2014/main" id="{880BA5BC-452A-87C6-A947-4EA76B163154}"/>
-              </a:ext>
-            </a:extLst>
-          </p:cNvPr>
+            <a:endParaRPr lang="en-US" dirty="0"/>
+          </a:p>
+        </p:txBody>
+      </p:sp>
+      <p:sp>
+        <p:nvSpPr>
+          <p:cNvPr id="7" name="Date Placeholder 6"/>
           <p:cNvSpPr>
             <a:spLocks noGrp="1"/>
           </p:cNvSpPr>
@@ -894,13 +826,7 @@
       </p:sp>
       <p:sp>
         <p:nvSpPr>
-          <p:cNvPr id="5" name="Footer Placeholder 4">
-            <a:extLst>
-              <a:ext uri="{FF2B5EF4-FFF2-40B4-BE49-F238E27FC236}">
-                <a16:creationId xmlns:a16="http://schemas.microsoft.com/office/drawing/2014/main" id="{B042B675-2A9F-8650-377B-BC3B2837E6F3}"/>
-              </a:ext>
-            </a:extLst>
-          </p:cNvPr>
+          <p:cNvPr id="8" name="Footer Placeholder 7"/>
           <p:cNvSpPr>
             <a:spLocks noGrp="1"/>
           </p:cNvSpPr>
@@ -919,13 +845,7 @@
       </p:sp>
       <p:sp>
         <p:nvSpPr>
-          <p:cNvPr id="6" name="Slide Number Placeholder 5">
-            <a:extLst>
-              <a:ext uri="{FF2B5EF4-FFF2-40B4-BE49-F238E27FC236}">
-                <a16:creationId xmlns:a16="http://schemas.microsoft.com/office/drawing/2014/main" id="{6C8C0C39-2DB1-7F1B-C1AE-542EA3E3CD0D}"/>
-              </a:ext>
-            </a:extLst>
-          </p:cNvPr>
+          <p:cNvPr id="9" name="Slide Number Placeholder 8"/>
           <p:cNvSpPr>
             <a:spLocks noGrp="1"/>
           </p:cNvSpPr>
@@ -949,7 +869,7 @@
     </p:spTree>
     <p:extLst>
       <p:ext uri="{BB962C8B-B14F-4D97-AF65-F5344CB8AC3E}">
-        <p14:creationId xmlns:p14="http://schemas.microsoft.com/office/powerpoint/2010/main" val="3570598486"/>
+        <p14:creationId xmlns:p14="http://schemas.microsoft.com/office/powerpoint/2010/main" val="324388384"/>
       </p:ext>
     </p:extLst>
   </p:cSld>
@@ -962,6 +882,14 @@
 <file path=ppt/slideLayouts/slideLayout3.xml><?xml version="1.0" encoding="utf-8"?>
 <p:sldLayout xmlns:a="http://schemas.openxmlformats.org/drawingml/2006/main" xmlns:r="http://schemas.openxmlformats.org/officeDocument/2006/relationships" xmlns:p="http://schemas.openxmlformats.org/presentationml/2006/main" type="secHead" preserve="1">
   <p:cSld name="Section Header">
+    <p:bg>
+      <p:bgPr>
+        <a:solidFill>
+          <a:schemeClr val="accent1"/>
+        </a:solidFill>
+        <a:effectLst/>
+      </p:bgPr>
+    </p:bg>
     <p:spTree>
       <p:nvGrpSpPr>
         <p:cNvPr id="1" name=""/>
@@ -978,73 +906,76 @@
       </p:grpSpPr>
       <p:sp>
         <p:nvSpPr>
-          <p:cNvPr id="2" name="Title 1">
-            <a:extLst>
-              <a:ext uri="{FF2B5EF4-FFF2-40B4-BE49-F238E27FC236}">
-                <a16:creationId xmlns:a16="http://schemas.microsoft.com/office/drawing/2014/main" id="{9949D7A4-8210-7A75-F88A-13D8A990BCE9}"/>
-              </a:ext>
-            </a:extLst>
-          </p:cNvPr>
+          <p:cNvPr id="2" name="Title 1"/>
           <p:cNvSpPr>
             <a:spLocks noGrp="1"/>
           </p:cNvSpPr>
           <p:nvPr>
             <p:ph type="title"/>
+          </p:nvPr>
+        </p:nvSpPr>
+        <p:spPr bwMode="blackWhite">
+          <a:xfrm>
+            <a:off x="1600200" y="2386744"/>
+            <a:ext cx="8991600" cy="1645920"/>
+          </a:xfrm>
+          <a:solidFill>
+            <a:srgbClr val="FFFFFF"/>
+          </a:solidFill>
+          <a:ln w="38100">
+            <a:solidFill>
+              <a:srgbClr val="404040"/>
+            </a:solidFill>
+          </a:ln>
+        </p:spPr>
+        <p:txBody>
+          <a:bodyPr lIns="274320" rIns="274320" anchor="ctr" anchorCtr="1">
+            <a:normAutofit/>
+          </a:bodyPr>
+          <a:lstStyle>
+            <a:lvl1pPr>
+              <a:defRPr sz="3800">
+                <a:solidFill>
+                  <a:srgbClr val="262626"/>
+                </a:solidFill>
+              </a:defRPr>
+            </a:lvl1pPr>
+          </a:lstStyle>
+          <a:p>
+            <a:r>
+              <a:rPr lang="en-US"/>
+              <a:t>Click to edit Master title style</a:t>
+            </a:r>
+            <a:endParaRPr lang="en-US" dirty="0"/>
+          </a:p>
+        </p:txBody>
+      </p:sp>
+      <p:sp>
+        <p:nvSpPr>
+          <p:cNvPr id="3" name="Text Placeholder 2"/>
+          <p:cNvSpPr>
+            <a:spLocks noGrp="1"/>
+          </p:cNvSpPr>
+          <p:nvPr>
+            <p:ph type="body" idx="1"/>
           </p:nvPr>
         </p:nvSpPr>
         <p:spPr>
           <a:xfrm>
-            <a:off x="831850" y="1709738"/>
-            <a:ext cx="10515600" cy="2852737"/>
+            <a:off x="2695194" y="4352465"/>
+            <a:ext cx="6801612" cy="1265082"/>
           </a:xfrm>
         </p:spPr>
         <p:txBody>
-          <a:bodyPr anchor="b"/>
-          <a:lstStyle>
-            <a:lvl1pPr>
-              <a:defRPr sz="6000"/>
-            </a:lvl1pPr>
-          </a:lstStyle>
-          <a:p>
-            <a:r>
-              <a:rPr lang="en-US"/>
-              <a:t>Click to edit Master title style</a:t>
-            </a:r>
-          </a:p>
-        </p:txBody>
-      </p:sp>
-      <p:sp>
-        <p:nvSpPr>
-          <p:cNvPr id="3" name="Text Placeholder 2">
-            <a:extLst>
-              <a:ext uri="{FF2B5EF4-FFF2-40B4-BE49-F238E27FC236}">
-                <a16:creationId xmlns:a16="http://schemas.microsoft.com/office/drawing/2014/main" id="{F33D17FD-DF42-B97D-0E46-4D650B06E819}"/>
-              </a:ext>
-            </a:extLst>
-          </p:cNvPr>
-          <p:cNvSpPr>
-            <a:spLocks noGrp="1"/>
-          </p:cNvSpPr>
-          <p:nvPr>
-            <p:ph type="body" idx="1"/>
-          </p:nvPr>
-        </p:nvSpPr>
-        <p:spPr>
-          <a:xfrm>
-            <a:off x="831850" y="4589463"/>
-            <a:ext cx="10515600" cy="1500187"/>
-          </a:xfrm>
-        </p:spPr>
-        <p:txBody>
-          <a:bodyPr/>
+          <a:bodyPr anchor="t" anchorCtr="1">
+            <a:normAutofit/>
+          </a:bodyPr>
           <a:lstStyle>
             <a:lvl1pPr marL="0" indent="0">
               <a:buNone/>
-              <a:defRPr sz="2400">
+              <a:defRPr sz="2000">
                 <a:solidFill>
-                  <a:schemeClr val="tx1">
-                    <a:tint val="82000"/>
-                  </a:schemeClr>
+                  <a:schemeClr val="tx1"/>
                 </a:solidFill>
               </a:defRPr>
             </a:lvl1pPr>
@@ -1053,7 +984,7 @@
               <a:defRPr sz="2000">
                 <a:solidFill>
                   <a:schemeClr val="tx1">
-                    <a:tint val="82000"/>
+                    <a:tint val="75000"/>
                   </a:schemeClr>
                 </a:solidFill>
               </a:defRPr>
@@ -1063,7 +994,7 @@
               <a:defRPr sz="1800">
                 <a:solidFill>
                   <a:schemeClr val="tx1">
-                    <a:tint val="82000"/>
+                    <a:tint val="75000"/>
                   </a:schemeClr>
                 </a:solidFill>
               </a:defRPr>
@@ -1073,7 +1004,7 @@
               <a:defRPr sz="1600">
                 <a:solidFill>
                   <a:schemeClr val="tx1">
-                    <a:tint val="82000"/>
+                    <a:tint val="75000"/>
                   </a:schemeClr>
                 </a:solidFill>
               </a:defRPr>
@@ -1083,7 +1014,7 @@
               <a:defRPr sz="1600">
                 <a:solidFill>
                   <a:schemeClr val="tx1">
-                    <a:tint val="82000"/>
+                    <a:tint val="75000"/>
                   </a:schemeClr>
                 </a:solidFill>
               </a:defRPr>
@@ -1093,7 +1024,7 @@
               <a:defRPr sz="1600">
                 <a:solidFill>
                   <a:schemeClr val="tx1">
-                    <a:tint val="82000"/>
+                    <a:tint val="75000"/>
                   </a:schemeClr>
                 </a:solidFill>
               </a:defRPr>
@@ -1103,7 +1034,7 @@
               <a:defRPr sz="1600">
                 <a:solidFill>
                   <a:schemeClr val="tx1">
-                    <a:tint val="82000"/>
+                    <a:tint val="75000"/>
                   </a:schemeClr>
                 </a:solidFill>
               </a:defRPr>
@@ -1113,7 +1044,7 @@
               <a:defRPr sz="1600">
                 <a:solidFill>
                   <a:schemeClr val="tx1">
-                    <a:tint val="82000"/>
+                    <a:tint val="75000"/>
                   </a:schemeClr>
                 </a:solidFill>
               </a:defRPr>
@@ -1123,7 +1054,7 @@
               <a:defRPr sz="1600">
                 <a:solidFill>
                   <a:schemeClr val="tx1">
-                    <a:tint val="82000"/>
+                    <a:tint val="75000"/>
                   </a:schemeClr>
                 </a:solidFill>
               </a:defRPr>
@@ -1140,13 +1071,7 @@
       </p:sp>
       <p:sp>
         <p:nvSpPr>
-          <p:cNvPr id="4" name="Date Placeholder 3">
-            <a:extLst>
-              <a:ext uri="{FF2B5EF4-FFF2-40B4-BE49-F238E27FC236}">
-                <a16:creationId xmlns:a16="http://schemas.microsoft.com/office/drawing/2014/main" id="{5422A90E-0FE5-6E25-1FB6-BA9EBA786072}"/>
-              </a:ext>
-            </a:extLst>
-          </p:cNvPr>
+          <p:cNvPr id="7" name="Date Placeholder 6"/>
           <p:cNvSpPr>
             <a:spLocks noGrp="1"/>
           </p:cNvSpPr>
@@ -1169,13 +1094,7 @@
       </p:sp>
       <p:sp>
         <p:nvSpPr>
-          <p:cNvPr id="5" name="Footer Placeholder 4">
-            <a:extLst>
-              <a:ext uri="{FF2B5EF4-FFF2-40B4-BE49-F238E27FC236}">
-                <a16:creationId xmlns:a16="http://schemas.microsoft.com/office/drawing/2014/main" id="{102456A6-EE16-A95E-DB08-F01FC6BB3B32}"/>
-              </a:ext>
-            </a:extLst>
-          </p:cNvPr>
+          <p:cNvPr id="8" name="Footer Placeholder 7"/>
           <p:cNvSpPr>
             <a:spLocks noGrp="1"/>
           </p:cNvSpPr>
@@ -1194,13 +1113,7 @@
       </p:sp>
       <p:sp>
         <p:nvSpPr>
-          <p:cNvPr id="6" name="Slide Number Placeholder 5">
-            <a:extLst>
-              <a:ext uri="{FF2B5EF4-FFF2-40B4-BE49-F238E27FC236}">
-                <a16:creationId xmlns:a16="http://schemas.microsoft.com/office/drawing/2014/main" id="{27FA653A-72C0-9433-A930-6CD18DD9EB9D}"/>
-              </a:ext>
-            </a:extLst>
-          </p:cNvPr>
+          <p:cNvPr id="9" name="Slide Number Placeholder 8"/>
           <p:cNvSpPr>
             <a:spLocks noGrp="1"/>
           </p:cNvSpPr>
@@ -1224,12 +1137,12 @@
     </p:spTree>
     <p:extLst>
       <p:ext uri="{BB962C8B-B14F-4D97-AF65-F5344CB8AC3E}">
-        <p14:creationId xmlns:p14="http://schemas.microsoft.com/office/powerpoint/2010/main" val="3985668528"/>
+        <p14:creationId xmlns:p14="http://schemas.microsoft.com/office/powerpoint/2010/main" val="1815954346"/>
       </p:ext>
     </p:extLst>
   </p:cSld>
   <p:clrMapOvr>
-    <a:masterClrMapping/>
+    <a:overrideClrMapping bg1="dk1" tx1="lt1" bg2="dk2" tx2="lt2" accent1="accent1" accent2="accent2" accent3="accent3" accent4="accent4" accent5="accent5" accent6="accent6" hlink="hlink" folHlink="folHlink"/>
   </p:clrMapOvr>
 </p:sldLayout>
 </file>
@@ -1253,13 +1166,7 @@
       </p:grpSpPr>
       <p:sp>
         <p:nvSpPr>
-          <p:cNvPr id="2" name="Title 1">
-            <a:extLst>
-              <a:ext uri="{FF2B5EF4-FFF2-40B4-BE49-F238E27FC236}">
-                <a16:creationId xmlns:a16="http://schemas.microsoft.com/office/drawing/2014/main" id="{44F416B0-5A84-93ED-82B9-0D9B7B1B20E6}"/>
-              </a:ext>
-            </a:extLst>
-          </p:cNvPr>
+          <p:cNvPr id="2" name="Title 1"/>
           <p:cNvSpPr>
             <a:spLocks noGrp="1"/>
           </p:cNvSpPr>
@@ -1276,18 +1183,13 @@
               <a:rPr lang="en-US"/>
               <a:t>Click to edit Master title style</a:t>
             </a:r>
-          </a:p>
-        </p:txBody>
-      </p:sp>
-      <p:sp>
-        <p:nvSpPr>
-          <p:cNvPr id="3" name="Content Placeholder 2">
-            <a:extLst>
-              <a:ext uri="{FF2B5EF4-FFF2-40B4-BE49-F238E27FC236}">
-                <a16:creationId xmlns:a16="http://schemas.microsoft.com/office/drawing/2014/main" id="{B5B0318B-DC8C-6D38-0487-5C0E78F8DD5F}"/>
-              </a:ext>
-            </a:extLst>
-          </p:cNvPr>
+            <a:endParaRPr lang="en-US" dirty="0"/>
+          </a:p>
+        </p:txBody>
+      </p:sp>
+      <p:sp>
+        <p:nvSpPr>
+          <p:cNvPr id="3" name="Content Placeholder 2"/>
           <p:cNvSpPr>
             <a:spLocks noGrp="1"/>
           </p:cNvSpPr>
@@ -1297,8 +1199,8 @@
         </p:nvSpPr>
         <p:spPr>
           <a:xfrm>
-            <a:off x="838200" y="1825625"/>
-            <a:ext cx="5181600" cy="4351338"/>
+            <a:off x="1581912" y="2638044"/>
+            <a:ext cx="4271771" cy="3101982"/>
           </a:xfrm>
         </p:spPr>
         <p:txBody>
@@ -1338,18 +1240,13 @@
               <a:rPr lang="en-US"/>
               <a:t>Fifth level</a:t>
             </a:r>
-          </a:p>
-        </p:txBody>
-      </p:sp>
-      <p:sp>
-        <p:nvSpPr>
-          <p:cNvPr id="4" name="Content Placeholder 3">
-            <a:extLst>
-              <a:ext uri="{FF2B5EF4-FFF2-40B4-BE49-F238E27FC236}">
-                <a16:creationId xmlns:a16="http://schemas.microsoft.com/office/drawing/2014/main" id="{A6ACAF71-60BE-9426-10C7-0326FD6B58C0}"/>
-              </a:ext>
-            </a:extLst>
-          </p:cNvPr>
+            <a:endParaRPr lang="en-US" dirty="0"/>
+          </a:p>
+        </p:txBody>
+      </p:sp>
+      <p:sp>
+        <p:nvSpPr>
+          <p:cNvPr id="4" name="Content Placeholder 3"/>
           <p:cNvSpPr>
             <a:spLocks noGrp="1"/>
           </p:cNvSpPr>
@@ -1359,8 +1256,8 @@
         </p:nvSpPr>
         <p:spPr>
           <a:xfrm>
-            <a:off x="6172200" y="1825625"/>
-            <a:ext cx="5181600" cy="4351338"/>
+            <a:off x="6338315" y="2638044"/>
+            <a:ext cx="4270247" cy="3101982"/>
           </a:xfrm>
         </p:spPr>
         <p:txBody>
@@ -1400,18 +1297,13 @@
               <a:rPr lang="en-US"/>
               <a:t>Fifth level</a:t>
             </a:r>
-          </a:p>
-        </p:txBody>
-      </p:sp>
-      <p:sp>
-        <p:nvSpPr>
-          <p:cNvPr id="5" name="Date Placeholder 4">
-            <a:extLst>
-              <a:ext uri="{FF2B5EF4-FFF2-40B4-BE49-F238E27FC236}">
-                <a16:creationId xmlns:a16="http://schemas.microsoft.com/office/drawing/2014/main" id="{ED8387E6-AE6E-07AB-93AC-399D8F8A734E}"/>
-              </a:ext>
-            </a:extLst>
-          </p:cNvPr>
+            <a:endParaRPr lang="en-US" dirty="0"/>
+          </a:p>
+        </p:txBody>
+      </p:sp>
+      <p:sp>
+        <p:nvSpPr>
+          <p:cNvPr id="8" name="Date Placeholder 7"/>
           <p:cNvSpPr>
             <a:spLocks noGrp="1"/>
           </p:cNvSpPr>
@@ -1434,13 +1326,7 @@
       </p:sp>
       <p:sp>
         <p:nvSpPr>
-          <p:cNvPr id="6" name="Footer Placeholder 5">
-            <a:extLst>
-              <a:ext uri="{FF2B5EF4-FFF2-40B4-BE49-F238E27FC236}">
-                <a16:creationId xmlns:a16="http://schemas.microsoft.com/office/drawing/2014/main" id="{EE2C7BEB-C37D-B75B-2862-598B42F57661}"/>
-              </a:ext>
-            </a:extLst>
-          </p:cNvPr>
+          <p:cNvPr id="9" name="Footer Placeholder 8"/>
           <p:cNvSpPr>
             <a:spLocks noGrp="1"/>
           </p:cNvSpPr>
@@ -1459,13 +1345,7 @@
       </p:sp>
       <p:sp>
         <p:nvSpPr>
-          <p:cNvPr id="7" name="Slide Number Placeholder 6">
-            <a:extLst>
-              <a:ext uri="{FF2B5EF4-FFF2-40B4-BE49-F238E27FC236}">
-                <a16:creationId xmlns:a16="http://schemas.microsoft.com/office/drawing/2014/main" id="{233B0554-A1F6-0390-7BA0-C26695ED698C}"/>
-              </a:ext>
-            </a:extLst>
-          </p:cNvPr>
+          <p:cNvPr id="10" name="Slide Number Placeholder 9"/>
           <p:cNvSpPr>
             <a:spLocks noGrp="1"/>
           </p:cNvSpPr>
@@ -1489,7 +1369,7 @@
     </p:spTree>
     <p:extLst>
       <p:ext uri="{BB962C8B-B14F-4D97-AF65-F5344CB8AC3E}">
-        <p14:creationId xmlns:p14="http://schemas.microsoft.com/office/powerpoint/2010/main" val="2830388525"/>
+        <p14:creationId xmlns:p14="http://schemas.microsoft.com/office/powerpoint/2010/main" val="520309003"/>
       </p:ext>
     </p:extLst>
   </p:cSld>
@@ -1518,69 +1398,38 @@
       </p:grpSpPr>
       <p:sp>
         <p:nvSpPr>
-          <p:cNvPr id="2" name="Title 1">
-            <a:extLst>
-              <a:ext uri="{FF2B5EF4-FFF2-40B4-BE49-F238E27FC236}">
-                <a16:creationId xmlns:a16="http://schemas.microsoft.com/office/drawing/2014/main" id="{89331CA8-031A-6094-9722-4C3B81D1CB50}"/>
-              </a:ext>
-            </a:extLst>
-          </p:cNvPr>
-          <p:cNvSpPr>
-            <a:spLocks noGrp="1"/>
-          </p:cNvSpPr>
-          <p:nvPr>
-            <p:ph type="title"/>
+          <p:cNvPr id="3" name="Text Placeholder 2"/>
+          <p:cNvSpPr>
+            <a:spLocks noGrp="1"/>
+          </p:cNvSpPr>
+          <p:nvPr>
+            <p:ph type="body" idx="1"/>
           </p:nvPr>
         </p:nvSpPr>
         <p:spPr>
           <a:xfrm>
-            <a:off x="839788" y="365125"/>
-            <a:ext cx="10515600" cy="1325563"/>
+            <a:off x="1583436" y="2313433"/>
+            <a:ext cx="4270248" cy="704087"/>
           </a:xfrm>
         </p:spPr>
         <p:txBody>
-          <a:bodyPr/>
-          <a:lstStyle/>
-          <a:p>
-            <a:r>
-              <a:rPr lang="en-US"/>
-              <a:t>Click to edit Master title style</a:t>
-            </a:r>
-          </a:p>
-        </p:txBody>
-      </p:sp>
-      <p:sp>
-        <p:nvSpPr>
-          <p:cNvPr id="3" name="Text Placeholder 2">
-            <a:extLst>
-              <a:ext uri="{FF2B5EF4-FFF2-40B4-BE49-F238E27FC236}">
-                <a16:creationId xmlns:a16="http://schemas.microsoft.com/office/drawing/2014/main" id="{4FF2EC21-5B78-9826-018E-0D4D3E611A7C}"/>
-              </a:ext>
-            </a:extLst>
-          </p:cNvPr>
-          <p:cNvSpPr>
-            <a:spLocks noGrp="1"/>
-          </p:cNvSpPr>
-          <p:nvPr>
-            <p:ph type="body" idx="1"/>
-          </p:nvPr>
-        </p:nvSpPr>
-        <p:spPr>
-          <a:xfrm>
-            <a:off x="839788" y="1681163"/>
-            <a:ext cx="5157787" cy="823912"/>
-          </a:xfrm>
-        </p:spPr>
-        <p:txBody>
-          <a:bodyPr anchor="b"/>
+          <a:bodyPr anchor="b" anchorCtr="1">
+            <a:normAutofit/>
+          </a:bodyPr>
           <a:lstStyle>
-            <a:lvl1pPr marL="0" indent="0">
+            <a:lvl1pPr marL="0" indent="0" algn="ctr">
               <a:buNone/>
-              <a:defRPr sz="2400" b="1"/>
+              <a:defRPr sz="1900" b="0" cap="all" spc="100" baseline="0">
+                <a:solidFill>
+                  <a:schemeClr val="accent2">
+                    <a:lumMod val="75000"/>
+                  </a:schemeClr>
+                </a:solidFill>
+              </a:defRPr>
             </a:lvl1pPr>
             <a:lvl2pPr marL="457200" indent="0">
               <a:buNone/>
-              <a:defRPr sz="2000" b="1"/>
+              <a:defRPr sz="1900" b="1"/>
             </a:lvl2pPr>
             <a:lvl3pPr marL="914400" indent="0">
               <a:buNone/>
@@ -1622,13 +1471,7 @@
       </p:sp>
       <p:sp>
         <p:nvSpPr>
-          <p:cNvPr id="4" name="Content Placeholder 3">
-            <a:extLst>
-              <a:ext uri="{FF2B5EF4-FFF2-40B4-BE49-F238E27FC236}">
-                <a16:creationId xmlns:a16="http://schemas.microsoft.com/office/drawing/2014/main" id="{0F5F4A79-04A6-D0A1-D106-CD6BB897FD93}"/>
-              </a:ext>
-            </a:extLst>
-          </p:cNvPr>
+          <p:cNvPr id="4" name="Content Placeholder 3"/>
           <p:cNvSpPr>
             <a:spLocks noGrp="1"/>
           </p:cNvSpPr>
@@ -1638,8 +1481,8 @@
         </p:nvSpPr>
         <p:spPr>
           <a:xfrm>
-            <a:off x="839788" y="2505075"/>
-            <a:ext cx="5157787" cy="3684588"/>
+            <a:off x="1583436" y="3143250"/>
+            <a:ext cx="4270248" cy="2596776"/>
           </a:xfrm>
         </p:spPr>
         <p:txBody>
@@ -1679,41 +1522,105 @@
               <a:rPr lang="en-US"/>
               <a:t>Fifth level</a:t>
             </a:r>
-          </a:p>
-        </p:txBody>
-      </p:sp>
-      <p:sp>
-        <p:nvSpPr>
-          <p:cNvPr id="5" name="Text Placeholder 4">
-            <a:extLst>
-              <a:ext uri="{FF2B5EF4-FFF2-40B4-BE49-F238E27FC236}">
-                <a16:creationId xmlns:a16="http://schemas.microsoft.com/office/drawing/2014/main" id="{7973ECB5-92FE-4418-878D-9D2EEF77EBEB}"/>
-              </a:ext>
-            </a:extLst>
-          </p:cNvPr>
-          <p:cNvSpPr>
-            <a:spLocks noGrp="1"/>
-          </p:cNvSpPr>
-          <p:nvPr>
-            <p:ph type="body" sz="quarter" idx="3"/>
+            <a:endParaRPr lang="en-US" dirty="0"/>
+          </a:p>
+        </p:txBody>
+      </p:sp>
+      <p:sp>
+        <p:nvSpPr>
+          <p:cNvPr id="6" name="Content Placeholder 5"/>
+          <p:cNvSpPr>
+            <a:spLocks noGrp="1"/>
+          </p:cNvSpPr>
+          <p:nvPr>
+            <p:ph sz="quarter" idx="4"/>
           </p:nvPr>
         </p:nvSpPr>
         <p:spPr>
           <a:xfrm>
-            <a:off x="6172200" y="1681163"/>
-            <a:ext cx="5183188" cy="823912"/>
+            <a:off x="6338316" y="3143250"/>
+            <a:ext cx="4253484" cy="2596776"/>
           </a:xfrm>
         </p:spPr>
         <p:txBody>
-          <a:bodyPr anchor="b"/>
+          <a:bodyPr/>
           <a:lstStyle>
-            <a:lvl1pPr marL="0" indent="0">
+            <a:lvl5pPr>
+              <a:defRPr/>
+            </a:lvl5pPr>
+          </a:lstStyle>
+          <a:p>
+            <a:pPr lvl="0"/>
+            <a:r>
+              <a:rPr lang="en-US"/>
+              <a:t>Click to edit Master text styles</a:t>
+            </a:r>
+          </a:p>
+          <a:p>
+            <a:pPr lvl="1"/>
+            <a:r>
+              <a:rPr lang="en-US"/>
+              <a:t>Second level</a:t>
+            </a:r>
+          </a:p>
+          <a:p>
+            <a:pPr lvl="2"/>
+            <a:r>
+              <a:rPr lang="en-US"/>
+              <a:t>Third level</a:t>
+            </a:r>
+          </a:p>
+          <a:p>
+            <a:pPr lvl="3"/>
+            <a:r>
+              <a:rPr lang="en-US"/>
+              <a:t>Fourth level</a:t>
+            </a:r>
+          </a:p>
+          <a:p>
+            <a:pPr lvl="4"/>
+            <a:r>
+              <a:rPr lang="en-US"/>
+              <a:t>Fifth level</a:t>
+            </a:r>
+            <a:endParaRPr lang="en-US" dirty="0"/>
+          </a:p>
+        </p:txBody>
+      </p:sp>
+      <p:sp>
+        <p:nvSpPr>
+          <p:cNvPr id="11" name="Text Placeholder 4"/>
+          <p:cNvSpPr>
+            <a:spLocks noGrp="1"/>
+          </p:cNvSpPr>
+          <p:nvPr>
+            <p:ph type="body" sz="quarter" idx="13"/>
+          </p:nvPr>
+        </p:nvSpPr>
+        <p:spPr>
+          <a:xfrm>
+            <a:off x="6338316" y="2313433"/>
+            <a:ext cx="4270248" cy="704087"/>
+          </a:xfrm>
+        </p:spPr>
+        <p:txBody>
+          <a:bodyPr anchor="b" anchorCtr="1">
+            <a:normAutofit/>
+          </a:bodyPr>
+          <a:lstStyle>
+            <a:lvl1pPr marL="0" indent="0" algn="ctr">
               <a:buNone/>
-              <a:defRPr sz="2400" b="1"/>
+              <a:defRPr sz="1900" b="0" cap="all" spc="100" baseline="0">
+                <a:solidFill>
+                  <a:schemeClr val="accent2">
+                    <a:lumMod val="75000"/>
+                  </a:schemeClr>
+                </a:solidFill>
+              </a:defRPr>
             </a:lvl1pPr>
             <a:lvl2pPr marL="457200" indent="0">
               <a:buNone/>
-              <a:defRPr sz="2000" b="1"/>
+              <a:defRPr sz="1900" b="1"/>
             </a:lvl2pPr>
             <a:lvl3pPr marL="914400" indent="0">
               <a:buNone/>
@@ -1755,75 +1662,7 @@
       </p:sp>
       <p:sp>
         <p:nvSpPr>
-          <p:cNvPr id="6" name="Content Placeholder 5">
-            <a:extLst>
-              <a:ext uri="{FF2B5EF4-FFF2-40B4-BE49-F238E27FC236}">
-                <a16:creationId xmlns:a16="http://schemas.microsoft.com/office/drawing/2014/main" id="{39FE5409-814B-5B27-908B-E5EE377B81F0}"/>
-              </a:ext>
-            </a:extLst>
-          </p:cNvPr>
-          <p:cNvSpPr>
-            <a:spLocks noGrp="1"/>
-          </p:cNvSpPr>
-          <p:nvPr>
-            <p:ph sz="quarter" idx="4"/>
-          </p:nvPr>
-        </p:nvSpPr>
-        <p:spPr>
-          <a:xfrm>
-            <a:off x="6172200" y="2505075"/>
-            <a:ext cx="5183188" cy="3684588"/>
-          </a:xfrm>
-        </p:spPr>
-        <p:txBody>
-          <a:bodyPr/>
-          <a:lstStyle/>
-          <a:p>
-            <a:pPr lvl="0"/>
-            <a:r>
-              <a:rPr lang="en-US"/>
-              <a:t>Click to edit Master text styles</a:t>
-            </a:r>
-          </a:p>
-          <a:p>
-            <a:pPr lvl="1"/>
-            <a:r>
-              <a:rPr lang="en-US"/>
-              <a:t>Second level</a:t>
-            </a:r>
-          </a:p>
-          <a:p>
-            <a:pPr lvl="2"/>
-            <a:r>
-              <a:rPr lang="en-US"/>
-              <a:t>Third level</a:t>
-            </a:r>
-          </a:p>
-          <a:p>
-            <a:pPr lvl="3"/>
-            <a:r>
-              <a:rPr lang="en-US"/>
-              <a:t>Fourth level</a:t>
-            </a:r>
-          </a:p>
-          <a:p>
-            <a:pPr lvl="4"/>
-            <a:r>
-              <a:rPr lang="en-US"/>
-              <a:t>Fifth level</a:t>
-            </a:r>
-          </a:p>
-        </p:txBody>
-      </p:sp>
-      <p:sp>
-        <p:nvSpPr>
-          <p:cNvPr id="7" name="Date Placeholder 6">
-            <a:extLst>
-              <a:ext uri="{FF2B5EF4-FFF2-40B4-BE49-F238E27FC236}">
-                <a16:creationId xmlns:a16="http://schemas.microsoft.com/office/drawing/2014/main" id="{522B9A59-8C81-ED5B-5AAB-889D898BD79E}"/>
-              </a:ext>
-            </a:extLst>
-          </p:cNvPr>
+          <p:cNvPr id="7" name="Date Placeholder 6"/>
           <p:cNvSpPr>
             <a:spLocks noGrp="1"/>
           </p:cNvSpPr>
@@ -1846,13 +1685,7 @@
       </p:sp>
       <p:sp>
         <p:nvSpPr>
-          <p:cNvPr id="8" name="Footer Placeholder 7">
-            <a:extLst>
-              <a:ext uri="{FF2B5EF4-FFF2-40B4-BE49-F238E27FC236}">
-                <a16:creationId xmlns:a16="http://schemas.microsoft.com/office/drawing/2014/main" id="{F0ACC451-71DB-3A47-B477-0EA9EBFAA365}"/>
-              </a:ext>
-            </a:extLst>
-          </p:cNvPr>
+          <p:cNvPr id="8" name="Footer Placeholder 7"/>
           <p:cNvSpPr>
             <a:spLocks noGrp="1"/>
           </p:cNvSpPr>
@@ -1871,13 +1704,7 @@
       </p:sp>
       <p:sp>
         <p:nvSpPr>
-          <p:cNvPr id="9" name="Slide Number Placeholder 8">
-            <a:extLst>
-              <a:ext uri="{FF2B5EF4-FFF2-40B4-BE49-F238E27FC236}">
-                <a16:creationId xmlns:a16="http://schemas.microsoft.com/office/drawing/2014/main" id="{A5CFC22E-6AA8-AE01-B298-5B4550AE0E14}"/>
-              </a:ext>
-            </a:extLst>
-          </p:cNvPr>
+          <p:cNvPr id="9" name="Slide Number Placeholder 8"/>
           <p:cNvSpPr>
             <a:spLocks noGrp="1"/>
           </p:cNvSpPr>
@@ -1898,10 +1725,33 @@
           </a:p>
         </p:txBody>
       </p:sp>
+      <p:sp>
+        <p:nvSpPr>
+          <p:cNvPr id="10" name="Title 9"/>
+          <p:cNvSpPr>
+            <a:spLocks noGrp="1"/>
+          </p:cNvSpPr>
+          <p:nvPr>
+            <p:ph type="title"/>
+          </p:nvPr>
+        </p:nvSpPr>
+        <p:spPr/>
+        <p:txBody>
+          <a:bodyPr/>
+          <a:lstStyle/>
+          <a:p>
+            <a:r>
+              <a:rPr lang="en-US"/>
+              <a:t>Click to edit Master title style</a:t>
+            </a:r>
+            <a:endParaRPr lang="en-US" dirty="0"/>
+          </a:p>
+        </p:txBody>
+      </p:sp>
     </p:spTree>
     <p:extLst>
       <p:ext uri="{BB962C8B-B14F-4D97-AF65-F5344CB8AC3E}">
-        <p14:creationId xmlns:p14="http://schemas.microsoft.com/office/powerpoint/2010/main" val="1388240549"/>
+        <p14:creationId xmlns:p14="http://schemas.microsoft.com/office/powerpoint/2010/main" val="2314528050"/>
       </p:ext>
     </p:extLst>
   </p:cSld>
@@ -1930,13 +1780,7 @@
       </p:grpSpPr>
       <p:sp>
         <p:nvSpPr>
-          <p:cNvPr id="2" name="Title 1">
-            <a:extLst>
-              <a:ext uri="{FF2B5EF4-FFF2-40B4-BE49-F238E27FC236}">
-                <a16:creationId xmlns:a16="http://schemas.microsoft.com/office/drawing/2014/main" id="{AC82A2EC-8E5D-60A3-7BA9-04460F765C38}"/>
-              </a:ext>
-            </a:extLst>
-          </p:cNvPr>
+          <p:cNvPr id="2" name="Title 1"/>
           <p:cNvSpPr>
             <a:spLocks noGrp="1"/>
           </p:cNvSpPr>
@@ -1953,18 +1797,13 @@
               <a:rPr lang="en-US"/>
               <a:t>Click to edit Master title style</a:t>
             </a:r>
-          </a:p>
-        </p:txBody>
-      </p:sp>
-      <p:sp>
-        <p:nvSpPr>
-          <p:cNvPr id="3" name="Date Placeholder 2">
-            <a:extLst>
-              <a:ext uri="{FF2B5EF4-FFF2-40B4-BE49-F238E27FC236}">
-                <a16:creationId xmlns:a16="http://schemas.microsoft.com/office/drawing/2014/main" id="{E3AB77A8-DC83-71C4-2AF0-FB9D8F76F1AC}"/>
-              </a:ext>
-            </a:extLst>
-          </p:cNvPr>
+            <a:endParaRPr lang="en-US" dirty="0"/>
+          </a:p>
+        </p:txBody>
+      </p:sp>
+      <p:sp>
+        <p:nvSpPr>
+          <p:cNvPr id="3" name="Date Placeholder 2"/>
           <p:cNvSpPr>
             <a:spLocks noGrp="1"/>
           </p:cNvSpPr>
@@ -1987,13 +1826,7 @@
       </p:sp>
       <p:sp>
         <p:nvSpPr>
-          <p:cNvPr id="4" name="Footer Placeholder 3">
-            <a:extLst>
-              <a:ext uri="{FF2B5EF4-FFF2-40B4-BE49-F238E27FC236}">
-                <a16:creationId xmlns:a16="http://schemas.microsoft.com/office/drawing/2014/main" id="{D3E4AF62-E386-665C-3F14-659E9E63D4E0}"/>
-              </a:ext>
-            </a:extLst>
-          </p:cNvPr>
+          <p:cNvPr id="4" name="Footer Placeholder 3"/>
           <p:cNvSpPr>
             <a:spLocks noGrp="1"/>
           </p:cNvSpPr>
@@ -2012,13 +1845,7 @@
       </p:sp>
       <p:sp>
         <p:nvSpPr>
-          <p:cNvPr id="5" name="Slide Number Placeholder 4">
-            <a:extLst>
-              <a:ext uri="{FF2B5EF4-FFF2-40B4-BE49-F238E27FC236}">
-                <a16:creationId xmlns:a16="http://schemas.microsoft.com/office/drawing/2014/main" id="{56A85D04-F778-29E5-4D36-1E60A8A8F2E3}"/>
-              </a:ext>
-            </a:extLst>
-          </p:cNvPr>
+          <p:cNvPr id="5" name="Slide Number Placeholder 4"/>
           <p:cNvSpPr>
             <a:spLocks noGrp="1"/>
           </p:cNvSpPr>
@@ -2042,7 +1869,7 @@
     </p:spTree>
     <p:extLst>
       <p:ext uri="{BB962C8B-B14F-4D97-AF65-F5344CB8AC3E}">
-        <p14:creationId xmlns:p14="http://schemas.microsoft.com/office/powerpoint/2010/main" val="2154952359"/>
+        <p14:creationId xmlns:p14="http://schemas.microsoft.com/office/powerpoint/2010/main" val="2075257284"/>
       </p:ext>
     </p:extLst>
   </p:cSld>
@@ -2071,13 +1898,7 @@
       </p:grpSpPr>
       <p:sp>
         <p:nvSpPr>
-          <p:cNvPr id="2" name="Date Placeholder 1">
-            <a:extLst>
-              <a:ext uri="{FF2B5EF4-FFF2-40B4-BE49-F238E27FC236}">
-                <a16:creationId xmlns:a16="http://schemas.microsoft.com/office/drawing/2014/main" id="{D5D41B88-1235-4EB6-66EA-C57DEF223876}"/>
-              </a:ext>
-            </a:extLst>
-          </p:cNvPr>
+          <p:cNvPr id="2" name="Date Placeholder 1"/>
           <p:cNvSpPr>
             <a:spLocks noGrp="1"/>
           </p:cNvSpPr>
@@ -2100,13 +1921,7 @@
       </p:sp>
       <p:sp>
         <p:nvSpPr>
-          <p:cNvPr id="3" name="Footer Placeholder 2">
-            <a:extLst>
-              <a:ext uri="{FF2B5EF4-FFF2-40B4-BE49-F238E27FC236}">
-                <a16:creationId xmlns:a16="http://schemas.microsoft.com/office/drawing/2014/main" id="{8895EB61-0EB3-1F38-6B49-2B46263F5A32}"/>
-              </a:ext>
-            </a:extLst>
-          </p:cNvPr>
+          <p:cNvPr id="3" name="Footer Placeholder 2"/>
           <p:cNvSpPr>
             <a:spLocks noGrp="1"/>
           </p:cNvSpPr>
@@ -2125,13 +1940,7 @@
       </p:sp>
       <p:sp>
         <p:nvSpPr>
-          <p:cNvPr id="4" name="Slide Number Placeholder 3">
-            <a:extLst>
-              <a:ext uri="{FF2B5EF4-FFF2-40B4-BE49-F238E27FC236}">
-                <a16:creationId xmlns:a16="http://schemas.microsoft.com/office/drawing/2014/main" id="{BCDF05FC-421D-FA74-FF92-43D9601A6722}"/>
-              </a:ext>
-            </a:extLst>
-          </p:cNvPr>
+          <p:cNvPr id="4" name="Slide Number Placeholder 3"/>
           <p:cNvSpPr>
             <a:spLocks noGrp="1"/>
           </p:cNvSpPr>
@@ -2155,7 +1964,7 @@
     </p:spTree>
     <p:extLst>
       <p:ext uri="{BB962C8B-B14F-4D97-AF65-F5344CB8AC3E}">
-        <p14:creationId xmlns:p14="http://schemas.microsoft.com/office/powerpoint/2010/main" val="4044535271"/>
+        <p14:creationId xmlns:p14="http://schemas.microsoft.com/office/powerpoint/2010/main" val="730073076"/>
       </p:ext>
     </p:extLst>
   </p:cSld>
@@ -2184,159 +1993,223 @@
       </p:grpSpPr>
       <p:sp>
         <p:nvSpPr>
-          <p:cNvPr id="2" name="Title 1">
-            <a:extLst>
-              <a:ext uri="{FF2B5EF4-FFF2-40B4-BE49-F238E27FC236}">
-                <a16:creationId xmlns:a16="http://schemas.microsoft.com/office/drawing/2014/main" id="{3152ED7C-E957-970A-D23C-153882B5734D}"/>
-              </a:ext>
-            </a:extLst>
-          </p:cNvPr>
-          <p:cNvSpPr>
-            <a:spLocks noGrp="1"/>
-          </p:cNvSpPr>
-          <p:nvPr>
-            <p:ph type="title"/>
-          </p:nvPr>
+          <p:cNvPr id="26" name="Rectangle 25"/>
+          <p:cNvSpPr/>
+          <p:nvPr/>
         </p:nvSpPr>
         <p:spPr>
           <a:xfrm>
-            <a:off x="839788" y="457200"/>
-            <a:ext cx="3932237" cy="1600200"/>
+            <a:off x="0" y="0"/>
+            <a:ext cx="6096000" cy="6858000"/>
+          </a:xfrm>
+          <a:prstGeom prst="rect">
+            <a:avLst/>
+          </a:prstGeom>
+          <a:solidFill>
+            <a:schemeClr val="accent2"/>
+          </a:solidFill>
+          <a:ln>
+            <a:noFill/>
+          </a:ln>
+        </p:spPr>
+        <p:style>
+          <a:lnRef idx="2">
+            <a:schemeClr val="accent1">
+              <a:shade val="50000"/>
+            </a:schemeClr>
+          </a:lnRef>
+          <a:fillRef idx="1">
+            <a:schemeClr val="accent1"/>
+          </a:fillRef>
+          <a:effectRef idx="0">
+            <a:schemeClr val="accent1"/>
+          </a:effectRef>
+          <a:fontRef idx="minor">
+            <a:schemeClr val="lt1"/>
+          </a:fontRef>
+        </p:style>
+      </p:sp>
+      <p:sp>
+        <p:nvSpPr>
+          <p:cNvPr id="2" name="Title 1"/>
+          <p:cNvSpPr>
+            <a:spLocks noGrp="1"/>
+          </p:cNvSpPr>
+          <p:nvPr>
+            <p:ph type="title"/>
+          </p:nvPr>
+        </p:nvSpPr>
+        <p:spPr bwMode="blackWhite">
+          <a:xfrm>
+            <a:off x="804672" y="2243828"/>
+            <a:ext cx="4486656" cy="1141497"/>
+          </a:xfrm>
+          <a:solidFill>
+            <a:srgbClr val="FFFFFF"/>
+          </a:solidFill>
+          <a:ln>
+            <a:solidFill>
+              <a:srgbClr val="404040"/>
+            </a:solidFill>
+          </a:ln>
+        </p:spPr>
+        <p:txBody>
+          <a:bodyPr anchor="ctr" anchorCtr="1">
+            <a:normAutofit/>
+          </a:bodyPr>
+          <a:lstStyle>
+            <a:lvl1pPr>
+              <a:defRPr sz="2200">
+                <a:solidFill>
+                  <a:srgbClr val="262626"/>
+                </a:solidFill>
+              </a:defRPr>
+            </a:lvl1pPr>
+          </a:lstStyle>
+          <a:p>
+            <a:r>
+              <a:rPr lang="en-US"/>
+              <a:t>Click to edit Master title style</a:t>
+            </a:r>
+            <a:endParaRPr lang="en-US" dirty="0"/>
+          </a:p>
+        </p:txBody>
+      </p:sp>
+      <p:sp>
+        <p:nvSpPr>
+          <p:cNvPr id="3" name="Content Placeholder 2"/>
+          <p:cNvSpPr>
+            <a:spLocks noGrp="1"/>
+          </p:cNvSpPr>
+          <p:nvPr>
+            <p:ph idx="1"/>
+          </p:nvPr>
+        </p:nvSpPr>
+        <p:spPr>
+          <a:xfrm>
+            <a:off x="6736080" y="804672"/>
+            <a:ext cx="4815840" cy="5248656"/>
           </a:xfrm>
         </p:spPr>
         <p:txBody>
-          <a:bodyPr anchor="b"/>
+          <a:bodyPr>
+            <a:normAutofit/>
+          </a:bodyPr>
           <a:lstStyle>
             <a:lvl1pPr>
-              <a:defRPr sz="3200"/>
+              <a:defRPr sz="1900">
+                <a:solidFill>
+                  <a:schemeClr val="tx1"/>
+                </a:solidFill>
+              </a:defRPr>
             </a:lvl1pPr>
+            <a:lvl2pPr>
+              <a:defRPr sz="1600">
+                <a:solidFill>
+                  <a:schemeClr val="tx1"/>
+                </a:solidFill>
+              </a:defRPr>
+            </a:lvl2pPr>
+            <a:lvl3pPr>
+              <a:defRPr sz="1600">
+                <a:solidFill>
+                  <a:schemeClr val="tx1"/>
+                </a:solidFill>
+              </a:defRPr>
+            </a:lvl3pPr>
+            <a:lvl4pPr>
+              <a:defRPr sz="1600">
+                <a:solidFill>
+                  <a:schemeClr val="tx1"/>
+                </a:solidFill>
+              </a:defRPr>
+            </a:lvl4pPr>
+            <a:lvl5pPr>
+              <a:defRPr sz="1600">
+                <a:solidFill>
+                  <a:schemeClr val="tx1"/>
+                </a:solidFill>
+              </a:defRPr>
+            </a:lvl5pPr>
+            <a:lvl6pPr>
+              <a:defRPr sz="1600"/>
+            </a:lvl6pPr>
+            <a:lvl7pPr>
+              <a:defRPr sz="1600"/>
+            </a:lvl7pPr>
+            <a:lvl8pPr>
+              <a:defRPr sz="1600"/>
+            </a:lvl8pPr>
+            <a:lvl9pPr>
+              <a:defRPr sz="1600"/>
+            </a:lvl9pPr>
           </a:lstStyle>
           <a:p>
+            <a:pPr lvl="0"/>
             <a:r>
               <a:rPr lang="en-US"/>
-              <a:t>Click to edit Master title style</a:t>
-            </a:r>
-          </a:p>
-        </p:txBody>
-      </p:sp>
-      <p:sp>
-        <p:nvSpPr>
-          <p:cNvPr id="3" name="Content Placeholder 2">
-            <a:extLst>
-              <a:ext uri="{FF2B5EF4-FFF2-40B4-BE49-F238E27FC236}">
-                <a16:creationId xmlns:a16="http://schemas.microsoft.com/office/drawing/2014/main" id="{8272783E-EF81-1883-B2DA-00B253B40C6F}"/>
-              </a:ext>
-            </a:extLst>
-          </p:cNvPr>
-          <p:cNvSpPr>
-            <a:spLocks noGrp="1"/>
-          </p:cNvSpPr>
-          <p:nvPr>
-            <p:ph idx="1"/>
+              <a:t>Click to edit Master text styles</a:t>
+            </a:r>
+          </a:p>
+          <a:p>
+            <a:pPr lvl="1"/>
+            <a:r>
+              <a:rPr lang="en-US"/>
+              <a:t>Second level</a:t>
+            </a:r>
+          </a:p>
+          <a:p>
+            <a:pPr lvl="2"/>
+            <a:r>
+              <a:rPr lang="en-US"/>
+              <a:t>Third level</a:t>
+            </a:r>
+          </a:p>
+          <a:p>
+            <a:pPr lvl="3"/>
+            <a:r>
+              <a:rPr lang="en-US"/>
+              <a:t>Fourth level</a:t>
+            </a:r>
+          </a:p>
+          <a:p>
+            <a:pPr lvl="4"/>
+            <a:r>
+              <a:rPr lang="en-US"/>
+              <a:t>Fifth level</a:t>
+            </a:r>
+            <a:endParaRPr lang="en-US" dirty="0"/>
+          </a:p>
+        </p:txBody>
+      </p:sp>
+      <p:sp>
+        <p:nvSpPr>
+          <p:cNvPr id="4" name="Text Placeholder 3"/>
+          <p:cNvSpPr>
+            <a:spLocks noGrp="1"/>
+          </p:cNvSpPr>
+          <p:nvPr>
+            <p:ph type="body" sz="half" idx="2"/>
           </p:nvPr>
         </p:nvSpPr>
         <p:spPr>
           <a:xfrm>
-            <a:off x="5183188" y="987425"/>
-            <a:ext cx="6172200" cy="4873625"/>
+            <a:off x="1115568" y="3549918"/>
+            <a:ext cx="3794760" cy="2194036"/>
           </a:xfrm>
         </p:spPr>
         <p:txBody>
-          <a:bodyPr/>
+          <a:bodyPr anchor="t" anchorCtr="1">
+            <a:normAutofit/>
+          </a:bodyPr>
           <a:lstStyle>
-            <a:lvl1pPr>
-              <a:defRPr sz="3200"/>
-            </a:lvl1pPr>
-            <a:lvl2pPr>
-              <a:defRPr sz="2800"/>
-            </a:lvl2pPr>
-            <a:lvl3pPr>
-              <a:defRPr sz="2400"/>
-            </a:lvl3pPr>
-            <a:lvl4pPr>
-              <a:defRPr sz="2000"/>
-            </a:lvl4pPr>
-            <a:lvl5pPr>
-              <a:defRPr sz="2000"/>
-            </a:lvl5pPr>
-            <a:lvl6pPr>
-              <a:defRPr sz="2000"/>
-            </a:lvl6pPr>
-            <a:lvl7pPr>
-              <a:defRPr sz="2000"/>
-            </a:lvl7pPr>
-            <a:lvl8pPr>
-              <a:defRPr sz="2000"/>
-            </a:lvl8pPr>
-            <a:lvl9pPr>
-              <a:defRPr sz="2000"/>
-            </a:lvl9pPr>
-          </a:lstStyle>
-          <a:p>
-            <a:pPr lvl="0"/>
-            <a:r>
-              <a:rPr lang="en-US"/>
-              <a:t>Click to edit Master text styles</a:t>
-            </a:r>
-          </a:p>
-          <a:p>
-            <a:pPr lvl="1"/>
-            <a:r>
-              <a:rPr lang="en-US"/>
-              <a:t>Second level</a:t>
-            </a:r>
-          </a:p>
-          <a:p>
-            <a:pPr lvl="2"/>
-            <a:r>
-              <a:rPr lang="en-US"/>
-              <a:t>Third level</a:t>
-            </a:r>
-          </a:p>
-          <a:p>
-            <a:pPr lvl="3"/>
-            <a:r>
-              <a:rPr lang="en-US"/>
-              <a:t>Fourth level</a:t>
-            </a:r>
-          </a:p>
-          <a:p>
-            <a:pPr lvl="4"/>
-            <a:r>
-              <a:rPr lang="en-US"/>
-              <a:t>Fifth level</a:t>
-            </a:r>
-          </a:p>
-        </p:txBody>
-      </p:sp>
-      <p:sp>
-        <p:nvSpPr>
-          <p:cNvPr id="4" name="Text Placeholder 3">
-            <a:extLst>
-              <a:ext uri="{FF2B5EF4-FFF2-40B4-BE49-F238E27FC236}">
-                <a16:creationId xmlns:a16="http://schemas.microsoft.com/office/drawing/2014/main" id="{A1AB4839-E17F-780D-B977-776D41993810}"/>
-              </a:ext>
-            </a:extLst>
-          </p:cNvPr>
-          <p:cNvSpPr>
-            <a:spLocks noGrp="1"/>
-          </p:cNvSpPr>
-          <p:nvPr>
-            <p:ph type="body" sz="half" idx="2"/>
-          </p:nvPr>
-        </p:nvSpPr>
-        <p:spPr>
-          <a:xfrm>
-            <a:off x="839788" y="2057400"/>
-            <a:ext cx="3932237" cy="3811588"/>
-          </a:xfrm>
-        </p:spPr>
-        <p:txBody>
-          <a:bodyPr/>
-          <a:lstStyle>
-            <a:lvl1pPr marL="0" indent="0">
+            <a:lvl1pPr marL="0" indent="0" algn="ctr">
               <a:buNone/>
-              <a:defRPr sz="1600"/>
+              <a:defRPr sz="1500">
+                <a:solidFill>
+                  <a:srgbClr val="FFFFFF"/>
+                </a:solidFill>
+              </a:defRPr>
             </a:lvl1pPr>
             <a:lvl2pPr marL="457200" indent="0">
               <a:buNone/>
@@ -2382,13 +2255,7 @@
       </p:sp>
       <p:sp>
         <p:nvSpPr>
-          <p:cNvPr id="5" name="Date Placeholder 4">
-            <a:extLst>
-              <a:ext uri="{FF2B5EF4-FFF2-40B4-BE49-F238E27FC236}">
-                <a16:creationId xmlns:a16="http://schemas.microsoft.com/office/drawing/2014/main" id="{3AF83E8D-A55E-1365-1091-9F8A6CDFB1B7}"/>
-              </a:ext>
-            </a:extLst>
-          </p:cNvPr>
+          <p:cNvPr id="9" name="Date Placeholder 8"/>
           <p:cNvSpPr>
             <a:spLocks noGrp="1"/>
           </p:cNvSpPr>
@@ -2411,13 +2278,7 @@
       </p:sp>
       <p:sp>
         <p:nvSpPr>
-          <p:cNvPr id="6" name="Footer Placeholder 5">
-            <a:extLst>
-              <a:ext uri="{FF2B5EF4-FFF2-40B4-BE49-F238E27FC236}">
-                <a16:creationId xmlns:a16="http://schemas.microsoft.com/office/drawing/2014/main" id="{6F1738FA-CA04-7F31-28BA-162260C75C2C}"/>
-              </a:ext>
-            </a:extLst>
-          </p:cNvPr>
+          <p:cNvPr id="10" name="Footer Placeholder 9"/>
           <p:cNvSpPr>
             <a:spLocks noGrp="1"/>
           </p:cNvSpPr>
@@ -2425,10 +2286,25 @@
             <p:ph type="ftr" sz="quarter" idx="11"/>
           </p:nvPr>
         </p:nvSpPr>
-        <p:spPr/>
+        <p:spPr>
+          <a:xfrm>
+            <a:off x="804672" y="6236208"/>
+            <a:ext cx="5124797" cy="320040"/>
+          </a:xfrm>
+        </p:spPr>
         <p:txBody>
           <a:bodyPr/>
-          <a:lstStyle/>
+          <a:lstStyle>
+            <a:lvl1pPr>
+              <a:defRPr>
+                <a:solidFill>
+                  <a:srgbClr val="FFFFFF">
+                    <a:alpha val="70000"/>
+                  </a:srgbClr>
+                </a:solidFill>
+              </a:defRPr>
+            </a:lvl1pPr>
+          </a:lstStyle>
           <a:p>
             <a:endParaRPr lang="en-US"/>
           </a:p>
@@ -2436,13 +2312,7 @@
       </p:sp>
       <p:sp>
         <p:nvSpPr>
-          <p:cNvPr id="7" name="Slide Number Placeholder 6">
-            <a:extLst>
-              <a:ext uri="{FF2B5EF4-FFF2-40B4-BE49-F238E27FC236}">
-                <a16:creationId xmlns:a16="http://schemas.microsoft.com/office/drawing/2014/main" id="{EC7A0F7A-5801-EE0B-D385-E3685D9CCA9B}"/>
-              </a:ext>
-            </a:extLst>
-          </p:cNvPr>
+          <p:cNvPr id="11" name="Slide Number Placeholder 10"/>
           <p:cNvSpPr>
             <a:spLocks noGrp="1"/>
           </p:cNvSpPr>
@@ -2466,7 +2336,7 @@
     </p:spTree>
     <p:extLst>
       <p:ext uri="{BB962C8B-B14F-4D97-AF65-F5344CB8AC3E}">
-        <p14:creationId xmlns:p14="http://schemas.microsoft.com/office/powerpoint/2010/main" val="803987169"/>
+        <p14:creationId xmlns:p14="http://schemas.microsoft.com/office/powerpoint/2010/main" val="57777292"/>
       </p:ext>
     </p:extLst>
   </p:cSld>
@@ -2495,31 +2365,77 @@
       </p:grpSpPr>
       <p:sp>
         <p:nvSpPr>
-          <p:cNvPr id="2" name="Title 1">
-            <a:extLst>
-              <a:ext uri="{FF2B5EF4-FFF2-40B4-BE49-F238E27FC236}">
-                <a16:creationId xmlns:a16="http://schemas.microsoft.com/office/drawing/2014/main" id="{938D885B-B0CB-43F2-422D-00D318042A17}"/>
-              </a:ext>
-            </a:extLst>
-          </p:cNvPr>
-          <p:cNvSpPr>
-            <a:spLocks noGrp="1"/>
-          </p:cNvSpPr>
-          <p:nvPr>
-            <p:ph type="title"/>
-          </p:nvPr>
+          <p:cNvPr id="18" name="Rectangle 17"/>
+          <p:cNvSpPr/>
+          <p:nvPr/>
         </p:nvSpPr>
         <p:spPr>
           <a:xfrm>
-            <a:off x="839788" y="457200"/>
-            <a:ext cx="3932237" cy="1600200"/>
+            <a:off x="0" y="0"/>
+            <a:ext cx="6095999" cy="6858000"/>
           </a:xfrm>
+          <a:prstGeom prst="rect">
+            <a:avLst/>
+          </a:prstGeom>
+          <a:solidFill>
+            <a:schemeClr val="accent2"/>
+          </a:solidFill>
+          <a:ln>
+            <a:noFill/>
+          </a:ln>
         </p:spPr>
-        <p:txBody>
-          <a:bodyPr anchor="b"/>
+        <p:style>
+          <a:lnRef idx="2">
+            <a:schemeClr val="accent1">
+              <a:shade val="50000"/>
+            </a:schemeClr>
+          </a:lnRef>
+          <a:fillRef idx="1">
+            <a:schemeClr val="accent1"/>
+          </a:fillRef>
+          <a:effectRef idx="0">
+            <a:schemeClr val="accent1"/>
+          </a:effectRef>
+          <a:fontRef idx="minor">
+            <a:schemeClr val="lt1"/>
+          </a:fontRef>
+        </p:style>
+      </p:sp>
+      <p:sp>
+        <p:nvSpPr>
+          <p:cNvPr id="2" name="Title 1"/>
+          <p:cNvSpPr>
+            <a:spLocks noGrp="1"/>
+          </p:cNvSpPr>
+          <p:nvPr>
+            <p:ph type="title"/>
+          </p:nvPr>
+        </p:nvSpPr>
+        <p:spPr bwMode="blackWhite">
+          <a:xfrm>
+            <a:off x="808523" y="2243828"/>
+            <a:ext cx="4494998" cy="1134640"/>
+          </a:xfrm>
+          <a:solidFill>
+            <a:srgbClr val="FFFFFF"/>
+          </a:solidFill>
+          <a:ln>
+            <a:solidFill>
+              <a:srgbClr val="404040"/>
+            </a:solidFill>
+          </a:ln>
+        </p:spPr>
+        <p:txBody>
+          <a:bodyPr anchor="ctr" anchorCtr="1">
+            <a:noAutofit/>
+          </a:bodyPr>
           <a:lstStyle>
             <a:lvl1pPr>
-              <a:defRPr sz="3200"/>
+              <a:defRPr sz="2200">
+                <a:solidFill>
+                  <a:srgbClr val="262626"/>
+                </a:solidFill>
+              </a:defRPr>
             </a:lvl1pPr>
           </a:lstStyle>
           <a:p>
@@ -2527,20 +2443,15 @@
               <a:rPr lang="en-US"/>
               <a:t>Click to edit Master title style</a:t>
             </a:r>
-          </a:p>
-        </p:txBody>
-      </p:sp>
-      <p:sp>
-        <p:nvSpPr>
-          <p:cNvPr id="3" name="Picture Placeholder 2">
-            <a:extLst>
-              <a:ext uri="{FF2B5EF4-FFF2-40B4-BE49-F238E27FC236}">
-                <a16:creationId xmlns:a16="http://schemas.microsoft.com/office/drawing/2014/main" id="{C02302F9-1C33-FAED-4FC9-DA0C3BFFFEDE}"/>
-              </a:ext>
-            </a:extLst>
-          </p:cNvPr>
-          <p:cNvSpPr>
-            <a:spLocks noGrp="1"/>
+            <a:endParaRPr lang="en-US" dirty="0"/>
+          </a:p>
+        </p:txBody>
+      </p:sp>
+      <p:sp>
+        <p:nvSpPr>
+          <p:cNvPr id="3" name="Picture Placeholder 2"/>
+          <p:cNvSpPr>
+            <a:spLocks noGrp="1" noChangeAspect="1"/>
           </p:cNvSpPr>
           <p:nvPr>
             <p:ph type="pic" idx="1"/>
@@ -2548,16 +2459,28 @@
         </p:nvSpPr>
         <p:spPr>
           <a:xfrm>
-            <a:off x="5183188" y="987425"/>
-            <a:ext cx="6172200" cy="4873625"/>
+            <a:off x="6095999" y="0"/>
+            <a:ext cx="6102097" cy="6858000"/>
           </a:xfrm>
+          <a:solidFill>
+            <a:schemeClr val="bg1">
+              <a:lumMod val="75000"/>
+            </a:schemeClr>
+          </a:solidFill>
         </p:spPr>
         <p:txBody>
-          <a:bodyPr/>
+          <a:bodyPr anchor="t"/>
           <a:lstStyle>
             <a:lvl1pPr marL="0" indent="0">
               <a:buNone/>
-              <a:defRPr sz="3200"/>
+              <a:defRPr sz="3200">
+                <a:solidFill>
+                  <a:schemeClr val="bg1">
+                    <a:lumMod val="85000"/>
+                    <a:lumOff val="15000"/>
+                  </a:schemeClr>
+                </a:solidFill>
+              </a:defRPr>
             </a:lvl1pPr>
             <a:lvl2pPr marL="457200" indent="0">
               <a:buNone/>
@@ -2593,19 +2516,17 @@
             </a:lvl9pPr>
           </a:lstStyle>
           <a:p>
-            <a:endParaRPr lang="en-US"/>
-          </a:p>
-        </p:txBody>
-      </p:sp>
-      <p:sp>
-        <p:nvSpPr>
-          <p:cNvPr id="4" name="Text Placeholder 3">
-            <a:extLst>
-              <a:ext uri="{FF2B5EF4-FFF2-40B4-BE49-F238E27FC236}">
-                <a16:creationId xmlns:a16="http://schemas.microsoft.com/office/drawing/2014/main" id="{A94F3656-910C-0BBB-CC67-6C5F64F35591}"/>
-              </a:ext>
-            </a:extLst>
-          </p:cNvPr>
+            <a:r>
+              <a:rPr lang="en-US"/>
+              <a:t>Click icon to add picture</a:t>
+            </a:r>
+            <a:endParaRPr lang="en-US" dirty="0"/>
+          </a:p>
+        </p:txBody>
+      </p:sp>
+      <p:sp>
+        <p:nvSpPr>
+          <p:cNvPr id="4" name="Text Placeholder 3"/>
           <p:cNvSpPr>
             <a:spLocks noGrp="1"/>
           </p:cNvSpPr>
@@ -2615,16 +2536,22 @@
         </p:nvSpPr>
         <p:spPr>
           <a:xfrm>
-            <a:off x="839788" y="2057400"/>
-            <a:ext cx="3932237" cy="3811588"/>
+            <a:off x="1115568" y="3549918"/>
+            <a:ext cx="3794760" cy="2194037"/>
           </a:xfrm>
         </p:spPr>
         <p:txBody>
-          <a:bodyPr/>
+          <a:bodyPr anchor="t" anchorCtr="1">
+            <a:normAutofit/>
+          </a:bodyPr>
           <a:lstStyle>
-            <a:lvl1pPr marL="0" indent="0">
+            <a:lvl1pPr marL="0" indent="0" algn="ctr">
               <a:buNone/>
-              <a:defRPr sz="1600"/>
+              <a:defRPr sz="1500">
+                <a:solidFill>
+                  <a:srgbClr val="FFFFFF"/>
+                </a:solidFill>
+              </a:defRPr>
             </a:lvl1pPr>
             <a:lvl2pPr marL="457200" indent="0">
               <a:buNone/>
@@ -2670,13 +2597,7 @@
       </p:sp>
       <p:sp>
         <p:nvSpPr>
-          <p:cNvPr id="5" name="Date Placeholder 4">
-            <a:extLst>
-              <a:ext uri="{FF2B5EF4-FFF2-40B4-BE49-F238E27FC236}">
-                <a16:creationId xmlns:a16="http://schemas.microsoft.com/office/drawing/2014/main" id="{6849BB16-6CF1-C3EA-50F7-B2122CA8D0E5}"/>
-              </a:ext>
-            </a:extLst>
-          </p:cNvPr>
+          <p:cNvPr id="8" name="Date Placeholder 7"/>
           <p:cNvSpPr>
             <a:spLocks noGrp="1"/>
           </p:cNvSpPr>
@@ -2687,7 +2608,22 @@
         <p:spPr/>
         <p:txBody>
           <a:bodyPr/>
-          <a:lstStyle/>
+          <a:lstStyle>
+            <a:lvl1pPr>
+              <a:defRPr>
+                <a:solidFill>
+                  <a:srgbClr val="FFFFFF"/>
+                </a:solidFill>
+                <a:effectLst>
+                  <a:outerShdw blurRad="50800" dist="38100" dir="2700000" algn="tl" rotWithShape="0">
+                    <a:prstClr val="black">
+                      <a:alpha val="43000"/>
+                    </a:prstClr>
+                  </a:outerShdw>
+                </a:effectLst>
+              </a:defRPr>
+            </a:lvl1pPr>
+          </a:lstStyle>
           <a:p>
             <a:fld id="{05D7635D-5716-2149-87AF-1F135607E50F}" type="datetimeFigureOut">
               <a:rPr lang="en-US" smtClean="0"/>
@@ -2699,13 +2635,7 @@
       </p:sp>
       <p:sp>
         <p:nvSpPr>
-          <p:cNvPr id="6" name="Footer Placeholder 5">
-            <a:extLst>
-              <a:ext uri="{FF2B5EF4-FFF2-40B4-BE49-F238E27FC236}">
-                <a16:creationId xmlns:a16="http://schemas.microsoft.com/office/drawing/2014/main" id="{029DE4E1-4A72-DF38-7635-FC3A9B569F4A}"/>
-              </a:ext>
-            </a:extLst>
-          </p:cNvPr>
+          <p:cNvPr id="9" name="Footer Placeholder 8"/>
           <p:cNvSpPr>
             <a:spLocks noGrp="1"/>
           </p:cNvSpPr>
@@ -2713,10 +2643,25 @@
             <p:ph type="ftr" sz="quarter" idx="11"/>
           </p:nvPr>
         </p:nvSpPr>
-        <p:spPr/>
+        <p:spPr>
+          <a:xfrm>
+            <a:off x="804672" y="6236208"/>
+            <a:ext cx="5124797" cy="320040"/>
+          </a:xfrm>
+        </p:spPr>
         <p:txBody>
           <a:bodyPr/>
-          <a:lstStyle/>
+          <a:lstStyle>
+            <a:lvl1pPr>
+              <a:defRPr>
+                <a:solidFill>
+                  <a:srgbClr val="FFFFFF">
+                    <a:alpha val="70000"/>
+                  </a:srgbClr>
+                </a:solidFill>
+              </a:defRPr>
+            </a:lvl1pPr>
+          </a:lstStyle>
           <a:p>
             <a:endParaRPr lang="en-US"/>
           </a:p>
@@ -2724,13 +2669,7 @@
       </p:sp>
       <p:sp>
         <p:nvSpPr>
-          <p:cNvPr id="7" name="Slide Number Placeholder 6">
-            <a:extLst>
-              <a:ext uri="{FF2B5EF4-FFF2-40B4-BE49-F238E27FC236}">
-                <a16:creationId xmlns:a16="http://schemas.microsoft.com/office/drawing/2014/main" id="{908E9553-FB49-2A6E-9665-C73AF21B3C4F}"/>
-              </a:ext>
-            </a:extLst>
-          </p:cNvPr>
+          <p:cNvPr id="10" name="Slide Number Placeholder 9"/>
           <p:cNvSpPr>
             <a:spLocks noGrp="1"/>
           </p:cNvSpPr>
@@ -2754,7 +2693,7 @@
     </p:spTree>
     <p:extLst>
       <p:ext uri="{BB962C8B-B14F-4D97-AF65-F5344CB8AC3E}">
-        <p14:creationId xmlns:p14="http://schemas.microsoft.com/office/powerpoint/2010/main" val="2987473456"/>
+        <p14:creationId xmlns:p14="http://schemas.microsoft.com/office/powerpoint/2010/main" val="2749452857"/>
       </p:ext>
     </p:extLst>
   </p:cSld>
@@ -2768,9 +2707,14 @@
 <p:sldMaster xmlns:a="http://schemas.openxmlformats.org/drawingml/2006/main" xmlns:r="http://schemas.openxmlformats.org/officeDocument/2006/relationships" xmlns:p="http://schemas.openxmlformats.org/presentationml/2006/main">
   <p:cSld>
     <p:bg>
-      <p:bgRef idx="1001">
-        <a:schemeClr val="bg1"/>
-      </p:bgRef>
+      <p:bgPr>
+        <a:solidFill>
+          <a:schemeClr val="bg1">
+            <a:lumMod val="95000"/>
+          </a:schemeClr>
+        </a:solidFill>
+        <a:effectLst/>
+      </p:bgPr>
     </p:bg>
     <p:spTree>
       <p:nvGrpSpPr>
@@ -2788,129 +2732,163 @@
       </p:grpSpPr>
       <p:sp>
         <p:nvSpPr>
-          <p:cNvPr id="2" name="Title Placeholder 1">
-            <a:extLst>
-              <a:ext uri="{FF2B5EF4-FFF2-40B4-BE49-F238E27FC236}">
-                <a16:creationId xmlns:a16="http://schemas.microsoft.com/office/drawing/2014/main" id="{1C49C4DF-AE38-1FE4-015F-BE95B22A93C7}"/>
-              </a:ext>
-            </a:extLst>
-          </p:cNvPr>
+          <p:cNvPr id="2" name="Title Placeholder 1"/>
           <p:cNvSpPr>
             <a:spLocks noGrp="1"/>
           </p:cNvSpPr>
           <p:nvPr>
             <p:ph type="title"/>
+          </p:nvPr>
+        </p:nvSpPr>
+        <p:spPr bwMode="black">
+          <a:xfrm>
+            <a:off x="2231136" y="964692"/>
+            <a:ext cx="7729728" cy="1188720"/>
+          </a:xfrm>
+          <a:prstGeom prst="rect">
+            <a:avLst/>
+          </a:prstGeom>
+          <a:solidFill>
+            <a:srgbClr val="FFFFFF"/>
+          </a:solidFill>
+          <a:ln w="31750" cap="sq">
+            <a:solidFill>
+              <a:srgbClr val="404040"/>
+            </a:solidFill>
+            <a:miter lim="800000"/>
+          </a:ln>
+        </p:spPr>
+        <p:txBody>
+          <a:bodyPr vert="horz" lIns="182880" tIns="182880" rIns="182880" bIns="182880" rtlCol="0" anchor="ctr">
+            <a:normAutofit/>
+          </a:bodyPr>
+          <a:lstStyle/>
+          <a:p>
+            <a:r>
+              <a:rPr lang="en-US"/>
+              <a:t>Click to edit Master title style</a:t>
+            </a:r>
+            <a:endParaRPr lang="en-US" dirty="0"/>
+          </a:p>
+        </p:txBody>
+      </p:sp>
+      <p:sp>
+        <p:nvSpPr>
+          <p:cNvPr id="3" name="Text Placeholder 2"/>
+          <p:cNvSpPr>
+            <a:spLocks noGrp="1"/>
+          </p:cNvSpPr>
+          <p:nvPr>
+            <p:ph type="body" idx="1"/>
           </p:nvPr>
         </p:nvSpPr>
         <p:spPr>
           <a:xfrm>
-            <a:off x="838200" y="365125"/>
-            <a:ext cx="10515600" cy="1325563"/>
+            <a:off x="2231136" y="2638044"/>
+            <a:ext cx="7729728" cy="3101983"/>
           </a:xfrm>
           <a:prstGeom prst="rect">
             <a:avLst/>
           </a:prstGeom>
         </p:spPr>
         <p:txBody>
-          <a:bodyPr vert="horz" lIns="91440" tIns="45720" rIns="91440" bIns="45720" rtlCol="0" anchor="ctr">
+          <a:bodyPr vert="horz" lIns="91440" tIns="45720" rIns="91440" bIns="45720" rtlCol="0">
             <a:normAutofit/>
           </a:bodyPr>
           <a:lstStyle/>
           <a:p>
+            <a:pPr lvl="0"/>
             <a:r>
               <a:rPr lang="en-US"/>
-              <a:t>Click to edit Master title style</a:t>
-            </a:r>
-          </a:p>
-        </p:txBody>
-      </p:sp>
-      <p:sp>
-        <p:nvSpPr>
-          <p:cNvPr id="3" name="Text Placeholder 2">
-            <a:extLst>
-              <a:ext uri="{FF2B5EF4-FFF2-40B4-BE49-F238E27FC236}">
-                <a16:creationId xmlns:a16="http://schemas.microsoft.com/office/drawing/2014/main" id="{1B4F55C7-D452-1A08-9EDE-50071E74DAB4}"/>
-              </a:ext>
-            </a:extLst>
-          </p:cNvPr>
-          <p:cNvSpPr>
-            <a:spLocks noGrp="1"/>
-          </p:cNvSpPr>
-          <p:nvPr>
-            <p:ph type="body" idx="1"/>
+              <a:t>Click to edit Master text styles</a:t>
+            </a:r>
+          </a:p>
+          <a:p>
+            <a:pPr lvl="1"/>
+            <a:r>
+              <a:rPr lang="en-US"/>
+              <a:t>Second level</a:t>
+            </a:r>
+          </a:p>
+          <a:p>
+            <a:pPr lvl="2"/>
+            <a:r>
+              <a:rPr lang="en-US"/>
+              <a:t>Third level</a:t>
+            </a:r>
+          </a:p>
+          <a:p>
+            <a:pPr lvl="3"/>
+            <a:r>
+              <a:rPr lang="en-US"/>
+              <a:t>Fourth level</a:t>
+            </a:r>
+          </a:p>
+          <a:p>
+            <a:pPr lvl="4"/>
+            <a:r>
+              <a:rPr lang="en-US"/>
+              <a:t>Fifth level</a:t>
+            </a:r>
+            <a:endParaRPr lang="en-US" dirty="0"/>
+          </a:p>
+        </p:txBody>
+      </p:sp>
+      <p:sp>
+        <p:nvSpPr>
+          <p:cNvPr id="4" name="Date Placeholder 3"/>
+          <p:cNvSpPr>
+            <a:spLocks noGrp="1"/>
+          </p:cNvSpPr>
+          <p:nvPr>
+            <p:ph type="dt" sz="half" idx="2"/>
           </p:nvPr>
         </p:nvSpPr>
         <p:spPr>
           <a:xfrm>
-            <a:off x="838200" y="1825625"/>
-            <a:ext cx="10515600" cy="4351338"/>
+            <a:off x="7821429" y="6238816"/>
+            <a:ext cx="2753746" cy="323968"/>
           </a:xfrm>
           <a:prstGeom prst="rect">
             <a:avLst/>
           </a:prstGeom>
         </p:spPr>
         <p:txBody>
-          <a:bodyPr vert="horz" lIns="91440" tIns="45720" rIns="91440" bIns="45720" rtlCol="0">
-            <a:normAutofit/>
-          </a:bodyPr>
-          <a:lstStyle/>
-          <a:p>
-            <a:pPr lvl="0"/>
-            <a:r>
-              <a:rPr lang="en-US"/>
-              <a:t>Click to edit Master text styles</a:t>
-            </a:r>
-          </a:p>
-          <a:p>
-            <a:pPr lvl="1"/>
-            <a:r>
-              <a:rPr lang="en-US"/>
-              <a:t>Second level</a:t>
-            </a:r>
-          </a:p>
-          <a:p>
-            <a:pPr lvl="2"/>
-            <a:r>
-              <a:rPr lang="en-US"/>
-              <a:t>Third level</a:t>
-            </a:r>
-          </a:p>
-          <a:p>
-            <a:pPr lvl="3"/>
-            <a:r>
-              <a:rPr lang="en-US"/>
-              <a:t>Fourth level</a:t>
-            </a:r>
-          </a:p>
-          <a:p>
-            <a:pPr lvl="4"/>
-            <a:r>
-              <a:rPr lang="en-US"/>
-              <a:t>Fifth level</a:t>
-            </a:r>
-          </a:p>
-        </p:txBody>
-      </p:sp>
-      <p:sp>
-        <p:nvSpPr>
-          <p:cNvPr id="4" name="Date Placeholder 3">
-            <a:extLst>
-              <a:ext uri="{FF2B5EF4-FFF2-40B4-BE49-F238E27FC236}">
-                <a16:creationId xmlns:a16="http://schemas.microsoft.com/office/drawing/2014/main" id="{B6B14215-24E1-24BB-FF05-D1744F3E2B61}"/>
-              </a:ext>
-            </a:extLst>
-          </p:cNvPr>
-          <p:cNvSpPr>
-            <a:spLocks noGrp="1"/>
-          </p:cNvSpPr>
-          <p:nvPr>
-            <p:ph type="dt" sz="half" idx="2"/>
+          <a:bodyPr vert="horz" lIns="91440" tIns="45720" rIns="91440" bIns="45720" rtlCol="0" anchor="ctr"/>
+          <a:lstStyle>
+            <a:lvl1pPr algn="r">
+              <a:defRPr sz="1050">
+                <a:solidFill>
+                  <a:schemeClr val="tx1">
+                    <a:alpha val="70000"/>
+                  </a:schemeClr>
+                </a:solidFill>
+              </a:defRPr>
+            </a:lvl1pPr>
+          </a:lstStyle>
+          <a:p>
+            <a:fld id="{05D7635D-5716-2149-87AF-1F135607E50F}" type="datetimeFigureOut">
+              <a:rPr lang="en-US" smtClean="0"/>
+              <a:t>1/6/26</a:t>
+            </a:fld>
+            <a:endParaRPr lang="en-US"/>
+          </a:p>
+        </p:txBody>
+      </p:sp>
+      <p:sp>
+        <p:nvSpPr>
+          <p:cNvPr id="5" name="Footer Placeholder 4"/>
+          <p:cNvSpPr>
+            <a:spLocks noGrp="1"/>
+          </p:cNvSpPr>
+          <p:nvPr>
+            <p:ph type="ftr" sz="quarter" idx="3"/>
           </p:nvPr>
         </p:nvSpPr>
         <p:spPr>
           <a:xfrm>
-            <a:off x="838200" y="6356350"/>
-            <a:ext cx="2743200" cy="365125"/>
+            <a:off x="1600200" y="6236208"/>
+            <a:ext cx="5901189" cy="320040"/>
           </a:xfrm>
           <a:prstGeom prst="rect">
             <a:avLst/>
@@ -2920,101 +2898,53 @@
           <a:bodyPr vert="horz" lIns="91440" tIns="45720" rIns="91440" bIns="45720" rtlCol="0" anchor="ctr"/>
           <a:lstStyle>
             <a:lvl1pPr algn="l">
-              <a:defRPr sz="1200">
+              <a:defRPr sz="1050">
                 <a:solidFill>
                   <a:schemeClr val="tx1">
-                    <a:tint val="82000"/>
+                    <a:alpha val="70000"/>
                   </a:schemeClr>
                 </a:solidFill>
               </a:defRPr>
             </a:lvl1pPr>
           </a:lstStyle>
           <a:p>
-            <a:fld id="{05D7635D-5716-2149-87AF-1F135607E50F}" type="datetimeFigureOut">
-              <a:rPr lang="en-US" smtClean="0"/>
-              <a:t>1/6/26</a:t>
-            </a:fld>
             <a:endParaRPr lang="en-US"/>
           </a:p>
         </p:txBody>
       </p:sp>
       <p:sp>
         <p:nvSpPr>
-          <p:cNvPr id="5" name="Footer Placeholder 4">
-            <a:extLst>
-              <a:ext uri="{FF2B5EF4-FFF2-40B4-BE49-F238E27FC236}">
-                <a16:creationId xmlns:a16="http://schemas.microsoft.com/office/drawing/2014/main" id="{187E9AE6-2DF1-A399-DC2B-D68F14EEBD42}"/>
-              </a:ext>
-            </a:extLst>
-          </p:cNvPr>
-          <p:cNvSpPr>
-            <a:spLocks noGrp="1"/>
-          </p:cNvSpPr>
-          <p:nvPr>
-            <p:ph type="ftr" sz="quarter" idx="3"/>
+          <p:cNvPr id="6" name="Slide Number Placeholder 5"/>
+          <p:cNvSpPr>
+            <a:spLocks noGrp="1"/>
+          </p:cNvSpPr>
+          <p:nvPr>
+            <p:ph type="sldNum" sz="quarter" idx="4"/>
           </p:nvPr>
         </p:nvSpPr>
         <p:spPr>
           <a:xfrm>
-            <a:off x="4038600" y="6356350"/>
-            <a:ext cx="4114800" cy="365125"/>
+            <a:off x="10758922" y="6217920"/>
+            <a:ext cx="365760" cy="365760"/>
           </a:xfrm>
-          <a:prstGeom prst="rect">
+          <a:prstGeom prst="ellipse">
             <a:avLst/>
           </a:prstGeom>
+          <a:solidFill>
+            <a:srgbClr val="1D1D1D">
+              <a:alpha val="70000"/>
+            </a:srgbClr>
+          </a:solidFill>
         </p:spPr>
         <p:txBody>
-          <a:bodyPr vert="horz" lIns="91440" tIns="45720" rIns="91440" bIns="45720" rtlCol="0" anchor="ctr"/>
+          <a:bodyPr vert="horz" lIns="18288" tIns="45720" rIns="18288" bIns="45720" rtlCol="0" anchor="ctr">
+            <a:noAutofit/>
+          </a:bodyPr>
           <a:lstStyle>
             <a:lvl1pPr algn="ctr">
-              <a:defRPr sz="1200">
+              <a:defRPr sz="1100" spc="0" baseline="0">
                 <a:solidFill>
-                  <a:schemeClr val="tx1">
-                    <a:tint val="82000"/>
-                  </a:schemeClr>
-                </a:solidFill>
-              </a:defRPr>
-            </a:lvl1pPr>
-          </a:lstStyle>
-          <a:p>
-            <a:endParaRPr lang="en-US"/>
-          </a:p>
-        </p:txBody>
-      </p:sp>
-      <p:sp>
-        <p:nvSpPr>
-          <p:cNvPr id="6" name="Slide Number Placeholder 5">
-            <a:extLst>
-              <a:ext uri="{FF2B5EF4-FFF2-40B4-BE49-F238E27FC236}">
-                <a16:creationId xmlns:a16="http://schemas.microsoft.com/office/drawing/2014/main" id="{F1437CFF-9322-CA8F-DA13-2051C38F7E74}"/>
-              </a:ext>
-            </a:extLst>
-          </p:cNvPr>
-          <p:cNvSpPr>
-            <a:spLocks noGrp="1"/>
-          </p:cNvSpPr>
-          <p:nvPr>
-            <p:ph type="sldNum" sz="quarter" idx="4"/>
-          </p:nvPr>
-        </p:nvSpPr>
-        <p:spPr>
-          <a:xfrm>
-            <a:off x="8610600" y="6356350"/>
-            <a:ext cx="2743200" cy="365125"/>
-          </a:xfrm>
-          <a:prstGeom prst="rect">
-            <a:avLst/>
-          </a:prstGeom>
-        </p:spPr>
-        <p:txBody>
-          <a:bodyPr vert="horz" lIns="91440" tIns="45720" rIns="91440" bIns="45720" rtlCol="0" anchor="ctr"/>
-          <a:lstStyle>
-            <a:lvl1pPr algn="r">
-              <a:defRPr sz="1200">
-                <a:solidFill>
-                  <a:schemeClr val="tx1">
-                    <a:tint val="82000"/>
-                  </a:schemeClr>
+                  <a:srgbClr val="FFFFFF"/>
                 </a:solidFill>
               </a:defRPr>
             </a:lvl1pPr>
@@ -3031,27 +2961,27 @@
     </p:spTree>
     <p:extLst>
       <p:ext uri="{BB962C8B-B14F-4D97-AF65-F5344CB8AC3E}">
-        <p14:creationId xmlns:p14="http://schemas.microsoft.com/office/powerpoint/2010/main" val="2094510737"/>
+        <p14:creationId xmlns:p14="http://schemas.microsoft.com/office/powerpoint/2010/main" val="3136082054"/>
       </p:ext>
     </p:extLst>
   </p:cSld>
   <p:clrMap bg1="lt1" tx1="dk1" bg2="lt2" tx2="dk2" accent1="accent1" accent2="accent2" accent3="accent3" accent4="accent4" accent5="accent5" accent6="accent6" hlink="hlink" folHlink="folHlink"/>
   <p:sldLayoutIdLst>
-    <p:sldLayoutId id="2147483649" r:id="rId1"/>
-    <p:sldLayoutId id="2147483650" r:id="rId2"/>
-    <p:sldLayoutId id="2147483651" r:id="rId3"/>
-    <p:sldLayoutId id="2147483652" r:id="rId4"/>
-    <p:sldLayoutId id="2147483653" r:id="rId5"/>
-    <p:sldLayoutId id="2147483654" r:id="rId6"/>
-    <p:sldLayoutId id="2147483655" r:id="rId7"/>
-    <p:sldLayoutId id="2147483656" r:id="rId8"/>
-    <p:sldLayoutId id="2147483657" r:id="rId9"/>
-    <p:sldLayoutId id="2147483658" r:id="rId10"/>
-    <p:sldLayoutId id="2147483659" r:id="rId11"/>
+    <p:sldLayoutId id="2147483733" r:id="rId1"/>
+    <p:sldLayoutId id="2147483734" r:id="rId2"/>
+    <p:sldLayoutId id="2147483735" r:id="rId3"/>
+    <p:sldLayoutId id="2147483736" r:id="rId4"/>
+    <p:sldLayoutId id="2147483737" r:id="rId5"/>
+    <p:sldLayoutId id="2147483738" r:id="rId6"/>
+    <p:sldLayoutId id="2147483739" r:id="rId7"/>
+    <p:sldLayoutId id="2147483740" r:id="rId8"/>
+    <p:sldLayoutId id="2147483741" r:id="rId9"/>
+    <p:sldLayoutId id="2147483742" r:id="rId10"/>
+    <p:sldLayoutId id="2147483743" r:id="rId11"/>
   </p:sldLayoutIdLst>
   <p:txStyles>
     <p:titleStyle>
-      <a:lvl1pPr algn="l" defTabSz="914400" rtl="0" eaLnBrk="1" latinLnBrk="0" hangingPunct="1">
+      <a:lvl1pPr algn="ctr" defTabSz="914400" rtl="0" eaLnBrk="1" latinLnBrk="0" hangingPunct="1">
         <a:lnSpc>
           <a:spcPct val="90000"/>
         </a:lnSpc>
@@ -3059,9 +2989,9 @@
           <a:spcPct val="0"/>
         </a:spcBef>
         <a:buNone/>
-        <a:defRPr sz="4400" kern="1200">
+        <a:defRPr sz="2800" kern="1200" cap="all" spc="200" baseline="0">
           <a:solidFill>
-            <a:schemeClr val="tx1"/>
+            <a:srgbClr val="262626"/>
           </a:solidFill>
           <a:latin typeface="+mj-lt"/>
           <a:ea typeface="+mj-ea"/>
@@ -3072,104 +3002,137 @@
     <p:bodyStyle>
       <a:lvl1pPr marL="228600" indent="-228600" algn="l" defTabSz="914400" rtl="0" eaLnBrk="1" latinLnBrk="0" hangingPunct="1">
         <a:lnSpc>
-          <a:spcPct val="90000"/>
+          <a:spcPct val="100000"/>
         </a:lnSpc>
         <a:spcBef>
           <a:spcPts val="1000"/>
         </a:spcBef>
+        <a:buClr>
+          <a:schemeClr val="accent2"/>
+        </a:buClr>
         <a:buFont typeface="Arial" panose="020B0604020202020204" pitchFamily="34" charset="0"/>
         <a:buChar char="•"/>
-        <a:defRPr sz="2800" kern="1200">
+        <a:defRPr sz="1800" kern="1200">
           <a:solidFill>
-            <a:schemeClr val="tx1"/>
+            <a:schemeClr val="tx1">
+              <a:lumMod val="85000"/>
+              <a:lumOff val="15000"/>
+            </a:schemeClr>
           </a:solidFill>
           <a:latin typeface="+mn-lt"/>
           <a:ea typeface="+mn-ea"/>
           <a:cs typeface="+mn-cs"/>
         </a:defRPr>
       </a:lvl1pPr>
-      <a:lvl2pPr marL="685800" indent="-228600" algn="l" defTabSz="914400" rtl="0" eaLnBrk="1" latinLnBrk="0" hangingPunct="1">
+      <a:lvl2pPr marL="457200" indent="-228600" algn="l" defTabSz="914400" rtl="0" eaLnBrk="1" latinLnBrk="0" hangingPunct="1">
         <a:lnSpc>
-          <a:spcPct val="90000"/>
+          <a:spcPct val="100000"/>
         </a:lnSpc>
         <a:spcBef>
-          <a:spcPts val="500"/>
+          <a:spcPts val="1000"/>
         </a:spcBef>
+        <a:buClr>
+          <a:schemeClr val="accent2"/>
+        </a:buClr>
         <a:buFont typeface="Arial" panose="020B0604020202020204" pitchFamily="34" charset="0"/>
         <a:buChar char="•"/>
-        <a:defRPr sz="2400" kern="1200">
+        <a:defRPr sz="1600" kern="1200">
           <a:solidFill>
-            <a:schemeClr val="tx1"/>
+            <a:schemeClr val="tx1">
+              <a:lumMod val="85000"/>
+              <a:lumOff val="15000"/>
+            </a:schemeClr>
           </a:solidFill>
           <a:latin typeface="+mn-lt"/>
           <a:ea typeface="+mn-ea"/>
           <a:cs typeface="+mn-cs"/>
         </a:defRPr>
       </a:lvl2pPr>
-      <a:lvl3pPr marL="1143000" indent="-228600" algn="l" defTabSz="914400" rtl="0" eaLnBrk="1" latinLnBrk="0" hangingPunct="1">
+      <a:lvl3pPr marL="685800" indent="-228600" algn="l" defTabSz="914400" rtl="0" eaLnBrk="1" latinLnBrk="0" hangingPunct="1">
         <a:lnSpc>
-          <a:spcPct val="90000"/>
+          <a:spcPct val="100000"/>
         </a:lnSpc>
         <a:spcBef>
-          <a:spcPts val="500"/>
+          <a:spcPts val="1000"/>
         </a:spcBef>
+        <a:buClr>
+          <a:schemeClr val="accent2"/>
+        </a:buClr>
         <a:buFont typeface="Arial" panose="020B0604020202020204" pitchFamily="34" charset="0"/>
         <a:buChar char="•"/>
-        <a:defRPr sz="2000" kern="1200">
+        <a:defRPr sz="1600" kern="1200">
           <a:solidFill>
-            <a:schemeClr val="tx1"/>
+            <a:schemeClr val="tx1">
+              <a:lumMod val="85000"/>
+              <a:lumOff val="15000"/>
+            </a:schemeClr>
           </a:solidFill>
           <a:latin typeface="+mn-lt"/>
           <a:ea typeface="+mn-ea"/>
           <a:cs typeface="+mn-cs"/>
         </a:defRPr>
       </a:lvl3pPr>
-      <a:lvl4pPr marL="1600200" indent="-228600" algn="l" defTabSz="914400" rtl="0" eaLnBrk="1" latinLnBrk="0" hangingPunct="1">
+      <a:lvl4pPr marL="914400" indent="-228600" algn="l" defTabSz="914400" rtl="0" eaLnBrk="1" latinLnBrk="0" hangingPunct="1">
         <a:lnSpc>
-          <a:spcPct val="90000"/>
+          <a:spcPct val="100000"/>
         </a:lnSpc>
         <a:spcBef>
-          <a:spcPts val="500"/>
+          <a:spcPts val="1000"/>
         </a:spcBef>
+        <a:buClr>
+          <a:schemeClr val="accent2"/>
+        </a:buClr>
         <a:buFont typeface="Arial" panose="020B0604020202020204" pitchFamily="34" charset="0"/>
         <a:buChar char="•"/>
-        <a:defRPr sz="1800" kern="1200">
+        <a:defRPr sz="1600" kern="1200">
           <a:solidFill>
-            <a:schemeClr val="tx1"/>
+            <a:schemeClr val="tx1">
+              <a:lumMod val="85000"/>
+              <a:lumOff val="15000"/>
+            </a:schemeClr>
           </a:solidFill>
           <a:latin typeface="+mn-lt"/>
           <a:ea typeface="+mn-ea"/>
           <a:cs typeface="+mn-cs"/>
         </a:defRPr>
       </a:lvl4pPr>
-      <a:lvl5pPr marL="2057400" indent="-228600" algn="l" defTabSz="914400" rtl="0" eaLnBrk="1" latinLnBrk="0" hangingPunct="1">
+      <a:lvl5pPr marL="1143000" indent="-228600" algn="l" defTabSz="914400" rtl="0" eaLnBrk="1" latinLnBrk="0" hangingPunct="1">
         <a:lnSpc>
-          <a:spcPct val="90000"/>
+          <a:spcPct val="100000"/>
         </a:lnSpc>
         <a:spcBef>
-          <a:spcPts val="500"/>
+          <a:spcPts val="1000"/>
         </a:spcBef>
+        <a:buClr>
+          <a:schemeClr val="accent2"/>
+        </a:buClr>
         <a:buFont typeface="Arial" panose="020B0604020202020204" pitchFamily="34" charset="0"/>
         <a:buChar char="•"/>
-        <a:defRPr sz="1800" kern="1200">
+        <a:defRPr sz="1600" kern="1200">
           <a:solidFill>
-            <a:schemeClr val="tx1"/>
+            <a:schemeClr val="tx1">
+              <a:lumMod val="85000"/>
+              <a:lumOff val="15000"/>
+            </a:schemeClr>
           </a:solidFill>
           <a:latin typeface="+mn-lt"/>
           <a:ea typeface="+mn-ea"/>
           <a:cs typeface="+mn-cs"/>
         </a:defRPr>
       </a:lvl5pPr>
-      <a:lvl6pPr marL="2514600" indent="-228600" algn="l" defTabSz="914400" rtl="0" eaLnBrk="1" latinLnBrk="0" hangingPunct="1">
+      <a:lvl6pPr marL="1312863" indent="-228600" algn="l" defTabSz="914400" rtl="0" eaLnBrk="1" latinLnBrk="0" hangingPunct="1">
         <a:lnSpc>
-          <a:spcPct val="90000"/>
+          <a:spcPct val="100000"/>
         </a:lnSpc>
         <a:spcBef>
-          <a:spcPts val="500"/>
+          <a:spcPts val="1000"/>
         </a:spcBef>
+        <a:buClr>
+          <a:schemeClr val="accent2"/>
+        </a:buClr>
         <a:buFont typeface="Arial" panose="020B0604020202020204" pitchFamily="34" charset="0"/>
         <a:buChar char="•"/>
-        <a:defRPr sz="1800" kern="1200">
+        <a:defRPr sz="1600" kern="1200">
           <a:solidFill>
             <a:schemeClr val="tx1"/>
           </a:solidFill>
@@ -3178,16 +3141,19 @@
           <a:cs typeface="+mn-cs"/>
         </a:defRPr>
       </a:lvl6pPr>
-      <a:lvl7pPr marL="2971800" indent="-228600" algn="l" defTabSz="914400" rtl="0" eaLnBrk="1" latinLnBrk="0" hangingPunct="1">
+      <a:lvl7pPr marL="1484313" indent="-228600" algn="l" defTabSz="914400" rtl="0" eaLnBrk="1" latinLnBrk="0" hangingPunct="1">
         <a:lnSpc>
-          <a:spcPct val="90000"/>
+          <a:spcPct val="100000"/>
         </a:lnSpc>
         <a:spcBef>
-          <a:spcPts val="500"/>
+          <a:spcPts val="1000"/>
         </a:spcBef>
+        <a:buClr>
+          <a:schemeClr val="accent2"/>
+        </a:buClr>
         <a:buFont typeface="Arial" panose="020B0604020202020204" pitchFamily="34" charset="0"/>
         <a:buChar char="•"/>
-        <a:defRPr sz="1800" kern="1200">
+        <a:defRPr sz="1600" kern="1200">
           <a:solidFill>
             <a:schemeClr val="tx1"/>
           </a:solidFill>
@@ -3196,16 +3162,19 @@
           <a:cs typeface="+mn-cs"/>
         </a:defRPr>
       </a:lvl7pPr>
-      <a:lvl8pPr marL="3429000" indent="-228600" algn="l" defTabSz="914400" rtl="0" eaLnBrk="1" latinLnBrk="0" hangingPunct="1">
+      <a:lvl8pPr marL="1657350" indent="-228600" algn="l" defTabSz="914400" rtl="0" eaLnBrk="1" latinLnBrk="0" hangingPunct="1">
         <a:lnSpc>
-          <a:spcPct val="90000"/>
+          <a:spcPct val="100000"/>
         </a:lnSpc>
         <a:spcBef>
-          <a:spcPts val="500"/>
+          <a:spcPts val="1000"/>
         </a:spcBef>
+        <a:buClr>
+          <a:schemeClr val="accent2"/>
+        </a:buClr>
         <a:buFont typeface="Arial" panose="020B0604020202020204" pitchFamily="34" charset="0"/>
         <a:buChar char="•"/>
-        <a:defRPr sz="1800" kern="1200">
+        <a:defRPr sz="1600" kern="1200" baseline="0">
           <a:solidFill>
             <a:schemeClr val="tx1"/>
           </a:solidFill>
@@ -3214,16 +3183,19 @@
           <a:cs typeface="+mn-cs"/>
         </a:defRPr>
       </a:lvl8pPr>
-      <a:lvl9pPr marL="3886200" indent="-228600" algn="l" defTabSz="914400" rtl="0" eaLnBrk="1" latinLnBrk="0" hangingPunct="1">
+      <a:lvl9pPr marL="1882775" indent="-228600" algn="l" defTabSz="914400" rtl="0" eaLnBrk="1" latinLnBrk="0" hangingPunct="1">
         <a:lnSpc>
-          <a:spcPct val="90000"/>
+          <a:spcPct val="100000"/>
         </a:lnSpc>
         <a:spcBef>
-          <a:spcPts val="500"/>
+          <a:spcPts val="1000"/>
         </a:spcBef>
+        <a:buClr>
+          <a:schemeClr val="accent2"/>
+        </a:buClr>
         <a:buFont typeface="Arial" panose="020B0604020202020204" pitchFamily="34" charset="0"/>
         <a:buChar char="•"/>
-        <a:defRPr sz="1800" kern="1200">
+        <a:defRPr sz="1600" kern="1200" baseline="0">
           <a:solidFill>
             <a:schemeClr val="tx1"/>
           </a:solidFill>
@@ -3468,239 +3440,246 @@
             <p:ph idx="1"/>
           </p:nvPr>
         </p:nvSpPr>
-        <p:spPr/>
-        <p:txBody>
-          <a:bodyPr/>
+        <p:spPr>
+          <a:xfrm>
+            <a:off x="969895" y="1878008"/>
+            <a:ext cx="10738629" cy="3101983"/>
+          </a:xfrm>
+        </p:spPr>
+        <p:txBody>
+          <a:bodyPr>
+            <a:normAutofit lnSpcReduction="10000"/>
+          </a:bodyPr>
           <a:lstStyle/>
           <a:p>
             <a:pPr marL="0" indent="0">
               <a:buNone/>
             </a:pPr>
             <a:r>
-              <a:rPr lang="en-US" dirty="0" err="1"/>
+              <a:rPr lang="en-US" sz="2800" dirty="0" err="1"/>
               <a:t>Ожидаемые</a:t>
             </a:r>
             <a:r>
-              <a:rPr lang="en-US" dirty="0"/>
-              <a:t> </a:t>
-            </a:r>
-            <a:r>
-              <a:rPr lang="en-US" dirty="0" err="1"/>
+              <a:rPr lang="en-US" sz="2800" dirty="0"/>
+              <a:t> </a:t>
+            </a:r>
+            <a:r>
+              <a:rPr lang="en-US" sz="2800" dirty="0" err="1"/>
               <a:t>результаты</a:t>
             </a:r>
-            <a:endParaRPr lang="en-US" dirty="0"/>
-          </a:p>
-          <a:p>
-            <a:r>
-              <a:rPr lang="en-US" dirty="0"/>
+            <a:endParaRPr lang="en-US" sz="2800" dirty="0"/>
+          </a:p>
+          <a:p>
+            <a:r>
+              <a:rPr lang="en-US" sz="2800" dirty="0"/>
               <a:t>- </a:t>
             </a:r>
             <a:r>
-              <a:rPr lang="en-US" dirty="0" err="1"/>
+              <a:rPr lang="en-US" sz="2800" dirty="0" err="1"/>
               <a:t>Презентация</a:t>
             </a:r>
             <a:r>
-              <a:rPr lang="en-US" dirty="0"/>
-              <a:t> </a:t>
-            </a:r>
-            <a:r>
-              <a:rPr lang="en-US" dirty="0" err="1"/>
+              <a:rPr lang="en-US" sz="2800" dirty="0"/>
+              <a:t> </a:t>
+            </a:r>
+            <a:r>
+              <a:rPr lang="en-US" sz="2800" dirty="0" err="1"/>
               <a:t>с</a:t>
             </a:r>
             <a:r>
-              <a:rPr lang="en-US" dirty="0"/>
-              <a:t> </a:t>
-            </a:r>
-            <a:r>
-              <a:rPr lang="en-US" dirty="0" err="1"/>
+              <a:rPr lang="en-US" sz="2800" dirty="0"/>
+              <a:t> </a:t>
+            </a:r>
+            <a:r>
+              <a:rPr lang="en-US" sz="2800" dirty="0" err="1"/>
               <a:t>аналитическими</a:t>
             </a:r>
             <a:r>
-              <a:rPr lang="en-US" dirty="0"/>
-              <a:t> </a:t>
-            </a:r>
-            <a:r>
-              <a:rPr lang="en-US" dirty="0" err="1"/>
+              <a:rPr lang="en-US" sz="2800" dirty="0"/>
+              <a:t> </a:t>
+            </a:r>
+            <a:r>
+              <a:rPr lang="en-US" sz="2800" dirty="0" err="1"/>
               <a:t>выводами</a:t>
             </a:r>
             <a:r>
-              <a:rPr lang="en-US" dirty="0"/>
-              <a:t> </a:t>
-            </a:r>
-            <a:r>
-              <a:rPr lang="en-US" dirty="0" err="1"/>
+              <a:rPr lang="en-US" sz="2800" dirty="0"/>
+              <a:t> </a:t>
+            </a:r>
+            <a:r>
+              <a:rPr lang="en-US" sz="2800" dirty="0" err="1"/>
               <a:t>и</a:t>
             </a:r>
             <a:r>
-              <a:rPr lang="en-US" dirty="0"/>
-              <a:t> </a:t>
-            </a:r>
-            <a:r>
-              <a:rPr lang="en-US" dirty="0" err="1"/>
+              <a:rPr lang="en-US" sz="2800" dirty="0"/>
+              <a:t> </a:t>
+            </a:r>
+            <a:r>
+              <a:rPr lang="en-US" sz="2800" dirty="0" err="1"/>
               <a:t>рекомендациями</a:t>
             </a:r>
-            <a:endParaRPr lang="en-US" dirty="0"/>
-          </a:p>
-          <a:p>
-            <a:r>
-              <a:rPr lang="en-US" dirty="0"/>
+            <a:endParaRPr lang="en-US" sz="2800" dirty="0"/>
+          </a:p>
+          <a:p>
+            <a:r>
+              <a:rPr lang="en-US" sz="2800" dirty="0"/>
               <a:t>- </a:t>
             </a:r>
             <a:r>
-              <a:rPr lang="en-US" dirty="0" err="1"/>
+              <a:rPr lang="en-US" sz="2800" dirty="0" err="1"/>
               <a:t>Конкретные</a:t>
             </a:r>
             <a:r>
-              <a:rPr lang="en-US" dirty="0"/>
-              <a:t> </a:t>
-            </a:r>
-            <a:r>
-              <a:rPr lang="en-US" dirty="0" err="1"/>
+              <a:rPr lang="en-US" sz="2800" dirty="0"/>
+              <a:t> </a:t>
+            </a:r>
+            <a:r>
+              <a:rPr lang="en-US" sz="2800" dirty="0" err="1"/>
               <a:t>предложения</a:t>
             </a:r>
             <a:r>
-              <a:rPr lang="en-US" dirty="0"/>
-              <a:t> </a:t>
-            </a:r>
-            <a:r>
-              <a:rPr lang="en-US" dirty="0" err="1"/>
+              <a:rPr lang="en-US" sz="2800" dirty="0"/>
+              <a:t> </a:t>
+            </a:r>
+            <a:r>
+              <a:rPr lang="en-US" sz="2800" dirty="0" err="1"/>
               <a:t>по</a:t>
             </a:r>
             <a:r>
-              <a:rPr lang="en-US" dirty="0"/>
-              <a:t> </a:t>
-            </a:r>
-            <a:r>
-              <a:rPr lang="en-US" dirty="0" err="1"/>
+              <a:rPr lang="en-US" sz="2800" dirty="0"/>
+              <a:t> </a:t>
+            </a:r>
+            <a:r>
+              <a:rPr lang="en-US" sz="2800" dirty="0" err="1"/>
               <a:t>локации</a:t>
             </a:r>
             <a:r>
-              <a:rPr lang="en-US" dirty="0"/>
+              <a:rPr lang="en-US" sz="2800" dirty="0"/>
               <a:t>, </a:t>
             </a:r>
             <a:r>
-              <a:rPr lang="en-US" dirty="0" err="1"/>
+              <a:rPr lang="en-US" sz="2800" dirty="0" err="1"/>
               <a:t>формату</a:t>
             </a:r>
             <a:r>
-              <a:rPr lang="en-US" dirty="0"/>
-              <a:t> </a:t>
-            </a:r>
-            <a:r>
-              <a:rPr lang="en-US" dirty="0" err="1"/>
+              <a:rPr lang="en-US" sz="2800" dirty="0"/>
+              <a:t> </a:t>
+            </a:r>
+            <a:r>
+              <a:rPr lang="en-US" sz="2800" dirty="0" err="1"/>
               <a:t>и</a:t>
             </a:r>
             <a:r>
-              <a:rPr lang="en-US" dirty="0"/>
-              <a:t> </a:t>
-            </a:r>
-            <a:r>
-              <a:rPr lang="en-US" dirty="0" err="1"/>
+              <a:rPr lang="en-US" sz="2800" dirty="0"/>
+              <a:t> </a:t>
+            </a:r>
+            <a:r>
+              <a:rPr lang="en-US" sz="2800" dirty="0" err="1"/>
               <a:t>ценообразованию</a:t>
             </a:r>
-            <a:endParaRPr lang="en-US" dirty="0"/>
-          </a:p>
-          <a:p>
-            <a:r>
-              <a:rPr lang="en-US" dirty="0"/>
+            <a:endParaRPr lang="en-US" sz="2800" dirty="0"/>
+          </a:p>
+          <a:p>
+            <a:r>
+              <a:rPr lang="en-US" sz="2800" dirty="0"/>
               <a:t>- </a:t>
             </a:r>
             <a:r>
-              <a:rPr lang="en-US" dirty="0" err="1"/>
+              <a:rPr lang="en-US" sz="2800" dirty="0" err="1"/>
               <a:t>Пошаговый</a:t>
             </a:r>
             <a:r>
-              <a:rPr lang="en-US" dirty="0"/>
-              <a:t> </a:t>
-            </a:r>
-            <a:r>
-              <a:rPr lang="en-US" dirty="0" err="1"/>
+              <a:rPr lang="en-US" sz="2800" dirty="0"/>
+              <a:t> </a:t>
+            </a:r>
+            <a:r>
+              <a:rPr lang="en-US" sz="2800" dirty="0" err="1"/>
               <a:t>план</a:t>
             </a:r>
             <a:r>
-              <a:rPr lang="en-US" dirty="0"/>
-              <a:t> </a:t>
-            </a:r>
-            <a:r>
-              <a:rPr lang="en-US" dirty="0" err="1"/>
+              <a:rPr lang="en-US" sz="2800" dirty="0"/>
+              <a:t> </a:t>
+            </a:r>
+            <a:r>
+              <a:rPr lang="en-US" sz="2800" dirty="0" err="1"/>
               <a:t>открытия</a:t>
             </a:r>
             <a:r>
-              <a:rPr lang="en-US" dirty="0"/>
-              <a:t> </a:t>
-            </a:r>
-            <a:r>
-              <a:rPr lang="en-US" dirty="0" err="1"/>
+              <a:rPr lang="en-US" sz="2800" dirty="0"/>
+              <a:t> </a:t>
+            </a:r>
+            <a:r>
+              <a:rPr lang="en-US" sz="2800" dirty="0" err="1"/>
               <a:t>нового</a:t>
             </a:r>
             <a:r>
-              <a:rPr lang="en-US" dirty="0"/>
-              <a:t> </a:t>
-            </a:r>
-            <a:r>
-              <a:rPr lang="en-US" dirty="0" err="1"/>
+              <a:rPr lang="en-US" sz="2800" dirty="0"/>
+              <a:t> </a:t>
+            </a:r>
+            <a:r>
+              <a:rPr lang="en-US" sz="2800" dirty="0" err="1"/>
               <a:t>заведения</a:t>
             </a:r>
-            <a:endParaRPr lang="en-US" dirty="0"/>
-          </a:p>
-          <a:p>
-            <a:r>
-              <a:rPr lang="en-US" dirty="0"/>
+            <a:endParaRPr lang="en-US" sz="2800" dirty="0"/>
+          </a:p>
+          <a:p>
+            <a:r>
+              <a:rPr lang="en-US" sz="2800" dirty="0"/>
               <a:t>- </a:t>
             </a:r>
             <a:r>
-              <a:rPr lang="en-US" dirty="0" err="1"/>
+              <a:rPr lang="en-US" sz="2800" dirty="0" err="1"/>
               <a:t>Оценка</a:t>
             </a:r>
             <a:r>
-              <a:rPr lang="en-US" dirty="0"/>
-              <a:t> </a:t>
-            </a:r>
-            <a:r>
-              <a:rPr lang="en-US" dirty="0" err="1"/>
+              <a:rPr lang="en-US" sz="2800" dirty="0"/>
+              <a:t> </a:t>
+            </a:r>
+            <a:r>
+              <a:rPr lang="en-US" sz="2800" dirty="0" err="1"/>
               <a:t>рисков</a:t>
             </a:r>
             <a:r>
-              <a:rPr lang="en-US" dirty="0"/>
-              <a:t> </a:t>
-            </a:r>
-            <a:r>
-              <a:rPr lang="en-US" dirty="0" err="1"/>
+              <a:rPr lang="en-US" sz="2800" dirty="0"/>
+              <a:t> </a:t>
+            </a:r>
+            <a:r>
+              <a:rPr lang="en-US" sz="2800" dirty="0" err="1"/>
               <a:t>и</a:t>
             </a:r>
             <a:r>
-              <a:rPr lang="en-US" dirty="0"/>
-              <a:t> </a:t>
-            </a:r>
-            <a:r>
-              <a:rPr lang="en-US" dirty="0" err="1"/>
+              <a:rPr lang="en-US" sz="2800" dirty="0"/>
+              <a:t> </a:t>
+            </a:r>
+            <a:r>
+              <a:rPr lang="en-US" sz="2800" dirty="0" err="1"/>
               <a:t>возможностей</a:t>
             </a:r>
             <a:r>
-              <a:rPr lang="en-US" dirty="0"/>
-              <a:t> </a:t>
-            </a:r>
-            <a:r>
-              <a:rPr lang="en-US" dirty="0" err="1"/>
+              <a:rPr lang="en-US" sz="2800" dirty="0"/>
+              <a:t> </a:t>
+            </a:r>
+            <a:r>
+              <a:rPr lang="en-US" sz="2800" dirty="0" err="1"/>
               <a:t>на</a:t>
             </a:r>
             <a:r>
-              <a:rPr lang="en-US" dirty="0"/>
-              <a:t> </a:t>
-            </a:r>
-            <a:r>
-              <a:rPr lang="en-US" dirty="0" err="1"/>
+              <a:rPr lang="en-US" sz="2800" dirty="0"/>
+              <a:t> </a:t>
+            </a:r>
+            <a:r>
+              <a:rPr lang="en-US" sz="2800" dirty="0" err="1"/>
               <a:t>московском</a:t>
             </a:r>
             <a:r>
-              <a:rPr lang="en-US" dirty="0"/>
-              <a:t> </a:t>
-            </a:r>
-            <a:r>
-              <a:rPr lang="en-US" dirty="0" err="1"/>
+              <a:rPr lang="en-US" sz="2800" dirty="0"/>
+              <a:t> </a:t>
+            </a:r>
+            <a:r>
+              <a:rPr lang="en-US" sz="2800" dirty="0" err="1"/>
               <a:t>рынке</a:t>
             </a:r>
-            <a:endParaRPr lang="en-US" dirty="0"/>
+            <a:endParaRPr lang="en-US" sz="2800" dirty="0"/>
           </a:p>
         </p:txBody>
       </p:sp>
@@ -3782,7 +3761,7 @@
         <p:spPr/>
         <p:txBody>
           <a:bodyPr>
-            <a:normAutofit lnSpcReduction="10000"/>
+            <a:normAutofit fontScale="92500" lnSpcReduction="10000"/>
           </a:bodyPr>
           <a:lstStyle/>
           <a:p>
@@ -4265,7 +4244,7 @@
         </p:nvSpPr>
         <p:spPr>
           <a:xfrm>
-            <a:off x="1676400" y="5707117"/>
+            <a:off x="3158359" y="5938344"/>
             <a:ext cx="10515600" cy="4351338"/>
           </a:xfrm>
         </p:spPr>
@@ -4372,7 +4351,7 @@
         </p:nvSpPr>
         <p:spPr>
           <a:xfrm>
-            <a:off x="1027386" y="5770180"/>
+            <a:off x="3013842" y="5990897"/>
             <a:ext cx="10515600" cy="4351338"/>
           </a:xfrm>
         </p:spPr>
@@ -4447,7 +4426,9 @@
         </p:nvSpPr>
         <p:spPr/>
         <p:txBody>
-          <a:bodyPr/>
+          <a:bodyPr>
+            <a:normAutofit/>
+          </a:bodyPr>
           <a:lstStyle/>
           <a:p>
             <a:r>
@@ -4536,7 +4517,7 @@
         </p:nvSpPr>
         <p:spPr>
           <a:xfrm>
-            <a:off x="2404242" y="6029763"/>
+            <a:off x="3760076" y="6187418"/>
             <a:ext cx="10515600" cy="4351338"/>
           </a:xfrm>
         </p:spPr>
@@ -4630,7 +4611,7 @@
         </p:nvSpPr>
         <p:spPr>
           <a:xfrm>
-            <a:off x="1676400" y="6187418"/>
+            <a:off x="3084787" y="6303032"/>
             <a:ext cx="10515600" cy="4351338"/>
           </a:xfrm>
         </p:spPr>
@@ -4786,12 +4767,7 @@
             <p:ph type="title"/>
           </p:nvPr>
         </p:nvSpPr>
-        <p:spPr>
-          <a:xfrm>
-            <a:off x="838200" y="365125"/>
-            <a:ext cx="10515600" cy="1325563"/>
-          </a:xfrm>
-        </p:spPr>
+        <p:spPr/>
         <p:txBody>
           <a:bodyPr/>
           <a:lstStyle/>
@@ -4857,38 +4833,40 @@
           </a:xfrm>
         </p:spPr>
         <p:txBody>
-          <a:bodyPr/>
-          <a:lstStyle/>
-          <a:p>
-            <a:r>
-              <a:rPr lang="ru-RU" dirty="0"/>
+          <a:bodyPr>
+            <a:normAutofit/>
+          </a:bodyPr>
+          <a:lstStyle/>
+          <a:p>
+            <a:r>
+              <a:rPr lang="ru-RU" sz="2800" dirty="0"/>
               <a:t>1. Рынок общественного питания Москвы разнообразен и конкурентен.</a:t>
             </a:r>
           </a:p>
           <a:p>
             <a:r>
-              <a:rPr lang="ru-RU" dirty="0"/>
+              <a:rPr lang="ru-RU" sz="2800" dirty="0"/>
               <a:t>2. Наибольшую долю занимают кафе, рестораны и кофейни.</a:t>
             </a:r>
           </a:p>
           <a:p>
             <a:r>
-              <a:rPr lang="ru-RU" dirty="0"/>
+              <a:rPr lang="ru-RU" sz="2800" dirty="0"/>
               <a:t>3. Центральные районы имеют наибольшую концентрацию заведений.</a:t>
             </a:r>
           </a:p>
           <a:p>
             <a:r>
-              <a:rPr lang="ru-RU" dirty="0"/>
+              <a:rPr lang="ru-RU" sz="2800" dirty="0"/>
               <a:t>4. Цены значительно варьируются в зависимости от района и категории.</a:t>
             </a:r>
           </a:p>
           <a:p>
             <a:r>
-              <a:rPr lang="ru-RU" dirty="0"/>
+              <a:rPr lang="ru-RU" sz="2800" dirty="0"/>
               <a:t>5. Сетевые заведения составляют значительную часть рынка.</a:t>
             </a:r>
-            <a:endParaRPr lang="en-US" dirty="0"/>
+            <a:endParaRPr lang="en-US" sz="2800" dirty="0"/>
           </a:p>
         </p:txBody>
       </p:sp>
@@ -4938,12 +4916,7 @@
             <p:ph type="title"/>
           </p:nvPr>
         </p:nvSpPr>
-        <p:spPr>
-          <a:xfrm>
-            <a:off x="838200" y="365125"/>
-            <a:ext cx="10515600" cy="1325563"/>
-          </a:xfrm>
-        </p:spPr>
+        <p:spPr/>
         <p:txBody>
           <a:bodyPr/>
           <a:lstStyle/>
@@ -5002,42 +4975,47 @@
             <p:ph idx="1"/>
           </p:nvPr>
         </p:nvSpPr>
-        <p:spPr/>
+        <p:spPr>
+          <a:xfrm>
+            <a:off x="1043466" y="1878008"/>
+            <a:ext cx="10475871" cy="3101983"/>
+          </a:xfrm>
+        </p:spPr>
         <p:txBody>
           <a:bodyPr>
-            <a:normAutofit lnSpcReduction="10000"/>
+            <a:normAutofit/>
           </a:bodyPr>
           <a:lstStyle/>
           <a:p>
             <a:r>
-              <a:rPr lang="ru-RU" dirty="0"/>
+              <a:rPr lang="ru-RU" sz="2400" dirty="0"/>
               <a:t>1. Для нового заведения стоит рассмотреть районы с высокой проходимостью.</a:t>
             </a:r>
           </a:p>
           <a:p>
             <a:r>
-              <a:rPr lang="ru-RU" dirty="0"/>
+              <a:rPr lang="ru-RU" sz="2400" dirty="0"/>
               <a:t>2. При выборе категории важно учитывать локальные предпочтения.</a:t>
             </a:r>
           </a:p>
           <a:p>
             <a:r>
-              <a:rPr lang="ru-RU" dirty="0"/>
+              <a:rPr lang="ru-RU" sz="2400" dirty="0"/>
               <a:t>3. Ценовая политика должна соответствовать району расположения.</a:t>
             </a:r>
           </a:p>
           <a:p>
             <a:r>
-              <a:rPr lang="ru-RU" dirty="0"/>
+              <a:rPr lang="ru-RU" sz="2400" dirty="0"/>
               <a:t>4. Уникальная концепция может стать конкурентным преимуществом.</a:t>
             </a:r>
           </a:p>
           <a:p>
             <a:r>
-              <a:rPr lang="ru-RU" dirty="0"/>
+              <a:rPr lang="ru-RU" sz="2400" dirty="0"/>
               <a:t>5. Сетевой формат имеет преимущества, но требует больше инвестиций.</a:t>
             </a:r>
-            <a:endParaRPr lang="en-US" dirty="0"/>
+            <a:endParaRPr lang="en-US" sz="2400" dirty="0"/>
           </a:p>
         </p:txBody>
       </p:sp>
@@ -5517,176 +5495,183 @@
             <p:ph idx="1"/>
           </p:nvPr>
         </p:nvSpPr>
-        <p:spPr/>
-        <p:txBody>
-          <a:bodyPr/>
+        <p:spPr>
+          <a:xfrm>
+            <a:off x="1978888" y="1878008"/>
+            <a:ext cx="10213112" cy="3101983"/>
+          </a:xfrm>
+        </p:spPr>
+        <p:txBody>
+          <a:bodyPr>
+            <a:normAutofit/>
+          </a:bodyPr>
           <a:lstStyle/>
           <a:p>
             <a:pPr marL="0" indent="0">
               <a:buNone/>
             </a:pPr>
             <a:r>
-              <a:rPr lang="en-US" dirty="0"/>
+              <a:rPr lang="en-US" sz="2800" dirty="0"/>
               <a:t>1. </a:t>
             </a:r>
             <a:r>
-              <a:rPr lang="en-US" dirty="0" err="1"/>
+              <a:rPr lang="en-US" sz="2800" dirty="0" err="1"/>
               <a:t>Анализ</a:t>
             </a:r>
             <a:r>
-              <a:rPr lang="en-US" dirty="0"/>
-              <a:t> </a:t>
-            </a:r>
-            <a:r>
-              <a:rPr lang="en-US" dirty="0" err="1"/>
+              <a:rPr lang="en-US" sz="2800" dirty="0"/>
+              <a:t> </a:t>
+            </a:r>
+            <a:r>
+              <a:rPr lang="en-US" sz="2800" dirty="0" err="1"/>
               <a:t>общего</a:t>
             </a:r>
             <a:r>
-              <a:rPr lang="en-US" dirty="0"/>
-              <a:t> </a:t>
-            </a:r>
-            <a:r>
-              <a:rPr lang="en-US" dirty="0" err="1"/>
+              <a:rPr lang="en-US" sz="2800" dirty="0"/>
+              <a:t> </a:t>
+            </a:r>
+            <a:r>
+              <a:rPr lang="en-US" sz="2800" dirty="0" err="1"/>
               <a:t>состояния</a:t>
             </a:r>
             <a:r>
-              <a:rPr lang="en-US" dirty="0"/>
-              <a:t> </a:t>
-            </a:r>
-            <a:r>
-              <a:rPr lang="en-US" dirty="0" err="1"/>
+              <a:rPr lang="en-US" sz="2800" dirty="0"/>
+              <a:t> </a:t>
+            </a:r>
+            <a:r>
+              <a:rPr lang="en-US" sz="2800" dirty="0" err="1"/>
               <a:t>рынка</a:t>
             </a:r>
-            <a:endParaRPr lang="en-US" dirty="0"/>
-          </a:p>
-          <a:p>
-            <a:r>
-              <a:rPr lang="en-US" dirty="0"/>
+            <a:endParaRPr lang="en-US" sz="2800" dirty="0"/>
+          </a:p>
+          <a:p>
+            <a:r>
+              <a:rPr lang="en-US" sz="2800" dirty="0"/>
               <a:t>- </a:t>
             </a:r>
             <a:r>
-              <a:rPr lang="en-US" dirty="0" err="1"/>
+              <a:rPr lang="en-US" sz="2800" dirty="0" err="1"/>
               <a:t>Изучить</a:t>
             </a:r>
             <a:r>
-              <a:rPr lang="en-US" dirty="0"/>
-              <a:t> </a:t>
-            </a:r>
-            <a:r>
-              <a:rPr lang="en-US" dirty="0" err="1"/>
+              <a:rPr lang="en-US" sz="2800" dirty="0"/>
+              <a:t> </a:t>
+            </a:r>
+            <a:r>
+              <a:rPr lang="en-US" sz="2800" dirty="0" err="1"/>
               <a:t>структуру</a:t>
             </a:r>
             <a:r>
-              <a:rPr lang="en-US" dirty="0"/>
-              <a:t> </a:t>
-            </a:r>
-            <a:r>
-              <a:rPr lang="en-US" dirty="0" err="1"/>
+              <a:rPr lang="en-US" sz="2800" dirty="0"/>
+              <a:t> </a:t>
+            </a:r>
+            <a:r>
+              <a:rPr lang="en-US" sz="2800" dirty="0" err="1"/>
               <a:t>рынка</a:t>
             </a:r>
             <a:r>
-              <a:rPr lang="en-US" dirty="0"/>
-              <a:t> </a:t>
-            </a:r>
-            <a:r>
-              <a:rPr lang="en-US" dirty="0" err="1"/>
+              <a:rPr lang="en-US" sz="2800" dirty="0"/>
+              <a:t> </a:t>
+            </a:r>
+            <a:r>
+              <a:rPr lang="en-US" sz="2800" dirty="0" err="1"/>
               <a:t>по</a:t>
             </a:r>
             <a:r>
-              <a:rPr lang="en-US" dirty="0"/>
-              <a:t> </a:t>
-            </a:r>
-            <a:r>
-              <a:rPr lang="en-US" dirty="0" err="1"/>
+              <a:rPr lang="en-US" sz="2800" dirty="0"/>
+              <a:t> </a:t>
+            </a:r>
+            <a:r>
+              <a:rPr lang="en-US" sz="2800" dirty="0" err="1"/>
               <a:t>категориям</a:t>
             </a:r>
             <a:r>
-              <a:rPr lang="en-US" dirty="0"/>
-              <a:t> </a:t>
-            </a:r>
-            <a:r>
-              <a:rPr lang="en-US" dirty="0" err="1"/>
+              <a:rPr lang="en-US" sz="2800" dirty="0"/>
+              <a:t> </a:t>
+            </a:r>
+            <a:r>
+              <a:rPr lang="en-US" sz="2800" dirty="0" err="1"/>
               <a:t>заведений</a:t>
             </a:r>
-            <a:endParaRPr lang="en-US" dirty="0"/>
-          </a:p>
-          <a:p>
-            <a:r>
-              <a:rPr lang="en-US" dirty="0"/>
+            <a:endParaRPr lang="en-US" sz="2800" dirty="0"/>
+          </a:p>
+          <a:p>
+            <a:r>
+              <a:rPr lang="en-US" sz="2800" dirty="0"/>
               <a:t>- </a:t>
             </a:r>
             <a:r>
-              <a:rPr lang="en-US" dirty="0" err="1"/>
+              <a:rPr lang="en-US" sz="2800" dirty="0" err="1"/>
               <a:t>Проанализировать</a:t>
             </a:r>
             <a:r>
-              <a:rPr lang="en-US" dirty="0"/>
-              <a:t> </a:t>
-            </a:r>
-            <a:r>
-              <a:rPr lang="en-US" dirty="0" err="1"/>
+              <a:rPr lang="en-US" sz="2800" dirty="0"/>
+              <a:t> </a:t>
+            </a:r>
+            <a:r>
+              <a:rPr lang="en-US" sz="2800" dirty="0" err="1"/>
               <a:t>географическое</a:t>
             </a:r>
             <a:r>
-              <a:rPr lang="en-US" dirty="0"/>
-              <a:t> </a:t>
-            </a:r>
-            <a:r>
-              <a:rPr lang="en-US" dirty="0" err="1"/>
+              <a:rPr lang="en-US" sz="2800" dirty="0"/>
+              <a:t> </a:t>
+            </a:r>
+            <a:r>
+              <a:rPr lang="en-US" sz="2800" dirty="0" err="1"/>
               <a:t>распределение</a:t>
             </a:r>
-            <a:endParaRPr lang="en-US" dirty="0"/>
-          </a:p>
-          <a:p>
-            <a:r>
-              <a:rPr lang="en-US" dirty="0"/>
+            <a:endParaRPr lang="en-US" sz="2800" dirty="0"/>
+          </a:p>
+          <a:p>
+            <a:r>
+              <a:rPr lang="en-US" sz="2800" dirty="0"/>
               <a:t>- </a:t>
             </a:r>
             <a:r>
-              <a:rPr lang="en-US" dirty="0" err="1"/>
+              <a:rPr lang="en-US" sz="2800" dirty="0" err="1"/>
               <a:t>Определить</a:t>
             </a:r>
             <a:r>
-              <a:rPr lang="en-US" dirty="0"/>
-              <a:t> </a:t>
-            </a:r>
-            <a:r>
-              <a:rPr lang="en-US" dirty="0" err="1"/>
+              <a:rPr lang="en-US" sz="2800" dirty="0"/>
+              <a:t> </a:t>
+            </a:r>
+            <a:r>
+              <a:rPr lang="en-US" sz="2800" dirty="0" err="1"/>
               <a:t>уровень</a:t>
             </a:r>
             <a:r>
-              <a:rPr lang="en-US" dirty="0"/>
-              <a:t> </a:t>
-            </a:r>
-            <a:r>
-              <a:rPr lang="en-US" dirty="0" err="1"/>
+              <a:rPr lang="en-US" sz="2800" dirty="0"/>
+              <a:t> </a:t>
+            </a:r>
+            <a:r>
+              <a:rPr lang="en-US" sz="2800" dirty="0" err="1"/>
               <a:t>конкуренции</a:t>
             </a:r>
             <a:r>
-              <a:rPr lang="en-US" dirty="0"/>
-              <a:t> </a:t>
-            </a:r>
-            <a:r>
-              <a:rPr lang="en-US" dirty="0" err="1"/>
+              <a:rPr lang="en-US" sz="2800" dirty="0"/>
+              <a:t> </a:t>
+            </a:r>
+            <a:r>
+              <a:rPr lang="en-US" sz="2800" dirty="0" err="1"/>
               <a:t>в</a:t>
             </a:r>
             <a:r>
-              <a:rPr lang="en-US" dirty="0"/>
-              <a:t> </a:t>
-            </a:r>
-            <a:r>
-              <a:rPr lang="en-US" dirty="0" err="1"/>
+              <a:rPr lang="en-US" sz="2800" dirty="0"/>
+              <a:t> </a:t>
+            </a:r>
+            <a:r>
+              <a:rPr lang="en-US" sz="2800" dirty="0" err="1"/>
               <a:t>разных</a:t>
             </a:r>
             <a:r>
-              <a:rPr lang="en-US" dirty="0"/>
-              <a:t> </a:t>
-            </a:r>
-            <a:r>
-              <a:rPr lang="en-US" dirty="0" err="1"/>
+              <a:rPr lang="en-US" sz="2800" dirty="0"/>
+              <a:t> </a:t>
+            </a:r>
+            <a:r>
+              <a:rPr lang="en-US" sz="2800" dirty="0" err="1"/>
               <a:t>сегментах</a:t>
             </a:r>
-            <a:endParaRPr lang="en-US" dirty="0"/>
+            <a:endParaRPr lang="en-US" sz="2800" dirty="0"/>
           </a:p>
         </p:txBody>
       </p:sp>
@@ -5736,160 +5721,167 @@
             <p:ph idx="1"/>
           </p:nvPr>
         </p:nvSpPr>
-        <p:spPr/>
-        <p:txBody>
-          <a:bodyPr/>
+        <p:spPr>
+          <a:xfrm>
+            <a:off x="1421838" y="1878008"/>
+            <a:ext cx="10538933" cy="3101983"/>
+          </a:xfrm>
+        </p:spPr>
+        <p:txBody>
+          <a:bodyPr>
+            <a:normAutofit/>
+          </a:bodyPr>
           <a:lstStyle/>
           <a:p>
             <a:pPr marL="0" indent="0">
               <a:buNone/>
             </a:pPr>
             <a:r>
-              <a:rPr lang="en-US" dirty="0"/>
+              <a:rPr lang="en-US" sz="3200" dirty="0"/>
               <a:t>2. </a:t>
             </a:r>
             <a:r>
-              <a:rPr lang="en-US" dirty="0" err="1"/>
+              <a:rPr lang="en-US" sz="3200" dirty="0" err="1"/>
               <a:t>Исследование</a:t>
             </a:r>
             <a:r>
-              <a:rPr lang="en-US" dirty="0"/>
-              <a:t> </a:t>
-            </a:r>
-            <a:r>
-              <a:rPr lang="en-US" dirty="0" err="1"/>
+              <a:rPr lang="en-US" sz="3200" dirty="0"/>
+              <a:t> </a:t>
+            </a:r>
+            <a:r>
+              <a:rPr lang="en-US" sz="3200" dirty="0" err="1"/>
               <a:t>ценовой</a:t>
             </a:r>
             <a:r>
-              <a:rPr lang="en-US" dirty="0"/>
-              <a:t> </a:t>
-            </a:r>
-            <a:r>
-              <a:rPr lang="en-US" dirty="0" err="1"/>
+              <a:rPr lang="en-US" sz="3200" dirty="0"/>
+              <a:t> </a:t>
+            </a:r>
+            <a:r>
+              <a:rPr lang="en-US" sz="3200" dirty="0" err="1"/>
               <a:t>политики</a:t>
             </a:r>
-            <a:endParaRPr lang="en-US" dirty="0"/>
-          </a:p>
-          <a:p>
-            <a:r>
-              <a:rPr lang="en-US" dirty="0"/>
+            <a:endParaRPr lang="en-US" sz="3200" dirty="0"/>
+          </a:p>
+          <a:p>
+            <a:r>
+              <a:rPr lang="en-US" sz="3200" dirty="0"/>
               <a:t>- </a:t>
             </a:r>
             <a:r>
-              <a:rPr lang="en-US" dirty="0" err="1"/>
+              <a:rPr lang="en-US" sz="3200" dirty="0" err="1"/>
               <a:t>Проанализировать</a:t>
             </a:r>
             <a:r>
-              <a:rPr lang="en-US" dirty="0"/>
-              <a:t> </a:t>
-            </a:r>
-            <a:r>
-              <a:rPr lang="en-US" dirty="0" err="1"/>
+              <a:rPr lang="en-US" sz="3200" dirty="0"/>
+              <a:t> </a:t>
+            </a:r>
+            <a:r>
+              <a:rPr lang="en-US" sz="3200" dirty="0" err="1"/>
               <a:t>средние</a:t>
             </a:r>
             <a:r>
-              <a:rPr lang="en-US" dirty="0"/>
-              <a:t> </a:t>
-            </a:r>
-            <a:r>
-              <a:rPr lang="en-US" dirty="0" err="1"/>
+              <a:rPr lang="en-US" sz="3200" dirty="0"/>
+              <a:t> </a:t>
+            </a:r>
+            <a:r>
+              <a:rPr lang="en-US" sz="3200" dirty="0" err="1"/>
               <a:t>чеки</a:t>
             </a:r>
             <a:r>
-              <a:rPr lang="en-US" dirty="0"/>
-              <a:t> </a:t>
-            </a:r>
-            <a:r>
-              <a:rPr lang="en-US" dirty="0" err="1"/>
+              <a:rPr lang="en-US" sz="3200" dirty="0"/>
+              <a:t> </a:t>
+            </a:r>
+            <a:r>
+              <a:rPr lang="en-US" sz="3200" dirty="0" err="1"/>
               <a:t>по</a:t>
             </a:r>
             <a:r>
-              <a:rPr lang="en-US" dirty="0"/>
-              <a:t> </a:t>
-            </a:r>
-            <a:r>
-              <a:rPr lang="en-US" dirty="0" err="1"/>
+              <a:rPr lang="en-US" sz="3200" dirty="0"/>
+              <a:t> </a:t>
+            </a:r>
+            <a:r>
+              <a:rPr lang="en-US" sz="3200" dirty="0" err="1"/>
               <a:t>районам</a:t>
             </a:r>
-            <a:endParaRPr lang="en-US" dirty="0"/>
-          </a:p>
-          <a:p>
-            <a:r>
-              <a:rPr lang="en-US" dirty="0"/>
+            <a:endParaRPr lang="en-US" sz="3200" dirty="0"/>
+          </a:p>
+          <a:p>
+            <a:r>
+              <a:rPr lang="en-US" sz="3200" dirty="0"/>
               <a:t>- </a:t>
             </a:r>
             <a:r>
-              <a:rPr lang="en-US" dirty="0" err="1"/>
+              <a:rPr lang="en-US" sz="3200" dirty="0" err="1"/>
               <a:t>Выявить</a:t>
             </a:r>
             <a:r>
-              <a:rPr lang="en-US" dirty="0"/>
-              <a:t> </a:t>
-            </a:r>
-            <a:r>
-              <a:rPr lang="en-US" dirty="0" err="1"/>
+              <a:rPr lang="en-US" sz="3200" dirty="0"/>
+              <a:t> </a:t>
+            </a:r>
+            <a:r>
+              <a:rPr lang="en-US" sz="3200" dirty="0" err="1"/>
               <a:t>зависимость</a:t>
             </a:r>
             <a:r>
-              <a:rPr lang="en-US" dirty="0"/>
-              <a:t> </a:t>
-            </a:r>
-            <a:r>
-              <a:rPr lang="en-US" dirty="0" err="1"/>
+              <a:rPr lang="en-US" sz="3200" dirty="0"/>
+              <a:t> </a:t>
+            </a:r>
+            <a:r>
+              <a:rPr lang="en-US" sz="3200" dirty="0" err="1"/>
               <a:t>цен</a:t>
             </a:r>
             <a:r>
-              <a:rPr lang="en-US" dirty="0"/>
-              <a:t> </a:t>
-            </a:r>
-            <a:r>
-              <a:rPr lang="en-US" dirty="0" err="1"/>
+              <a:rPr lang="en-US" sz="3200" dirty="0"/>
+              <a:t> </a:t>
+            </a:r>
+            <a:r>
+              <a:rPr lang="en-US" sz="3200" dirty="0" err="1"/>
               <a:t>от</a:t>
             </a:r>
             <a:r>
-              <a:rPr lang="en-US" dirty="0"/>
-              <a:t> </a:t>
-            </a:r>
-            <a:r>
-              <a:rPr lang="en-US" dirty="0" err="1"/>
+              <a:rPr lang="en-US" sz="3200" dirty="0"/>
+              <a:t> </a:t>
+            </a:r>
+            <a:r>
+              <a:rPr lang="en-US" sz="3200" dirty="0" err="1"/>
               <a:t>локации</a:t>
             </a:r>
-            <a:endParaRPr lang="en-US" dirty="0"/>
-          </a:p>
-          <a:p>
-            <a:r>
-              <a:rPr lang="en-US" dirty="0"/>
+            <a:endParaRPr lang="en-US" sz="3200" dirty="0"/>
+          </a:p>
+          <a:p>
+            <a:r>
+              <a:rPr lang="en-US" sz="3200" dirty="0"/>
               <a:t>- </a:t>
             </a:r>
             <a:r>
-              <a:rPr lang="en-US" dirty="0" err="1"/>
+              <a:rPr lang="en-US" sz="3200" dirty="0" err="1"/>
               <a:t>Определить</a:t>
             </a:r>
             <a:r>
-              <a:rPr lang="en-US" dirty="0"/>
-              <a:t> </a:t>
-            </a:r>
-            <a:r>
-              <a:rPr lang="en-US" dirty="0" err="1"/>
+              <a:rPr lang="en-US" sz="3200" dirty="0"/>
+              <a:t> </a:t>
+            </a:r>
+            <a:r>
+              <a:rPr lang="en-US" sz="3200" dirty="0" err="1"/>
               <a:t>оптимальные</a:t>
             </a:r>
             <a:r>
-              <a:rPr lang="en-US" dirty="0"/>
-              <a:t> </a:t>
-            </a:r>
-            <a:r>
-              <a:rPr lang="en-US" dirty="0" err="1"/>
+              <a:rPr lang="en-US" sz="3200" dirty="0"/>
+              <a:t> </a:t>
+            </a:r>
+            <a:r>
+              <a:rPr lang="en-US" sz="3200" dirty="0" err="1"/>
               <a:t>ценовые</a:t>
             </a:r>
             <a:r>
-              <a:rPr lang="en-US" dirty="0"/>
-              <a:t> </a:t>
-            </a:r>
-            <a:r>
-              <a:rPr lang="en-US" dirty="0" err="1"/>
+              <a:rPr lang="en-US" sz="3200" dirty="0"/>
+              <a:t> </a:t>
+            </a:r>
+            <a:r>
+              <a:rPr lang="en-US" sz="3200" dirty="0" err="1"/>
               <a:t>сегменты</a:t>
             </a:r>
-            <a:endParaRPr lang="en-US" dirty="0"/>
+            <a:endParaRPr lang="en-US" sz="3200" dirty="0"/>
           </a:p>
         </p:txBody>
       </p:sp>
@@ -5939,168 +5931,175 @@
             <p:ph idx="1"/>
           </p:nvPr>
         </p:nvSpPr>
-        <p:spPr/>
-        <p:txBody>
-          <a:bodyPr/>
+        <p:spPr>
+          <a:xfrm>
+            <a:off x="1495412" y="1878008"/>
+            <a:ext cx="10381278" cy="3101983"/>
+          </a:xfrm>
+        </p:spPr>
+        <p:txBody>
+          <a:bodyPr>
+            <a:normAutofit/>
+          </a:bodyPr>
           <a:lstStyle/>
           <a:p>
             <a:pPr marL="0" indent="0">
               <a:buNone/>
             </a:pPr>
             <a:r>
-              <a:rPr lang="en-US" dirty="0"/>
+              <a:rPr lang="en-US" sz="3200" dirty="0"/>
               <a:t>3. </a:t>
             </a:r>
             <a:r>
-              <a:rPr lang="en-US" dirty="0" err="1"/>
+              <a:rPr lang="en-US" sz="3200" dirty="0" err="1"/>
               <a:t>Оценка</a:t>
             </a:r>
             <a:r>
-              <a:rPr lang="en-US" dirty="0"/>
-              <a:t> </a:t>
-            </a:r>
-            <a:r>
-              <a:rPr lang="en-US" dirty="0" err="1"/>
+              <a:rPr lang="en-US" sz="3200" dirty="0"/>
+              <a:t> </a:t>
+            </a:r>
+            <a:r>
+              <a:rPr lang="en-US" sz="3200" dirty="0" err="1"/>
               <a:t>качества</a:t>
             </a:r>
             <a:r>
-              <a:rPr lang="en-US" dirty="0"/>
-              <a:t> </a:t>
-            </a:r>
-            <a:r>
-              <a:rPr lang="en-US" dirty="0" err="1"/>
+              <a:rPr lang="en-US" sz="3200" dirty="0"/>
+              <a:t> </a:t>
+            </a:r>
+            <a:r>
+              <a:rPr lang="en-US" sz="3200" dirty="0" err="1"/>
               <a:t>и</a:t>
             </a:r>
             <a:r>
-              <a:rPr lang="en-US" dirty="0"/>
-              <a:t> </a:t>
-            </a:r>
-            <a:r>
-              <a:rPr lang="en-US" dirty="0" err="1"/>
+              <a:rPr lang="en-US" sz="3200" dirty="0"/>
+              <a:t> </a:t>
+            </a:r>
+            <a:r>
+              <a:rPr lang="en-US" sz="3200" dirty="0" err="1"/>
               <a:t>рейтингов</a:t>
             </a:r>
-            <a:endParaRPr lang="en-US" dirty="0"/>
-          </a:p>
-          <a:p>
-            <a:r>
-              <a:rPr lang="en-US" dirty="0"/>
+            <a:endParaRPr lang="en-US" sz="3200" dirty="0"/>
+          </a:p>
+          <a:p>
+            <a:r>
+              <a:rPr lang="en-US" sz="3200" dirty="0"/>
               <a:t>- </a:t>
             </a:r>
             <a:r>
-              <a:rPr lang="en-US" dirty="0" err="1"/>
+              <a:rPr lang="en-US" sz="3200" dirty="0" err="1"/>
               <a:t>Изучить</a:t>
             </a:r>
             <a:r>
-              <a:rPr lang="en-US" dirty="0"/>
-              <a:t> </a:t>
-            </a:r>
-            <a:r>
-              <a:rPr lang="en-US" dirty="0" err="1"/>
+              <a:rPr lang="en-US" sz="3200" dirty="0"/>
+              <a:t> </a:t>
+            </a:r>
+            <a:r>
+              <a:rPr lang="en-US" sz="3200" dirty="0" err="1"/>
               <a:t>распределение</a:t>
             </a:r>
             <a:r>
-              <a:rPr lang="en-US" dirty="0"/>
-              <a:t> </a:t>
-            </a:r>
-            <a:r>
-              <a:rPr lang="en-US" dirty="0" err="1"/>
+              <a:rPr lang="en-US" sz="3200" dirty="0"/>
+              <a:t> </a:t>
+            </a:r>
+            <a:r>
+              <a:rPr lang="en-US" sz="3200" dirty="0" err="1"/>
               <a:t>рейтингов</a:t>
             </a:r>
             <a:r>
-              <a:rPr lang="en-US" dirty="0"/>
-              <a:t> </a:t>
-            </a:r>
-            <a:r>
-              <a:rPr lang="en-US" dirty="0" err="1"/>
+              <a:rPr lang="en-US" sz="3200" dirty="0"/>
+              <a:t> </a:t>
+            </a:r>
+            <a:r>
+              <a:rPr lang="en-US" sz="3200" dirty="0" err="1"/>
               <a:t>по</a:t>
             </a:r>
             <a:r>
-              <a:rPr lang="en-US" dirty="0"/>
-              <a:t> </a:t>
-            </a:r>
-            <a:r>
-              <a:rPr lang="en-US" dirty="0" err="1"/>
+              <a:rPr lang="en-US" sz="3200" dirty="0"/>
+              <a:t> </a:t>
+            </a:r>
+            <a:r>
+              <a:rPr lang="en-US" sz="3200" dirty="0" err="1"/>
               <a:t>категориям</a:t>
             </a:r>
-            <a:endParaRPr lang="en-US" dirty="0"/>
-          </a:p>
-          <a:p>
-            <a:r>
-              <a:rPr lang="en-US" dirty="0"/>
+            <a:endParaRPr lang="en-US" sz="3200" dirty="0"/>
+          </a:p>
+          <a:p>
+            <a:r>
+              <a:rPr lang="en-US" sz="3200" dirty="0"/>
               <a:t>- </a:t>
             </a:r>
             <a:r>
-              <a:rPr lang="en-US" dirty="0" err="1"/>
+              <a:rPr lang="en-US" sz="3200" dirty="0" err="1"/>
               <a:t>Выявить</a:t>
             </a:r>
             <a:r>
-              <a:rPr lang="en-US" dirty="0"/>
-              <a:t> </a:t>
-            </a:r>
-            <a:r>
-              <a:rPr lang="en-US" dirty="0" err="1"/>
+              <a:rPr lang="en-US" sz="3200" dirty="0"/>
+              <a:t> </a:t>
+            </a:r>
+            <a:r>
+              <a:rPr lang="en-US" sz="3200" dirty="0" err="1"/>
               <a:t>факторы</a:t>
             </a:r>
             <a:r>
-              <a:rPr lang="en-US" dirty="0"/>
-              <a:t> </a:t>
-            </a:r>
-            <a:r>
-              <a:rPr lang="en-US" dirty="0" err="1"/>
+              <a:rPr lang="en-US" sz="3200" dirty="0"/>
+              <a:t> </a:t>
+            </a:r>
+            <a:r>
+              <a:rPr lang="en-US" sz="3200" dirty="0" err="1"/>
               <a:t>успешных</a:t>
             </a:r>
             <a:r>
-              <a:rPr lang="en-US" dirty="0"/>
-              <a:t> </a:t>
-            </a:r>
-            <a:r>
-              <a:rPr lang="en-US" dirty="0" err="1"/>
+              <a:rPr lang="en-US" sz="3200" dirty="0"/>
+              <a:t> </a:t>
+            </a:r>
+            <a:r>
+              <a:rPr lang="en-US" sz="3200" dirty="0" err="1"/>
               <a:t>заведений</a:t>
             </a:r>
-            <a:endParaRPr lang="en-US" dirty="0"/>
-          </a:p>
-          <a:p>
-            <a:r>
-              <a:rPr lang="en-US" dirty="0"/>
+            <a:endParaRPr lang="en-US" sz="3200" dirty="0"/>
+          </a:p>
+          <a:p>
+            <a:r>
+              <a:rPr lang="en-US" sz="3200" dirty="0"/>
               <a:t>- </a:t>
             </a:r>
             <a:r>
-              <a:rPr lang="en-US" dirty="0" err="1"/>
+              <a:rPr lang="en-US" sz="3200" dirty="0" err="1"/>
               <a:t>Сравнить</a:t>
             </a:r>
             <a:r>
-              <a:rPr lang="en-US" dirty="0"/>
-              <a:t> </a:t>
-            </a:r>
-            <a:r>
-              <a:rPr lang="en-US" dirty="0" err="1"/>
+              <a:rPr lang="en-US" sz="3200" dirty="0"/>
+              <a:t> </a:t>
+            </a:r>
+            <a:r>
+              <a:rPr lang="en-US" sz="3200" dirty="0" err="1"/>
               <a:t>сетевые</a:t>
             </a:r>
             <a:r>
-              <a:rPr lang="en-US" dirty="0"/>
-              <a:t> </a:t>
-            </a:r>
-            <a:r>
-              <a:rPr lang="en-US" dirty="0" err="1"/>
+              <a:rPr lang="en-US" sz="3200" dirty="0"/>
+              <a:t> </a:t>
+            </a:r>
+            <a:r>
+              <a:rPr lang="en-US" sz="3200" dirty="0" err="1"/>
               <a:t>и</a:t>
             </a:r>
             <a:r>
-              <a:rPr lang="en-US" dirty="0"/>
-              <a:t> </a:t>
-            </a:r>
-            <a:r>
-              <a:rPr lang="en-US" dirty="0" err="1"/>
+              <a:rPr lang="en-US" sz="3200" dirty="0"/>
+              <a:t> </a:t>
+            </a:r>
+            <a:r>
+              <a:rPr lang="en-US" sz="3200" dirty="0" err="1"/>
               <a:t>независимые</a:t>
             </a:r>
             <a:r>
-              <a:rPr lang="en-US" dirty="0"/>
-              <a:t> </a:t>
-            </a:r>
-            <a:r>
-              <a:rPr lang="en-US" dirty="0" err="1"/>
+              <a:rPr lang="en-US" sz="3200" dirty="0"/>
+              <a:t> </a:t>
+            </a:r>
+            <a:r>
+              <a:rPr lang="en-US" sz="3200" dirty="0" err="1"/>
               <a:t>форматы</a:t>
             </a:r>
-            <a:endParaRPr lang="en-US" dirty="0"/>
+            <a:endParaRPr lang="en-US" sz="3200" dirty="0"/>
           </a:p>
         </p:txBody>
       </p:sp>
@@ -6150,187 +6149,194 @@
             <p:ph idx="1"/>
           </p:nvPr>
         </p:nvSpPr>
-        <p:spPr/>
-        <p:txBody>
-          <a:bodyPr/>
+        <p:spPr>
+          <a:xfrm>
+            <a:off x="969895" y="1878008"/>
+            <a:ext cx="11222105" cy="3101983"/>
+          </a:xfrm>
+        </p:spPr>
+        <p:txBody>
+          <a:bodyPr>
+            <a:normAutofit/>
+          </a:bodyPr>
           <a:lstStyle/>
           <a:p>
             <a:pPr marL="0" indent="0">
               <a:buNone/>
             </a:pPr>
             <a:r>
-              <a:rPr lang="en-US" dirty="0"/>
+              <a:rPr lang="en-US" sz="2800" dirty="0"/>
               <a:t>4. </a:t>
             </a:r>
             <a:r>
-              <a:rPr lang="en-US" dirty="0" err="1"/>
+              <a:rPr lang="en-US" sz="2800" dirty="0" err="1"/>
               <a:t>Специализированный</a:t>
             </a:r>
             <a:r>
-              <a:rPr lang="en-US" dirty="0"/>
-              <a:t> </a:t>
-            </a:r>
-            <a:r>
-              <a:rPr lang="en-US" dirty="0" err="1"/>
+              <a:rPr lang="en-US" sz="2800" dirty="0"/>
+              <a:t> </a:t>
+            </a:r>
+            <a:r>
+              <a:rPr lang="en-US" sz="2800" dirty="0" err="1"/>
               <a:t>анализ</a:t>
             </a:r>
             <a:r>
-              <a:rPr lang="en-US" dirty="0"/>
-              <a:t> </a:t>
-            </a:r>
-            <a:r>
-              <a:rPr lang="en-US" dirty="0" err="1"/>
+              <a:rPr lang="en-US" sz="2800" dirty="0"/>
+              <a:t> </a:t>
+            </a:r>
+            <a:r>
+              <a:rPr lang="en-US" sz="2800" dirty="0" err="1"/>
               <a:t>кофеен</a:t>
             </a:r>
-            <a:endParaRPr lang="en-US" dirty="0"/>
-          </a:p>
-          <a:p>
-            <a:r>
-              <a:rPr lang="en-US" dirty="0"/>
+            <a:endParaRPr lang="en-US" sz="2800" dirty="0"/>
+          </a:p>
+          <a:p>
+            <a:r>
+              <a:rPr lang="en-US" sz="2800" dirty="0"/>
               <a:t>- </a:t>
             </a:r>
             <a:r>
-              <a:rPr lang="en-US" dirty="0" err="1"/>
+              <a:rPr lang="en-US" sz="2800" dirty="0" err="1"/>
               <a:t>Оценить</a:t>
             </a:r>
             <a:r>
-              <a:rPr lang="en-US" dirty="0"/>
-              <a:t> </a:t>
-            </a:r>
-            <a:r>
-              <a:rPr lang="en-US" dirty="0" err="1"/>
+              <a:rPr lang="en-US" sz="2800" dirty="0"/>
+              <a:t> </a:t>
+            </a:r>
+            <a:r>
+              <a:rPr lang="en-US" sz="2800" dirty="0" err="1"/>
               <a:t>потенциал</a:t>
             </a:r>
             <a:r>
-              <a:rPr lang="en-US" dirty="0"/>
-              <a:t> </a:t>
-            </a:r>
-            <a:r>
-              <a:rPr lang="en-US" dirty="0" err="1"/>
+              <a:rPr lang="en-US" sz="2800" dirty="0"/>
+              <a:t> </a:t>
+            </a:r>
+            <a:r>
+              <a:rPr lang="en-US" sz="2800" dirty="0" err="1"/>
               <a:t>открытия</a:t>
             </a:r>
             <a:r>
-              <a:rPr lang="en-US" dirty="0"/>
-              <a:t> </a:t>
-            </a:r>
-            <a:r>
-              <a:rPr lang="en-US" dirty="0" err="1"/>
+              <a:rPr lang="en-US" sz="2800" dirty="0"/>
+              <a:t> </a:t>
+            </a:r>
+            <a:r>
+              <a:rPr lang="en-US" sz="2800" dirty="0" err="1"/>
               <a:t>кофейни</a:t>
             </a:r>
             <a:r>
-              <a:rPr lang="en-US" dirty="0"/>
-              <a:t> </a:t>
-            </a:r>
-            <a:r>
-              <a:rPr lang="en-US" dirty="0" err="1"/>
+              <a:rPr lang="en-US" sz="2800" dirty="0"/>
+              <a:t> </a:t>
+            </a:r>
+            <a:r>
+              <a:rPr lang="en-US" sz="2800" dirty="0" err="1"/>
               <a:t>в</a:t>
             </a:r>
             <a:r>
-              <a:rPr lang="en-US" dirty="0"/>
-              <a:t> </a:t>
-            </a:r>
-            <a:r>
-              <a:rPr lang="en-US" dirty="0" err="1"/>
+              <a:rPr lang="en-US" sz="2800" dirty="0"/>
+              <a:t> </a:t>
+            </a:r>
+            <a:r>
+              <a:rPr lang="en-US" sz="2800" dirty="0" err="1"/>
               <a:t>стиле</a:t>
             </a:r>
             <a:r>
-              <a:rPr lang="en-US" dirty="0"/>
+              <a:rPr lang="en-US" sz="2800" dirty="0"/>
               <a:t> «Central Perk»</a:t>
             </a:r>
           </a:p>
           <a:p>
             <a:r>
-              <a:rPr lang="en-US" dirty="0"/>
+              <a:rPr lang="en-US" sz="2800" dirty="0"/>
               <a:t>- </a:t>
             </a:r>
             <a:r>
-              <a:rPr lang="en-US" dirty="0" err="1"/>
+              <a:rPr lang="en-US" sz="2800" dirty="0" err="1"/>
               <a:t>Проанализировать</a:t>
             </a:r>
             <a:r>
-              <a:rPr lang="en-US" dirty="0"/>
-              <a:t> </a:t>
-            </a:r>
-            <a:r>
-              <a:rPr lang="en-US" dirty="0" err="1"/>
+              <a:rPr lang="en-US" sz="2800" dirty="0"/>
+              <a:t> </a:t>
+            </a:r>
+            <a:r>
+              <a:rPr lang="en-US" sz="2800" dirty="0" err="1"/>
               <a:t>конкурентную</a:t>
             </a:r>
             <a:r>
-              <a:rPr lang="en-US" dirty="0"/>
-              <a:t> </a:t>
-            </a:r>
-            <a:r>
-              <a:rPr lang="en-US" dirty="0" err="1"/>
+              <a:rPr lang="en-US" sz="2800" dirty="0"/>
+              <a:t> </a:t>
+            </a:r>
+            <a:r>
+              <a:rPr lang="en-US" sz="2800" dirty="0" err="1"/>
               <a:t>среду</a:t>
             </a:r>
             <a:r>
-              <a:rPr lang="en-US" dirty="0"/>
-              <a:t> </a:t>
-            </a:r>
-            <a:r>
-              <a:rPr lang="en-US" dirty="0" err="1"/>
+              <a:rPr lang="en-US" sz="2800" dirty="0"/>
+              <a:t> </a:t>
+            </a:r>
+            <a:r>
+              <a:rPr lang="en-US" sz="2800" dirty="0" err="1"/>
               <a:t>кофейного</a:t>
             </a:r>
             <a:r>
-              <a:rPr lang="en-US" dirty="0"/>
-              <a:t> </a:t>
-            </a:r>
-            <a:r>
-              <a:rPr lang="en-US" dirty="0" err="1"/>
+              <a:rPr lang="en-US" sz="2800" dirty="0"/>
+              <a:t> </a:t>
+            </a:r>
+            <a:r>
+              <a:rPr lang="en-US" sz="2800" dirty="0" err="1"/>
               <a:t>сегмента</a:t>
             </a:r>
-            <a:endParaRPr lang="en-US" dirty="0"/>
-          </a:p>
-          <a:p>
-            <a:r>
-              <a:rPr lang="en-US" dirty="0"/>
+            <a:endParaRPr lang="en-US" sz="2800" dirty="0"/>
+          </a:p>
+          <a:p>
+            <a:r>
+              <a:rPr lang="en-US" sz="2800" dirty="0"/>
               <a:t>- </a:t>
             </a:r>
             <a:r>
-              <a:rPr lang="en-US" dirty="0" err="1"/>
+              <a:rPr lang="en-US" sz="2800" dirty="0" err="1"/>
               <a:t>Определить</a:t>
             </a:r>
             <a:r>
-              <a:rPr lang="en-US" dirty="0"/>
-              <a:t> </a:t>
-            </a:r>
-            <a:r>
-              <a:rPr lang="en-US" dirty="0" err="1"/>
+              <a:rPr lang="en-US" sz="2800" dirty="0"/>
+              <a:t> </a:t>
+            </a:r>
+            <a:r>
+              <a:rPr lang="en-US" sz="2800" dirty="0" err="1"/>
               <a:t>оптимальные</a:t>
             </a:r>
             <a:r>
-              <a:rPr lang="en-US" dirty="0"/>
-              <a:t> </a:t>
-            </a:r>
-            <a:r>
-              <a:rPr lang="en-US" dirty="0" err="1"/>
+              <a:rPr lang="en-US" sz="2800" dirty="0"/>
+              <a:t> </a:t>
+            </a:r>
+            <a:r>
+              <a:rPr lang="en-US" sz="2800" dirty="0" err="1"/>
               <a:t>локации</a:t>
             </a:r>
             <a:r>
-              <a:rPr lang="en-US" dirty="0"/>
-              <a:t> </a:t>
-            </a:r>
-            <a:r>
-              <a:rPr lang="en-US" dirty="0" err="1"/>
+              <a:rPr lang="en-US" sz="2800" dirty="0"/>
+              <a:t> </a:t>
+            </a:r>
+            <a:r>
+              <a:rPr lang="en-US" sz="2800" dirty="0" err="1"/>
               <a:t>и</a:t>
             </a:r>
             <a:r>
-              <a:rPr lang="en-US" dirty="0"/>
-              <a:t> </a:t>
-            </a:r>
-            <a:r>
-              <a:rPr lang="en-US" dirty="0" err="1"/>
+              <a:rPr lang="en-US" sz="2800" dirty="0"/>
+              <a:t> </a:t>
+            </a:r>
+            <a:r>
+              <a:rPr lang="en-US" sz="2800" dirty="0" err="1"/>
               <a:t>ценовую</a:t>
             </a:r>
             <a:r>
-              <a:rPr lang="en-US" dirty="0"/>
-              <a:t> </a:t>
-            </a:r>
-            <a:r>
-              <a:rPr lang="en-US" dirty="0" err="1"/>
+              <a:rPr lang="en-US" sz="2800" dirty="0"/>
+              <a:t> </a:t>
+            </a:r>
+            <a:r>
+              <a:rPr lang="en-US" sz="2800" dirty="0" err="1"/>
               <a:t>политику</a:t>
             </a:r>
-            <a:endParaRPr lang="en-US" dirty="0"/>
+            <a:endParaRPr lang="en-US" sz="2800" dirty="0"/>
           </a:p>
         </p:txBody>
       </p:sp>
@@ -6380,200 +6386,207 @@
             <p:ph idx="1"/>
           </p:nvPr>
         </p:nvSpPr>
-        <p:spPr/>
-        <p:txBody>
-          <a:bodyPr/>
+        <p:spPr>
+          <a:xfrm>
+            <a:off x="1096018" y="2038955"/>
+            <a:ext cx="11222105" cy="3101983"/>
+          </a:xfrm>
+        </p:spPr>
+        <p:txBody>
+          <a:bodyPr>
+            <a:normAutofit/>
+          </a:bodyPr>
           <a:lstStyle/>
           <a:p>
             <a:pPr marL="0" indent="0">
               <a:buNone/>
             </a:pPr>
             <a:r>
-              <a:rPr lang="en-US" dirty="0"/>
+              <a:rPr lang="en-US" sz="2800" dirty="0"/>
               <a:t>5. </a:t>
             </a:r>
             <a:r>
-              <a:rPr lang="en-US" dirty="0" err="1"/>
+              <a:rPr lang="en-US" sz="2800" dirty="0" err="1"/>
               <a:t>Разработка</a:t>
             </a:r>
             <a:r>
-              <a:rPr lang="en-US" dirty="0"/>
-              <a:t> </a:t>
-            </a:r>
-            <a:r>
-              <a:rPr lang="en-US" dirty="0" err="1"/>
+              <a:rPr lang="en-US" sz="2800" dirty="0"/>
+              <a:t> </a:t>
+            </a:r>
+            <a:r>
+              <a:rPr lang="en-US" sz="2800" dirty="0" err="1"/>
               <a:t>практических</a:t>
             </a:r>
             <a:r>
-              <a:rPr lang="en-US" dirty="0"/>
-              <a:t> </a:t>
-            </a:r>
-            <a:r>
-              <a:rPr lang="en-US" dirty="0" err="1"/>
+              <a:rPr lang="en-US" sz="2800" dirty="0"/>
+              <a:t> </a:t>
+            </a:r>
+            <a:r>
+              <a:rPr lang="en-US" sz="2800" dirty="0" err="1"/>
               <a:t>рекомендаций</a:t>
             </a:r>
-            <a:endParaRPr lang="en-US" dirty="0"/>
-          </a:p>
-          <a:p>
-            <a:r>
-              <a:rPr lang="en-US" dirty="0"/>
+            <a:endParaRPr lang="en-US" sz="2800" dirty="0"/>
+          </a:p>
+          <a:p>
+            <a:r>
+              <a:rPr lang="en-US" sz="2800" dirty="0"/>
               <a:t>- </a:t>
             </a:r>
             <a:r>
-              <a:rPr lang="en-US" dirty="0" err="1"/>
+              <a:rPr lang="en-US" sz="2800" dirty="0" err="1"/>
               <a:t>Сформировать</a:t>
             </a:r>
             <a:r>
-              <a:rPr lang="en-US" dirty="0"/>
-              <a:t> </a:t>
-            </a:r>
-            <a:r>
-              <a:rPr lang="en-US" dirty="0" err="1"/>
+              <a:rPr lang="en-US" sz="2800" dirty="0"/>
+              <a:t> </a:t>
+            </a:r>
+            <a:r>
+              <a:rPr lang="en-US" sz="2800" dirty="0" err="1"/>
               <a:t>конкретные</a:t>
             </a:r>
             <a:r>
-              <a:rPr lang="en-US" dirty="0"/>
-              <a:t> </a:t>
-            </a:r>
-            <a:r>
-              <a:rPr lang="en-US" dirty="0" err="1"/>
+              <a:rPr lang="en-US" sz="2800" dirty="0"/>
+              <a:t> </a:t>
+            </a:r>
+            <a:r>
+              <a:rPr lang="en-US" sz="2800" dirty="0" err="1"/>
               <a:t>предложения</a:t>
             </a:r>
             <a:r>
-              <a:rPr lang="en-US" dirty="0"/>
-              <a:t> </a:t>
-            </a:r>
-            <a:r>
-              <a:rPr lang="en-US" dirty="0" err="1"/>
+              <a:rPr lang="en-US" sz="2800" dirty="0"/>
+              <a:t> </a:t>
+            </a:r>
+            <a:r>
+              <a:rPr lang="en-US" sz="2800" dirty="0" err="1"/>
               <a:t>по</a:t>
             </a:r>
             <a:r>
-              <a:rPr lang="en-US" dirty="0"/>
-              <a:t> </a:t>
-            </a:r>
-            <a:r>
-              <a:rPr lang="en-US" dirty="0" err="1"/>
+              <a:rPr lang="en-US" sz="2800" dirty="0"/>
+              <a:t> </a:t>
+            </a:r>
+            <a:r>
+              <a:rPr lang="en-US" sz="2800" dirty="0" err="1"/>
               <a:t>формату</a:t>
             </a:r>
             <a:r>
-              <a:rPr lang="en-US" dirty="0"/>
-              <a:t> </a:t>
-            </a:r>
-            <a:r>
-              <a:rPr lang="en-US" dirty="0" err="1"/>
+              <a:rPr lang="en-US" sz="2800" dirty="0"/>
+              <a:t> </a:t>
+            </a:r>
+            <a:r>
+              <a:rPr lang="en-US" sz="2800" dirty="0" err="1"/>
               <a:t>и</a:t>
             </a:r>
             <a:r>
-              <a:rPr lang="en-US" dirty="0"/>
-              <a:t> </a:t>
-            </a:r>
-            <a:r>
-              <a:rPr lang="en-US" dirty="0" err="1"/>
+              <a:rPr lang="en-US" sz="2800" dirty="0"/>
+              <a:t> </a:t>
+            </a:r>
+            <a:r>
+              <a:rPr lang="en-US" sz="2800" dirty="0" err="1"/>
               <a:t>концепции</a:t>
             </a:r>
-            <a:endParaRPr lang="en-US" dirty="0"/>
-          </a:p>
-          <a:p>
-            <a:r>
-              <a:rPr lang="en-US" dirty="0"/>
+            <a:endParaRPr lang="en-US" sz="2800" dirty="0"/>
+          </a:p>
+          <a:p>
+            <a:r>
+              <a:rPr lang="en-US" sz="2800" dirty="0"/>
               <a:t>- </a:t>
             </a:r>
             <a:r>
-              <a:rPr lang="en-US" dirty="0" err="1"/>
+              <a:rPr lang="en-US" sz="2800" dirty="0" err="1"/>
               <a:t>Определить</a:t>
             </a:r>
             <a:r>
-              <a:rPr lang="en-US" dirty="0"/>
-              <a:t> </a:t>
-            </a:r>
-            <a:r>
-              <a:rPr lang="en-US" dirty="0" err="1"/>
+              <a:rPr lang="en-US" sz="2800" dirty="0"/>
+              <a:t> </a:t>
+            </a:r>
+            <a:r>
+              <a:rPr lang="en-US" sz="2800" dirty="0" err="1"/>
               <a:t>оптимальные</a:t>
             </a:r>
             <a:r>
-              <a:rPr lang="en-US" dirty="0"/>
-              <a:t> </a:t>
-            </a:r>
-            <a:r>
-              <a:rPr lang="en-US" dirty="0" err="1"/>
+              <a:rPr lang="en-US" sz="2800" dirty="0"/>
+              <a:t> </a:t>
+            </a:r>
+            <a:r>
+              <a:rPr lang="en-US" sz="2800" dirty="0" err="1"/>
               <a:t>параметры</a:t>
             </a:r>
             <a:r>
-              <a:rPr lang="en-US" dirty="0"/>
-              <a:t> </a:t>
-            </a:r>
-            <a:r>
-              <a:rPr lang="en-US" dirty="0" err="1"/>
+              <a:rPr lang="en-US" sz="2800" dirty="0"/>
+              <a:t> </a:t>
+            </a:r>
+            <a:r>
+              <a:rPr lang="en-US" sz="2800" dirty="0" err="1"/>
               <a:t>для</a:t>
             </a:r>
             <a:r>
-              <a:rPr lang="en-US" dirty="0"/>
-              <a:t> </a:t>
-            </a:r>
-            <a:r>
-              <a:rPr lang="en-US" dirty="0" err="1"/>
+              <a:rPr lang="en-US" sz="2800" dirty="0"/>
+              <a:t> </a:t>
+            </a:r>
+            <a:r>
+              <a:rPr lang="en-US" sz="2800" dirty="0" err="1"/>
               <a:t>нового</a:t>
             </a:r>
             <a:r>
-              <a:rPr lang="en-US" dirty="0"/>
-              <a:t> </a:t>
-            </a:r>
-            <a:r>
-              <a:rPr lang="en-US" dirty="0" err="1"/>
+              <a:rPr lang="en-US" sz="2800" dirty="0"/>
+              <a:t> </a:t>
+            </a:r>
+            <a:r>
+              <a:rPr lang="en-US" sz="2800" dirty="0" err="1"/>
               <a:t>заведения</a:t>
             </a:r>
-            <a:endParaRPr lang="en-US" dirty="0"/>
-          </a:p>
-          <a:p>
-            <a:r>
-              <a:rPr lang="en-US" dirty="0"/>
+            <a:endParaRPr lang="en-US" sz="2800" dirty="0"/>
+          </a:p>
+          <a:p>
+            <a:r>
+              <a:rPr lang="en-US" sz="2800" dirty="0"/>
               <a:t>- </a:t>
             </a:r>
             <a:r>
-              <a:rPr lang="en-US" dirty="0" err="1"/>
+              <a:rPr lang="en-US" sz="2800" dirty="0" err="1"/>
               <a:t>Предложить</a:t>
             </a:r>
             <a:r>
-              <a:rPr lang="en-US" dirty="0"/>
-              <a:t> </a:t>
-            </a:r>
-            <a:r>
-              <a:rPr lang="en-US" dirty="0" err="1"/>
+              <a:rPr lang="en-US" sz="2800" dirty="0"/>
+              <a:t> </a:t>
+            </a:r>
+            <a:r>
+              <a:rPr lang="en-US" sz="2800" dirty="0" err="1"/>
               <a:t>план</a:t>
             </a:r>
             <a:r>
-              <a:rPr lang="en-US" dirty="0"/>
-              <a:t> </a:t>
-            </a:r>
-            <a:r>
-              <a:rPr lang="en-US" dirty="0" err="1"/>
+              <a:rPr lang="en-US" sz="2800" dirty="0"/>
+              <a:t> </a:t>
+            </a:r>
+            <a:r>
+              <a:rPr lang="en-US" sz="2800" dirty="0" err="1"/>
               <a:t>действий</a:t>
             </a:r>
             <a:r>
-              <a:rPr lang="en-US" dirty="0"/>
-              <a:t> </a:t>
-            </a:r>
-            <a:r>
-              <a:rPr lang="en-US" dirty="0" err="1"/>
+              <a:rPr lang="en-US" sz="2800" dirty="0"/>
+              <a:t> </a:t>
+            </a:r>
+            <a:r>
+              <a:rPr lang="en-US" sz="2800" dirty="0" err="1"/>
               <a:t>для</a:t>
             </a:r>
             <a:r>
-              <a:rPr lang="en-US" dirty="0"/>
-              <a:t> </a:t>
-            </a:r>
-            <a:r>
-              <a:rPr lang="en-US" dirty="0" err="1"/>
+              <a:rPr lang="en-US" sz="2800" dirty="0"/>
+              <a:t> </a:t>
+            </a:r>
+            <a:r>
+              <a:rPr lang="en-US" sz="2800" dirty="0" err="1"/>
               <a:t>реализации</a:t>
             </a:r>
             <a:r>
-              <a:rPr lang="en-US" dirty="0"/>
-              <a:t> </a:t>
-            </a:r>
-            <a:r>
-              <a:rPr lang="en-US" dirty="0" err="1"/>
+              <a:rPr lang="en-US" sz="2800" dirty="0"/>
+              <a:t> </a:t>
+            </a:r>
+            <a:r>
+              <a:rPr lang="en-US" sz="2800" dirty="0" err="1"/>
               <a:t>проекта</a:t>
             </a:r>
-            <a:endParaRPr lang="en-US" dirty="0"/>
+            <a:endParaRPr lang="en-US" sz="2800" dirty="0"/>
           </a:p>
         </p:txBody>
       </p:sp>
@@ -6591,108 +6604,58 @@
 </file>
 
 <file path=ppt/theme/theme1.xml><?xml version="1.0" encoding="utf-8"?>
-<a:theme xmlns:a="http://schemas.openxmlformats.org/drawingml/2006/main" name="Office Theme">
+<a:theme xmlns:a="http://schemas.openxmlformats.org/drawingml/2006/main" name="Parcel">
   <a:themeElements>
-    <a:clrScheme name="Office">
+    <a:clrScheme name="Parcel">
       <a:dk1>
-        <a:sysClr val="windowText" lastClr="000000"/>
+        <a:srgbClr val="000000"/>
       </a:dk1>
       <a:lt1>
-        <a:sysClr val="window" lastClr="FFFFFF"/>
+        <a:srgbClr val="FFFFFF"/>
       </a:lt1>
       <a:dk2>
-        <a:srgbClr val="0E2841"/>
+        <a:srgbClr val="4A5356"/>
       </a:dk2>
       <a:lt2>
-        <a:srgbClr val="E8E8E8"/>
+        <a:srgbClr val="E8E3CE"/>
       </a:lt2>
       <a:accent1>
-        <a:srgbClr val="156082"/>
+        <a:srgbClr val="F6A21D"/>
       </a:accent1>
       <a:accent2>
-        <a:srgbClr val="E97132"/>
+        <a:srgbClr val="9BAFB5"/>
       </a:accent2>
       <a:accent3>
-        <a:srgbClr val="196B24"/>
+        <a:srgbClr val="C96731"/>
       </a:accent3>
       <a:accent4>
-        <a:srgbClr val="0F9ED5"/>
+        <a:srgbClr val="9CA383"/>
       </a:accent4>
       <a:accent5>
-        <a:srgbClr val="A02B93"/>
+        <a:srgbClr val="87795D"/>
       </a:accent5>
       <a:accent6>
-        <a:srgbClr val="4EA72E"/>
+        <a:srgbClr val="A0988C"/>
       </a:accent6>
       <a:hlink>
-        <a:srgbClr val="467886"/>
+        <a:srgbClr val="00B0F0"/>
       </a:hlink>
       <a:folHlink>
-        <a:srgbClr val="96607D"/>
+        <a:srgbClr val="738F97"/>
       </a:folHlink>
     </a:clrScheme>
-    <a:fontScheme name="Office">
+    <a:fontScheme name="Parcel">
       <a:majorFont>
-        <a:latin typeface="Aptos Display" panose="02110004020202020204"/>
+        <a:latin typeface="Gill Sans MT" panose="020B0502020104020203"/>
         <a:ea typeface=""/>
         <a:cs typeface=""/>
-        <a:font script="Jpan" typeface="游ゴシック Light"/>
-        <a:font script="Hang" typeface="맑은 고딕"/>
-        <a:font script="Hans" typeface="等线 Light"/>
-        <a:font script="Hant" typeface="新細明體"/>
-        <a:font script="Arab" typeface="Times New Roman"/>
-        <a:font script="Hebr" typeface="Times New Roman"/>
-        <a:font script="Thai" typeface="Angsana New"/>
-        <a:font script="Ethi" typeface="Nyala"/>
-        <a:font script="Beng" typeface="Vrinda"/>
-        <a:font script="Gujr" typeface="Shruti"/>
-        <a:font script="Khmr" typeface="MoolBoran"/>
-        <a:font script="Knda" typeface="Tunga"/>
-        <a:font script="Guru" typeface="Raavi"/>
-        <a:font script="Cans" typeface="Euphemia"/>
-        <a:font script="Cher" typeface="Plantagenet Cherokee"/>
-        <a:font script="Yiii" typeface="Microsoft Yi Baiti"/>
-        <a:font script="Tibt" typeface="Microsoft Himalaya"/>
-        <a:font script="Thaa" typeface="MV Boli"/>
-        <a:font script="Deva" typeface="Mangal"/>
-        <a:font script="Telu" typeface="Gautami"/>
-        <a:font script="Taml" typeface="Latha"/>
-        <a:font script="Syrc" typeface="Estrangelo Edessa"/>
-        <a:font script="Orya" typeface="Kalinga"/>
-        <a:font script="Mlym" typeface="Kartika"/>
-        <a:font script="Laoo" typeface="DokChampa"/>
-        <a:font script="Sinh" typeface="Iskoola Pota"/>
-        <a:font script="Mong" typeface="Mongolian Baiti"/>
-        <a:font script="Viet" typeface="Times New Roman"/>
-        <a:font script="Uigh" typeface="Microsoft Uighur"/>
-        <a:font script="Geor" typeface="Sylfaen"/>
-        <a:font script="Armn" typeface="Arial"/>
-        <a:font script="Bugi" typeface="Leelawadee UI"/>
-        <a:font script="Bopo" typeface="Microsoft JhengHei"/>
-        <a:font script="Java" typeface="Javanese Text"/>
-        <a:font script="Lisu" typeface="Segoe UI"/>
-        <a:font script="Mymr" typeface="Myanmar Text"/>
-        <a:font script="Nkoo" typeface="Ebrima"/>
-        <a:font script="Olck" typeface="Nirmala UI"/>
-        <a:font script="Osma" typeface="Ebrima"/>
-        <a:font script="Phag" typeface="Phagspa"/>
-        <a:font script="Syrn" typeface="Estrangelo Edessa"/>
-        <a:font script="Syrj" typeface="Estrangelo Edessa"/>
-        <a:font script="Syre" typeface="Estrangelo Edessa"/>
-        <a:font script="Sora" typeface="Nirmala UI"/>
-        <a:font script="Tale" typeface="Microsoft Tai Le"/>
-        <a:font script="Talu" typeface="Microsoft New Tai Lue"/>
-        <a:font script="Tfng" typeface="Ebrima"/>
-      </a:majorFont>
-      <a:minorFont>
-        <a:latin typeface="Aptos" panose="02110004020202020204"/>
-        <a:ea typeface=""/>
-        <a:cs typeface=""/>
-        <a:font script="Jpan" typeface="游ゴシック"/>
-        <a:font script="Hang" typeface="맑은 고딕"/>
-        <a:font script="Hans" typeface="等线"/>
-        <a:font script="Hant" typeface="新細明體"/>
-        <a:font script="Arab" typeface="Arial"/>
+        <a:font script="Grek" typeface="Corbel"/>
+        <a:font script="Cyrl" typeface="Corbel"/>
+        <a:font script="Jpan" typeface="HGｺﾞｼｯｸE"/>
+        <a:font script="Hang" typeface="휴먼매직체"/>
+        <a:font script="Hans" typeface="华文中宋"/>
+        <a:font script="Hant" typeface="微軟正黑體"/>
+        <a:font script="Arab" typeface="Majalla UI"/>
         <a:font script="Hebr" typeface="Arial"/>
         <a:font script="Thai" typeface="Cordia New"/>
         <a:font script="Ethi" typeface="Nyala"/>
@@ -6715,29 +6678,49 @@
         <a:font script="Laoo" typeface="DokChampa"/>
         <a:font script="Sinh" typeface="Iskoola Pota"/>
         <a:font script="Mong" typeface="Mongolian Baiti"/>
-        <a:font script="Viet" typeface="Arial"/>
+        <a:font script="Viet" typeface="Tahoma"/>
         <a:font script="Uigh" typeface="Microsoft Uighur"/>
         <a:font script="Geor" typeface="Sylfaen"/>
-        <a:font script="Armn" typeface="Arial"/>
-        <a:font script="Bugi" typeface="Leelawadee UI"/>
-        <a:font script="Bopo" typeface="Microsoft JhengHei"/>
-        <a:font script="Java" typeface="Javanese Text"/>
-        <a:font script="Lisu" typeface="Segoe UI"/>
-        <a:font script="Mymr" typeface="Myanmar Text"/>
-        <a:font script="Nkoo" typeface="Ebrima"/>
-        <a:font script="Olck" typeface="Nirmala UI"/>
-        <a:font script="Osma" typeface="Ebrima"/>
-        <a:font script="Phag" typeface="Phagspa"/>
-        <a:font script="Syrn" typeface="Estrangelo Edessa"/>
-        <a:font script="Syrj" typeface="Estrangelo Edessa"/>
-        <a:font script="Syre" typeface="Estrangelo Edessa"/>
-        <a:font script="Sora" typeface="Nirmala UI"/>
-        <a:font script="Tale" typeface="Microsoft Tai Le"/>
-        <a:font script="Talu" typeface="Microsoft New Tai Lue"/>
-        <a:font script="Tfng" typeface="Ebrima"/>
+      </a:majorFont>
+      <a:minorFont>
+        <a:latin typeface="Gill Sans MT" panose="020B0502020104020203"/>
+        <a:ea typeface=""/>
+        <a:cs typeface=""/>
+        <a:font script="Grek" typeface="Corbel"/>
+        <a:font script="Cyrl" typeface="Corbel"/>
+        <a:font script="Jpan" typeface="HGｺﾞｼｯｸE"/>
+        <a:font script="Hang" typeface="휴먼매직체"/>
+        <a:font script="Hans" typeface="华文中宋"/>
+        <a:font script="Hant" typeface="微軟正黑體"/>
+        <a:font script="Arab" typeface="Majalla UI"/>
+        <a:font script="Hebr" typeface="Arial"/>
+        <a:font script="Thai" typeface="Cordia New"/>
+        <a:font script="Ethi" typeface="Nyala"/>
+        <a:font script="Beng" typeface="Vrinda"/>
+        <a:font script="Gujr" typeface="Shruti"/>
+        <a:font script="Khmr" typeface="DaunPenh"/>
+        <a:font script="Knda" typeface="Tunga"/>
+        <a:font script="Guru" typeface="Raavi"/>
+        <a:font script="Cans" typeface="Euphemia"/>
+        <a:font script="Cher" typeface="Plantagenet Cherokee"/>
+        <a:font script="Yiii" typeface="Microsoft Yi Baiti"/>
+        <a:font script="Tibt" typeface="Microsoft Himalaya"/>
+        <a:font script="Thaa" typeface="MV Boli"/>
+        <a:font script="Deva" typeface="Mangal"/>
+        <a:font script="Telu" typeface="Gautami"/>
+        <a:font script="Taml" typeface="Latha"/>
+        <a:font script="Syrc" typeface="Estrangelo Edessa"/>
+        <a:font script="Orya" typeface="Kalinga"/>
+        <a:font script="Mlym" typeface="Kartika"/>
+        <a:font script="Laoo" typeface="DokChampa"/>
+        <a:font script="Sinh" typeface="Iskoola Pota"/>
+        <a:font script="Mong" typeface="Mongolian Baiti"/>
+        <a:font script="Viet" typeface="Tahoma"/>
+        <a:font script="Uigh" typeface="Microsoft Uighur"/>
+        <a:font script="Geor" typeface="Sylfaen"/>
       </a:minorFont>
     </a:fontScheme>
-    <a:fmtScheme name="Office">
+    <a:fmtScheme name="Parcel">
       <a:fillStyleLst>
         <a:solidFill>
           <a:schemeClr val="phClr"/>
@@ -6746,23 +6729,16 @@
           <a:gsLst>
             <a:gs pos="0">
               <a:schemeClr val="phClr">
-                <a:lumMod val="110000"/>
-                <a:satMod val="105000"/>
-                <a:tint val="67000"/>
-              </a:schemeClr>
-            </a:gs>
-            <a:gs pos="50000">
-              <a:schemeClr val="phClr">
-                <a:lumMod val="105000"/>
-                <a:satMod val="103000"/>
-                <a:tint val="73000"/>
+                <a:tint val="80000"/>
+                <a:satMod val="107000"/>
+                <a:lumMod val="103000"/>
               </a:schemeClr>
             </a:gs>
             <a:gs pos="100000">
               <a:schemeClr val="phClr">
-                <a:lumMod val="105000"/>
+                <a:tint val="82000"/>
                 <a:satMod val="109000"/>
-                <a:tint val="81000"/>
+                <a:lumMod val="103000"/>
               </a:schemeClr>
             </a:gs>
           </a:gsLst>
@@ -6772,23 +6748,23 @@
           <a:gsLst>
             <a:gs pos="0">
               <a:schemeClr val="phClr">
-                <a:satMod val="103000"/>
+                <a:tint val="97000"/>
+                <a:satMod val="100000"/>
                 <a:lumMod val="102000"/>
-                <a:tint val="94000"/>
               </a:schemeClr>
             </a:gs>
             <a:gs pos="50000">
               <a:schemeClr val="phClr">
-                <a:satMod val="110000"/>
+                <a:shade val="100000"/>
+                <a:satMod val="103000"/>
                 <a:lumMod val="100000"/>
-                <a:shade val="100000"/>
               </a:schemeClr>
             </a:gs>
             <a:gs pos="100000">
               <a:schemeClr val="phClr">
+                <a:shade val="93000"/>
+                <a:satMod val="110000"/>
                 <a:lumMod val="99000"/>
-                <a:satMod val="120000"/>
-                <a:shade val="78000"/>
               </a:schemeClr>
             </a:gs>
           </a:gsLst>
@@ -6796,26 +6772,23 @@
         </a:gradFill>
       </a:fillStyleLst>
       <a:lnStyleLst>
+        <a:ln w="6350" cap="flat" cmpd="sng" algn="ctr">
+          <a:solidFill>
+            <a:schemeClr val="phClr"/>
+          </a:solidFill>
+          <a:prstDash val="solid"/>
+        </a:ln>
         <a:ln w="12700" cap="flat" cmpd="sng" algn="ctr">
           <a:solidFill>
             <a:schemeClr val="phClr"/>
           </a:solidFill>
           <a:prstDash val="solid"/>
-          <a:miter lim="800000"/>
         </a:ln>
-        <a:ln w="19050" cap="flat" cmpd="sng" algn="ctr">
+        <a:ln w="31750" cap="flat" cmpd="sng" algn="ctr">
           <a:solidFill>
             <a:schemeClr val="phClr"/>
           </a:solidFill>
           <a:prstDash val="solid"/>
-          <a:miter lim="800000"/>
-        </a:ln>
-        <a:ln w="25400" cap="flat" cmpd="sng" algn="ctr">
-          <a:solidFill>
-            <a:schemeClr val="phClr"/>
-          </a:solidFill>
-          <a:prstDash val="solid"/>
-          <a:miter lim="800000"/>
         </a:ln>
       </a:lnStyleLst>
       <a:effectStyleLst>
@@ -6827,12 +6800,21 @@
         </a:effectStyle>
         <a:effectStyle>
           <a:effectLst>
-            <a:outerShdw blurRad="57150" dist="19050" dir="5400000" algn="ctr" rotWithShape="0">
+            <a:outerShdw blurRad="55880" dist="15240" dir="5400000" algn="ctr" rotWithShape="0">
               <a:srgbClr val="000000">
-                <a:alpha val="63000"/>
+                <a:alpha val="45000"/>
               </a:srgbClr>
             </a:outerShdw>
           </a:effectLst>
+          <a:scene3d>
+            <a:camera prst="orthographicFront">
+              <a:rot lat="0" lon="0" rev="0"/>
+            </a:camera>
+            <a:lightRig rig="brightRoom" dir="tl"/>
+          </a:scene3d>
+          <a:sp3d prstMaterial="dkEdge">
+            <a:bevelT w="0" h="0"/>
+          </a:sp3d>
         </a:effectStyle>
       </a:effectStyleLst>
       <a:bgFillStyleLst>
@@ -6849,57 +6831,33 @@
           <a:gsLst>
             <a:gs pos="0">
               <a:schemeClr val="phClr">
-                <a:tint val="93000"/>
-                <a:satMod val="150000"/>
-                <a:shade val="98000"/>
-                <a:lumMod val="102000"/>
-              </a:schemeClr>
-            </a:gs>
-            <a:gs pos="50000">
-              <a:schemeClr val="phClr">
-                <a:tint val="98000"/>
-                <a:satMod val="130000"/>
-                <a:shade val="90000"/>
-                <a:lumMod val="103000"/>
+                <a:tint val="97000"/>
+                <a:shade val="100000"/>
+                <a:satMod val="185000"/>
+                <a:lumMod val="120000"/>
               </a:schemeClr>
             </a:gs>
             <a:gs pos="100000">
               <a:schemeClr val="phClr">
-                <a:shade val="63000"/>
-                <a:satMod val="120000"/>
+                <a:tint val="96000"/>
+                <a:shade val="95000"/>
+                <a:satMod val="215000"/>
+                <a:lumMod val="80000"/>
               </a:schemeClr>
             </a:gs>
           </a:gsLst>
-          <a:lin ang="5400000" scaled="0"/>
+          <a:path path="circle">
+            <a:fillToRect l="50000" t="55000" r="125000" b="100000"/>
+          </a:path>
         </a:gradFill>
       </a:bgFillStyleLst>
     </a:fmtScheme>
   </a:themeElements>
-  <a:objectDefaults>
-    <a:lnDef>
-      <a:spPr/>
-      <a:bodyPr/>
-      <a:lstStyle/>
-      <a:style>
-        <a:lnRef idx="2">
-          <a:schemeClr val="accent1"/>
-        </a:lnRef>
-        <a:fillRef idx="0">
-          <a:schemeClr val="accent1"/>
-        </a:fillRef>
-        <a:effectRef idx="1">
-          <a:schemeClr val="accent1"/>
-        </a:effectRef>
-        <a:fontRef idx="minor">
-          <a:schemeClr val="tx1"/>
-        </a:fontRef>
-      </a:style>
-    </a:lnDef>
-  </a:objectDefaults>
+  <a:objectDefaults/>
   <a:extraClrSchemeLst/>
   <a:extLst>
     <a:ext uri="{05A4C25C-085E-4340-85A3-A5531E510DB2}">
-      <thm15:themeFamily xmlns:thm15="http://schemas.microsoft.com/office/thememl/2012/main" name="Office Theme" id="{2E142A2C-CD16-42D6-873A-C26D2A0506FA}" vid="{1BDDFF52-6CD6-40A5-AB3C-68EB2F1E4D0A}"/>
+      <thm15:themeFamily xmlns:thm15="http://schemas.microsoft.com/office/thememl/2012/main" name="Parcel" id="{8BEC4385-4EB9-4D53-BFB5-0EA123736B6D}" vid="{4DB32801-28C0-48B0-8C1D-A9A58613615A}"/>
     </a:ext>
   </a:extLst>
 </a:theme>
